--- a/ppt/역량PT_김연주.pptx
+++ b/ppt/역량PT_김연주.pptx
@@ -22,10 +22,6 @@
     <p:embeddedFont>
       <p:font typeface="Pretendard Medium" panose="02000003000000020004" pitchFamily="2" charset="-127"/>
       <p:regular r:id="rId7"/>
-    </p:embeddedFont>
-    <p:embeddedFont>
-      <p:font typeface="Pretendard SemiBold" panose="02000003000000020004" pitchFamily="2" charset="-127"/>
-      <p:bold r:id="rId8"/>
     </p:embeddedFont>
   </p:embeddedFontLst>
   <p:defaultTextStyle>
@@ -167,7 +163,7 @@
     </p:spTree>
     <p:extLst>
       <p:ext uri="{BB962C8B-B14F-4D97-AF65-F5344CB8AC3E}">
-        <p14:creationId xmlns:p14="http://schemas.microsoft.com/office/powerpoint/2010/main" val="3220611821"/>
+        <p14:creationId xmlns:p14="http://schemas.microsoft.com/office/powerpoint/2010/main" val="2847212170"/>
       </p:ext>
     </p:extLst>
   </p:cSld>
@@ -312,7 +308,7 @@
           <a:lstStyle/>
           <a:p>
             <a:r>
-              <a:t>리스크 직무에 지원한 김연주입니다.</a:t>
+              <a:t>리스크 직무 지원자 김연주.</a:t>
             </a:r>
           </a:p>
           <a:p>
@@ -320,7 +316,7 @@
           </a:p>
           <a:p>
             <a:r>
-              <a:t>[상단 띠] 제 경험은 통계적 분석·검증, AI 모델·시스템 개발, 산업 현장 적용의 세 단계로 이어집니다.</a:t>
+              <a:t>[상단 띠] 경험은 통계적 분석·검증, AI 모델·시스템 개발, 산업 현장 적용의 세 단계로 이어짐.</a:t>
             </a:r>
           </a:p>
           <a:p>
@@ -328,7 +324,7 @@
           </a:p>
           <a:p>
             <a:r>
-              <a:t>[왼쪽] 통계학을 전공하고 연구보조로 생존분석을 수행하며, 사건이 언제 일어나는지 정의하고 결과를 통계적으로 검증하는 법을 익혔습니다.</a:t>
+              <a:t>[위 트랙] 통계학 전공으로 추론과 모델링을 익히고, 학회장으로 프로젝트와 조직 운영을 이끎. 석사 과정에서 딥러닝 모델 설계와 실험을 수행 중.</a:t>
             </a:r>
           </a:p>
           <a:p>
@@ -336,7 +332,7 @@
           </a:p>
           <a:p>
             <a:r>
-              <a:t>[가운데] 학회를 이끌며 멀티에이전트 시스템 세 건과 3D CT 멀티모달 모델을 개발했고, 모델을 직접 설계하고 실험 결과로 판단하는 습관을 갖게 되었습니다.</a:t>
+              <a:t>[아래 트랙] 생존분석 연구보조로 사건 시점을 정의하고 결과를 통계적으로 검증하는 방법을 익힘. 멀티에이전트 시스템 세 건과 3D CT 멀티모달 모델로 AI 시스템 구현 경험을 쌓음.</a:t>
             </a:r>
           </a:p>
           <a:p>
@@ -344,7 +340,7 @@
           </a:p>
           <a:p>
             <a:r>
-              <a:t>[BCG X] BCG X 인턴으로는 데이터마트 구축부터 예측 모델, 분석 화면, LLM 활용까지 실제 사용자가 쓰는 단계를 경험했습니다.</a:t>
+              <a:t>[합류] 두 트랙은 BCG X 인턴에서 합류. 데이터마트 구축부터 예측 모델, 분석 화면, LLM 활용까지 실제 사용자가 쓰는 단계를 경험함.</a:t>
             </a:r>
           </a:p>
           <a:p>
@@ -352,7 +348,7 @@
           </a:p>
           <a:p>
             <a:r>
-              <a:t>[종점] 이 세 가지를 하나로 묶어, 금융 모형을 운영하는 반복 업무를 자동화하는 프로젝트를 수행했습니다.</a:t>
+              <a:t>[종점] 통계적 검증, AI 시스템 구현, 산업 현장 적용을 하나로 묶어 금융 모형 운영 자동화 프로젝트를 수행함.</a:t>
             </a:r>
           </a:p>
         </p:txBody>
@@ -422,7 +418,7 @@
           <a:lstStyle/>
           <a:p>
             <a:r>
-              <a:t>[제목] 신용평가모형의 점검부터 개선안 검증, 보고까지 자동화한 시스템입니다.</a:t>
+              <a:t>[제목] 신용평가모형의 점검부터 개선안 검증, 보고까지의 자동화.</a:t>
             </a:r>
           </a:p>
           <a:p>
@@ -430,7 +426,7 @@
           </a:p>
           <a:p>
             <a:r>
-              <a:t>[문제] 대상은 신규 대출의 24개월 내 상각 위험을 예측하는 모형 하나입니다. 개발 당시 잘 맞던 모형도 시간이 지나면 실제 상각률과 어긋납니다. 이때 그대로 쓸지, 확률만 보정할지, 다시 학습할지 매 분기 판단해야 합니다.</a:t>
+              <a:t>[문제] 대상은 신규 대출의 24개월 내 상각 위험을 예측하는 모형 1개. 개발 당시 잘 맞던 모형도 시간이 지나면 실제 상각률과 어긋남. 매 분기 유지, 재보정, 재학습 중 하나를 판단해야 함.</a:t>
             </a:r>
           </a:p>
           <a:p>
@@ -438,7 +434,7 @@
           </a:p>
           <a:p>
             <a:r>
-              <a:t>[흐름] 시스템은 매 분기 그 시점에 알 수 있던 데이터만 사용해 신규 대출의 특성, 12개월 중간 신호, 결과가 확정된 대출의 실제 상각률을 점검합니다. 문제가 확인되면 유지·재보정·재학습 후보 열 가지를 1년 전 데이터로 만들어 이후 결과로 검증하고, 기준을 통과한 안만 권고합니다. 모형 변경은 담당자가 승인합니다.</a:t>
+              <a:t>[흐름] 매 분기 그 시점에 알 수 있던 데이터만으로 신규 대출 특성, 12개월 중간 신호, 결과가 확정된 대출의 실제 상각률을 점검. 문제 확인 시 유지·재보정·재학습 후보를 1년 전 데이터로 만들고 이후 결과로 검증한 뒤, 기준을 통과한 안만 권고. 모형 변경은 담당자 승인.</a:t>
             </a:r>
           </a:p>
           <a:p>
@@ -446,7 +442,7 @@
           </a:p>
           <a:p>
             <a:r>
-              <a:t>[화면] 2018년 1분기 화면입니다. 상태는 조치 검토, 권고는 재학습 검토입니다. 근거는 세 가지입니다. 신규 대출의 점수 분포는 안정적이었지만, 결과가 확정된 대출의 실제 상각률이 예측의 1.27배였고, 재학습 후보가 별도 검증에서 오차를 줄였습니다.</a:t>
+              <a:t>[화면] 2018년 1분기 실제 생성 화면. 상태는 조치 검토, 권고는 재학습 검토. 근거 세 가지: 신규 대출의 점수 분포는 안정적, 결과가 확정된 대출의 실제 상각률은 예측의 1.27배, 재학습 후보는 별도 검증에서 오차 감소.</a:t>
             </a:r>
           </a:p>
           <a:p>
@@ -454,7 +450,7 @@
           </a:p>
           <a:p>
             <a:r>
-              <a:t>[숫자] 결과는 세 가지입니다. 첫째, 12개월 중간 신호로 24개월 결과보다 2분기 먼저 이상을 포착했습니다. 둘째, 이 분기의 권고를 당시 보유 대출 46만 건에 적용하면 예측 오차가 33%에서 14%로 줄었습니다. 셋째, 매 분기 재학습하는 방식과 비교해 예측 오차는 비슷하면서 모형 변경은 13회에서 2회로 줄었습니다.</a:t>
+              <a:t>[숫자] 첫째, 12개월 중간 신호로 24개월 결과보다 2분기 먼저 이상 포착. 둘째, 이 분기 권고를 당시 보유 대출 46만 건에 적용 시 예측 오차 33%에서 14%로 감소. 셋째, 매 분기 재학습 방식과 비교해 예측 오차는 비슷하고 모형 변경은 13회에서 2회로 감소.</a:t>
             </a:r>
           </a:p>
           <a:p>
@@ -462,7 +458,7 @@
           </a:p>
           <a:p>
             <a:r>
-              <a:t>[내 역할] 저는 정답과 관측 시점을 검증하고, 예측·개선 모형을 만들고, 점검부터 후보 검증과 보고서 수치 대조까지 하나의 무인 실행 흐름으로 연결했습니다. 바꿀 이유가 없을 때 바꾸지 않는 판단까지 자동화하는 것이 목표였습니다.</a:t>
+              <a:t>[역할] 정답과 관측 시점 검증, 예측·개선 모형 개발, 점검부터 후보 검증과 보고서 수치 대조까지의 무인 실행 흐름 구축을 단독 수행. 목표는 바꿀 이유가 없을 때 바꾸지 않는 판단까지의 자동화.</a:t>
             </a:r>
           </a:p>
           <a:p>
@@ -470,7 +466,7 @@
           </a:p>
           <a:p>
             <a:r>
-              <a:t>[마무리] 공개 데이터로 과거 분기를 재현한 프로토타입이며, 상각 시점은 근사라는 한계를 별도 검증했습니다. 리스크 직무에서 모형을 믿을 수 있게 운영하는 일에 이 경험을 쓰겠습니다. 감사합니다.</a:t>
+              <a:t>[마무리] 공개 데이터로 과거 분기를 재현한 프로토타입이며, 상각 시점 근사의 한계는 별도 검증. 리스크 직무에서 모형을 믿을 수 있게 운영하는 일에 이 경험을 활용하고자 함.</a:t>
             </a:r>
           </a:p>
         </p:txBody>
@@ -3597,8 +3593,8 @@
         </p:nvSpPr>
         <p:spPr>
           <a:xfrm>
-            <a:off x="548640" y="1463040"/>
-            <a:ext cx="2862072" cy="777240"/>
+            <a:off x="548640" y="1417320"/>
+            <a:ext cx="2679191" cy="658368"/>
           </a:xfrm>
           <a:prstGeom prst="rect">
             <a:avLst/>
@@ -3642,8 +3638,8 @@
         </p:nvSpPr>
         <p:spPr>
           <a:xfrm>
-            <a:off x="713232" y="1609344"/>
-            <a:ext cx="2606040" cy="548640"/>
+            <a:off x="713232" y="1527048"/>
+            <a:ext cx="2423160" cy="457200"/>
           </a:xfrm>
           <a:prstGeom prst="rect">
             <a:avLst/>
@@ -3658,7 +3654,7 @@
           <a:p>
             <a:pPr algn="l">
               <a:lnSpc>
-                <a:spcPct val="135000"/>
+                <a:spcPct val="130000"/>
               </a:lnSpc>
             </a:pPr>
             <a:r>
@@ -3673,7 +3669,7 @@
               <a:t>1  </a:t>
             </a:r>
             <a:r>
-              <a:rPr sz="1250" b="1">
+              <a:rPr sz="1200" b="1">
                 <a:solidFill>
                   <a:srgbClr val="000000"/>
                 </a:solidFill>
@@ -3687,11 +3683,11 @@
           <a:p>
             <a:pPr algn="l">
               <a:lnSpc>
-                <a:spcPct val="135000"/>
+                <a:spcPct val="130000"/>
               </a:lnSpc>
             </a:pPr>
             <a:r>
-              <a:rPr sz="950" b="0">
+              <a:rPr sz="900" b="0">
                 <a:solidFill>
                   <a:srgbClr val="6B6B6B"/>
                 </a:solidFill>
@@ -3699,7 +3695,7 @@
                 <a:ea typeface="Pretendard"/>
                 <a:cs typeface="Pretendard"/>
               </a:rPr>
-              <a:t>통계적 추론 · 사건 시점 분석 · 검증</a:t>
+              <a:t>통계적 추론 · 사건 시점 분석</a:t>
             </a:r>
           </a:p>
         </p:txBody>
@@ -3712,8 +3708,8 @@
         </p:nvSpPr>
         <p:spPr>
           <a:xfrm>
-            <a:off x="3447288" y="1463040"/>
-            <a:ext cx="3438144" cy="777240"/>
+            <a:off x="3264408" y="1417320"/>
+            <a:ext cx="3255264" cy="658368"/>
           </a:xfrm>
           <a:prstGeom prst="rect">
             <a:avLst/>
@@ -3757,8 +3753,8 @@
         </p:nvSpPr>
         <p:spPr>
           <a:xfrm>
-            <a:off x="3593592" y="1609344"/>
-            <a:ext cx="3200400" cy="548640"/>
+            <a:off x="3410712" y="1527048"/>
+            <a:ext cx="3017520" cy="457200"/>
           </a:xfrm>
           <a:prstGeom prst="rect">
             <a:avLst/>
@@ -3773,7 +3769,7 @@
           <a:p>
             <a:pPr algn="l">
               <a:lnSpc>
-                <a:spcPct val="135000"/>
+                <a:spcPct val="130000"/>
               </a:lnSpc>
             </a:pPr>
             <a:r>
@@ -3788,7 +3784,7 @@
               <a:t>2  </a:t>
             </a:r>
             <a:r>
-              <a:rPr sz="1250" b="1">
+              <a:rPr sz="1200" b="1">
                 <a:solidFill>
                   <a:srgbClr val="000000"/>
                 </a:solidFill>
@@ -3802,11 +3798,11 @@
           <a:p>
             <a:pPr algn="l">
               <a:lnSpc>
-                <a:spcPct val="135000"/>
+                <a:spcPct val="130000"/>
               </a:lnSpc>
             </a:pPr>
             <a:r>
-              <a:rPr sz="950" b="0">
+              <a:rPr sz="900" b="0">
                 <a:solidFill>
                   <a:srgbClr val="6B6B6B"/>
                 </a:solidFill>
@@ -3814,7 +3810,7 @@
                 <a:ea typeface="Pretendard"/>
                 <a:cs typeface="Pretendard"/>
               </a:rPr>
-              <a:t>모델 설계·실험 · 에이전트 시스템 · 조직 운영</a:t>
+              <a:t>모델 설계·실험 · 에이전트 · 조직 운영</a:t>
             </a:r>
           </a:p>
         </p:txBody>
@@ -3827,8 +3823,8 @@
         </p:nvSpPr>
         <p:spPr>
           <a:xfrm>
-            <a:off x="6922007" y="1463040"/>
-            <a:ext cx="1975104" cy="777240"/>
+            <a:off x="6556248" y="1417320"/>
+            <a:ext cx="2066543" cy="658368"/>
           </a:xfrm>
           <a:prstGeom prst="rect">
             <a:avLst/>
@@ -3872,8 +3868,8 @@
         </p:nvSpPr>
         <p:spPr>
           <a:xfrm>
-            <a:off x="7068312" y="1609344"/>
-            <a:ext cx="1737360" cy="548640"/>
+            <a:off x="6702552" y="1527048"/>
+            <a:ext cx="1828799" cy="457200"/>
           </a:xfrm>
           <a:prstGeom prst="rect">
             <a:avLst/>
@@ -3888,7 +3884,7 @@
           <a:p>
             <a:pPr algn="l">
               <a:lnSpc>
-                <a:spcPct val="135000"/>
+                <a:spcPct val="130000"/>
               </a:lnSpc>
             </a:pPr>
             <a:r>
@@ -3903,7 +3899,7 @@
               <a:t>3  </a:t>
             </a:r>
             <a:r>
-              <a:rPr sz="1250" b="1">
+              <a:rPr sz="1200" b="1">
                 <a:solidFill>
                   <a:srgbClr val="000000"/>
                 </a:solidFill>
@@ -3917,11 +3913,11 @@
           <a:p>
             <a:pPr algn="l">
               <a:lnSpc>
-                <a:spcPct val="135000"/>
+                <a:spcPct val="130000"/>
               </a:lnSpc>
             </a:pPr>
             <a:r>
-              <a:rPr sz="950" b="0">
+              <a:rPr sz="900" b="0">
                 <a:solidFill>
                   <a:srgbClr val="6B6B6B"/>
                 </a:solidFill>
@@ -3936,59 +3932,14 @@
       </p:sp>
       <p:sp>
         <p:nvSpPr>
-          <p:cNvPr id="11" name="Rectangle 10"/>
-          <p:cNvSpPr/>
-          <p:nvPr/>
-        </p:nvSpPr>
-        <p:spPr>
-          <a:xfrm>
-            <a:off x="548640" y="3922395"/>
-            <a:ext cx="8366760" cy="19050"/>
-          </a:xfrm>
-          <a:prstGeom prst="rect">
-            <a:avLst/>
-          </a:prstGeom>
-          <a:solidFill>
-            <a:srgbClr val="000000"/>
-          </a:solidFill>
-          <a:ln>
-            <a:noFill/>
-          </a:ln>
-          <a:effectLst/>
-        </p:spPr>
-        <p:style>
-          <a:lnRef idx="1">
-            <a:schemeClr val="accent1"/>
-          </a:lnRef>
-          <a:fillRef idx="3">
-            <a:schemeClr val="accent1"/>
-          </a:fillRef>
-          <a:effectRef idx="2">
-            <a:schemeClr val="accent1"/>
-          </a:effectRef>
-          <a:fontRef idx="minor">
-            <a:schemeClr val="lt1"/>
-          </a:fontRef>
-        </p:style>
-        <p:txBody>
-          <a:bodyPr rtlCol="0" anchor="ctr"/>
-          <a:lstStyle/>
-          <a:p>
-            <a:pPr algn="ctr"/>
-            <a:endParaRPr/>
-          </a:p>
-        </p:txBody>
-      </p:sp>
-      <p:sp>
-        <p:nvSpPr>
-          <p:cNvPr id="12" name="TextBox 11"/>
+          <p:cNvPr id="11" name="TextBox 10"/>
           <p:cNvSpPr txBox="1"/>
           <p:nvPr/>
         </p:nvSpPr>
         <p:spPr>
           <a:xfrm>
-            <a:off x="548640" y="3657600"/>
-            <a:ext cx="731520" cy="182880"/>
+            <a:off x="548640" y="2907792"/>
+            <a:ext cx="914400" cy="182880"/>
           </a:xfrm>
           <a:prstGeom prst="rect">
             <a:avLst/>
@@ -4022,45 +3973,70 @@
       </p:sp>
       <p:sp>
         <p:nvSpPr>
-          <p:cNvPr id="13" name="TextBox 12"/>
-          <p:cNvSpPr txBox="1"/>
-          <p:nvPr/>
-        </p:nvSpPr>
-        <p:spPr>
-          <a:xfrm>
-            <a:off x="548640" y="4041648"/>
-            <a:ext cx="731520" cy="182880"/>
+          <p:cNvPr id="12" name="Rectangle 11"/>
+          <p:cNvSpPr/>
+          <p:nvPr/>
+        </p:nvSpPr>
+        <p:spPr>
+          <a:xfrm>
+            <a:off x="548640" y="3145155"/>
+            <a:ext cx="6355080" cy="19050"/>
           </a:xfrm>
           <a:prstGeom prst="rect">
             <a:avLst/>
           </a:prstGeom>
-          <a:noFill/>
-        </p:spPr>
-        <p:txBody>
-          <a:bodyPr wrap="none" lIns="0" tIns="0" rIns="0" bIns="0" anchor="t">
-            <a:spAutoFit/>
-          </a:bodyPr>
-          <a:lstStyle/>
-          <a:p>
-            <a:pPr algn="l">
-              <a:lnSpc>
-                <a:spcPct val="115000"/>
-              </a:lnSpc>
-            </a:pPr>
-            <a:r>
-              <a:rPr sz="850" b="0">
-                <a:solidFill>
-                  <a:srgbClr val="9A9A9A"/>
-                </a:solidFill>
-                <a:latin typeface="Pretendard Medium"/>
-                <a:ea typeface="Pretendard Medium"/>
-                <a:cs typeface="Pretendard Medium"/>
-              </a:rPr>
-              <a:t>프로젝트</a:t>
-            </a:r>
-          </a:p>
-        </p:txBody>
-      </p:sp>
+          <a:solidFill>
+            <a:srgbClr val="000000"/>
+          </a:solidFill>
+          <a:ln>
+            <a:noFill/>
+          </a:ln>
+          <a:effectLst/>
+        </p:spPr>
+        <p:style>
+          <a:lnRef idx="1">
+            <a:schemeClr val="accent1"/>
+          </a:lnRef>
+          <a:fillRef idx="3">
+            <a:schemeClr val="accent1"/>
+          </a:fillRef>
+          <a:effectRef idx="2">
+            <a:schemeClr val="accent1"/>
+          </a:effectRef>
+          <a:fontRef idx="minor">
+            <a:schemeClr val="lt1"/>
+          </a:fontRef>
+        </p:style>
+        <p:txBody>
+          <a:bodyPr rtlCol="0" anchor="ctr"/>
+          <a:lstStyle/>
+          <a:p>
+            <a:pPr algn="ctr"/>
+            <a:endParaRPr/>
+          </a:p>
+        </p:txBody>
+      </p:sp>
+      <p:cxnSp>
+        <p:nvCxnSpPr>
+          <p:cNvPr id="13" name="Connector 12"/>
+          <p:cNvCxnSpPr/>
+          <p:nvPr/>
+        </p:nvCxnSpPr>
+        <p:spPr>
+          <a:xfrm>
+            <a:off x="6903720" y="3154680"/>
+            <a:ext cx="411480" cy="768096"/>
+          </a:xfrm>
+          <a:prstGeom prst="line">
+            <a:avLst/>
+          </a:prstGeom>
+          <a:ln w="19050">
+            <a:solidFill>
+              <a:srgbClr val="000000"/>
+            </a:solidFill>
+          </a:ln>
+        </p:spPr>
+      </p:cxnSp>
       <p:sp>
         <p:nvSpPr>
           <p:cNvPr id="14" name="Oval 13"/>
@@ -4069,7 +4045,7 @@
         </p:nvSpPr>
         <p:spPr>
           <a:xfrm>
-            <a:off x="1252728" y="3721607"/>
+            <a:off x="1115568" y="2944368"/>
             <a:ext cx="420624" cy="420624"/>
           </a:xfrm>
           <a:prstGeom prst="ellipse">
@@ -4116,8 +4092,8 @@
         </p:nvCxnSpPr>
         <p:spPr>
           <a:xfrm flipV="1">
-            <a:off x="1394460" y="3959352"/>
-            <a:ext cx="0" cy="64007"/>
+            <a:off x="1257300" y="3182112"/>
+            <a:ext cx="0" cy="64008"/>
           </a:xfrm>
           <a:prstGeom prst="line">
             <a:avLst/>
@@ -4137,8 +4113,8 @@
         </p:nvCxnSpPr>
         <p:spPr>
           <a:xfrm flipV="1">
-            <a:off x="1463040" y="3886200"/>
-            <a:ext cx="0" cy="137159"/>
+            <a:off x="1325880" y="3108960"/>
+            <a:ext cx="0" cy="137160"/>
           </a:xfrm>
           <a:prstGeom prst="line">
             <a:avLst/>
@@ -4158,8 +4134,8 @@
         </p:nvCxnSpPr>
         <p:spPr>
           <a:xfrm flipV="1">
-            <a:off x="1531620" y="3840480"/>
-            <a:ext cx="0" cy="182879"/>
+            <a:off x="1394460" y="3063240"/>
+            <a:ext cx="0" cy="182880"/>
           </a:xfrm>
           <a:prstGeom prst="line">
             <a:avLst/>
@@ -4179,8 +4155,8 @@
         </p:nvSpPr>
         <p:spPr>
           <a:xfrm>
-            <a:off x="1252728" y="2926079"/>
-            <a:ext cx="2194560" cy="685800"/>
+            <a:off x="1115568" y="2221992"/>
+            <a:ext cx="2103120" cy="685800"/>
           </a:xfrm>
           <a:prstGeom prst="rect">
             <a:avLst/>
@@ -4248,36 +4224,15 @@
           </a:p>
         </p:txBody>
       </p:sp>
-      <p:cxnSp>
-        <p:nvCxnSpPr>
-          <p:cNvPr id="19" name="Connector 18"/>
-          <p:cNvCxnSpPr/>
-          <p:nvPr/>
-        </p:nvCxnSpPr>
-        <p:spPr>
-          <a:xfrm flipV="1">
-            <a:off x="1463040" y="3621024"/>
-            <a:ext cx="0" cy="100583"/>
-          </a:xfrm>
-          <a:prstGeom prst="line">
-            <a:avLst/>
-          </a:prstGeom>
-          <a:ln w="9525">
-            <a:solidFill>
-              <a:srgbClr val="9A9A9A"/>
-            </a:solidFill>
-          </a:ln>
-        </p:spPr>
-      </p:cxnSp>
-      <p:sp>
-        <p:nvSpPr>
-          <p:cNvPr id="20" name="Oval 19"/>
+      <p:sp>
+        <p:nvSpPr>
+          <p:cNvPr id="19" name="Oval 18"/>
           <p:cNvSpPr/>
           <p:nvPr/>
         </p:nvSpPr>
         <p:spPr>
           <a:xfrm>
-            <a:off x="3035808" y="3721607"/>
+            <a:off x="3310128" y="2944368"/>
             <a:ext cx="420624" cy="420624"/>
           </a:xfrm>
           <a:prstGeom prst="ellipse">
@@ -4318,14 +4273,14 @@
       </p:sp>
       <p:cxnSp>
         <p:nvCxnSpPr>
-          <p:cNvPr id="21" name="Connector 20"/>
+          <p:cNvPr id="20" name="Connector 19"/>
           <p:cNvCxnSpPr/>
           <p:nvPr/>
         </p:nvCxnSpPr>
         <p:spPr>
           <a:xfrm flipV="1">
-            <a:off x="3172968" y="3822191"/>
-            <a:ext cx="0" cy="219457"/>
+            <a:off x="3447288" y="3044952"/>
+            <a:ext cx="0" cy="219456"/>
           </a:xfrm>
           <a:prstGeom prst="line">
             <a:avLst/>
@@ -4339,14 +4294,14 @@
       </p:cxnSp>
       <p:sp>
         <p:nvSpPr>
-          <p:cNvPr id="22" name="Freeform 21"/>
+          <p:cNvPr id="21" name="Freeform 20"/>
           <p:cNvSpPr/>
           <p:nvPr/>
         </p:nvSpPr>
         <p:spPr>
           <a:xfrm>
-            <a:off x="3172968" y="3831335"/>
-            <a:ext cx="164592" cy="100585"/>
+            <a:off x="3447288" y="3054096"/>
+            <a:ext cx="164592" cy="100584"/>
           </a:xfrm>
           <a:custGeom>
             <a:avLst/>
@@ -4355,15 +4310,15 @@
             <a:cxnLst/>
             <a:rect l="l" t="t" r="r" b="b"/>
             <a:pathLst>
-              <a:path w="164592" h="100585">
+              <a:path w="164592" h="100584">
                 <a:moveTo>
                   <a:pt x="0" y="0"/>
                 </a:moveTo>
                 <a:lnTo>
-                  <a:pt x="164592" y="50293"/>
+                  <a:pt x="164592" y="50292"/>
                 </a:lnTo>
                 <a:lnTo>
-                  <a:pt x="0" y="100585"/>
+                  <a:pt x="0" y="100584"/>
                 </a:lnTo>
                 <a:close/>
               </a:path>
@@ -4402,14 +4357,14 @@
       </p:sp>
       <p:sp>
         <p:nvSpPr>
-          <p:cNvPr id="23" name="TextBox 22"/>
+          <p:cNvPr id="22" name="TextBox 21"/>
           <p:cNvSpPr txBox="1"/>
           <p:nvPr/>
         </p:nvSpPr>
         <p:spPr>
           <a:xfrm>
-            <a:off x="3035808" y="2926079"/>
-            <a:ext cx="2194560" cy="685800"/>
+            <a:off x="3310128" y="2221992"/>
+            <a:ext cx="2103120" cy="685800"/>
           </a:xfrm>
           <a:prstGeom prst="rect">
             <a:avLst/>
@@ -4454,7 +4409,7 @@
                 <a:ea typeface="Pretendard"/>
                 <a:cs typeface="Pretendard"/>
               </a:rPr>
-              <a:t>학회장 · 프로젝트 리딩·조직 운영</a:t>
+              <a:t>학회장 · 프로젝트 리딩</a:t>
             </a:r>
           </a:p>
           <a:p>
@@ -4477,36 +4432,15 @@
           </a:p>
         </p:txBody>
       </p:sp>
-      <p:cxnSp>
-        <p:nvCxnSpPr>
-          <p:cNvPr id="24" name="Connector 23"/>
-          <p:cNvCxnSpPr/>
-          <p:nvPr/>
-        </p:nvCxnSpPr>
-        <p:spPr>
-          <a:xfrm flipV="1">
-            <a:off x="3246120" y="3621024"/>
-            <a:ext cx="0" cy="100583"/>
-          </a:xfrm>
-          <a:prstGeom prst="line">
-            <a:avLst/>
-          </a:prstGeom>
-          <a:ln w="9525">
-            <a:solidFill>
-              <a:srgbClr val="9A9A9A"/>
-            </a:solidFill>
-          </a:ln>
-        </p:spPr>
-      </p:cxnSp>
-      <p:sp>
-        <p:nvSpPr>
-          <p:cNvPr id="25" name="Oval 24"/>
+      <p:sp>
+        <p:nvSpPr>
+          <p:cNvPr id="23" name="Oval 22"/>
           <p:cNvSpPr/>
           <p:nvPr/>
         </p:nvSpPr>
         <p:spPr>
           <a:xfrm>
-            <a:off x="5138927" y="3721607"/>
+            <a:off x="5276088" y="2944368"/>
             <a:ext cx="420624" cy="420624"/>
           </a:xfrm>
           <a:prstGeom prst="ellipse">
@@ -4547,13 +4481,13 @@
       </p:sp>
       <p:cxnSp>
         <p:nvCxnSpPr>
-          <p:cNvPr id="26" name="Connector 25"/>
+          <p:cNvPr id="24" name="Connector 23"/>
           <p:cNvCxnSpPr/>
           <p:nvPr/>
         </p:nvCxnSpPr>
         <p:spPr>
           <a:xfrm flipV="1">
-            <a:off x="5262372" y="3840480"/>
+            <a:off x="5399532" y="3063240"/>
             <a:ext cx="86868" cy="36576"/>
           </a:xfrm>
           <a:prstGeom prst="line">
@@ -4568,13 +4502,13 @@
       </p:cxnSp>
       <p:cxnSp>
         <p:nvCxnSpPr>
-          <p:cNvPr id="27" name="Connector 26"/>
+          <p:cNvPr id="25" name="Connector 24"/>
           <p:cNvCxnSpPr/>
           <p:nvPr/>
         </p:nvCxnSpPr>
         <p:spPr>
           <a:xfrm>
-            <a:off x="5262372" y="3877056"/>
+            <a:off x="5399532" y="3099816"/>
             <a:ext cx="86868" cy="54864"/>
           </a:xfrm>
           <a:prstGeom prst="line">
@@ -4589,14 +4523,14 @@
       </p:cxnSp>
       <p:cxnSp>
         <p:nvCxnSpPr>
-          <p:cNvPr id="28" name="Connector 27"/>
+          <p:cNvPr id="26" name="Connector 25"/>
           <p:cNvCxnSpPr/>
           <p:nvPr/>
         </p:nvCxnSpPr>
         <p:spPr>
           <a:xfrm>
-            <a:off x="5262372" y="3877056"/>
-            <a:ext cx="86868" cy="146303"/>
+            <a:off x="5399532" y="3099816"/>
+            <a:ext cx="86868" cy="146304"/>
           </a:xfrm>
           <a:prstGeom prst="line">
             <a:avLst/>
@@ -4610,14 +4544,14 @@
       </p:cxnSp>
       <p:cxnSp>
         <p:nvCxnSpPr>
-          <p:cNvPr id="29" name="Connector 28"/>
+          <p:cNvPr id="27" name="Connector 26"/>
           <p:cNvCxnSpPr/>
           <p:nvPr/>
         </p:nvCxnSpPr>
         <p:spPr>
           <a:xfrm flipV="1">
-            <a:off x="5262372" y="3840480"/>
-            <a:ext cx="86868" cy="146303"/>
+            <a:off x="5399532" y="3063240"/>
+            <a:ext cx="86868" cy="146304"/>
           </a:xfrm>
           <a:prstGeom prst="line">
             <a:avLst/>
@@ -4631,14 +4565,14 @@
       </p:cxnSp>
       <p:cxnSp>
         <p:nvCxnSpPr>
-          <p:cNvPr id="30" name="Connector 29"/>
+          <p:cNvPr id="28" name="Connector 27"/>
           <p:cNvCxnSpPr/>
           <p:nvPr/>
         </p:nvCxnSpPr>
         <p:spPr>
           <a:xfrm flipV="1">
-            <a:off x="5262372" y="3931920"/>
-            <a:ext cx="86868" cy="54863"/>
+            <a:off x="5399532" y="3154680"/>
+            <a:ext cx="86868" cy="54864"/>
           </a:xfrm>
           <a:prstGeom prst="line">
             <a:avLst/>
@@ -4652,13 +4586,13 @@
       </p:cxnSp>
       <p:cxnSp>
         <p:nvCxnSpPr>
-          <p:cNvPr id="31" name="Connector 30"/>
+          <p:cNvPr id="29" name="Connector 28"/>
           <p:cNvCxnSpPr/>
           <p:nvPr/>
         </p:nvCxnSpPr>
         <p:spPr>
           <a:xfrm>
-            <a:off x="5262372" y="3986783"/>
+            <a:off x="5399532" y="3209544"/>
             <a:ext cx="86868" cy="36576"/>
           </a:xfrm>
           <a:prstGeom prst="line">
@@ -4673,14 +4607,14 @@
       </p:cxnSp>
       <p:cxnSp>
         <p:nvCxnSpPr>
-          <p:cNvPr id="32" name="Connector 31"/>
+          <p:cNvPr id="30" name="Connector 29"/>
           <p:cNvCxnSpPr/>
           <p:nvPr/>
         </p:nvCxnSpPr>
         <p:spPr>
           <a:xfrm>
-            <a:off x="5349240" y="3840480"/>
-            <a:ext cx="86867" cy="91440"/>
+            <a:off x="5486400" y="3063240"/>
+            <a:ext cx="86868" cy="91440"/>
           </a:xfrm>
           <a:prstGeom prst="line">
             <a:avLst/>
@@ -4694,14 +4628,14 @@
       </p:cxnSp>
       <p:cxnSp>
         <p:nvCxnSpPr>
-          <p:cNvPr id="33" name="Connector 32"/>
+          <p:cNvPr id="31" name="Connector 30"/>
           <p:cNvCxnSpPr/>
           <p:nvPr/>
         </p:nvCxnSpPr>
         <p:spPr>
           <a:xfrm>
-            <a:off x="5349240" y="3931920"/>
-            <a:ext cx="86867" cy="0"/>
+            <a:off x="5486400" y="3154680"/>
+            <a:ext cx="86868" cy="0"/>
           </a:xfrm>
           <a:prstGeom prst="line">
             <a:avLst/>
@@ -4715,14 +4649,14 @@
       </p:cxnSp>
       <p:cxnSp>
         <p:nvCxnSpPr>
-          <p:cNvPr id="34" name="Connector 33"/>
+          <p:cNvPr id="32" name="Connector 31"/>
           <p:cNvCxnSpPr/>
           <p:nvPr/>
         </p:nvCxnSpPr>
         <p:spPr>
           <a:xfrm flipV="1">
-            <a:off x="5349240" y="3931920"/>
-            <a:ext cx="86867" cy="91439"/>
+            <a:off x="5486400" y="3154680"/>
+            <a:ext cx="86868" cy="91440"/>
           </a:xfrm>
           <a:prstGeom prst="line">
             <a:avLst/>
@@ -4736,13 +4670,13 @@
       </p:cxnSp>
       <p:sp>
         <p:nvSpPr>
-          <p:cNvPr id="35" name="Oval 34"/>
+          <p:cNvPr id="33" name="Oval 32"/>
           <p:cNvSpPr/>
           <p:nvPr/>
         </p:nvSpPr>
         <p:spPr>
           <a:xfrm>
-            <a:off x="5241798" y="3856482"/>
+            <a:off x="5378958" y="3079242"/>
             <a:ext cx="41148" cy="41148"/>
           </a:xfrm>
           <a:prstGeom prst="ellipse">
@@ -4783,13 +4717,13 @@
       </p:sp>
       <p:sp>
         <p:nvSpPr>
-          <p:cNvPr id="36" name="Oval 35"/>
+          <p:cNvPr id="34" name="Oval 33"/>
           <p:cNvSpPr/>
           <p:nvPr/>
         </p:nvSpPr>
         <p:spPr>
           <a:xfrm>
-            <a:off x="5241798" y="3966209"/>
+            <a:off x="5378958" y="3188970"/>
             <a:ext cx="41148" cy="41148"/>
           </a:xfrm>
           <a:prstGeom prst="ellipse">
@@ -4830,13 +4764,13 @@
       </p:sp>
       <p:sp>
         <p:nvSpPr>
-          <p:cNvPr id="37" name="Oval 36"/>
+          <p:cNvPr id="35" name="Oval 34"/>
           <p:cNvSpPr/>
           <p:nvPr/>
         </p:nvSpPr>
         <p:spPr>
           <a:xfrm>
-            <a:off x="5328666" y="3819906"/>
+            <a:off x="5465826" y="3042666"/>
             <a:ext cx="41148" cy="41148"/>
           </a:xfrm>
           <a:prstGeom prst="ellipse">
@@ -4877,13 +4811,13 @@
       </p:sp>
       <p:sp>
         <p:nvSpPr>
-          <p:cNvPr id="38" name="Oval 37"/>
+          <p:cNvPr id="36" name="Oval 35"/>
           <p:cNvSpPr/>
           <p:nvPr/>
         </p:nvSpPr>
         <p:spPr>
           <a:xfrm>
-            <a:off x="5328666" y="3911346"/>
+            <a:off x="5465826" y="3134106"/>
             <a:ext cx="41148" cy="41148"/>
           </a:xfrm>
           <a:prstGeom prst="ellipse">
@@ -4924,13 +4858,13 @@
       </p:sp>
       <p:sp>
         <p:nvSpPr>
-          <p:cNvPr id="39" name="Oval 38"/>
+          <p:cNvPr id="37" name="Oval 36"/>
           <p:cNvSpPr/>
           <p:nvPr/>
         </p:nvSpPr>
         <p:spPr>
           <a:xfrm>
-            <a:off x="5328666" y="4002785"/>
+            <a:off x="5465826" y="3225546"/>
             <a:ext cx="41148" cy="41148"/>
           </a:xfrm>
           <a:prstGeom prst="ellipse">
@@ -4971,13 +4905,13 @@
       </p:sp>
       <p:sp>
         <p:nvSpPr>
-          <p:cNvPr id="40" name="Oval 39"/>
+          <p:cNvPr id="38" name="Oval 37"/>
           <p:cNvSpPr/>
           <p:nvPr/>
         </p:nvSpPr>
         <p:spPr>
           <a:xfrm>
-            <a:off x="5415533" y="3911346"/>
+            <a:off x="5552694" y="3134106"/>
             <a:ext cx="41148" cy="41148"/>
           </a:xfrm>
           <a:prstGeom prst="ellipse">
@@ -5018,14 +4952,14 @@
       </p:sp>
       <p:sp>
         <p:nvSpPr>
-          <p:cNvPr id="41" name="TextBox 40"/>
+          <p:cNvPr id="39" name="TextBox 38"/>
           <p:cNvSpPr txBox="1"/>
           <p:nvPr/>
         </p:nvSpPr>
         <p:spPr>
           <a:xfrm>
-            <a:off x="5138927" y="2926079"/>
-            <a:ext cx="2194560" cy="685800"/>
+            <a:off x="5276088" y="2221992"/>
+            <a:ext cx="2103120" cy="685800"/>
           </a:xfrm>
           <a:prstGeom prst="rect">
             <a:avLst/>
@@ -5093,6 +5027,92 @@
           </a:p>
         </p:txBody>
       </p:sp>
+      <p:sp>
+        <p:nvSpPr>
+          <p:cNvPr id="40" name="TextBox 39"/>
+          <p:cNvSpPr txBox="1"/>
+          <p:nvPr/>
+        </p:nvSpPr>
+        <p:spPr>
+          <a:xfrm>
+            <a:off x="548640" y="5074920"/>
+            <a:ext cx="914400" cy="182880"/>
+          </a:xfrm>
+          <a:prstGeom prst="rect">
+            <a:avLst/>
+          </a:prstGeom>
+          <a:noFill/>
+        </p:spPr>
+        <p:txBody>
+          <a:bodyPr wrap="none" lIns="0" tIns="0" rIns="0" bIns="0" anchor="t">
+            <a:spAutoFit/>
+          </a:bodyPr>
+          <a:lstStyle/>
+          <a:p>
+            <a:pPr algn="l">
+              <a:lnSpc>
+                <a:spcPct val="115000"/>
+              </a:lnSpc>
+            </a:pPr>
+            <a:r>
+              <a:rPr sz="850" b="0">
+                <a:solidFill>
+                  <a:srgbClr val="9A9A9A"/>
+                </a:solidFill>
+                <a:latin typeface="Pretendard Medium"/>
+                <a:ea typeface="Pretendard Medium"/>
+                <a:cs typeface="Pretendard Medium"/>
+              </a:rPr>
+              <a:t>프로젝트</a:t>
+            </a:r>
+          </a:p>
+        </p:txBody>
+      </p:sp>
+      <p:sp>
+        <p:nvSpPr>
+          <p:cNvPr id="41" name="Rectangle 40"/>
+          <p:cNvSpPr/>
+          <p:nvPr/>
+        </p:nvSpPr>
+        <p:spPr>
+          <a:xfrm>
+            <a:off x="548640" y="4973955"/>
+            <a:ext cx="6355080" cy="19050"/>
+          </a:xfrm>
+          <a:prstGeom prst="rect">
+            <a:avLst/>
+          </a:prstGeom>
+          <a:solidFill>
+            <a:srgbClr val="000000"/>
+          </a:solidFill>
+          <a:ln>
+            <a:noFill/>
+          </a:ln>
+          <a:effectLst/>
+        </p:spPr>
+        <p:style>
+          <a:lnRef idx="1">
+            <a:schemeClr val="accent1"/>
+          </a:lnRef>
+          <a:fillRef idx="3">
+            <a:schemeClr val="accent1"/>
+          </a:fillRef>
+          <a:effectRef idx="2">
+            <a:schemeClr val="accent1"/>
+          </a:effectRef>
+          <a:fontRef idx="minor">
+            <a:schemeClr val="lt1"/>
+          </a:fontRef>
+        </p:style>
+        <p:txBody>
+          <a:bodyPr rtlCol="0" anchor="ctr"/>
+          <a:lstStyle/>
+          <a:p>
+            <a:pPr algn="ctr"/>
+            <a:endParaRPr/>
+          </a:p>
+        </p:txBody>
+      </p:sp>
       <p:cxnSp>
         <p:nvCxnSpPr>
           <p:cNvPr id="42" name="Connector 41"/>
@@ -5101,15 +5121,15 @@
         </p:nvCxnSpPr>
         <p:spPr>
           <a:xfrm flipV="1">
-            <a:off x="5349240" y="3621024"/>
-            <a:ext cx="0" cy="100583"/>
+            <a:off x="6903720" y="4215384"/>
+            <a:ext cx="411480" cy="768096"/>
           </a:xfrm>
           <a:prstGeom prst="line">
             <a:avLst/>
           </a:prstGeom>
-          <a:ln w="9525">
+          <a:ln w="19050">
             <a:solidFill>
-              <a:srgbClr val="9A9A9A"/>
+              <a:srgbClr val="000000"/>
             </a:solidFill>
           </a:ln>
         </p:spPr>
@@ -5122,7 +5142,7 @@
         </p:nvSpPr>
         <p:spPr>
           <a:xfrm>
-            <a:off x="2167128" y="3721607"/>
+            <a:off x="1984248" y="4773168"/>
             <a:ext cx="420624" cy="420624"/>
           </a:xfrm>
           <a:prstGeom prst="ellipse">
@@ -5169,8 +5189,8 @@
         </p:nvSpPr>
         <p:spPr>
           <a:xfrm>
-            <a:off x="2276856" y="3822191"/>
-            <a:ext cx="210312" cy="210313"/>
+            <a:off x="2093976" y="4873752"/>
+            <a:ext cx="210312" cy="210312"/>
           </a:xfrm>
           <a:custGeom>
             <a:avLst/>
@@ -5179,15 +5199,15 @@
             <a:cxnLst/>
             <a:rect l="l" t="t" r="r" b="b"/>
             <a:pathLst>
-              <a:path w="210312" h="210313">
+              <a:path w="210312" h="210312">
                 <a:moveTo>
                   <a:pt x="0" y="0"/>
                 </a:moveTo>
                 <a:lnTo>
-                  <a:pt x="0" y="210313"/>
+                  <a:pt x="0" y="210312"/>
                 </a:lnTo>
                 <a:lnTo>
-                  <a:pt x="210312" y="210313"/>
+                  <a:pt x="210312" y="210312"/>
                 </a:lnTo>
               </a:path>
             </a:pathLst>
@@ -5231,7 +5251,7 @@
         </p:nvSpPr>
         <p:spPr>
           <a:xfrm>
-            <a:off x="2276856" y="3849624"/>
+            <a:off x="2093976" y="4901184"/>
             <a:ext cx="192024" cy="109728"/>
           </a:xfrm>
           <a:custGeom>
@@ -5249,13 +5269,13 @@
                   <a:pt x="54864" y="0"/>
                 </a:lnTo>
                 <a:lnTo>
-                  <a:pt x="54864" y="54863"/>
+                  <a:pt x="54864" y="54864"/>
                 </a:lnTo>
                 <a:lnTo>
-                  <a:pt x="109728" y="54863"/>
+                  <a:pt x="109727" y="54864"/>
                 </a:lnTo>
                 <a:lnTo>
-                  <a:pt x="109728" y="109728"/>
+                  <a:pt x="109727" y="109728"/>
                 </a:lnTo>
                 <a:lnTo>
                   <a:pt x="192024" y="109728"/>
@@ -5302,8 +5322,8 @@
         </p:nvSpPr>
         <p:spPr>
           <a:xfrm>
-            <a:off x="2167128" y="4261104"/>
-            <a:ext cx="2194560" cy="685800"/>
+            <a:off x="1984248" y="5294376"/>
+            <a:ext cx="2103120" cy="685800"/>
           </a:xfrm>
           <a:prstGeom prst="rect">
             <a:avLst/>
@@ -5371,36 +5391,15 @@
           </a:p>
         </p:txBody>
       </p:sp>
-      <p:cxnSp>
-        <p:nvCxnSpPr>
-          <p:cNvPr id="47" name="Connector 46"/>
-          <p:cNvCxnSpPr/>
-          <p:nvPr/>
-        </p:nvCxnSpPr>
-        <p:spPr>
-          <a:xfrm>
-            <a:off x="2377440" y="4142232"/>
-            <a:ext cx="0" cy="100584"/>
-          </a:xfrm>
-          <a:prstGeom prst="line">
-            <a:avLst/>
-          </a:prstGeom>
-          <a:ln w="9525">
-            <a:solidFill>
-              <a:srgbClr val="9A9A9A"/>
-            </a:solidFill>
-          </a:ln>
-        </p:spPr>
-      </p:cxnSp>
-      <p:sp>
-        <p:nvSpPr>
-          <p:cNvPr id="48" name="Oval 47"/>
+      <p:sp>
+        <p:nvSpPr>
+          <p:cNvPr id="47" name="Oval 46"/>
           <p:cNvSpPr/>
           <p:nvPr/>
         </p:nvSpPr>
         <p:spPr>
           <a:xfrm>
-            <a:off x="3767327" y="3721607"/>
+            <a:off x="3904487" y="4773168"/>
             <a:ext cx="420624" cy="420624"/>
           </a:xfrm>
           <a:prstGeom prst="ellipse">
@@ -5441,13 +5440,13 @@
       </p:sp>
       <p:cxnSp>
         <p:nvCxnSpPr>
-          <p:cNvPr id="49" name="Connector 48"/>
+          <p:cNvPr id="48" name="Connector 47"/>
           <p:cNvCxnSpPr/>
           <p:nvPr/>
         </p:nvCxnSpPr>
         <p:spPr>
           <a:xfrm>
-            <a:off x="3899915" y="3995928"/>
+            <a:off x="4037076" y="5047488"/>
             <a:ext cx="155448" cy="0"/>
           </a:xfrm>
           <a:prstGeom prst="line">
@@ -5462,13 +5461,13 @@
       </p:cxnSp>
       <p:cxnSp>
         <p:nvCxnSpPr>
-          <p:cNvPr id="50" name="Connector 49"/>
+          <p:cNvPr id="49" name="Connector 48"/>
           <p:cNvCxnSpPr/>
           <p:nvPr/>
         </p:nvCxnSpPr>
         <p:spPr>
           <a:xfrm flipH="1" flipV="1">
-            <a:off x="3977639" y="3854196"/>
+            <a:off x="4114800" y="4905756"/>
             <a:ext cx="77724" cy="141732"/>
           </a:xfrm>
           <a:prstGeom prst="line">
@@ -5483,13 +5482,13 @@
       </p:cxnSp>
       <p:cxnSp>
         <p:nvCxnSpPr>
-          <p:cNvPr id="51" name="Connector 50"/>
+          <p:cNvPr id="50" name="Connector 49"/>
           <p:cNvCxnSpPr/>
           <p:nvPr/>
         </p:nvCxnSpPr>
         <p:spPr>
           <a:xfrm flipH="1">
-            <a:off x="3899915" y="3854196"/>
+            <a:off x="4037076" y="4905756"/>
             <a:ext cx="77724" cy="141732"/>
           </a:xfrm>
           <a:prstGeom prst="line">
@@ -5504,13 +5503,13 @@
       </p:cxnSp>
       <p:sp>
         <p:nvSpPr>
-          <p:cNvPr id="52" name="Oval 51"/>
+          <p:cNvPr id="51" name="Oval 50"/>
           <p:cNvSpPr/>
           <p:nvPr/>
         </p:nvSpPr>
         <p:spPr>
           <a:xfrm>
-            <a:off x="3870198" y="3966210"/>
+            <a:off x="4007358" y="5017770"/>
             <a:ext cx="59436" cy="59436"/>
           </a:xfrm>
           <a:prstGeom prst="ellipse">
@@ -5551,13 +5550,13 @@
       </p:sp>
       <p:sp>
         <p:nvSpPr>
-          <p:cNvPr id="53" name="Oval 52"/>
+          <p:cNvPr id="52" name="Oval 51"/>
           <p:cNvSpPr/>
           <p:nvPr/>
         </p:nvSpPr>
         <p:spPr>
           <a:xfrm>
-            <a:off x="4025646" y="3966210"/>
+            <a:off x="4162806" y="5017770"/>
             <a:ext cx="59436" cy="59436"/>
           </a:xfrm>
           <a:prstGeom prst="ellipse">
@@ -5598,13 +5597,13 @@
       </p:sp>
       <p:sp>
         <p:nvSpPr>
-          <p:cNvPr id="54" name="Oval 53"/>
+          <p:cNvPr id="53" name="Oval 52"/>
           <p:cNvSpPr/>
           <p:nvPr/>
         </p:nvSpPr>
         <p:spPr>
           <a:xfrm>
-            <a:off x="3947922" y="3824478"/>
+            <a:off x="4085082" y="4876038"/>
             <a:ext cx="59436" cy="59436"/>
           </a:xfrm>
           <a:prstGeom prst="ellipse">
@@ -5645,14 +5644,14 @@
       </p:sp>
       <p:sp>
         <p:nvSpPr>
-          <p:cNvPr id="55" name="TextBox 54"/>
+          <p:cNvPr id="54" name="TextBox 53"/>
           <p:cNvSpPr txBox="1"/>
           <p:nvPr/>
         </p:nvSpPr>
         <p:spPr>
           <a:xfrm>
-            <a:off x="3767327" y="4261104"/>
-            <a:ext cx="2194560" cy="685800"/>
+            <a:off x="3904487" y="5294376"/>
+            <a:ext cx="2103120" cy="685800"/>
           </a:xfrm>
           <a:prstGeom prst="rect">
             <a:avLst/>
@@ -5720,36 +5719,15 @@
           </a:p>
         </p:txBody>
       </p:sp>
-      <p:cxnSp>
-        <p:nvCxnSpPr>
-          <p:cNvPr id="56" name="Connector 55"/>
-          <p:cNvCxnSpPr/>
-          <p:nvPr/>
-        </p:nvCxnSpPr>
-        <p:spPr>
-          <a:xfrm>
-            <a:off x="3977639" y="4142232"/>
-            <a:ext cx="0" cy="100584"/>
-          </a:xfrm>
-          <a:prstGeom prst="line">
-            <a:avLst/>
-          </a:prstGeom>
-          <a:ln w="9525">
-            <a:solidFill>
-              <a:srgbClr val="9A9A9A"/>
-            </a:solidFill>
-          </a:ln>
-        </p:spPr>
-      </p:cxnSp>
-      <p:sp>
-        <p:nvSpPr>
-          <p:cNvPr id="57" name="Oval 56"/>
+      <p:sp>
+        <p:nvSpPr>
+          <p:cNvPr id="55" name="Oval 54"/>
           <p:cNvSpPr/>
           <p:nvPr/>
         </p:nvSpPr>
         <p:spPr>
           <a:xfrm>
-            <a:off x="5687568" y="3721607"/>
+            <a:off x="5687568" y="4773168"/>
             <a:ext cx="420624" cy="420624"/>
           </a:xfrm>
           <a:prstGeom prst="ellipse">
@@ -5790,13 +5768,13 @@
       </p:sp>
       <p:sp>
         <p:nvSpPr>
-          <p:cNvPr id="58" name="Freeform 57"/>
+          <p:cNvPr id="56" name="Freeform 55"/>
           <p:cNvSpPr/>
           <p:nvPr/>
         </p:nvSpPr>
         <p:spPr>
           <a:xfrm>
-            <a:off x="5797296" y="3835907"/>
+            <a:off x="5797296" y="4887468"/>
             <a:ext cx="201168" cy="100584"/>
           </a:xfrm>
           <a:custGeom>
@@ -5808,13 +5786,13 @@
             <a:pathLst>
               <a:path w="201168" h="100584">
                 <a:moveTo>
-                  <a:pt x="0" y="50293"/>
+                  <a:pt x="0" y="50292"/>
                 </a:moveTo>
                 <a:lnTo>
                   <a:pt x="100584" y="0"/>
                 </a:lnTo>
                 <a:lnTo>
-                  <a:pt x="201168" y="50293"/>
+                  <a:pt x="201168" y="50292"/>
                 </a:lnTo>
                 <a:lnTo>
                   <a:pt x="100584" y="100584"/>
@@ -5856,13 +5834,75 @@
       </p:sp>
       <p:sp>
         <p:nvSpPr>
-          <p:cNvPr id="59" name="Freeform 58"/>
+          <p:cNvPr id="57" name="Freeform 56"/>
           <p:cNvSpPr/>
           <p:nvPr/>
         </p:nvSpPr>
         <p:spPr>
           <a:xfrm>
-            <a:off x="5797296" y="3927347"/>
+            <a:off x="5797296" y="4978907"/>
+            <a:ext cx="201168" cy="50293"/>
+          </a:xfrm>
+          <a:custGeom>
+            <a:avLst/>
+            <a:gdLst/>
+            <a:ahLst/>
+            <a:cxnLst/>
+            <a:rect l="l" t="t" r="r" b="b"/>
+            <a:pathLst>
+              <a:path w="201168" h="50293">
+                <a:moveTo>
+                  <a:pt x="0" y="0"/>
+                </a:moveTo>
+                <a:lnTo>
+                  <a:pt x="100584" y="50293"/>
+                </a:lnTo>
+                <a:lnTo>
+                  <a:pt x="201168" y="0"/>
+                </a:lnTo>
+              </a:path>
+            </a:pathLst>
+          </a:custGeom>
+          <a:noFill/>
+          <a:ln w="19050">
+            <a:solidFill>
+              <a:srgbClr val="000000"/>
+            </a:solidFill>
+          </a:ln>
+          <a:effectLst/>
+        </p:spPr>
+        <p:style>
+          <a:lnRef idx="1">
+            <a:schemeClr val="accent1"/>
+          </a:lnRef>
+          <a:fillRef idx="3">
+            <a:schemeClr val="accent1"/>
+          </a:fillRef>
+          <a:effectRef idx="2">
+            <a:schemeClr val="accent1"/>
+          </a:effectRef>
+          <a:fontRef idx="minor">
+            <a:schemeClr val="lt1"/>
+          </a:fontRef>
+        </p:style>
+        <p:txBody>
+          <a:bodyPr rtlCol="0" anchor="ctr"/>
+          <a:lstStyle/>
+          <a:p>
+            <a:pPr algn="ctr"/>
+            <a:endParaRPr/>
+          </a:p>
+        </p:txBody>
+      </p:sp>
+      <p:sp>
+        <p:nvSpPr>
+          <p:cNvPr id="58" name="Freeform 57"/>
+          <p:cNvSpPr/>
+          <p:nvPr/>
+        </p:nvSpPr>
+        <p:spPr>
+          <a:xfrm>
+            <a:off x="5797296" y="5038344"/>
             <a:ext cx="201168" cy="50292"/>
           </a:xfrm>
           <a:custGeom>
@@ -5918,76 +5958,14 @@
       </p:sp>
       <p:sp>
         <p:nvSpPr>
-          <p:cNvPr id="60" name="Freeform 59"/>
-          <p:cNvSpPr/>
-          <p:nvPr/>
-        </p:nvSpPr>
-        <p:spPr>
-          <a:xfrm>
-            <a:off x="5797296" y="3986783"/>
-            <a:ext cx="201168" cy="50293"/>
-          </a:xfrm>
-          <a:custGeom>
-            <a:avLst/>
-            <a:gdLst/>
-            <a:ahLst/>
-            <a:cxnLst/>
-            <a:rect l="l" t="t" r="r" b="b"/>
-            <a:pathLst>
-              <a:path w="201168" h="50293">
-                <a:moveTo>
-                  <a:pt x="0" y="0"/>
-                </a:moveTo>
-                <a:lnTo>
-                  <a:pt x="100584" y="50293"/>
-                </a:lnTo>
-                <a:lnTo>
-                  <a:pt x="201168" y="0"/>
-                </a:lnTo>
-              </a:path>
-            </a:pathLst>
-          </a:custGeom>
-          <a:noFill/>
-          <a:ln w="19050">
-            <a:solidFill>
-              <a:srgbClr val="000000"/>
-            </a:solidFill>
-          </a:ln>
-          <a:effectLst/>
-        </p:spPr>
-        <p:style>
-          <a:lnRef idx="1">
-            <a:schemeClr val="accent1"/>
-          </a:lnRef>
-          <a:fillRef idx="3">
-            <a:schemeClr val="accent1"/>
-          </a:fillRef>
-          <a:effectRef idx="2">
-            <a:schemeClr val="accent1"/>
-          </a:effectRef>
-          <a:fontRef idx="minor">
-            <a:schemeClr val="lt1"/>
-          </a:fontRef>
-        </p:style>
-        <p:txBody>
-          <a:bodyPr rtlCol="0" anchor="ctr"/>
-          <a:lstStyle/>
-          <a:p>
-            <a:pPr algn="ctr"/>
-            <a:endParaRPr/>
-          </a:p>
-        </p:txBody>
-      </p:sp>
-      <p:sp>
-        <p:nvSpPr>
-          <p:cNvPr id="61" name="TextBox 60"/>
+          <p:cNvPr id="59" name="TextBox 58"/>
           <p:cNvSpPr txBox="1"/>
           <p:nvPr/>
         </p:nvSpPr>
         <p:spPr>
           <a:xfrm>
-            <a:off x="5687568" y="4261104"/>
-            <a:ext cx="2194560" cy="685800"/>
+            <a:off x="5687568" y="5294376"/>
+            <a:ext cx="2103120" cy="685800"/>
           </a:xfrm>
           <a:prstGeom prst="rect">
             <a:avLst/>
@@ -6055,36 +6033,15 @@
           </a:p>
         </p:txBody>
       </p:sp>
-      <p:cxnSp>
-        <p:nvCxnSpPr>
-          <p:cNvPr id="62" name="Connector 61"/>
-          <p:cNvCxnSpPr/>
-          <p:nvPr/>
-        </p:nvCxnSpPr>
-        <p:spPr>
-          <a:xfrm>
-            <a:off x="5897880" y="4142232"/>
-            <a:ext cx="0" cy="100584"/>
-          </a:xfrm>
-          <a:prstGeom prst="line">
-            <a:avLst/>
-          </a:prstGeom>
-          <a:ln w="9525">
-            <a:solidFill>
-              <a:srgbClr val="FFFFFF"/>
-            </a:solidFill>
-          </a:ln>
-        </p:spPr>
-      </p:cxnSp>
-      <p:sp>
-        <p:nvSpPr>
-          <p:cNvPr id="63" name="Oval 62"/>
+      <p:sp>
+        <p:nvSpPr>
+          <p:cNvPr id="60" name="Oval 59"/>
           <p:cNvSpPr/>
           <p:nvPr/>
         </p:nvSpPr>
         <p:spPr>
           <a:xfrm>
-            <a:off x="7552944" y="3575303"/>
+            <a:off x="7232904" y="3712464"/>
             <a:ext cx="713232" cy="713232"/>
           </a:xfrm>
           <a:prstGeom prst="ellipse">
@@ -6094,9 +6051,7 @@
             <a:srgbClr val="000000"/>
           </a:solidFill>
           <a:ln>
-            <a:solidFill>
-              <a:srgbClr val="FFFFFF"/>
-            </a:solidFill>
+            <a:noFill/>
           </a:ln>
           <a:effectLst/>
         </p:spPr>
@@ -6125,14 +6080,14 @@
       </p:sp>
       <p:sp>
         <p:nvSpPr>
-          <p:cNvPr id="64" name="Freeform 63"/>
+          <p:cNvPr id="61" name="Freeform 60"/>
           <p:cNvSpPr/>
           <p:nvPr/>
         </p:nvSpPr>
         <p:spPr>
           <a:xfrm>
-            <a:off x="7827264" y="3831335"/>
-            <a:ext cx="164592" cy="210313"/>
+            <a:off x="7507224" y="3968496"/>
+            <a:ext cx="164592" cy="210312"/>
           </a:xfrm>
           <a:custGeom>
             <a:avLst/>
@@ -6141,9 +6096,9 @@
             <a:cxnLst/>
             <a:rect l="l" t="t" r="r" b="b"/>
             <a:pathLst>
-              <a:path w="164592" h="210313">
+              <a:path w="164592" h="210312">
                 <a:moveTo>
-                  <a:pt x="0" y="210313"/>
+                  <a:pt x="0" y="210312"/>
                 </a:moveTo>
                 <a:lnTo>
                   <a:pt x="0" y="0"/>
@@ -6152,7 +6107,7 @@
                   <a:pt x="164592" y="0"/>
                 </a:lnTo>
                 <a:lnTo>
-                  <a:pt x="164592" y="210313"/>
+                  <a:pt x="164592" y="210312"/>
                 </a:lnTo>
                 <a:close/>
               </a:path>
@@ -6191,13 +6146,13 @@
       </p:sp>
       <p:cxnSp>
         <p:nvCxnSpPr>
-          <p:cNvPr id="65" name="Connector 64"/>
+          <p:cNvPr id="62" name="Connector 61"/>
           <p:cNvCxnSpPr/>
           <p:nvPr/>
         </p:nvCxnSpPr>
         <p:spPr>
           <a:xfrm>
-            <a:off x="7868412" y="3886200"/>
+            <a:off x="7548372" y="4023360"/>
             <a:ext cx="82296" cy="0"/>
           </a:xfrm>
           <a:prstGeom prst="line">
@@ -6212,13 +6167,13 @@
       </p:cxnSp>
       <p:cxnSp>
         <p:nvCxnSpPr>
-          <p:cNvPr id="66" name="Connector 65"/>
+          <p:cNvPr id="63" name="Connector 62"/>
           <p:cNvCxnSpPr/>
           <p:nvPr/>
         </p:nvCxnSpPr>
         <p:spPr>
           <a:xfrm>
-            <a:off x="7868412" y="3941063"/>
+            <a:off x="7548372" y="4078224"/>
             <a:ext cx="82296" cy="0"/>
           </a:xfrm>
           <a:prstGeom prst="line">
@@ -6233,14 +6188,14 @@
       </p:cxnSp>
       <p:cxnSp>
         <p:nvCxnSpPr>
-          <p:cNvPr id="67" name="Connector 66"/>
+          <p:cNvPr id="64" name="Connector 63"/>
           <p:cNvCxnSpPr/>
           <p:nvPr/>
         </p:nvCxnSpPr>
         <p:spPr>
           <a:xfrm>
-            <a:off x="7909560" y="3986783"/>
-            <a:ext cx="0" cy="54865"/>
+            <a:off x="7589520" y="4123944"/>
+            <a:ext cx="0" cy="54864"/>
           </a:xfrm>
           <a:prstGeom prst="line">
             <a:avLst/>
@@ -6254,14 +6209,14 @@
       </p:cxnSp>
       <p:sp>
         <p:nvSpPr>
-          <p:cNvPr id="68" name="TextBox 67"/>
+          <p:cNvPr id="65" name="TextBox 64"/>
           <p:cNvSpPr txBox="1"/>
           <p:nvPr/>
         </p:nvSpPr>
         <p:spPr>
           <a:xfrm>
-            <a:off x="7406640" y="4434840"/>
-            <a:ext cx="2377440" cy="822960"/>
+            <a:off x="7315200" y="4526280"/>
+            <a:ext cx="2194560" cy="822960"/>
           </a:xfrm>
           <a:prstGeom prst="rect">
             <a:avLst/>
@@ -6306,25 +6261,7 @@
                 <a:ea typeface="Pretendard"/>
                 <a:cs typeface="Pretendard"/>
               </a:rPr>
-              <a:t>데이터마트 · 예측 모델 · 분석 화면 · LLM 활용</a:t>
-            </a:r>
-          </a:p>
-          <a:p>
-            <a:pPr algn="l">
-              <a:lnSpc>
-                <a:spcPct val="130000"/>
-              </a:lnSpc>
-            </a:pPr>
-            <a:r>
-              <a:rPr sz="950" b="0">
-                <a:solidFill>
-                  <a:srgbClr val="6B6B6B"/>
-                </a:solidFill>
-                <a:latin typeface="Pretendard"/>
-                <a:ea typeface="Pretendard"/>
-                <a:cs typeface="Pretendard"/>
-              </a:rPr>
-              <a:t>실제 데이터와 사용자 기반 개발</a:t>
+              <a:t>데이터마트 · 예측 모델 · 분석 화면 · LLM</a:t>
             </a:r>
           </a:p>
           <a:p>
@@ -6349,14 +6286,14 @@
       </p:sp>
       <p:cxnSp>
         <p:nvCxnSpPr>
-          <p:cNvPr id="69" name="Connector 68"/>
+          <p:cNvPr id="66" name="Connector 65"/>
           <p:cNvCxnSpPr/>
           <p:nvPr/>
         </p:nvCxnSpPr>
         <p:spPr>
           <a:xfrm>
-            <a:off x="8915400" y="3931920"/>
-            <a:ext cx="274320" cy="0"/>
+            <a:off x="7946136" y="4069080"/>
+            <a:ext cx="1152144" cy="0"/>
           </a:xfrm>
           <a:prstGeom prst="line">
             <a:avLst/>
@@ -6370,13 +6307,13 @@
       </p:cxnSp>
       <p:sp>
         <p:nvSpPr>
-          <p:cNvPr id="70" name="Freeform 69"/>
+          <p:cNvPr id="67" name="Freeform 66"/>
           <p:cNvSpPr/>
           <p:nvPr/>
         </p:nvSpPr>
         <p:spPr>
           <a:xfrm>
-            <a:off x="9098280" y="3858768"/>
+            <a:off x="9006840" y="3995928"/>
             <a:ext cx="109728" cy="146304"/>
           </a:xfrm>
           <a:custGeom>
@@ -6432,14 +6369,14 @@
       </p:sp>
       <p:sp>
         <p:nvSpPr>
-          <p:cNvPr id="71" name="TextBox 70"/>
+          <p:cNvPr id="68" name="TextBox 67"/>
           <p:cNvSpPr txBox="1"/>
           <p:nvPr/>
         </p:nvSpPr>
         <p:spPr>
           <a:xfrm>
-            <a:off x="9326880" y="3017520"/>
-            <a:ext cx="2361895" cy="1920240"/>
+            <a:off x="9235440" y="3200400"/>
+            <a:ext cx="2453335" cy="1828800"/>
           </a:xfrm>
           <a:prstGeom prst="rect">
             <a:avLst/>
@@ -6673,7 +6610,7 @@
         </p:nvSpPr>
         <p:spPr>
           <a:xfrm>
-            <a:off x="548640" y="1024128"/>
+            <a:off x="548640" y="1097280"/>
             <a:ext cx="11094415" cy="274320"/>
           </a:xfrm>
           <a:prstGeom prst="rect">
@@ -6701,61 +6638,20 @@
                 <a:ea typeface="Pretendard"/>
                 <a:cs typeface="Pretendard"/>
               </a:rPr>
-              <a:t>공개 대출 데이터(Lending Club 226만 건)로 과거 13개 분기를 재현 · 단독 설계·구현</a:t>
-            </a:r>
-          </a:p>
-        </p:txBody>
-      </p:sp>
-      <p:sp>
-        <p:nvSpPr>
-          <p:cNvPr id="5" name="TextBox 4"/>
-          <p:cNvSpPr txBox="1"/>
-          <p:nvPr/>
-        </p:nvSpPr>
-        <p:spPr>
-          <a:xfrm>
-            <a:off x="548640" y="1325880"/>
-            <a:ext cx="11094415" cy="274320"/>
-          </a:xfrm>
-          <a:prstGeom prst="rect">
-            <a:avLst/>
-          </a:prstGeom>
-          <a:noFill/>
-        </p:spPr>
-        <p:txBody>
-          <a:bodyPr wrap="none" lIns="0" tIns="0" rIns="0" bIns="0" anchor="t">
-            <a:spAutoFit/>
-          </a:bodyPr>
-          <a:lstStyle/>
-          <a:p>
-            <a:pPr algn="l">
-              <a:lnSpc>
-                <a:spcPct val="115000"/>
-              </a:lnSpc>
-            </a:pPr>
-            <a:r>
-              <a:rPr sz="1150" b="0">
-                <a:solidFill>
-                  <a:srgbClr val="000000"/>
-                </a:solidFill>
-                <a:latin typeface="Pretendard Medium"/>
-                <a:ea typeface="Pretendard Medium"/>
-                <a:cs typeface="Pretendard Medium"/>
-              </a:rPr>
-              <a:t>신규 대출의 24개월 상각 위험을 예측하는 모형 1개가 시간이 지나 실제와 어긋날 때, 유지·재보정·재학습 중 무엇을 할지 매 분기 자동으로 판단</a:t>
-            </a:r>
-          </a:p>
-        </p:txBody>
-      </p:sp>
-      <p:sp>
-        <p:nvSpPr>
-          <p:cNvPr id="6" name="Rectangle 5"/>
+              <a:t>24개월 상각 위험 예측모형 1개 · 분기별 유지·재보정·재학습 자동 판단</a:t>
+            </a:r>
+          </a:p>
+        </p:txBody>
+      </p:sp>
+      <p:sp>
+        <p:nvSpPr>
+          <p:cNvPr id="5" name="Rectangle 4"/>
           <p:cNvSpPr/>
           <p:nvPr/>
         </p:nvSpPr>
         <p:spPr>
           <a:xfrm>
-            <a:off x="548640" y="1714309"/>
+            <a:off x="548640" y="1476565"/>
             <a:ext cx="11094415" cy="9525"/>
           </a:xfrm>
           <a:prstGeom prst="rect">
@@ -6794,14 +6690,14 @@
       </p:sp>
       <p:sp>
         <p:nvSpPr>
-          <p:cNvPr id="7" name="TextBox 6"/>
+          <p:cNvPr id="6" name="TextBox 5"/>
           <p:cNvSpPr txBox="1"/>
           <p:nvPr/>
         </p:nvSpPr>
         <p:spPr>
           <a:xfrm>
-            <a:off x="548640" y="1856231"/>
-            <a:ext cx="2202103" cy="502920"/>
+            <a:off x="548640" y="1609344"/>
+            <a:ext cx="2224963" cy="274320"/>
           </a:xfrm>
           <a:prstGeom prst="rect">
             <a:avLst/>
@@ -6816,7 +6712,7 @@
           <a:p>
             <a:pPr algn="l">
               <a:lnSpc>
-                <a:spcPct val="130000"/>
+                <a:spcPct val="115000"/>
               </a:lnSpc>
             </a:pPr>
             <a:r>
@@ -6842,35 +6738,17 @@
               <a:t>정기 실행</a:t>
             </a:r>
           </a:p>
-          <a:p>
-            <a:pPr algn="l">
-              <a:lnSpc>
-                <a:spcPct val="130000"/>
-              </a:lnSpc>
-            </a:pPr>
-            <a:r>
-              <a:rPr sz="900" b="0">
-                <a:solidFill>
-                  <a:srgbClr val="6B6B6B"/>
-                </a:solidFill>
-                <a:latin typeface="Pretendard"/>
-                <a:ea typeface="Pretendard"/>
-                <a:cs typeface="Pretendard"/>
-              </a:rPr>
-              <a:t>그 분기에 알 수 있던 데이터만</a:t>
-            </a:r>
-          </a:p>
-        </p:txBody>
-      </p:sp>
-      <p:sp>
-        <p:nvSpPr>
-          <p:cNvPr id="8" name="Freeform 7"/>
+        </p:txBody>
+      </p:sp>
+      <p:sp>
+        <p:nvSpPr>
+          <p:cNvPr id="7" name="Freeform 6"/>
           <p:cNvSpPr/>
           <p:nvPr/>
         </p:nvSpPr>
         <p:spPr>
           <a:xfrm>
-            <a:off x="2823895" y="1993392"/>
+            <a:off x="2828467" y="1645920"/>
             <a:ext cx="73152" cy="146304"/>
           </a:xfrm>
           <a:custGeom>
@@ -6885,7 +6763,7 @@
                   <a:pt x="0" y="0"/>
                 </a:moveTo>
                 <a:lnTo>
-                  <a:pt x="73152" y="73151"/>
+                  <a:pt x="73152" y="73152"/>
                 </a:lnTo>
                 <a:lnTo>
                   <a:pt x="0" y="146304"/>
@@ -6926,14 +6804,14 @@
       </p:sp>
       <p:sp>
         <p:nvSpPr>
-          <p:cNvPr id="9" name="TextBox 8"/>
+          <p:cNvPr id="8" name="TextBox 7"/>
           <p:cNvSpPr txBox="1"/>
           <p:nvPr/>
         </p:nvSpPr>
         <p:spPr>
           <a:xfrm>
-            <a:off x="3025063" y="1856231"/>
-            <a:ext cx="2202103" cy="502920"/>
+            <a:off x="3011347" y="1609344"/>
+            <a:ext cx="2224963" cy="274320"/>
           </a:xfrm>
           <a:prstGeom prst="rect">
             <a:avLst/>
@@ -6948,7 +6826,7 @@
           <a:p>
             <a:pPr algn="l">
               <a:lnSpc>
-                <a:spcPct val="130000"/>
+                <a:spcPct val="115000"/>
               </a:lnSpc>
             </a:pPr>
             <a:r>
@@ -6974,35 +6852,17 @@
               <a:t>점검</a:t>
             </a:r>
           </a:p>
-          <a:p>
-            <a:pPr algn="l">
-              <a:lnSpc>
-                <a:spcPct val="130000"/>
-              </a:lnSpc>
-            </a:pPr>
-            <a:r>
-              <a:rPr sz="900" b="0">
-                <a:solidFill>
-                  <a:srgbClr val="6B6B6B"/>
-                </a:solidFill>
-                <a:latin typeface="Pretendard"/>
-                <a:ea typeface="Pretendard"/>
-                <a:cs typeface="Pretendard"/>
-              </a:rPr>
-              <a:t>신규 대출 · 중간 신호 · 확정 결과</a:t>
-            </a:r>
-          </a:p>
-        </p:txBody>
-      </p:sp>
-      <p:sp>
-        <p:nvSpPr>
-          <p:cNvPr id="10" name="Freeform 9"/>
+        </p:txBody>
+      </p:sp>
+      <p:sp>
+        <p:nvSpPr>
+          <p:cNvPr id="9" name="Freeform 8"/>
           <p:cNvSpPr/>
           <p:nvPr/>
         </p:nvSpPr>
         <p:spPr>
           <a:xfrm>
-            <a:off x="5208879" y="1993392"/>
+            <a:off x="5236311" y="1645920"/>
             <a:ext cx="73152" cy="146304"/>
           </a:xfrm>
           <a:custGeom>
@@ -7017,7 +6877,7 @@
                   <a:pt x="0" y="0"/>
                 </a:moveTo>
                 <a:lnTo>
-                  <a:pt x="73152" y="73151"/>
+                  <a:pt x="73152" y="73152"/>
                 </a:lnTo>
                 <a:lnTo>
                   <a:pt x="0" y="146304"/>
@@ -7058,14 +6918,14 @@
       </p:sp>
       <p:sp>
         <p:nvSpPr>
-          <p:cNvPr id="11" name="TextBox 10"/>
+          <p:cNvPr id="10" name="TextBox 9"/>
           <p:cNvSpPr txBox="1"/>
           <p:nvPr/>
         </p:nvSpPr>
         <p:spPr>
           <a:xfrm>
-            <a:off x="5410047" y="1856231"/>
-            <a:ext cx="2202103" cy="502920"/>
+            <a:off x="5419191" y="1609344"/>
+            <a:ext cx="2224963" cy="274320"/>
           </a:xfrm>
           <a:prstGeom prst="rect">
             <a:avLst/>
@@ -7080,7 +6940,7 @@
           <a:p>
             <a:pPr algn="l">
               <a:lnSpc>
-                <a:spcPct val="130000"/>
+                <a:spcPct val="115000"/>
               </a:lnSpc>
             </a:pPr>
             <a:r>
@@ -7106,35 +6966,17 @@
               <a:t>이상 시 개선안 검증</a:t>
             </a:r>
           </a:p>
-          <a:p>
-            <a:pPr algn="l">
-              <a:lnSpc>
-                <a:spcPct val="130000"/>
-              </a:lnSpc>
-            </a:pPr>
-            <a:r>
-              <a:rPr sz="900" b="0">
-                <a:solidFill>
-                  <a:srgbClr val="6B6B6B"/>
-                </a:solidFill>
-                <a:latin typeface="Pretendard"/>
-                <a:ea typeface="Pretendard"/>
-                <a:cs typeface="Pretendard"/>
-              </a:rPr>
-              <a:t>유지·재보정·재학습 10종 비교</a:t>
-            </a:r>
-          </a:p>
-        </p:txBody>
-      </p:sp>
-      <p:sp>
-        <p:nvSpPr>
-          <p:cNvPr id="12" name="Freeform 11"/>
+        </p:txBody>
+      </p:sp>
+      <p:sp>
+        <p:nvSpPr>
+          <p:cNvPr id="11" name="Freeform 10"/>
           <p:cNvSpPr/>
           <p:nvPr/>
         </p:nvSpPr>
         <p:spPr>
           <a:xfrm>
-            <a:off x="7593863" y="1993392"/>
+            <a:off x="7644155" y="1645920"/>
             <a:ext cx="73152" cy="146304"/>
           </a:xfrm>
           <a:custGeom>
@@ -7149,7 +6991,7 @@
                   <a:pt x="0" y="0"/>
                 </a:moveTo>
                 <a:lnTo>
-                  <a:pt x="73152" y="73151"/>
+                  <a:pt x="73152" y="73152"/>
                 </a:lnTo>
                 <a:lnTo>
                   <a:pt x="0" y="146304"/>
@@ -7190,14 +7032,14 @@
       </p:sp>
       <p:sp>
         <p:nvSpPr>
-          <p:cNvPr id="13" name="TextBox 12"/>
+          <p:cNvPr id="12" name="TextBox 11"/>
           <p:cNvSpPr txBox="1"/>
           <p:nvPr/>
         </p:nvSpPr>
         <p:spPr>
           <a:xfrm>
-            <a:off x="7795031" y="1856231"/>
-            <a:ext cx="2202103" cy="502920"/>
+            <a:off x="7827035" y="1609344"/>
+            <a:ext cx="2224963" cy="274320"/>
           </a:xfrm>
           <a:prstGeom prst="rect">
             <a:avLst/>
@@ -7212,7 +7054,7 @@
           <a:p>
             <a:pPr algn="l">
               <a:lnSpc>
-                <a:spcPct val="130000"/>
+                <a:spcPct val="115000"/>
               </a:lnSpc>
             </a:pPr>
             <a:r>
@@ -7238,10 +7080,33 @@
               <a:t>보고</a:t>
             </a:r>
           </a:p>
+        </p:txBody>
+      </p:sp>
+      <p:sp>
+        <p:nvSpPr>
+          <p:cNvPr id="13" name="TextBox 12"/>
+          <p:cNvSpPr txBox="1"/>
+          <p:nvPr/>
+        </p:nvSpPr>
+        <p:spPr>
+          <a:xfrm>
+            <a:off x="10271455" y="1636776"/>
+            <a:ext cx="1371600" cy="274320"/>
+          </a:xfrm>
+          <a:prstGeom prst="rect">
+            <a:avLst/>
+          </a:prstGeom>
+          <a:noFill/>
+        </p:spPr>
+        <p:txBody>
+          <a:bodyPr wrap="none" lIns="0" tIns="0" rIns="0" bIns="0" anchor="t">
+            <a:spAutoFit/>
+          </a:bodyPr>
+          <a:lstStyle/>
           <a:p>
             <a:pPr algn="l">
               <a:lnSpc>
-                <a:spcPct val="130000"/>
+                <a:spcPct val="115000"/>
               </a:lnSpc>
             </a:pPr>
             <a:r>
@@ -7253,79 +7118,20 @@
                 <a:ea typeface="Pretendard"/>
                 <a:cs typeface="Pretendard"/>
               </a:rPr>
-              <a:t>상태 · 권고 · 근거 3개, 수치 자동 대조</a:t>
-            </a:r>
-          </a:p>
-        </p:txBody>
-      </p:sp>
-      <p:sp>
-        <p:nvSpPr>
-          <p:cNvPr id="14" name="TextBox 13"/>
-          <p:cNvSpPr txBox="1"/>
-          <p:nvPr/>
-        </p:nvSpPr>
-        <p:spPr>
-          <a:xfrm>
-            <a:off x="10180015" y="1920240"/>
-            <a:ext cx="1463040" cy="411480"/>
-          </a:xfrm>
-          <a:prstGeom prst="rect">
-            <a:avLst/>
-          </a:prstGeom>
-          <a:noFill/>
-        </p:spPr>
-        <p:txBody>
-          <a:bodyPr wrap="none" lIns="0" tIns="0" rIns="0" bIns="0" anchor="t">
-            <a:spAutoFit/>
-          </a:bodyPr>
-          <a:lstStyle/>
-          <a:p>
-            <a:pPr algn="l">
-              <a:lnSpc>
-                <a:spcPct val="125000"/>
-              </a:lnSpc>
-            </a:pPr>
-            <a:r>
-              <a:rPr sz="900" b="0">
-                <a:solidFill>
-                  <a:srgbClr val="6B6B6B"/>
-                </a:solidFill>
-                <a:latin typeface="Pretendard"/>
-                <a:ea typeface="Pretendard"/>
-                <a:cs typeface="Pretendard"/>
-              </a:rPr>
-              <a:t>변경은</a:t>
-            </a:r>
-          </a:p>
-          <a:p>
-            <a:pPr algn="l">
-              <a:lnSpc>
-                <a:spcPct val="125000"/>
-              </a:lnSpc>
-            </a:pPr>
-            <a:r>
-              <a:rPr sz="900" b="1">
-                <a:solidFill>
-                  <a:srgbClr val="000000"/>
-                </a:solidFill>
-                <a:latin typeface="Pretendard"/>
-                <a:ea typeface="Pretendard"/>
-                <a:cs typeface="Pretendard"/>
-              </a:rPr>
-              <a:t>담당자 승인</a:t>
-            </a:r>
-          </a:p>
-        </p:txBody>
-      </p:sp>
-      <p:sp>
-        <p:nvSpPr>
-          <p:cNvPr id="15" name="Rectangle 14"/>
+              <a:t>변경은 담당자 승인</a:t>
+            </a:r>
+          </a:p>
+        </p:txBody>
+      </p:sp>
+      <p:sp>
+        <p:nvSpPr>
+          <p:cNvPr id="14" name="Rectangle 13"/>
           <p:cNvSpPr/>
           <p:nvPr/>
         </p:nvSpPr>
         <p:spPr>
           <a:xfrm>
-            <a:off x="548640" y="2482405"/>
+            <a:off x="548640" y="2006917"/>
             <a:ext cx="11094415" cy="9525"/>
           </a:xfrm>
           <a:prstGeom prst="rect">
@@ -7364,7 +7170,7 @@
       </p:sp>
       <p:pic>
         <p:nvPicPr>
-          <p:cNvPr id="16" name="Picture 15" descr="app_card.png"/>
+          <p:cNvPr id="15" name="Picture 14" descr="app_card.png"/>
           <p:cNvPicPr>
             <a:picLocks noChangeAspect="1"/>
           </p:cNvPicPr>
@@ -7378,8 +7184,8 @@
         </p:blipFill>
         <p:spPr>
           <a:xfrm>
-            <a:off x="548640" y="2651760"/>
-            <a:ext cx="5760720" cy="3360420"/>
+            <a:off x="548640" y="2212848"/>
+            <a:ext cx="6400800" cy="3561265"/>
           </a:xfrm>
           <a:prstGeom prst="rect">
             <a:avLst/>
@@ -7393,14 +7199,14 @@
       </p:pic>
       <p:sp>
         <p:nvSpPr>
-          <p:cNvPr id="17" name="TextBox 16"/>
+          <p:cNvPr id="16" name="TextBox 15"/>
           <p:cNvSpPr txBox="1"/>
           <p:nvPr/>
         </p:nvSpPr>
         <p:spPr>
           <a:xfrm>
-            <a:off x="548640" y="6057899"/>
-            <a:ext cx="5760720" cy="182880"/>
+            <a:off x="548640" y="5819833"/>
+            <a:ext cx="6400800" cy="182880"/>
           </a:xfrm>
           <a:prstGeom prst="rect">
             <a:avLst/>
@@ -7427,21 +7233,21 @@
                 <a:ea typeface="Pretendard"/>
                 <a:cs typeface="Pretendard"/>
               </a:rPr>
-              <a:t>실제 생성 화면 · 2018년 1분기 판단</a:t>
-            </a:r>
-          </a:p>
-        </p:txBody>
-      </p:sp>
-      <p:sp>
-        <p:nvSpPr>
-          <p:cNvPr id="18" name="TextBox 17"/>
+              <a:t>실제 생성 화면 · 2018년 1분기</a:t>
+            </a:r>
+          </a:p>
+        </p:txBody>
+      </p:sp>
+      <p:sp>
+        <p:nvSpPr>
+          <p:cNvPr id="17" name="TextBox 16"/>
           <p:cNvSpPr txBox="1"/>
           <p:nvPr/>
         </p:nvSpPr>
         <p:spPr>
           <a:xfrm>
-            <a:off x="6720840" y="2651760"/>
-            <a:ext cx="4922215" cy="201168"/>
+            <a:off x="7406640" y="2212848"/>
+            <a:ext cx="4236415" cy="201168"/>
           </a:xfrm>
           <a:prstGeom prst="rect">
             <a:avLst/>
@@ -7475,14 +7281,14 @@
       </p:sp>
       <p:sp>
         <p:nvSpPr>
-          <p:cNvPr id="19" name="TextBox 18"/>
+          <p:cNvPr id="18" name="TextBox 17"/>
           <p:cNvSpPr txBox="1"/>
           <p:nvPr/>
         </p:nvSpPr>
         <p:spPr>
           <a:xfrm>
-            <a:off x="6720840" y="2852928"/>
-            <a:ext cx="4922215" cy="457200"/>
+            <a:off x="7406640" y="2450591"/>
+            <a:ext cx="4236415" cy="502920"/>
           </a:xfrm>
           <a:prstGeom prst="rect">
             <a:avLst/>
@@ -7501,7 +7307,7 @@
               </a:lnSpc>
             </a:pPr>
             <a:r>
-              <a:rPr sz="2600" b="1">
+              <a:rPr sz="3000" b="1">
                 <a:solidFill>
                   <a:srgbClr val="000000"/>
                 </a:solidFill>
@@ -7516,14 +7322,14 @@
       </p:sp>
       <p:sp>
         <p:nvSpPr>
-          <p:cNvPr id="20" name="TextBox 19"/>
+          <p:cNvPr id="19" name="TextBox 18"/>
           <p:cNvSpPr txBox="1"/>
           <p:nvPr/>
         </p:nvSpPr>
         <p:spPr>
           <a:xfrm>
-            <a:off x="6720840" y="3328415"/>
-            <a:ext cx="4922215" cy="274320"/>
+            <a:off x="7406640" y="3035808"/>
+            <a:ext cx="4236415" cy="228600"/>
           </a:xfrm>
           <a:prstGeom prst="rect">
             <a:avLst/>
@@ -7542,7 +7348,7 @@
               </a:lnSpc>
             </a:pPr>
             <a:r>
-              <a:rPr sz="850" b="0">
+              <a:rPr sz="900" b="0">
                 <a:solidFill>
                   <a:srgbClr val="6B6B6B"/>
                 </a:solidFill>
@@ -7550,21 +7356,21 @@
                 <a:ea typeface="Pretendard"/>
                 <a:cs typeface="Pretendard"/>
               </a:rPr>
-              <a:t>과소 예측을 12개월 중간 신호로 2016Q4에 포착. 24개월 확정 결과로는 2017Q2에 확인</a:t>
-            </a:r>
-          </a:p>
-        </p:txBody>
-      </p:sp>
-      <p:sp>
-        <p:nvSpPr>
-          <p:cNvPr id="21" name="Rectangle 20"/>
+              <a:t>12개월 중간 신호 기준</a:t>
+            </a:r>
+          </a:p>
+        </p:txBody>
+      </p:sp>
+      <p:sp>
+        <p:nvSpPr>
+          <p:cNvPr id="20" name="Rectangle 19"/>
           <p:cNvSpPr/>
           <p:nvPr/>
         </p:nvSpPr>
         <p:spPr>
           <a:xfrm>
-            <a:off x="6720840" y="3597972"/>
-            <a:ext cx="4922215" cy="9525"/>
+            <a:off x="7406640" y="3424237"/>
+            <a:ext cx="4236415" cy="9525"/>
           </a:xfrm>
           <a:prstGeom prst="rect">
             <a:avLst/>
@@ -7602,14 +7408,14 @@
       </p:sp>
       <p:sp>
         <p:nvSpPr>
-          <p:cNvPr id="22" name="TextBox 21"/>
+          <p:cNvPr id="21" name="TextBox 20"/>
           <p:cNvSpPr txBox="1"/>
           <p:nvPr/>
         </p:nvSpPr>
         <p:spPr>
           <a:xfrm>
-            <a:off x="6720840" y="3675887"/>
-            <a:ext cx="4922215" cy="201168"/>
+            <a:off x="7406640" y="3538728"/>
+            <a:ext cx="4236415" cy="201168"/>
           </a:xfrm>
           <a:prstGeom prst="rect">
             <a:avLst/>
@@ -7643,14 +7449,14 @@
       </p:sp>
       <p:sp>
         <p:nvSpPr>
-          <p:cNvPr id="23" name="TextBox 22"/>
+          <p:cNvPr id="22" name="TextBox 21"/>
           <p:cNvSpPr txBox="1"/>
           <p:nvPr/>
         </p:nvSpPr>
         <p:spPr>
           <a:xfrm>
-            <a:off x="6720840" y="3877055"/>
-            <a:ext cx="4922215" cy="457200"/>
+            <a:off x="7406640" y="3776472"/>
+            <a:ext cx="4236415" cy="502920"/>
           </a:xfrm>
           <a:prstGeom prst="rect">
             <a:avLst/>
@@ -7669,7 +7475,7 @@
               </a:lnSpc>
             </a:pPr>
             <a:r>
-              <a:rPr sz="2600" b="1">
+              <a:rPr sz="3000" b="1">
                 <a:solidFill>
                   <a:srgbClr val="000000"/>
                 </a:solidFill>
@@ -7684,14 +7490,14 @@
       </p:sp>
       <p:sp>
         <p:nvSpPr>
-          <p:cNvPr id="24" name="TextBox 23"/>
+          <p:cNvPr id="23" name="TextBox 22"/>
           <p:cNvSpPr txBox="1"/>
           <p:nvPr/>
         </p:nvSpPr>
         <p:spPr>
           <a:xfrm>
-            <a:off x="6720840" y="4352544"/>
-            <a:ext cx="4922215" cy="274320"/>
+            <a:off x="7406640" y="4361688"/>
+            <a:ext cx="4236415" cy="228600"/>
           </a:xfrm>
           <a:prstGeom prst="rect">
             <a:avLst/>
@@ -7710,7 +7516,7 @@
               </a:lnSpc>
             </a:pPr>
             <a:r>
-              <a:rPr sz="850" b="0">
+              <a:rPr sz="900" b="0">
                 <a:solidFill>
                   <a:srgbClr val="6B6B6B"/>
                 </a:solidFill>
@@ -7718,21 +7524,21 @@
                 <a:ea typeface="Pretendard"/>
                 <a:cs typeface="Pretendard"/>
               </a:rPr>
-              <a:t>2018Q1 권고(재학습(LightGBM+확장 변수))를 판단 당시 보유 대출 461,365건에 적용. AUC 0.687 → 0.714</a:t>
-            </a:r>
-          </a:p>
-        </p:txBody>
-      </p:sp>
-      <p:sp>
-        <p:nvSpPr>
-          <p:cNvPr id="25" name="Rectangle 24"/>
+              <a:t>2018Q1 권고 · 보유 대출 46만 건</a:t>
+            </a:r>
+          </a:p>
+        </p:txBody>
+      </p:sp>
+      <p:sp>
+        <p:nvSpPr>
+          <p:cNvPr id="24" name="Rectangle 23"/>
           <p:cNvSpPr/>
           <p:nvPr/>
         </p:nvSpPr>
         <p:spPr>
           <a:xfrm>
-            <a:off x="6720840" y="4622101"/>
-            <a:ext cx="4922215" cy="9525"/>
+            <a:off x="7406640" y="4750117"/>
+            <a:ext cx="4236415" cy="9525"/>
           </a:xfrm>
           <a:prstGeom prst="rect">
             <a:avLst/>
@@ -7770,14 +7576,14 @@
       </p:sp>
       <p:sp>
         <p:nvSpPr>
-          <p:cNvPr id="26" name="TextBox 25"/>
+          <p:cNvPr id="25" name="TextBox 24"/>
           <p:cNvSpPr txBox="1"/>
           <p:nvPr/>
         </p:nvSpPr>
         <p:spPr>
           <a:xfrm>
-            <a:off x="6720840" y="4700016"/>
-            <a:ext cx="4922215" cy="201168"/>
+            <a:off x="7406640" y="4864608"/>
+            <a:ext cx="4236415" cy="201168"/>
           </a:xfrm>
           <a:prstGeom prst="rect">
             <a:avLst/>
@@ -7811,14 +7617,14 @@
       </p:sp>
       <p:sp>
         <p:nvSpPr>
-          <p:cNvPr id="27" name="TextBox 26"/>
+          <p:cNvPr id="26" name="TextBox 25"/>
           <p:cNvSpPr txBox="1"/>
           <p:nvPr/>
         </p:nvSpPr>
         <p:spPr>
           <a:xfrm>
-            <a:off x="6720840" y="4901184"/>
-            <a:ext cx="4922215" cy="457200"/>
+            <a:off x="7406640" y="5102352"/>
+            <a:ext cx="4236415" cy="502920"/>
           </a:xfrm>
           <a:prstGeom prst="rect">
             <a:avLst/>
@@ -7837,7 +7643,7 @@
               </a:lnSpc>
             </a:pPr>
             <a:r>
-              <a:rPr sz="2600" b="1">
+              <a:rPr sz="3000" b="1">
                 <a:solidFill>
                   <a:srgbClr val="000000"/>
                 </a:solidFill>
@@ -7852,14 +7658,14 @@
       </p:sp>
       <p:sp>
         <p:nvSpPr>
-          <p:cNvPr id="28" name="TextBox 27"/>
+          <p:cNvPr id="27" name="TextBox 26"/>
           <p:cNvSpPr txBox="1"/>
           <p:nvPr/>
         </p:nvSpPr>
         <p:spPr>
           <a:xfrm>
-            <a:off x="6720840" y="5376672"/>
-            <a:ext cx="4922215" cy="274320"/>
+            <a:off x="7406640" y="5687568"/>
+            <a:ext cx="4236415" cy="228600"/>
           </a:xfrm>
           <a:prstGeom prst="rect">
             <a:avLst/>
@@ -7877,103 +7683,6 @@
                 <a:spcPct val="115000"/>
               </a:lnSpc>
             </a:pPr>
-            <a:r>
-              <a:rPr sz="850" b="0">
-                <a:solidFill>
-                  <a:srgbClr val="6B6B6B"/>
-                </a:solidFill>
-                <a:latin typeface="Pretendard"/>
-                <a:ea typeface="Pretendard"/>
-                <a:cs typeface="Pretendard"/>
-              </a:rPr>
-              <a:t>매 분기 재학습 대비. 예측 오차는 비슷 (20.0% vs 19.5%, 고정 모형 27.5%)</a:t>
-            </a:r>
-          </a:p>
-        </p:txBody>
-      </p:sp>
-      <p:sp>
-        <p:nvSpPr>
-          <p:cNvPr id="29" name="Rectangle 28"/>
-          <p:cNvSpPr/>
-          <p:nvPr/>
-        </p:nvSpPr>
-        <p:spPr>
-          <a:xfrm>
-            <a:off x="6720840" y="5783389"/>
-            <a:ext cx="4922215" cy="9525"/>
-          </a:xfrm>
-          <a:prstGeom prst="rect">
-            <a:avLst/>
-          </a:prstGeom>
-          <a:solidFill>
-            <a:srgbClr val="000000"/>
-          </a:solidFill>
-          <a:ln>
-            <a:noFill/>
-          </a:ln>
-          <a:effectLst/>
-        </p:spPr>
-        <p:style>
-          <a:lnRef idx="1">
-            <a:schemeClr val="accent1"/>
-          </a:lnRef>
-          <a:fillRef idx="3">
-            <a:schemeClr val="accent1"/>
-          </a:fillRef>
-          <a:effectRef idx="2">
-            <a:schemeClr val="accent1"/>
-          </a:effectRef>
-          <a:fontRef idx="minor">
-            <a:schemeClr val="lt1"/>
-          </a:fontRef>
-        </p:style>
-        <p:txBody>
-          <a:bodyPr rtlCol="0" anchor="ctr"/>
-          <a:lstStyle/>
-          <a:p>
-            <a:pPr algn="ctr"/>
-            <a:endParaRPr/>
-          </a:p>
-        </p:txBody>
-      </p:sp>
-      <p:sp>
-        <p:nvSpPr>
-          <p:cNvPr id="30" name="TextBox 29"/>
-          <p:cNvSpPr txBox="1"/>
-          <p:nvPr/>
-        </p:nvSpPr>
-        <p:spPr>
-          <a:xfrm>
-            <a:off x="6720840" y="5852160"/>
-            <a:ext cx="4922215" cy="548640"/>
-          </a:xfrm>
-          <a:prstGeom prst="rect">
-            <a:avLst/>
-          </a:prstGeom>
-          <a:noFill/>
-        </p:spPr>
-        <p:txBody>
-          <a:bodyPr wrap="none" lIns="0" tIns="0" rIns="0" bIns="0" anchor="t">
-            <a:spAutoFit/>
-          </a:bodyPr>
-          <a:lstStyle/>
-          <a:p>
-            <a:pPr algn="l">
-              <a:lnSpc>
-                <a:spcPct val="135000"/>
-              </a:lnSpc>
-            </a:pPr>
-            <a:r>
-              <a:rPr sz="900" b="0">
-                <a:solidFill>
-                  <a:srgbClr val="000000"/>
-                </a:solidFill>
-                <a:latin typeface="Pretendard SemiBold"/>
-                <a:ea typeface="Pretendard SemiBold"/>
-                <a:cs typeface="Pretendard SemiBold"/>
-              </a:rPr>
-              <a:t>수행</a:t>
-            </a:r>
             <a:r>
               <a:rPr sz="900" b="0">
                 <a:solidFill>
@@ -7983,43 +7692,14 @@
                 <a:ea typeface="Pretendard"/>
                 <a:cs typeface="Pretendard"/>
               </a:rPr>
-              <a:t>  정답·시점 검증 · 모형 개발 · 판정 규칙 · 후보 검증 엔진 · 무인 실행·보고</a:t>
-            </a:r>
-          </a:p>
-          <a:p>
-            <a:pPr algn="l">
-              <a:lnSpc>
-                <a:spcPct val="135000"/>
-              </a:lnSpc>
-            </a:pPr>
-            <a:r>
-              <a:rPr sz="900" b="0">
-                <a:solidFill>
-                  <a:srgbClr val="000000"/>
-                </a:solidFill>
-                <a:latin typeface="Pretendard SemiBold"/>
-                <a:ea typeface="Pretendard SemiBold"/>
-                <a:cs typeface="Pretendard SemiBold"/>
-              </a:rPr>
-              <a:t>한계</a:t>
-            </a:r>
-            <a:r>
-              <a:rPr sz="900" b="0">
-                <a:solidFill>
-                  <a:srgbClr val="6B6B6B"/>
-                </a:solidFill>
-                <a:latin typeface="Pretendard"/>
-                <a:ea typeface="Pretendard"/>
-                <a:cs typeface="Pretendard"/>
-              </a:rPr>
-              <a:t>  상각 시점은 마지막 납부월 기준 근사 · 판단 후 신규 대출 성과는 데이터 범위 밖</a:t>
-            </a:r>
-          </a:p>
-        </p:txBody>
-      </p:sp>
-      <p:sp>
-        <p:nvSpPr>
-          <p:cNvPr id="31" name="TextBox 30"/>
+              <a:t>매 분기 재학습 대비 · 예측 오차 유사</a:t>
+            </a:r>
+          </a:p>
+        </p:txBody>
+      </p:sp>
+      <p:sp>
+        <p:nvSpPr>
+          <p:cNvPr id="28" name="TextBox 27"/>
           <p:cNvSpPr txBox="1"/>
           <p:nvPr/>
         </p:nvSpPr>
@@ -8053,7 +7733,7 @@
                 <a:ea typeface="Pretendard"/>
                 <a:cs typeface="Pretendard"/>
               </a:rPr>
-              <a:t>공개 대출 데이터 기반 과거 분기 재현·프로토타입. 실제 금융회사 운영 아님. 결과 확정 시점 가정(상각 지연 4·5·6개월)은 별도 검증. 정책 비교는 각 분기 당시 데이터로 결정하고 이후 확정 결과로 평가</a:t>
+              <a:t>공개 대출 데이터 기반 과거 분기 재현·프로토타입 · 실제 금융회사 운영 아님 · 판단은 당시 데이터만 사용, 평가는 이후 확정 결과</a:t>
             </a:r>
           </a:p>
         </p:txBody>

--- a/ppt/역량PT_김연주.pptx
+++ b/ppt/역량PT_김연주.pptx
@@ -163,7 +163,7 @@
     </p:spTree>
     <p:extLst>
       <p:ext uri="{BB962C8B-B14F-4D97-AF65-F5344CB8AC3E}">
-        <p14:creationId xmlns:p14="http://schemas.microsoft.com/office/powerpoint/2010/main" val="2847212170"/>
+        <p14:creationId xmlns:p14="http://schemas.microsoft.com/office/powerpoint/2010/main" val="2219680588"/>
       </p:ext>
     </p:extLst>
   </p:cSld>
@@ -307,49 +307,7 @@
           <a:bodyPr/>
           <a:lstStyle/>
           <a:p>
-            <a:r>
-              <a:t>리스크 직무 지원자 김연주.</a:t>
-            </a:r>
-          </a:p>
-          <a:p>
             <a:endParaRPr/>
-          </a:p>
-          <a:p>
-            <a:r>
-              <a:t>[상단 띠] 경험은 통계적 분석·검증, AI 모델·시스템 개발, 산업 현장 적용의 세 단계로 이어짐.</a:t>
-            </a:r>
-          </a:p>
-          <a:p>
-            <a:endParaRPr/>
-          </a:p>
-          <a:p>
-            <a:r>
-              <a:t>[위 트랙] 통계학 전공으로 추론과 모델링을 익히고, 학회장으로 프로젝트와 조직 운영을 이끎. 석사 과정에서 딥러닝 모델 설계와 실험을 수행 중.</a:t>
-            </a:r>
-          </a:p>
-          <a:p>
-            <a:endParaRPr/>
-          </a:p>
-          <a:p>
-            <a:r>
-              <a:t>[아래 트랙] 생존분석 연구보조로 사건 시점을 정의하고 결과를 통계적으로 검증하는 방법을 익힘. 멀티에이전트 시스템 세 건과 3D CT 멀티모달 모델로 AI 시스템 구현 경험을 쌓음.</a:t>
-            </a:r>
-          </a:p>
-          <a:p>
-            <a:endParaRPr/>
-          </a:p>
-          <a:p>
-            <a:r>
-              <a:t>[합류] 두 트랙은 BCG X 인턴에서 합류. 데이터마트 구축부터 예측 모델, 분석 화면, LLM 활용까지 실제 사용자가 쓰는 단계를 경험함.</a:t>
-            </a:r>
-          </a:p>
-          <a:p>
-            <a:endParaRPr/>
-          </a:p>
-          <a:p>
-            <a:r>
-              <a:t>[종점] 통계적 검증, AI 시스템 구현, 산업 현장 적용을 하나로 묶어 금융 모형 운영 자동화 프로젝트를 수행함.</a:t>
-            </a:r>
           </a:p>
         </p:txBody>
       </p:sp>
@@ -417,57 +375,7 @@
           <a:bodyPr/>
           <a:lstStyle/>
           <a:p>
-            <a:r>
-              <a:t>[제목] 신용평가모형의 점검부터 개선안 검증, 보고까지의 자동화.</a:t>
-            </a:r>
-          </a:p>
-          <a:p>
             <a:endParaRPr/>
-          </a:p>
-          <a:p>
-            <a:r>
-              <a:t>[문제] 대상은 신규 대출의 24개월 내 상각 위험을 예측하는 모형 1개. 개발 당시 잘 맞던 모형도 시간이 지나면 실제 상각률과 어긋남. 매 분기 유지, 재보정, 재학습 중 하나를 판단해야 함.</a:t>
-            </a:r>
-          </a:p>
-          <a:p>
-            <a:endParaRPr/>
-          </a:p>
-          <a:p>
-            <a:r>
-              <a:t>[흐름] 매 분기 그 시점에 알 수 있던 데이터만으로 신규 대출 특성, 12개월 중간 신호, 결과가 확정된 대출의 실제 상각률을 점검. 문제 확인 시 유지·재보정·재학습 후보를 1년 전 데이터로 만들고 이후 결과로 검증한 뒤, 기준을 통과한 안만 권고. 모형 변경은 담당자 승인.</a:t>
-            </a:r>
-          </a:p>
-          <a:p>
-            <a:endParaRPr/>
-          </a:p>
-          <a:p>
-            <a:r>
-              <a:t>[화면] 2018년 1분기 실제 생성 화면. 상태는 조치 검토, 권고는 재학습 검토. 근거 세 가지: 신규 대출의 점수 분포는 안정적, 결과가 확정된 대출의 실제 상각률은 예측의 1.27배, 재학습 후보는 별도 검증에서 오차 감소.</a:t>
-            </a:r>
-          </a:p>
-          <a:p>
-            <a:endParaRPr/>
-          </a:p>
-          <a:p>
-            <a:r>
-              <a:t>[숫자] 첫째, 12개월 중간 신호로 24개월 결과보다 2분기 먼저 이상 포착. 둘째, 이 분기 권고를 당시 보유 대출 46만 건에 적용 시 예측 오차 33%에서 14%로 감소. 셋째, 매 분기 재학습 방식과 비교해 예측 오차는 비슷하고 모형 변경은 13회에서 2회로 감소.</a:t>
-            </a:r>
-          </a:p>
-          <a:p>
-            <a:endParaRPr/>
-          </a:p>
-          <a:p>
-            <a:r>
-              <a:t>[역할] 정답과 관측 시점 검증, 예측·개선 모형 개발, 점검부터 후보 검증과 보고서 수치 대조까지의 무인 실행 흐름 구축을 단독 수행. 목표는 바꿀 이유가 없을 때 바꾸지 않는 판단까지의 자동화.</a:t>
-            </a:r>
-          </a:p>
-          <a:p>
-            <a:endParaRPr/>
-          </a:p>
-          <a:p>
-            <a:r>
-              <a:t>[마무리] 공개 데이터로 과거 분기를 재현한 프로토타입이며, 상각 시점 근사의 한계는 별도 검증. 리스크 직무에서 모형을 믿을 수 있게 운영하는 일에 이 경험을 활용하고자 함.</a:t>
-            </a:r>
           </a:p>
         </p:txBody>
       </p:sp>
@@ -3466,48 +3374,7 @@
         </p:nvSpPr>
         <p:spPr>
           <a:xfrm>
-            <a:off x="548640" y="384048"/>
-            <a:ext cx="3657600" cy="228600"/>
-          </a:xfrm>
-          <a:prstGeom prst="rect">
-            <a:avLst/>
-          </a:prstGeom>
-          <a:noFill/>
-        </p:spPr>
-        <p:txBody>
-          <a:bodyPr wrap="none" lIns="0" tIns="0" rIns="0" bIns="0" anchor="t">
-            <a:spAutoFit/>
-          </a:bodyPr>
-          <a:lstStyle/>
-          <a:p>
-            <a:pPr algn="l">
-              <a:lnSpc>
-                <a:spcPct val="115000"/>
-              </a:lnSpc>
-            </a:pPr>
-            <a:r>
-              <a:rPr sz="1000" b="0">
-                <a:solidFill>
-                  <a:srgbClr val="6B6B6B"/>
-                </a:solidFill>
-                <a:latin typeface="Pretendard Medium"/>
-                <a:ea typeface="Pretendard Medium"/>
-                <a:cs typeface="Pretendard Medium"/>
-              </a:rPr>
-              <a:t>01 경험과 노력</a:t>
-            </a:r>
-          </a:p>
-        </p:txBody>
-      </p:sp>
-      <p:sp>
-        <p:nvSpPr>
-          <p:cNvPr id="3" name="TextBox 2"/>
-          <p:cNvSpPr txBox="1"/>
-          <p:nvPr/>
-        </p:nvSpPr>
-        <p:spPr>
-          <a:xfrm>
-            <a:off x="548640" y="603504"/>
+            <a:off x="548640" y="566928"/>
             <a:ext cx="11094415" cy="411480"/>
           </a:xfrm>
           <a:prstGeom prst="rect">
@@ -3535,14 +3402,14 @@
                 <a:ea typeface="Pretendard"/>
                 <a:cs typeface="Pretendard"/>
               </a:rPr>
-              <a:t>통계적 검증에서 AI 시스템 구현, 산업 현장 적용으로</a:t>
-            </a:r>
-          </a:p>
-        </p:txBody>
-      </p:sp>
-      <p:sp>
-        <p:nvSpPr>
-          <p:cNvPr id="4" name="Rectangle 3"/>
+              <a:t>01 Experiences</a:t>
+            </a:r>
+          </a:p>
+        </p:txBody>
+      </p:sp>
+      <p:sp>
+        <p:nvSpPr>
+          <p:cNvPr id="3" name="Rectangle 2"/>
           <p:cNvSpPr/>
           <p:nvPr/>
         </p:nvSpPr>
@@ -3587,7 +3454,7 @@
       </p:sp>
       <p:sp>
         <p:nvSpPr>
-          <p:cNvPr id="5" name="Rectangle 4"/>
+          <p:cNvPr id="4" name="Rectangle 3"/>
           <p:cNvSpPr/>
           <p:nvPr/>
         </p:nvSpPr>
@@ -3632,7 +3499,7 @@
       </p:sp>
       <p:sp>
         <p:nvSpPr>
-          <p:cNvPr id="6" name="TextBox 5"/>
+          <p:cNvPr id="5" name="TextBox 4"/>
           <p:cNvSpPr txBox="1"/>
           <p:nvPr/>
         </p:nvSpPr>
@@ -3677,7 +3544,7 @@
                 <a:ea typeface="Pretendard"/>
                 <a:cs typeface="Pretendard"/>
               </a:rPr>
-              <a:t>통계적 분석·검증</a:t>
+              <a:t>통계 분석</a:t>
             </a:r>
           </a:p>
           <a:p>
@@ -3695,14 +3562,14 @@
                 <a:ea typeface="Pretendard"/>
                 <a:cs typeface="Pretendard"/>
               </a:rPr>
-              <a:t>통계적 추론 · 사건 시점 분석</a:t>
-            </a:r>
-          </a:p>
-        </p:txBody>
-      </p:sp>
-      <p:sp>
-        <p:nvSpPr>
-          <p:cNvPr id="7" name="Rectangle 6"/>
+              <a:t>추론, 생존분석</a:t>
+            </a:r>
+          </a:p>
+        </p:txBody>
+      </p:sp>
+      <p:sp>
+        <p:nvSpPr>
+          <p:cNvPr id="6" name="Rectangle 5"/>
           <p:cNvSpPr/>
           <p:nvPr/>
         </p:nvSpPr>
@@ -3747,7 +3614,7 @@
       </p:sp>
       <p:sp>
         <p:nvSpPr>
-          <p:cNvPr id="8" name="TextBox 7"/>
+          <p:cNvPr id="7" name="TextBox 6"/>
           <p:cNvSpPr txBox="1"/>
           <p:nvPr/>
         </p:nvSpPr>
@@ -3792,7 +3659,7 @@
                 <a:ea typeface="Pretendard"/>
                 <a:cs typeface="Pretendard"/>
               </a:rPr>
-              <a:t>AI 모델·시스템 개발</a:t>
+              <a:t>AI 모델 개발</a:t>
             </a:r>
           </a:p>
           <a:p>
@@ -3810,14 +3677,14 @@
                 <a:ea typeface="Pretendard"/>
                 <a:cs typeface="Pretendard"/>
               </a:rPr>
-              <a:t>모델 설계·실험 · 에이전트 · 조직 운영</a:t>
-            </a:r>
-          </a:p>
-        </p:txBody>
-      </p:sp>
-      <p:sp>
-        <p:nvSpPr>
-          <p:cNvPr id="9" name="Rectangle 8"/>
+              <a:t>모델 설계와 실험, 에이전트</a:t>
+            </a:r>
+          </a:p>
+        </p:txBody>
+      </p:sp>
+      <p:sp>
+        <p:nvSpPr>
+          <p:cNvPr id="8" name="Rectangle 7"/>
           <p:cNvSpPr/>
           <p:nvPr/>
         </p:nvSpPr>
@@ -3862,7 +3729,7 @@
       </p:sp>
       <p:sp>
         <p:nvSpPr>
-          <p:cNvPr id="10" name="TextBox 9"/>
+          <p:cNvPr id="9" name="TextBox 8"/>
           <p:cNvSpPr txBox="1"/>
           <p:nvPr/>
         </p:nvSpPr>
@@ -3907,7 +3774,7 @@
                 <a:ea typeface="Pretendard"/>
                 <a:cs typeface="Pretendard"/>
               </a:rPr>
-              <a:t>산업 현장 적용</a:t>
+              <a:t>산업 적용</a:t>
             </a:r>
           </a:p>
           <a:p>
@@ -3925,14 +3792,14 @@
                 <a:ea typeface="Pretendard"/>
                 <a:cs typeface="Pretendard"/>
               </a:rPr>
-              <a:t>데이터 구축부터 실제 활용까지</a:t>
-            </a:r>
-          </a:p>
-        </p:txBody>
-      </p:sp>
-      <p:sp>
-        <p:nvSpPr>
-          <p:cNvPr id="11" name="TextBox 10"/>
+              <a:t>데이터 구축과 실사용</a:t>
+            </a:r>
+          </a:p>
+        </p:txBody>
+      </p:sp>
+      <p:sp>
+        <p:nvSpPr>
+          <p:cNvPr id="10" name="TextBox 9"/>
           <p:cNvSpPr txBox="1"/>
           <p:nvPr/>
         </p:nvSpPr>
@@ -3966,14 +3833,14 @@
                 <a:ea typeface="Pretendard Medium"/>
                 <a:cs typeface="Pretendard Medium"/>
               </a:rPr>
-              <a:t>학업·활동</a:t>
-            </a:r>
-          </a:p>
-        </p:txBody>
-      </p:sp>
-      <p:sp>
-        <p:nvSpPr>
-          <p:cNvPr id="12" name="Rectangle 11"/>
+              <a:t>학업과 활동</a:t>
+            </a:r>
+          </a:p>
+        </p:txBody>
+      </p:sp>
+      <p:sp>
+        <p:nvSpPr>
+          <p:cNvPr id="11" name="Rectangle 10"/>
           <p:cNvSpPr/>
           <p:nvPr/>
         </p:nvSpPr>
@@ -4018,7 +3885,7 @@
       </p:sp>
       <p:cxnSp>
         <p:nvCxnSpPr>
-          <p:cNvPr id="13" name="Connector 12"/>
+          <p:cNvPr id="12" name="Connector 11"/>
           <p:cNvCxnSpPr/>
           <p:nvPr/>
         </p:nvCxnSpPr>
@@ -4039,7 +3906,7 @@
       </p:cxnSp>
       <p:sp>
         <p:nvSpPr>
-          <p:cNvPr id="14" name="Oval 13"/>
+          <p:cNvPr id="13" name="Oval 12"/>
           <p:cNvSpPr/>
           <p:nvPr/>
         </p:nvSpPr>
@@ -4086,7 +3953,7 @@
       </p:sp>
       <p:cxnSp>
         <p:nvCxnSpPr>
-          <p:cNvPr id="15" name="Connector 14"/>
+          <p:cNvPr id="14" name="Connector 13"/>
           <p:cNvCxnSpPr/>
           <p:nvPr/>
         </p:nvCxnSpPr>
@@ -4107,7 +3974,7 @@
       </p:cxnSp>
       <p:cxnSp>
         <p:nvCxnSpPr>
-          <p:cNvPr id="16" name="Connector 15"/>
+          <p:cNvPr id="15" name="Connector 14"/>
           <p:cNvCxnSpPr/>
           <p:nvPr/>
         </p:nvCxnSpPr>
@@ -4128,7 +3995,7 @@
       </p:cxnSp>
       <p:cxnSp>
         <p:nvCxnSpPr>
-          <p:cNvPr id="17" name="Connector 16"/>
+          <p:cNvPr id="16" name="Connector 15"/>
           <p:cNvCxnSpPr/>
           <p:nvPr/>
         </p:nvCxnSpPr>
@@ -4149,7 +4016,7 @@
       </p:cxnSp>
       <p:sp>
         <p:nvSpPr>
-          <p:cNvPr id="18" name="TextBox 17"/>
+          <p:cNvPr id="17" name="TextBox 16"/>
           <p:cNvSpPr txBox="1"/>
           <p:nvPr/>
         </p:nvSpPr>
@@ -4201,7 +4068,7 @@
                 <a:ea typeface="Pretendard"/>
                 <a:cs typeface="Pretendard"/>
               </a:rPr>
-              <a:t>통계적 추론·모델링</a:t>
+              <a:t>통계적 추론과 모델링</a:t>
             </a:r>
           </a:p>
           <a:p>
@@ -4226,7 +4093,7 @@
       </p:sp>
       <p:sp>
         <p:nvSpPr>
-          <p:cNvPr id="19" name="Oval 18"/>
+          <p:cNvPr id="18" name="Oval 17"/>
           <p:cNvSpPr/>
           <p:nvPr/>
         </p:nvSpPr>
@@ -4273,7 +4140,7 @@
       </p:sp>
       <p:cxnSp>
         <p:nvCxnSpPr>
-          <p:cNvPr id="20" name="Connector 19"/>
+          <p:cNvPr id="19" name="Connector 18"/>
           <p:cNvCxnSpPr/>
           <p:nvPr/>
         </p:nvCxnSpPr>
@@ -4294,7 +4161,7 @@
       </p:cxnSp>
       <p:sp>
         <p:nvSpPr>
-          <p:cNvPr id="21" name="Freeform 20"/>
+          <p:cNvPr id="20" name="Freeform 19"/>
           <p:cNvSpPr/>
           <p:nvPr/>
         </p:nvSpPr>
@@ -4357,7 +4224,7 @@
       </p:sp>
       <p:sp>
         <p:nvSpPr>
-          <p:cNvPr id="22" name="TextBox 21"/>
+          <p:cNvPr id="21" name="TextBox 20"/>
           <p:cNvSpPr txBox="1"/>
           <p:nvPr/>
         </p:nvSpPr>
@@ -4391,7 +4258,7 @@
                 <a:ea typeface="Pretendard"/>
                 <a:cs typeface="Pretendard"/>
               </a:rPr>
-              <a:t>데이터사이언스·AI 학회</a:t>
+              <a:t>데이터사이언스 학회</a:t>
             </a:r>
           </a:p>
           <a:p>
@@ -4409,7 +4276,7 @@
                 <a:ea typeface="Pretendard"/>
                 <a:cs typeface="Pretendard"/>
               </a:rPr>
-              <a:t>학회장 · 프로젝트 리딩</a:t>
+              <a:t>학회장, 프로젝트 리딩</a:t>
             </a:r>
           </a:p>
           <a:p>
@@ -4434,7 +4301,7 @@
       </p:sp>
       <p:sp>
         <p:nvSpPr>
-          <p:cNvPr id="23" name="Oval 22"/>
+          <p:cNvPr id="22" name="Oval 21"/>
           <p:cNvSpPr/>
           <p:nvPr/>
         </p:nvSpPr>
@@ -4481,7 +4348,7 @@
       </p:sp>
       <p:cxnSp>
         <p:nvCxnSpPr>
-          <p:cNvPr id="24" name="Connector 23"/>
+          <p:cNvPr id="23" name="Connector 22"/>
           <p:cNvCxnSpPr/>
           <p:nvPr/>
         </p:nvCxnSpPr>
@@ -4502,7 +4369,7 @@
       </p:cxnSp>
       <p:cxnSp>
         <p:nvCxnSpPr>
-          <p:cNvPr id="25" name="Connector 24"/>
+          <p:cNvPr id="24" name="Connector 23"/>
           <p:cNvCxnSpPr/>
           <p:nvPr/>
         </p:nvCxnSpPr>
@@ -4523,7 +4390,7 @@
       </p:cxnSp>
       <p:cxnSp>
         <p:nvCxnSpPr>
-          <p:cNvPr id="26" name="Connector 25"/>
+          <p:cNvPr id="25" name="Connector 24"/>
           <p:cNvCxnSpPr/>
           <p:nvPr/>
         </p:nvCxnSpPr>
@@ -4544,7 +4411,7 @@
       </p:cxnSp>
       <p:cxnSp>
         <p:nvCxnSpPr>
-          <p:cNvPr id="27" name="Connector 26"/>
+          <p:cNvPr id="26" name="Connector 25"/>
           <p:cNvCxnSpPr/>
           <p:nvPr/>
         </p:nvCxnSpPr>
@@ -4565,7 +4432,7 @@
       </p:cxnSp>
       <p:cxnSp>
         <p:nvCxnSpPr>
-          <p:cNvPr id="28" name="Connector 27"/>
+          <p:cNvPr id="27" name="Connector 26"/>
           <p:cNvCxnSpPr/>
           <p:nvPr/>
         </p:nvCxnSpPr>
@@ -4586,7 +4453,7 @@
       </p:cxnSp>
       <p:cxnSp>
         <p:nvCxnSpPr>
-          <p:cNvPr id="29" name="Connector 28"/>
+          <p:cNvPr id="28" name="Connector 27"/>
           <p:cNvCxnSpPr/>
           <p:nvPr/>
         </p:nvCxnSpPr>
@@ -4607,7 +4474,7 @@
       </p:cxnSp>
       <p:cxnSp>
         <p:nvCxnSpPr>
-          <p:cNvPr id="30" name="Connector 29"/>
+          <p:cNvPr id="29" name="Connector 28"/>
           <p:cNvCxnSpPr/>
           <p:nvPr/>
         </p:nvCxnSpPr>
@@ -4628,7 +4495,7 @@
       </p:cxnSp>
       <p:cxnSp>
         <p:nvCxnSpPr>
-          <p:cNvPr id="31" name="Connector 30"/>
+          <p:cNvPr id="30" name="Connector 29"/>
           <p:cNvCxnSpPr/>
           <p:nvPr/>
         </p:nvCxnSpPr>
@@ -4649,7 +4516,7 @@
       </p:cxnSp>
       <p:cxnSp>
         <p:nvCxnSpPr>
-          <p:cNvPr id="32" name="Connector 31"/>
+          <p:cNvPr id="31" name="Connector 30"/>
           <p:cNvCxnSpPr/>
           <p:nvPr/>
         </p:nvCxnSpPr>
@@ -4670,7 +4537,7 @@
       </p:cxnSp>
       <p:sp>
         <p:nvSpPr>
-          <p:cNvPr id="33" name="Oval 32"/>
+          <p:cNvPr id="32" name="Oval 31"/>
           <p:cNvSpPr/>
           <p:nvPr/>
         </p:nvSpPr>
@@ -4717,7 +4584,7 @@
       </p:sp>
       <p:sp>
         <p:nvSpPr>
-          <p:cNvPr id="34" name="Oval 33"/>
+          <p:cNvPr id="33" name="Oval 32"/>
           <p:cNvSpPr/>
           <p:nvPr/>
         </p:nvSpPr>
@@ -4764,7 +4631,7 @@
       </p:sp>
       <p:sp>
         <p:nvSpPr>
-          <p:cNvPr id="35" name="Oval 34"/>
+          <p:cNvPr id="34" name="Oval 33"/>
           <p:cNvSpPr/>
           <p:nvPr/>
         </p:nvSpPr>
@@ -4811,7 +4678,7 @@
       </p:sp>
       <p:sp>
         <p:nvSpPr>
-          <p:cNvPr id="36" name="Oval 35"/>
+          <p:cNvPr id="35" name="Oval 34"/>
           <p:cNvSpPr/>
           <p:nvPr/>
         </p:nvSpPr>
@@ -4858,7 +4725,7 @@
       </p:sp>
       <p:sp>
         <p:nvSpPr>
-          <p:cNvPr id="37" name="Oval 36"/>
+          <p:cNvPr id="36" name="Oval 35"/>
           <p:cNvSpPr/>
           <p:nvPr/>
         </p:nvSpPr>
@@ -4905,7 +4772,7 @@
       </p:sp>
       <p:sp>
         <p:nvSpPr>
-          <p:cNvPr id="38" name="Oval 37"/>
+          <p:cNvPr id="37" name="Oval 36"/>
           <p:cNvSpPr/>
           <p:nvPr/>
         </p:nvSpPr>
@@ -4952,7 +4819,7 @@
       </p:sp>
       <p:sp>
         <p:nvSpPr>
-          <p:cNvPr id="39" name="TextBox 38"/>
+          <p:cNvPr id="38" name="TextBox 37"/>
           <p:cNvSpPr txBox="1"/>
           <p:nvPr/>
         </p:nvSpPr>
@@ -4986,7 +4853,7 @@
                 <a:ea typeface="Pretendard"/>
                 <a:cs typeface="Pretendard"/>
               </a:rPr>
-              <a:t>통계학 석사 · 딥러닝</a:t>
+              <a:t>통계학 석사</a:t>
             </a:r>
           </a:p>
           <a:p>
@@ -5004,7 +4871,7 @@
                 <a:ea typeface="Pretendard"/>
                 <a:cs typeface="Pretendard"/>
               </a:rPr>
-              <a:t>모델 설계·실험</a:t>
+              <a:t>딥러닝 모델 설계</a:t>
             </a:r>
           </a:p>
           <a:p>
@@ -5029,7 +4896,7 @@
       </p:sp>
       <p:sp>
         <p:nvSpPr>
-          <p:cNvPr id="40" name="TextBox 39"/>
+          <p:cNvPr id="39" name="TextBox 38"/>
           <p:cNvSpPr txBox="1"/>
           <p:nvPr/>
         </p:nvSpPr>
@@ -5070,7 +4937,7 @@
       </p:sp>
       <p:sp>
         <p:nvSpPr>
-          <p:cNvPr id="41" name="Rectangle 40"/>
+          <p:cNvPr id="40" name="Rectangle 39"/>
           <p:cNvSpPr/>
           <p:nvPr/>
         </p:nvSpPr>
@@ -5115,7 +4982,7 @@
       </p:sp>
       <p:cxnSp>
         <p:nvCxnSpPr>
-          <p:cNvPr id="42" name="Connector 41"/>
+          <p:cNvPr id="41" name="Connector 40"/>
           <p:cNvCxnSpPr/>
           <p:nvPr/>
         </p:nvCxnSpPr>
@@ -5136,7 +5003,7 @@
       </p:cxnSp>
       <p:sp>
         <p:nvSpPr>
-          <p:cNvPr id="43" name="Oval 42"/>
+          <p:cNvPr id="42" name="Oval 41"/>
           <p:cNvSpPr/>
           <p:nvPr/>
         </p:nvSpPr>
@@ -5183,7 +5050,7 @@
       </p:sp>
       <p:sp>
         <p:nvSpPr>
-          <p:cNvPr id="44" name="Freeform 43"/>
+          <p:cNvPr id="43" name="Freeform 42"/>
           <p:cNvSpPr/>
           <p:nvPr/>
         </p:nvSpPr>
@@ -5245,7 +5112,7 @@
       </p:sp>
       <p:sp>
         <p:nvSpPr>
-          <p:cNvPr id="45" name="Freeform 44"/>
+          <p:cNvPr id="44" name="Freeform 43"/>
           <p:cNvSpPr/>
           <p:nvPr/>
         </p:nvSpPr>
@@ -5316,7 +5183,7 @@
       </p:sp>
       <p:sp>
         <p:nvSpPr>
-          <p:cNvPr id="46" name="TextBox 45"/>
+          <p:cNvPr id="45" name="TextBox 44"/>
           <p:cNvSpPr txBox="1"/>
           <p:nvPr/>
         </p:nvSpPr>
@@ -5368,7 +5235,7 @@
                 <a:ea typeface="Pretendard"/>
                 <a:cs typeface="Pretendard"/>
               </a:rPr>
-              <a:t>사건 시점 분석·통계적 검증</a:t>
+              <a:t>사건 시점 분석</a:t>
             </a:r>
           </a:p>
           <a:p>
@@ -5393,7 +5260,7 @@
       </p:sp>
       <p:sp>
         <p:nvSpPr>
-          <p:cNvPr id="47" name="Oval 46"/>
+          <p:cNvPr id="46" name="Oval 45"/>
           <p:cNvSpPr/>
           <p:nvPr/>
         </p:nvSpPr>
@@ -5440,7 +5307,7 @@
       </p:sp>
       <p:cxnSp>
         <p:nvCxnSpPr>
-          <p:cNvPr id="48" name="Connector 47"/>
+          <p:cNvPr id="47" name="Connector 46"/>
           <p:cNvCxnSpPr/>
           <p:nvPr/>
         </p:nvCxnSpPr>
@@ -5461,7 +5328,7 @@
       </p:cxnSp>
       <p:cxnSp>
         <p:nvCxnSpPr>
-          <p:cNvPr id="49" name="Connector 48"/>
+          <p:cNvPr id="48" name="Connector 47"/>
           <p:cNvCxnSpPr/>
           <p:nvPr/>
         </p:nvCxnSpPr>
@@ -5482,7 +5349,7 @@
       </p:cxnSp>
       <p:cxnSp>
         <p:nvCxnSpPr>
-          <p:cNvPr id="50" name="Connector 49"/>
+          <p:cNvPr id="49" name="Connector 48"/>
           <p:cNvCxnSpPr/>
           <p:nvPr/>
         </p:nvCxnSpPr>
@@ -5503,7 +5370,7 @@
       </p:cxnSp>
       <p:sp>
         <p:nvSpPr>
-          <p:cNvPr id="51" name="Oval 50"/>
+          <p:cNvPr id="50" name="Oval 49"/>
           <p:cNvSpPr/>
           <p:nvPr/>
         </p:nvSpPr>
@@ -5550,7 +5417,7 @@
       </p:sp>
       <p:sp>
         <p:nvSpPr>
-          <p:cNvPr id="52" name="Oval 51"/>
+          <p:cNvPr id="51" name="Oval 50"/>
           <p:cNvSpPr/>
           <p:nvPr/>
         </p:nvSpPr>
@@ -5597,7 +5464,7 @@
       </p:sp>
       <p:sp>
         <p:nvSpPr>
-          <p:cNvPr id="53" name="Oval 52"/>
+          <p:cNvPr id="52" name="Oval 51"/>
           <p:cNvSpPr/>
           <p:nvPr/>
         </p:nvSpPr>
@@ -5644,7 +5511,7 @@
       </p:sp>
       <p:sp>
         <p:nvSpPr>
-          <p:cNvPr id="54" name="TextBox 53"/>
+          <p:cNvPr id="53" name="TextBox 52"/>
           <p:cNvSpPr txBox="1"/>
           <p:nvPr/>
         </p:nvSpPr>
@@ -5696,7 +5563,7 @@
                 <a:ea typeface="Pretendard"/>
                 <a:cs typeface="Pretendard"/>
               </a:rPr>
-              <a:t>데이터·AI 시스템 통합</a:t>
+              <a:t>데이터와 AI 시스템 연결</a:t>
             </a:r>
           </a:p>
           <a:p>
@@ -5721,7 +5588,7 @@
       </p:sp>
       <p:sp>
         <p:nvSpPr>
-          <p:cNvPr id="55" name="Oval 54"/>
+          <p:cNvPr id="54" name="Oval 53"/>
           <p:cNvSpPr/>
           <p:nvPr/>
         </p:nvSpPr>
@@ -5768,7 +5635,7 @@
       </p:sp>
       <p:sp>
         <p:nvSpPr>
-          <p:cNvPr id="56" name="Freeform 55"/>
+          <p:cNvPr id="55" name="Freeform 54"/>
           <p:cNvSpPr/>
           <p:nvPr/>
         </p:nvSpPr>
@@ -5834,7 +5701,7 @@
       </p:sp>
       <p:sp>
         <p:nvSpPr>
-          <p:cNvPr id="57" name="Freeform 56"/>
+          <p:cNvPr id="56" name="Freeform 55"/>
           <p:cNvSpPr/>
           <p:nvPr/>
         </p:nvSpPr>
@@ -5896,7 +5763,7 @@
       </p:sp>
       <p:sp>
         <p:nvSpPr>
-          <p:cNvPr id="58" name="Freeform 57"/>
+          <p:cNvPr id="57" name="Freeform 56"/>
           <p:cNvSpPr/>
           <p:nvPr/>
         </p:nvSpPr>
@@ -5958,7 +5825,7 @@
       </p:sp>
       <p:sp>
         <p:nvSpPr>
-          <p:cNvPr id="59" name="TextBox 58"/>
+          <p:cNvPr id="58" name="TextBox 57"/>
           <p:cNvSpPr txBox="1"/>
           <p:nvPr/>
         </p:nvSpPr>
@@ -6010,7 +5877,7 @@
                 <a:ea typeface="Pretendard"/>
                 <a:cs typeface="Pretendard"/>
               </a:rPr>
-              <a:t>모델 설계·실험</a:t>
+              <a:t>표현 학습과 평가</a:t>
             </a:r>
           </a:p>
           <a:p>
@@ -6035,7 +5902,7 @@
       </p:sp>
       <p:sp>
         <p:nvSpPr>
-          <p:cNvPr id="60" name="Oval 59"/>
+          <p:cNvPr id="59" name="Oval 58"/>
           <p:cNvSpPr/>
           <p:nvPr/>
         </p:nvSpPr>
@@ -6080,7 +5947,7 @@
       </p:sp>
       <p:sp>
         <p:nvSpPr>
-          <p:cNvPr id="61" name="Freeform 60"/>
+          <p:cNvPr id="60" name="Freeform 59"/>
           <p:cNvSpPr/>
           <p:nvPr/>
         </p:nvSpPr>
@@ -6146,7 +6013,7 @@
       </p:sp>
       <p:cxnSp>
         <p:nvCxnSpPr>
-          <p:cNvPr id="62" name="Connector 61"/>
+          <p:cNvPr id="61" name="Connector 60"/>
           <p:cNvCxnSpPr/>
           <p:nvPr/>
         </p:nvCxnSpPr>
@@ -6167,7 +6034,7 @@
       </p:cxnSp>
       <p:cxnSp>
         <p:nvCxnSpPr>
-          <p:cNvPr id="63" name="Connector 62"/>
+          <p:cNvPr id="62" name="Connector 61"/>
           <p:cNvCxnSpPr/>
           <p:nvPr/>
         </p:nvCxnSpPr>
@@ -6188,7 +6055,7 @@
       </p:cxnSp>
       <p:cxnSp>
         <p:nvCxnSpPr>
-          <p:cNvPr id="64" name="Connector 63"/>
+          <p:cNvPr id="63" name="Connector 62"/>
           <p:cNvCxnSpPr/>
           <p:nvPr/>
         </p:nvCxnSpPr>
@@ -6209,7 +6076,7 @@
       </p:cxnSp>
       <p:sp>
         <p:nvSpPr>
-          <p:cNvPr id="65" name="TextBox 64"/>
+          <p:cNvPr id="64" name="TextBox 63"/>
           <p:cNvSpPr txBox="1"/>
           <p:nvPr/>
         </p:nvSpPr>
@@ -6261,7 +6128,7 @@
                 <a:ea typeface="Pretendard"/>
                 <a:cs typeface="Pretendard"/>
               </a:rPr>
-              <a:t>데이터마트 · 예측 모델 · 분석 화면 · LLM</a:t>
+              <a:t>데이터마트, 예측 모델, 분석 화면</a:t>
             </a:r>
           </a:p>
           <a:p>
@@ -6286,14 +6153,14 @@
       </p:sp>
       <p:cxnSp>
         <p:nvCxnSpPr>
-          <p:cNvPr id="66" name="Connector 65"/>
+          <p:cNvPr id="65" name="Connector 64"/>
           <p:cNvCxnSpPr/>
           <p:nvPr/>
         </p:nvCxnSpPr>
         <p:spPr>
           <a:xfrm>
             <a:off x="7946136" y="4069080"/>
-            <a:ext cx="1152144" cy="0"/>
+            <a:ext cx="1316736" cy="0"/>
           </a:xfrm>
           <a:prstGeom prst="line">
             <a:avLst/>
@@ -6307,36 +6174,21 @@
       </p:cxnSp>
       <p:sp>
         <p:nvSpPr>
-          <p:cNvPr id="67" name="Freeform 66"/>
+          <p:cNvPr id="66" name="Oval 65"/>
           <p:cNvSpPr/>
           <p:nvPr/>
         </p:nvSpPr>
         <p:spPr>
           <a:xfrm>
-            <a:off x="9006840" y="3995928"/>
-            <a:ext cx="109728" cy="146304"/>
-          </a:xfrm>
-          <a:custGeom>
-            <a:avLst/>
-            <a:gdLst/>
-            <a:ahLst/>
-            <a:cxnLst/>
-            <a:rect l="l" t="t" r="r" b="b"/>
-            <a:pathLst>
-              <a:path w="109728" h="146304">
-                <a:moveTo>
-                  <a:pt x="0" y="0"/>
-                </a:moveTo>
-                <a:lnTo>
-                  <a:pt x="109728" y="73152"/>
-                </a:lnTo>
-                <a:lnTo>
-                  <a:pt x="0" y="146304"/>
-                </a:lnTo>
-              </a:path>
-            </a:pathLst>
-          </a:custGeom>
-          <a:noFill/>
+            <a:off x="9262872" y="3913632"/>
+            <a:ext cx="310896" cy="310896"/>
+          </a:xfrm>
+          <a:prstGeom prst="ellipse">
+            <a:avLst/>
+          </a:prstGeom>
+          <a:solidFill>
+            <a:srgbClr val="FFFFFF"/>
+          </a:solidFill>
           <a:ln w="19050">
             <a:solidFill>
               <a:srgbClr val="000000"/>
@@ -6369,14 +6221,14 @@
       </p:sp>
       <p:sp>
         <p:nvSpPr>
-          <p:cNvPr id="68" name="TextBox 67"/>
+          <p:cNvPr id="67" name="TextBox 66"/>
           <p:cNvSpPr txBox="1"/>
           <p:nvPr/>
         </p:nvSpPr>
         <p:spPr>
           <a:xfrm>
-            <a:off x="9235440" y="3200400"/>
-            <a:ext cx="2453335" cy="1828800"/>
+            <a:off x="9692640" y="3822191"/>
+            <a:ext cx="1950415" cy="548640"/>
           </a:xfrm>
           <a:prstGeom prst="rect">
             <a:avLst/>
@@ -6391,11 +6243,11 @@
           <a:p>
             <a:pPr algn="l">
               <a:lnSpc>
-                <a:spcPct val="135000"/>
+                <a:spcPct val="130000"/>
               </a:lnSpc>
             </a:pPr>
             <a:r>
-              <a:rPr sz="1200" b="1">
+              <a:rPr sz="1400" b="1">
                 <a:solidFill>
                   <a:srgbClr val="000000"/>
                 </a:solidFill>
@@ -6403,94 +6255,25 @@
                 <a:ea typeface="Pretendard"/>
                 <a:cs typeface="Pretendard"/>
               </a:rPr>
-              <a:t>통계적 검증</a:t>
+              <a:t>현대카드</a:t>
             </a:r>
           </a:p>
           <a:p>
             <a:pPr algn="l">
               <a:lnSpc>
-                <a:spcPct val="135000"/>
+                <a:spcPct val="130000"/>
               </a:lnSpc>
             </a:pPr>
             <a:r>
-              <a:rPr sz="1200" b="1">
+              <a:rPr sz="1000" b="0">
                 <a:solidFill>
-                  <a:srgbClr val="000000"/>
+                  <a:srgbClr val="6B6B6B"/>
                 </a:solidFill>
                 <a:latin typeface="Pretendard"/>
                 <a:ea typeface="Pretendard"/>
                 <a:cs typeface="Pretendard"/>
               </a:rPr>
-              <a:t>AI 시스템 구현</a:t>
-            </a:r>
-          </a:p>
-          <a:p>
-            <a:pPr algn="l">
-              <a:lnSpc>
-                <a:spcPct val="135000"/>
-              </a:lnSpc>
-            </a:pPr>
-            <a:r>
-              <a:rPr sz="1200" b="1">
-                <a:solidFill>
-                  <a:srgbClr val="000000"/>
-                </a:solidFill>
-                <a:latin typeface="Pretendard"/>
-                <a:ea typeface="Pretendard"/>
-                <a:cs typeface="Pretendard"/>
-              </a:rPr>
-              <a:t>산업 현장 적용</a:t>
-            </a:r>
-          </a:p>
-          <a:p>
-            <a:pPr algn="l">
-              <a:lnSpc>
-                <a:spcPct val="135000"/>
-              </a:lnSpc>
-            </a:pPr>
-            <a:endParaRPr sz="1200" b="1">
-              <a:solidFill>
-                <a:srgbClr val="000000"/>
-              </a:solidFill>
-              <a:latin typeface="Pretendard"/>
-              <a:ea typeface="Pretendard"/>
-              <a:cs typeface="Pretendard"/>
-            </a:endParaRPr>
-          </a:p>
-          <a:p>
-            <a:pPr algn="l">
-              <a:lnSpc>
-                <a:spcPct val="135000"/>
-              </a:lnSpc>
-            </a:pPr>
-            <a:r>
-              <a:rPr sz="1300" b="1">
-                <a:solidFill>
-                  <a:srgbClr val="000000"/>
-                </a:solidFill>
-                <a:latin typeface="Pretendard"/>
-                <a:ea typeface="Pretendard"/>
-                <a:cs typeface="Pretendard"/>
-              </a:rPr>
-              <a:t>→ 금융 모형 운영 자동화</a:t>
-            </a:r>
-          </a:p>
-          <a:p>
-            <a:pPr algn="l">
-              <a:lnSpc>
-                <a:spcPct val="135000"/>
-              </a:lnSpc>
-            </a:pPr>
-            <a:r>
-              <a:rPr sz="900" b="0">
-                <a:solidFill>
-                  <a:srgbClr val="9A9A9A"/>
-                </a:solidFill>
-                <a:latin typeface="Pretendard"/>
-                <a:ea typeface="Pretendard"/>
-                <a:cs typeface="Pretendard"/>
-              </a:rPr>
-              <a:t>2장 프로젝트</a:t>
+              <a:t>리스크 모형 운영</a:t>
             </a:r>
           </a:p>
         </p:txBody>
@@ -6528,48 +6311,7 @@
         </p:nvSpPr>
         <p:spPr>
           <a:xfrm>
-            <a:off x="548640" y="384048"/>
-            <a:ext cx="3657600" cy="228600"/>
-          </a:xfrm>
-          <a:prstGeom prst="rect">
-            <a:avLst/>
-          </a:prstGeom>
-          <a:noFill/>
-        </p:spPr>
-        <p:txBody>
-          <a:bodyPr wrap="none" lIns="0" tIns="0" rIns="0" bIns="0" anchor="t">
-            <a:spAutoFit/>
-          </a:bodyPr>
-          <a:lstStyle/>
-          <a:p>
-            <a:pPr algn="l">
-              <a:lnSpc>
-                <a:spcPct val="115000"/>
-              </a:lnSpc>
-            </a:pPr>
-            <a:r>
-              <a:rPr sz="1000" b="0">
-                <a:solidFill>
-                  <a:srgbClr val="6B6B6B"/>
-                </a:solidFill>
-                <a:latin typeface="Pretendard Medium"/>
-                <a:ea typeface="Pretendard Medium"/>
-                <a:cs typeface="Pretendard Medium"/>
-              </a:rPr>
-              <a:t>02 역량</a:t>
-            </a:r>
-          </a:p>
-        </p:txBody>
-      </p:sp>
-      <p:sp>
-        <p:nvSpPr>
-          <p:cNvPr id="3" name="TextBox 2"/>
-          <p:cNvSpPr txBox="1"/>
-          <p:nvPr/>
-        </p:nvSpPr>
-        <p:spPr>
-          <a:xfrm>
-            <a:off x="548640" y="603504"/>
+            <a:off x="548640" y="566928"/>
             <a:ext cx="11094415" cy="411480"/>
           </a:xfrm>
           <a:prstGeom prst="rect">
@@ -6597,20 +6339,20 @@
                 <a:ea typeface="Pretendard"/>
                 <a:cs typeface="Pretendard"/>
               </a:rPr>
-              <a:t>신용평가모형의 점검부터 개선안 검증·보고까지 자동화</a:t>
-            </a:r>
-          </a:p>
-        </p:txBody>
-      </p:sp>
-      <p:sp>
-        <p:nvSpPr>
-          <p:cNvPr id="4" name="TextBox 3"/>
+              <a:t>02 Project</a:t>
+            </a:r>
+          </a:p>
+        </p:txBody>
+      </p:sp>
+      <p:sp>
+        <p:nvSpPr>
+          <p:cNvPr id="3" name="TextBox 2"/>
           <p:cNvSpPr txBox="1"/>
           <p:nvPr/>
         </p:nvSpPr>
         <p:spPr>
           <a:xfrm>
-            <a:off x="548640" y="1097280"/>
+            <a:off x="548640" y="1024128"/>
             <a:ext cx="11094415" cy="274320"/>
           </a:xfrm>
           <a:prstGeom prst="rect">
@@ -6630,22 +6372,22 @@
               </a:lnSpc>
             </a:pPr>
             <a:r>
-              <a:rPr sz="1100" b="0">
+              <a:rPr sz="1300" b="0">
                 <a:solidFill>
-                  <a:srgbClr val="6B6B6B"/>
+                  <a:srgbClr val="000000"/>
                 </a:solidFill>
-                <a:latin typeface="Pretendard"/>
-                <a:ea typeface="Pretendard"/>
-                <a:cs typeface="Pretendard"/>
+                <a:latin typeface="Pretendard Medium"/>
+                <a:ea typeface="Pretendard Medium"/>
+                <a:cs typeface="Pretendard Medium"/>
               </a:rPr>
-              <a:t>24개월 상각 위험 예측모형 1개 · 분기별 유지·재보정·재학습 자동 판단</a:t>
-            </a:r>
-          </a:p>
-        </p:txBody>
-      </p:sp>
-      <p:sp>
-        <p:nvSpPr>
-          <p:cNvPr id="5" name="Rectangle 4"/>
+              <a:t>신용평가모형 운영 자동화</a:t>
+            </a:r>
+          </a:p>
+        </p:txBody>
+      </p:sp>
+      <p:sp>
+        <p:nvSpPr>
+          <p:cNvPr id="4" name="Rectangle 3"/>
           <p:cNvSpPr/>
           <p:nvPr/>
         </p:nvSpPr>
@@ -6690,7 +6432,7 @@
       </p:sp>
       <p:sp>
         <p:nvSpPr>
-          <p:cNvPr id="6" name="TextBox 5"/>
+          <p:cNvPr id="5" name="TextBox 4"/>
           <p:cNvSpPr txBox="1"/>
           <p:nvPr/>
         </p:nvSpPr>
@@ -6742,7 +6484,7 @@
       </p:sp>
       <p:sp>
         <p:nvSpPr>
-          <p:cNvPr id="7" name="Freeform 6"/>
+          <p:cNvPr id="6" name="Freeform 5"/>
           <p:cNvSpPr/>
           <p:nvPr/>
         </p:nvSpPr>
@@ -6804,7 +6546,7 @@
       </p:sp>
       <p:sp>
         <p:nvSpPr>
-          <p:cNvPr id="8" name="TextBox 7"/>
+          <p:cNvPr id="7" name="TextBox 6"/>
           <p:cNvSpPr txBox="1"/>
           <p:nvPr/>
         </p:nvSpPr>
@@ -6856,7 +6598,7 @@
       </p:sp>
       <p:sp>
         <p:nvSpPr>
-          <p:cNvPr id="9" name="Freeform 8"/>
+          <p:cNvPr id="8" name="Freeform 7"/>
           <p:cNvSpPr/>
           <p:nvPr/>
         </p:nvSpPr>
@@ -6918,7 +6660,7 @@
       </p:sp>
       <p:sp>
         <p:nvSpPr>
-          <p:cNvPr id="10" name="TextBox 9"/>
+          <p:cNvPr id="9" name="TextBox 8"/>
           <p:cNvSpPr txBox="1"/>
           <p:nvPr/>
         </p:nvSpPr>
@@ -6963,14 +6705,14 @@
                 <a:ea typeface="Pretendard"/>
                 <a:cs typeface="Pretendard"/>
               </a:rPr>
-              <a:t>이상 시 개선안 검증</a:t>
-            </a:r>
-          </a:p>
-        </p:txBody>
-      </p:sp>
-      <p:sp>
-        <p:nvSpPr>
-          <p:cNvPr id="11" name="Freeform 10"/>
+              <a:t>개선안 검증</a:t>
+            </a:r>
+          </a:p>
+        </p:txBody>
+      </p:sp>
+      <p:sp>
+        <p:nvSpPr>
+          <p:cNvPr id="10" name="Freeform 9"/>
           <p:cNvSpPr/>
           <p:nvPr/>
         </p:nvSpPr>
@@ -7032,7 +6774,7 @@
       </p:sp>
       <p:sp>
         <p:nvSpPr>
-          <p:cNvPr id="12" name="TextBox 11"/>
+          <p:cNvPr id="11" name="TextBox 10"/>
           <p:cNvSpPr txBox="1"/>
           <p:nvPr/>
         </p:nvSpPr>
@@ -7084,14 +6826,14 @@
       </p:sp>
       <p:sp>
         <p:nvSpPr>
-          <p:cNvPr id="13" name="TextBox 12"/>
+          <p:cNvPr id="12" name="TextBox 11"/>
           <p:cNvSpPr txBox="1"/>
           <p:nvPr/>
         </p:nvSpPr>
         <p:spPr>
           <a:xfrm>
-            <a:off x="10271455" y="1636776"/>
-            <a:ext cx="1371600" cy="274320"/>
+            <a:off x="10088575" y="1636776"/>
+            <a:ext cx="1554480" cy="274320"/>
           </a:xfrm>
           <a:prstGeom prst="rect">
             <a:avLst/>
@@ -7118,14 +6860,14 @@
                 <a:ea typeface="Pretendard"/>
                 <a:cs typeface="Pretendard"/>
               </a:rPr>
-              <a:t>변경은 담당자 승인</a:t>
-            </a:r>
-          </a:p>
-        </p:txBody>
-      </p:sp>
-      <p:sp>
-        <p:nvSpPr>
-          <p:cNvPr id="14" name="Rectangle 13"/>
+              <a:t>모형 변경은 담당자 승인</a:t>
+            </a:r>
+          </a:p>
+        </p:txBody>
+      </p:sp>
+      <p:sp>
+        <p:nvSpPr>
+          <p:cNvPr id="13" name="Rectangle 12"/>
           <p:cNvSpPr/>
           <p:nvPr/>
         </p:nvSpPr>
@@ -7170,7 +6912,7 @@
       </p:sp>
       <p:pic>
         <p:nvPicPr>
-          <p:cNvPr id="15" name="Picture 14" descr="app_card.png"/>
+          <p:cNvPr id="14" name="Picture 13" descr="app_card.png"/>
           <p:cNvPicPr>
             <a:picLocks noChangeAspect="1"/>
           </p:cNvPicPr>
@@ -7199,7 +6941,7 @@
       </p:pic>
       <p:sp>
         <p:nvSpPr>
-          <p:cNvPr id="16" name="TextBox 15"/>
+          <p:cNvPr id="15" name="TextBox 14"/>
           <p:cNvSpPr txBox="1"/>
           <p:nvPr/>
         </p:nvSpPr>
@@ -7233,14 +6975,14 @@
                 <a:ea typeface="Pretendard"/>
                 <a:cs typeface="Pretendard"/>
               </a:rPr>
-              <a:t>실제 생성 화면 · 2018년 1분기</a:t>
-            </a:r>
-          </a:p>
-        </p:txBody>
-      </p:sp>
-      <p:sp>
-        <p:nvSpPr>
-          <p:cNvPr id="17" name="TextBox 16"/>
+              <a:t>2018년 1분기 판단 화면</a:t>
+            </a:r>
+          </a:p>
+        </p:txBody>
+      </p:sp>
+      <p:sp>
+        <p:nvSpPr>
+          <p:cNvPr id="16" name="TextBox 15"/>
           <p:cNvSpPr txBox="1"/>
           <p:nvPr/>
         </p:nvSpPr>
@@ -7274,14 +7016,14 @@
                 <a:ea typeface="Pretendard Medium"/>
                 <a:cs typeface="Pretendard Medium"/>
               </a:rPr>
-              <a:t>조기 경고</a:t>
-            </a:r>
-          </a:p>
-        </p:txBody>
-      </p:sp>
-      <p:sp>
-        <p:nvSpPr>
-          <p:cNvPr id="18" name="TextBox 17"/>
+              <a:t>이상 감지 시점</a:t>
+            </a:r>
+          </a:p>
+        </p:txBody>
+      </p:sp>
+      <p:sp>
+        <p:nvSpPr>
+          <p:cNvPr id="17" name="TextBox 16"/>
           <p:cNvSpPr txBox="1"/>
           <p:nvPr/>
         </p:nvSpPr>
@@ -7315,14 +7057,14 @@
                 <a:ea typeface="Pretendard"/>
                 <a:cs typeface="Pretendard"/>
               </a:rPr>
-              <a:t>2분기 먼저</a:t>
-            </a:r>
-          </a:p>
-        </p:txBody>
-      </p:sp>
-      <p:sp>
-        <p:nvSpPr>
-          <p:cNvPr id="19" name="TextBox 18"/>
+              <a:t>2분기 앞당김</a:t>
+            </a:r>
+          </a:p>
+        </p:txBody>
+      </p:sp>
+      <p:sp>
+        <p:nvSpPr>
+          <p:cNvPr id="18" name="TextBox 17"/>
           <p:cNvSpPr txBox="1"/>
           <p:nvPr/>
         </p:nvSpPr>
@@ -7356,14 +7098,14 @@
                 <a:ea typeface="Pretendard"/>
                 <a:cs typeface="Pretendard"/>
               </a:rPr>
-              <a:t>12개월 중간 신호 기준</a:t>
-            </a:r>
-          </a:p>
-        </p:txBody>
-      </p:sp>
-      <p:sp>
-        <p:nvSpPr>
-          <p:cNvPr id="20" name="Rectangle 19"/>
+              <a:t>12개월 중간 신호 사용</a:t>
+            </a:r>
+          </a:p>
+        </p:txBody>
+      </p:sp>
+      <p:sp>
+        <p:nvSpPr>
+          <p:cNvPr id="19" name="Rectangle 18"/>
           <p:cNvSpPr/>
           <p:nvPr/>
         </p:nvSpPr>
@@ -7408,7 +7150,7 @@
       </p:sp>
       <p:sp>
         <p:nvSpPr>
-          <p:cNvPr id="21" name="TextBox 20"/>
+          <p:cNvPr id="20" name="TextBox 19"/>
           <p:cNvSpPr txBox="1"/>
           <p:nvPr/>
         </p:nvSpPr>
@@ -7442,14 +7184,14 @@
                 <a:ea typeface="Pretendard Medium"/>
                 <a:cs typeface="Pretendard Medium"/>
               </a:rPr>
-              <a:t>예측 오차 (사후 확인)</a:t>
-            </a:r>
-          </a:p>
-        </p:txBody>
-      </p:sp>
-      <p:sp>
-        <p:nvSpPr>
-          <p:cNvPr id="22" name="TextBox 21"/>
+              <a:t>예측 오차</a:t>
+            </a:r>
+          </a:p>
+        </p:txBody>
+      </p:sp>
+      <p:sp>
+        <p:nvSpPr>
+          <p:cNvPr id="21" name="TextBox 20"/>
           <p:cNvSpPr txBox="1"/>
           <p:nvPr/>
         </p:nvSpPr>
@@ -7483,14 +7225,14 @@
                 <a:ea typeface="Pretendard"/>
                 <a:cs typeface="Pretendard"/>
               </a:rPr>
-              <a:t>33% → 14%</a:t>
-            </a:r>
-          </a:p>
-        </p:txBody>
-      </p:sp>
-      <p:sp>
-        <p:nvSpPr>
-          <p:cNvPr id="23" name="TextBox 22"/>
+              <a:t>14%</a:t>
+            </a:r>
+          </a:p>
+        </p:txBody>
+      </p:sp>
+      <p:sp>
+        <p:nvSpPr>
+          <p:cNvPr id="22" name="TextBox 21"/>
           <p:cNvSpPr txBox="1"/>
           <p:nvPr/>
         </p:nvSpPr>
@@ -7524,14 +7266,14 @@
                 <a:ea typeface="Pretendard"/>
                 <a:cs typeface="Pretendard"/>
               </a:rPr>
-              <a:t>2018Q1 권고 · 보유 대출 46만 건</a:t>
-            </a:r>
-          </a:p>
-        </p:txBody>
-      </p:sp>
-      <p:sp>
-        <p:nvSpPr>
-          <p:cNvPr id="24" name="Rectangle 23"/>
+              <a:t>적용 전 33%. 2018년 1분기 보유 대출 46만 건</a:t>
+            </a:r>
+          </a:p>
+        </p:txBody>
+      </p:sp>
+      <p:sp>
+        <p:nvSpPr>
+          <p:cNvPr id="23" name="Rectangle 22"/>
           <p:cNvSpPr/>
           <p:nvPr/>
         </p:nvSpPr>
@@ -7576,7 +7318,7 @@
       </p:sp>
       <p:sp>
         <p:nvSpPr>
-          <p:cNvPr id="25" name="TextBox 24"/>
+          <p:cNvPr id="24" name="TextBox 23"/>
           <p:cNvSpPr txBox="1"/>
           <p:nvPr/>
         </p:nvSpPr>
@@ -7610,14 +7352,14 @@
                 <a:ea typeface="Pretendard Medium"/>
                 <a:cs typeface="Pretendard Medium"/>
               </a:rPr>
-              <a:t>모형 변경 (13개 분기)</a:t>
-            </a:r>
-          </a:p>
-        </p:txBody>
-      </p:sp>
-      <p:sp>
-        <p:nvSpPr>
-          <p:cNvPr id="26" name="TextBox 25"/>
+              <a:t>모형 변경 횟수</a:t>
+            </a:r>
+          </a:p>
+        </p:txBody>
+      </p:sp>
+      <p:sp>
+        <p:nvSpPr>
+          <p:cNvPr id="25" name="TextBox 24"/>
           <p:cNvSpPr txBox="1"/>
           <p:nvPr/>
         </p:nvSpPr>
@@ -7651,14 +7393,14 @@
                 <a:ea typeface="Pretendard"/>
                 <a:cs typeface="Pretendard"/>
               </a:rPr>
-              <a:t>13회 → 2회</a:t>
-            </a:r>
-          </a:p>
-        </p:txBody>
-      </p:sp>
-      <p:sp>
-        <p:nvSpPr>
-          <p:cNvPr id="27" name="TextBox 26"/>
+              <a:t>2회</a:t>
+            </a:r>
+          </a:p>
+        </p:txBody>
+      </p:sp>
+      <p:sp>
+        <p:nvSpPr>
+          <p:cNvPr id="26" name="TextBox 25"/>
           <p:cNvSpPr txBox="1"/>
           <p:nvPr/>
         </p:nvSpPr>
@@ -7692,14 +7434,14 @@
                 <a:ea typeface="Pretendard"/>
                 <a:cs typeface="Pretendard"/>
               </a:rPr>
-              <a:t>매 분기 재학습 대비 · 예측 오차 유사</a:t>
-            </a:r>
-          </a:p>
-        </p:txBody>
-      </p:sp>
-      <p:sp>
-        <p:nvSpPr>
-          <p:cNvPr id="28" name="TextBox 27"/>
+              <a:t>분기별 재학습 13회와 비슷한 오차</a:t>
+            </a:r>
+          </a:p>
+        </p:txBody>
+      </p:sp>
+      <p:sp>
+        <p:nvSpPr>
+          <p:cNvPr id="27" name="TextBox 26"/>
           <p:cNvSpPr txBox="1"/>
           <p:nvPr/>
         </p:nvSpPr>
@@ -7733,7 +7475,7 @@
                 <a:ea typeface="Pretendard"/>
                 <a:cs typeface="Pretendard"/>
               </a:rPr>
-              <a:t>공개 대출 데이터 기반 과거 분기 재현·프로토타입 · 실제 금융회사 운영 아님 · 판단은 당시 데이터만 사용, 평가는 이후 확정 결과</a:t>
+              <a:t>Lending Club 공개 대출 데이터로 과거 분기를 재현한 프로토타입. 판단에는 당시 데이터만 쓰고, 평가는 이후 확정된 결과로 함</a:t>
             </a:r>
           </a:p>
         </p:txBody>

--- a/ppt/역량PT_김연주.pptx
+++ b/ppt/역량PT_김연주.pptx
@@ -22,6 +22,15 @@
     <p:embeddedFont>
       <p:font typeface="Pretendard Medium" panose="02000003000000020004" pitchFamily="2" charset="-127"/>
       <p:regular r:id="rId7"/>
+    </p:embeddedFont>
+    <p:embeddedFont>
+      <p:font typeface="Pretendard SemiBold" panose="02000003000000020004" pitchFamily="2" charset="-127"/>
+      <p:bold r:id="rId8"/>
+    </p:embeddedFont>
+    <p:embeddedFont>
+      <p:font typeface="맑은 고딕" panose="020B0503020000020004" pitchFamily="50" charset="-127"/>
+      <p:regular r:id="rId9"/>
+      <p:bold r:id="rId10"/>
     </p:embeddedFont>
   </p:embeddedFontLst>
   <p:defaultTextStyle>
@@ -160,10 +169,234 @@
           <a:chExt cx="0" cy="0"/>
         </a:xfrm>
       </p:grpSpPr>
+      <p:sp>
+        <p:nvSpPr>
+          <p:cNvPr id="2" name="머리글 개체 틀 1"/>
+          <p:cNvSpPr>
+            <a:spLocks noGrp="1"/>
+          </p:cNvSpPr>
+          <p:nvPr>
+            <p:ph type="hdr" sz="quarter"/>
+          </p:nvPr>
+        </p:nvSpPr>
+        <p:spPr>
+          <a:xfrm>
+            <a:off x="0" y="0"/>
+            <a:ext cx="2971800" cy="458788"/>
+          </a:xfrm>
+          <a:prstGeom prst="rect">
+            <a:avLst/>
+          </a:prstGeom>
+        </p:spPr>
+        <p:txBody>
+          <a:bodyPr vert="horz" lIns="91440" tIns="45720" rIns="91440" bIns="45720" rtlCol="0"/>
+          <a:lstStyle>
+            <a:lvl1pPr algn="l">
+              <a:defRPr sz="1200"/>
+            </a:lvl1pPr>
+          </a:lstStyle>
+          <a:p>
+            <a:endParaRPr lang="ko-KR" altLang="en-US"/>
+          </a:p>
+        </p:txBody>
+      </p:sp>
+      <p:sp>
+        <p:nvSpPr>
+          <p:cNvPr id="3" name="날짜 개체 틀 2"/>
+          <p:cNvSpPr>
+            <a:spLocks noGrp="1"/>
+          </p:cNvSpPr>
+          <p:nvPr>
+            <p:ph type="dt" idx="1"/>
+          </p:nvPr>
+        </p:nvSpPr>
+        <p:spPr>
+          <a:xfrm>
+            <a:off x="3884613" y="0"/>
+            <a:ext cx="2971800" cy="458788"/>
+          </a:xfrm>
+          <a:prstGeom prst="rect">
+            <a:avLst/>
+          </a:prstGeom>
+        </p:spPr>
+        <p:txBody>
+          <a:bodyPr vert="horz" lIns="91440" tIns="45720" rIns="91440" bIns="45720" rtlCol="0"/>
+          <a:lstStyle>
+            <a:lvl1pPr algn="r">
+              <a:defRPr sz="1200"/>
+            </a:lvl1pPr>
+          </a:lstStyle>
+          <a:p>
+            <a:fld id="{6FD4DE19-E75C-4715-95F5-1D0E12C882BD}" type="datetimeFigureOut">
+              <a:rPr lang="ko-KR" altLang="en-US" smtClean="0"/>
+              <a:t>2026-10-22</a:t>
+            </a:fld>
+            <a:endParaRPr lang="ko-KR" altLang="en-US"/>
+          </a:p>
+        </p:txBody>
+      </p:sp>
+      <p:sp>
+        <p:nvSpPr>
+          <p:cNvPr id="4" name="슬라이드 이미지 개체 틀 3"/>
+          <p:cNvSpPr>
+            <a:spLocks noGrp="1" noRot="1" noChangeAspect="1"/>
+          </p:cNvSpPr>
+          <p:nvPr>
+            <p:ph type="sldImg" idx="2"/>
+          </p:nvPr>
+        </p:nvSpPr>
+        <p:spPr>
+          <a:xfrm>
+            <a:off x="685800" y="1143000"/>
+            <a:ext cx="5486400" cy="3086100"/>
+          </a:xfrm>
+          <a:prstGeom prst="rect">
+            <a:avLst/>
+          </a:prstGeom>
+          <a:noFill/>
+          <a:ln w="12700">
+            <a:solidFill>
+              <a:prstClr val="black"/>
+            </a:solidFill>
+          </a:ln>
+        </p:spPr>
+        <p:txBody>
+          <a:bodyPr vert="horz" lIns="91440" tIns="45720" rIns="91440" bIns="45720" rtlCol="0" anchor="ctr"/>
+          <a:lstStyle/>
+          <a:p>
+            <a:endParaRPr lang="ko-KR" altLang="en-US"/>
+          </a:p>
+        </p:txBody>
+      </p:sp>
+      <p:sp>
+        <p:nvSpPr>
+          <p:cNvPr id="5" name="슬라이드 노트 개체 틀 4"/>
+          <p:cNvSpPr>
+            <a:spLocks noGrp="1"/>
+          </p:cNvSpPr>
+          <p:nvPr>
+            <p:ph type="body" sz="quarter" idx="3"/>
+          </p:nvPr>
+        </p:nvSpPr>
+        <p:spPr>
+          <a:xfrm>
+            <a:off x="685800" y="4400550"/>
+            <a:ext cx="5486400" cy="3600450"/>
+          </a:xfrm>
+          <a:prstGeom prst="rect">
+            <a:avLst/>
+          </a:prstGeom>
+        </p:spPr>
+        <p:txBody>
+          <a:bodyPr vert="horz" lIns="91440" tIns="45720" rIns="91440" bIns="45720" rtlCol="0"/>
+          <a:lstStyle/>
+          <a:p>
+            <a:pPr lvl="0"/>
+            <a:r>
+              <a:rPr lang="ko-KR" altLang="en-US"/>
+              <a:t>마스터 텍스트 스타일을 편집하려면 클릭</a:t>
+            </a:r>
+          </a:p>
+          <a:p>
+            <a:pPr lvl="1"/>
+            <a:r>
+              <a:rPr lang="ko-KR" altLang="en-US"/>
+              <a:t>두 번째 수준</a:t>
+            </a:r>
+          </a:p>
+          <a:p>
+            <a:pPr lvl="2"/>
+            <a:r>
+              <a:rPr lang="ko-KR" altLang="en-US"/>
+              <a:t>세 번째 수준</a:t>
+            </a:r>
+          </a:p>
+          <a:p>
+            <a:pPr lvl="3"/>
+            <a:r>
+              <a:rPr lang="ko-KR" altLang="en-US"/>
+              <a:t>네 번째 수준</a:t>
+            </a:r>
+          </a:p>
+          <a:p>
+            <a:pPr lvl="4"/>
+            <a:r>
+              <a:rPr lang="ko-KR" altLang="en-US"/>
+              <a:t>다섯 번째 수준</a:t>
+            </a:r>
+          </a:p>
+        </p:txBody>
+      </p:sp>
+      <p:sp>
+        <p:nvSpPr>
+          <p:cNvPr id="6" name="바닥글 개체 틀 5"/>
+          <p:cNvSpPr>
+            <a:spLocks noGrp="1"/>
+          </p:cNvSpPr>
+          <p:nvPr>
+            <p:ph type="ftr" sz="quarter" idx="4"/>
+          </p:nvPr>
+        </p:nvSpPr>
+        <p:spPr>
+          <a:xfrm>
+            <a:off x="0" y="8685213"/>
+            <a:ext cx="2971800" cy="458787"/>
+          </a:xfrm>
+          <a:prstGeom prst="rect">
+            <a:avLst/>
+          </a:prstGeom>
+        </p:spPr>
+        <p:txBody>
+          <a:bodyPr vert="horz" lIns="91440" tIns="45720" rIns="91440" bIns="45720" rtlCol="0" anchor="b"/>
+          <a:lstStyle>
+            <a:lvl1pPr algn="l">
+              <a:defRPr sz="1200"/>
+            </a:lvl1pPr>
+          </a:lstStyle>
+          <a:p>
+            <a:endParaRPr lang="ko-KR" altLang="en-US"/>
+          </a:p>
+        </p:txBody>
+      </p:sp>
+      <p:sp>
+        <p:nvSpPr>
+          <p:cNvPr id="7" name="슬라이드 번호 개체 틀 6"/>
+          <p:cNvSpPr>
+            <a:spLocks noGrp="1"/>
+          </p:cNvSpPr>
+          <p:nvPr>
+            <p:ph type="sldNum" sz="quarter" idx="5"/>
+          </p:nvPr>
+        </p:nvSpPr>
+        <p:spPr>
+          <a:xfrm>
+            <a:off x="3884613" y="8685213"/>
+            <a:ext cx="2971800" cy="458787"/>
+          </a:xfrm>
+          <a:prstGeom prst="rect">
+            <a:avLst/>
+          </a:prstGeom>
+        </p:spPr>
+        <p:txBody>
+          <a:bodyPr vert="horz" lIns="91440" tIns="45720" rIns="91440" bIns="45720" rtlCol="0" anchor="b"/>
+          <a:lstStyle>
+            <a:lvl1pPr algn="r">
+              <a:defRPr sz="1200"/>
+            </a:lvl1pPr>
+          </a:lstStyle>
+          <a:p>
+            <a:fld id="{4A1FCCD6-4DDE-428A-A3E3-A7B38B9DF13D}" type="slidenum">
+              <a:rPr lang="ko-KR" altLang="en-US" smtClean="0"/>
+              <a:t>‹#›</a:t>
+            </a:fld>
+            <a:endParaRPr lang="ko-KR" altLang="en-US"/>
+          </a:p>
+        </p:txBody>
+      </p:sp>
     </p:spTree>
     <p:extLst>
       <p:ext uri="{BB962C8B-B14F-4D97-AF65-F5344CB8AC3E}">
-        <p14:creationId xmlns:p14="http://schemas.microsoft.com/office/powerpoint/2010/main" val="2219680588"/>
+        <p14:creationId xmlns:p14="http://schemas.microsoft.com/office/powerpoint/2010/main" val="486947192"/>
       </p:ext>
     </p:extLst>
   </p:cSld>
@@ -264,74 +497,6 @@
 </file>
 
 <file path=ppt/notesSlides/notesSlide1.xml><?xml version="1.0" encoding="utf-8"?>
-<p:notes xmlns:a="http://schemas.openxmlformats.org/drawingml/2006/main" xmlns:r="http://schemas.openxmlformats.org/officeDocument/2006/relationships" xmlns:p="http://schemas.openxmlformats.org/presentationml/2006/main">
-  <p:cSld>
-    <p:spTree>
-      <p:nvGrpSpPr>
-        <p:cNvPr id="1" name=""/>
-        <p:cNvGrpSpPr/>
-        <p:nvPr/>
-      </p:nvGrpSpPr>
-      <p:grpSpPr>
-        <a:xfrm>
-          <a:off x="0" y="0"/>
-          <a:ext cx="0" cy="0"/>
-          <a:chOff x="0" y="0"/>
-          <a:chExt cx="0" cy="0"/>
-        </a:xfrm>
-      </p:grpSpPr>
-      <p:sp>
-        <p:nvSpPr>
-          <p:cNvPr id="2" name="Slide Image Placeholder 1"/>
-          <p:cNvSpPr>
-            <a:spLocks noGrp="1" noRot="1" noChangeAspect="1"/>
-          </p:cNvSpPr>
-          <p:nvPr>
-            <p:ph type="sldImg" idx="2"/>
-          </p:nvPr>
-        </p:nvSpPr>
-        <p:spPr/>
-      </p:sp>
-      <p:sp>
-        <p:nvSpPr>
-          <p:cNvPr id="3" name="Notes Placeholder 2"/>
-          <p:cNvSpPr>
-            <a:spLocks noGrp="1"/>
-          </p:cNvSpPr>
-          <p:nvPr>
-            <p:ph type="body" sz="quarter" idx="3"/>
-          </p:nvPr>
-        </p:nvSpPr>
-        <p:spPr/>
-        <p:txBody>
-          <a:bodyPr/>
-          <a:lstStyle/>
-          <a:p>
-            <a:endParaRPr/>
-          </a:p>
-        </p:txBody>
-      </p:sp>
-      <p:sp>
-        <p:nvSpPr>
-          <p:cNvPr id="4" name="Slide Number Placeholder 3"/>
-          <p:cNvSpPr>
-            <a:spLocks noGrp="1"/>
-          </p:cNvSpPr>
-          <p:nvPr>
-            <p:ph type="sldNum" sz="quarter" idx="5"/>
-          </p:nvPr>
-        </p:nvSpPr>
-        <p:spPr/>
-      </p:sp>
-    </p:spTree>
-  </p:cSld>
-  <p:clrMapOvr>
-    <a:masterClrMapping/>
-  </p:clrMapOvr>
-</p:notes>
-</file>
-
-<file path=ppt/notesSlides/notesSlide2.xml><?xml version="1.0" encoding="utf-8"?>
 <p:notes xmlns:a="http://schemas.openxmlformats.org/drawingml/2006/main" xmlns:r="http://schemas.openxmlformats.org/officeDocument/2006/relationships" xmlns:p="http://schemas.openxmlformats.org/presentationml/2006/main">
   <p:cSld>
     <p:spTree>
@@ -3402,7 +3567,7 @@
                 <a:ea typeface="Pretendard"/>
                 <a:cs typeface="Pretendard"/>
               </a:rPr>
-              <a:t>01 Experiences</a:t>
+              <a:t>Experience Timeline</a:t>
             </a:r>
           </a:p>
         </p:txBody>
@@ -3415,7 +3580,7 @@
         </p:nvSpPr>
         <p:spPr>
           <a:xfrm>
-            <a:off x="548640" y="1257109"/>
+            <a:off x="548640" y="1183957"/>
             <a:ext cx="11094415" cy="9525"/>
           </a:xfrm>
           <a:prstGeom prst="rect">
@@ -3454,359 +3619,14 @@
       </p:sp>
       <p:sp>
         <p:nvSpPr>
-          <p:cNvPr id="4" name="Rectangle 3"/>
-          <p:cNvSpPr/>
-          <p:nvPr/>
-        </p:nvSpPr>
-        <p:spPr>
-          <a:xfrm>
-            <a:off x="548640" y="1417320"/>
-            <a:ext cx="2679191" cy="658368"/>
-          </a:xfrm>
-          <a:prstGeom prst="rect">
-            <a:avLst/>
-          </a:prstGeom>
-          <a:solidFill>
-            <a:srgbClr val="F6F6F6"/>
-          </a:solidFill>
-          <a:ln>
-            <a:noFill/>
-          </a:ln>
-          <a:effectLst/>
-        </p:spPr>
-        <p:style>
-          <a:lnRef idx="1">
-            <a:schemeClr val="accent1"/>
-          </a:lnRef>
-          <a:fillRef idx="3">
-            <a:schemeClr val="accent1"/>
-          </a:fillRef>
-          <a:effectRef idx="2">
-            <a:schemeClr val="accent1"/>
-          </a:effectRef>
-          <a:fontRef idx="minor">
-            <a:schemeClr val="lt1"/>
-          </a:fontRef>
-        </p:style>
-        <p:txBody>
-          <a:bodyPr rtlCol="0" anchor="ctr"/>
-          <a:lstStyle/>
-          <a:p>
-            <a:pPr algn="ctr"/>
-            <a:endParaRPr/>
-          </a:p>
-        </p:txBody>
-      </p:sp>
-      <p:sp>
-        <p:nvSpPr>
-          <p:cNvPr id="5" name="TextBox 4"/>
+          <p:cNvPr id="4" name="TextBox 3"/>
           <p:cNvSpPr txBox="1"/>
           <p:nvPr/>
         </p:nvSpPr>
         <p:spPr>
           <a:xfrm>
-            <a:off x="713232" y="1527048"/>
-            <a:ext cx="2423160" cy="457200"/>
-          </a:xfrm>
-          <a:prstGeom prst="rect">
-            <a:avLst/>
-          </a:prstGeom>
-          <a:noFill/>
-        </p:spPr>
-        <p:txBody>
-          <a:bodyPr wrap="none" lIns="0" tIns="0" rIns="0" bIns="0" anchor="t">
-            <a:spAutoFit/>
-          </a:bodyPr>
-          <a:lstStyle/>
-          <a:p>
-            <a:pPr algn="l">
-              <a:lnSpc>
-                <a:spcPct val="130000"/>
-              </a:lnSpc>
-            </a:pPr>
-            <a:r>
-              <a:rPr sz="1100" b="0">
-                <a:solidFill>
-                  <a:srgbClr val="9A9A9A"/>
-                </a:solidFill>
-                <a:latin typeface="Pretendard Medium"/>
-                <a:ea typeface="Pretendard Medium"/>
-                <a:cs typeface="Pretendard Medium"/>
-              </a:rPr>
-              <a:t>1  </a:t>
-            </a:r>
-            <a:r>
-              <a:rPr sz="1200" b="1">
-                <a:solidFill>
-                  <a:srgbClr val="000000"/>
-                </a:solidFill>
-                <a:latin typeface="Pretendard"/>
-                <a:ea typeface="Pretendard"/>
-                <a:cs typeface="Pretendard"/>
-              </a:rPr>
-              <a:t>통계 분석</a:t>
-            </a:r>
-          </a:p>
-          <a:p>
-            <a:pPr algn="l">
-              <a:lnSpc>
-                <a:spcPct val="130000"/>
-              </a:lnSpc>
-            </a:pPr>
-            <a:r>
-              <a:rPr sz="900" b="0">
-                <a:solidFill>
-                  <a:srgbClr val="6B6B6B"/>
-                </a:solidFill>
-                <a:latin typeface="Pretendard"/>
-                <a:ea typeface="Pretendard"/>
-                <a:cs typeface="Pretendard"/>
-              </a:rPr>
-              <a:t>추론, 생존분석</a:t>
-            </a:r>
-          </a:p>
-        </p:txBody>
-      </p:sp>
-      <p:sp>
-        <p:nvSpPr>
-          <p:cNvPr id="6" name="Rectangle 5"/>
-          <p:cNvSpPr/>
-          <p:nvPr/>
-        </p:nvSpPr>
-        <p:spPr>
-          <a:xfrm>
-            <a:off x="3264408" y="1417320"/>
-            <a:ext cx="3255264" cy="658368"/>
-          </a:xfrm>
-          <a:prstGeom prst="rect">
-            <a:avLst/>
-          </a:prstGeom>
-          <a:solidFill>
-            <a:srgbClr val="F6F6F6"/>
-          </a:solidFill>
-          <a:ln>
-            <a:noFill/>
-          </a:ln>
-          <a:effectLst/>
-        </p:spPr>
-        <p:style>
-          <a:lnRef idx="1">
-            <a:schemeClr val="accent1"/>
-          </a:lnRef>
-          <a:fillRef idx="3">
-            <a:schemeClr val="accent1"/>
-          </a:fillRef>
-          <a:effectRef idx="2">
-            <a:schemeClr val="accent1"/>
-          </a:effectRef>
-          <a:fontRef idx="minor">
-            <a:schemeClr val="lt1"/>
-          </a:fontRef>
-        </p:style>
-        <p:txBody>
-          <a:bodyPr rtlCol="0" anchor="ctr"/>
-          <a:lstStyle/>
-          <a:p>
-            <a:pPr algn="ctr"/>
-            <a:endParaRPr/>
-          </a:p>
-        </p:txBody>
-      </p:sp>
-      <p:sp>
-        <p:nvSpPr>
-          <p:cNvPr id="7" name="TextBox 6"/>
-          <p:cNvSpPr txBox="1"/>
-          <p:nvPr/>
-        </p:nvSpPr>
-        <p:spPr>
-          <a:xfrm>
-            <a:off x="3410712" y="1527048"/>
-            <a:ext cx="3017520" cy="457200"/>
-          </a:xfrm>
-          <a:prstGeom prst="rect">
-            <a:avLst/>
-          </a:prstGeom>
-          <a:noFill/>
-        </p:spPr>
-        <p:txBody>
-          <a:bodyPr wrap="none" lIns="0" tIns="0" rIns="0" bIns="0" anchor="t">
-            <a:spAutoFit/>
-          </a:bodyPr>
-          <a:lstStyle/>
-          <a:p>
-            <a:pPr algn="l">
-              <a:lnSpc>
-                <a:spcPct val="130000"/>
-              </a:lnSpc>
-            </a:pPr>
-            <a:r>
-              <a:rPr sz="1100" b="0">
-                <a:solidFill>
-                  <a:srgbClr val="9A9A9A"/>
-                </a:solidFill>
-                <a:latin typeface="Pretendard Medium"/>
-                <a:ea typeface="Pretendard Medium"/>
-                <a:cs typeface="Pretendard Medium"/>
-              </a:rPr>
-              <a:t>2  </a:t>
-            </a:r>
-            <a:r>
-              <a:rPr sz="1200" b="1">
-                <a:solidFill>
-                  <a:srgbClr val="000000"/>
-                </a:solidFill>
-                <a:latin typeface="Pretendard"/>
-                <a:ea typeface="Pretendard"/>
-                <a:cs typeface="Pretendard"/>
-              </a:rPr>
-              <a:t>AI 모델 개발</a:t>
-            </a:r>
-          </a:p>
-          <a:p>
-            <a:pPr algn="l">
-              <a:lnSpc>
-                <a:spcPct val="130000"/>
-              </a:lnSpc>
-            </a:pPr>
-            <a:r>
-              <a:rPr sz="900" b="0">
-                <a:solidFill>
-                  <a:srgbClr val="6B6B6B"/>
-                </a:solidFill>
-                <a:latin typeface="Pretendard"/>
-                <a:ea typeface="Pretendard"/>
-                <a:cs typeface="Pretendard"/>
-              </a:rPr>
-              <a:t>모델 설계와 실험, 에이전트</a:t>
-            </a:r>
-          </a:p>
-        </p:txBody>
-      </p:sp>
-      <p:sp>
-        <p:nvSpPr>
-          <p:cNvPr id="8" name="Rectangle 7"/>
-          <p:cNvSpPr/>
-          <p:nvPr/>
-        </p:nvSpPr>
-        <p:spPr>
-          <a:xfrm>
-            <a:off x="6556248" y="1417320"/>
-            <a:ext cx="2066543" cy="658368"/>
-          </a:xfrm>
-          <a:prstGeom prst="rect">
-            <a:avLst/>
-          </a:prstGeom>
-          <a:solidFill>
-            <a:srgbClr val="F6F6F6"/>
-          </a:solidFill>
-          <a:ln>
-            <a:noFill/>
-          </a:ln>
-          <a:effectLst/>
-        </p:spPr>
-        <p:style>
-          <a:lnRef idx="1">
-            <a:schemeClr val="accent1"/>
-          </a:lnRef>
-          <a:fillRef idx="3">
-            <a:schemeClr val="accent1"/>
-          </a:fillRef>
-          <a:effectRef idx="2">
-            <a:schemeClr val="accent1"/>
-          </a:effectRef>
-          <a:fontRef idx="minor">
-            <a:schemeClr val="lt1"/>
-          </a:fontRef>
-        </p:style>
-        <p:txBody>
-          <a:bodyPr rtlCol="0" anchor="ctr"/>
-          <a:lstStyle/>
-          <a:p>
-            <a:pPr algn="ctr"/>
-            <a:endParaRPr/>
-          </a:p>
-        </p:txBody>
-      </p:sp>
-      <p:sp>
-        <p:nvSpPr>
-          <p:cNvPr id="9" name="TextBox 8"/>
-          <p:cNvSpPr txBox="1"/>
-          <p:nvPr/>
-        </p:nvSpPr>
-        <p:spPr>
-          <a:xfrm>
-            <a:off x="6702552" y="1527048"/>
-            <a:ext cx="1828799" cy="457200"/>
-          </a:xfrm>
-          <a:prstGeom prst="rect">
-            <a:avLst/>
-          </a:prstGeom>
-          <a:noFill/>
-        </p:spPr>
-        <p:txBody>
-          <a:bodyPr wrap="none" lIns="0" tIns="0" rIns="0" bIns="0" anchor="t">
-            <a:spAutoFit/>
-          </a:bodyPr>
-          <a:lstStyle/>
-          <a:p>
-            <a:pPr algn="l">
-              <a:lnSpc>
-                <a:spcPct val="130000"/>
-              </a:lnSpc>
-            </a:pPr>
-            <a:r>
-              <a:rPr sz="1100" b="0">
-                <a:solidFill>
-                  <a:srgbClr val="9A9A9A"/>
-                </a:solidFill>
-                <a:latin typeface="Pretendard Medium"/>
-                <a:ea typeface="Pretendard Medium"/>
-                <a:cs typeface="Pretendard Medium"/>
-              </a:rPr>
-              <a:t>3  </a:t>
-            </a:r>
-            <a:r>
-              <a:rPr sz="1200" b="1">
-                <a:solidFill>
-                  <a:srgbClr val="000000"/>
-                </a:solidFill>
-                <a:latin typeface="Pretendard"/>
-                <a:ea typeface="Pretendard"/>
-                <a:cs typeface="Pretendard"/>
-              </a:rPr>
-              <a:t>산업 적용</a:t>
-            </a:r>
-          </a:p>
-          <a:p>
-            <a:pPr algn="l">
-              <a:lnSpc>
-                <a:spcPct val="130000"/>
-              </a:lnSpc>
-            </a:pPr>
-            <a:r>
-              <a:rPr sz="900" b="0">
-                <a:solidFill>
-                  <a:srgbClr val="6B6B6B"/>
-                </a:solidFill>
-                <a:latin typeface="Pretendard"/>
-                <a:ea typeface="Pretendard"/>
-                <a:cs typeface="Pretendard"/>
-              </a:rPr>
-              <a:t>데이터 구축과 실사용</a:t>
-            </a:r>
-          </a:p>
-        </p:txBody>
-      </p:sp>
-      <p:sp>
-        <p:nvSpPr>
-          <p:cNvPr id="10" name="TextBox 9"/>
-          <p:cNvSpPr txBox="1"/>
-          <p:nvPr/>
-        </p:nvSpPr>
-        <p:spPr>
-          <a:xfrm>
-            <a:off x="548640" y="2907792"/>
-            <a:ext cx="914400" cy="182880"/>
+            <a:off x="548640" y="2423160"/>
+            <a:ext cx="731520" cy="182880"/>
           </a:xfrm>
           <a:prstGeom prst="rect">
             <a:avLst/>
@@ -3825,29 +3645,29 @@
               </a:lnSpc>
             </a:pPr>
             <a:r>
-              <a:rPr sz="850" b="0">
-                <a:solidFill>
-                  <a:srgbClr val="9A9A9A"/>
+              <a:rPr sz="900" b="0">
+                <a:solidFill>
+                  <a:srgbClr val="6B6B6B"/>
                 </a:solidFill>
                 <a:latin typeface="Pretendard Medium"/>
                 <a:ea typeface="Pretendard Medium"/>
                 <a:cs typeface="Pretendard Medium"/>
               </a:rPr>
-              <a:t>학업과 활동</a:t>
-            </a:r>
-          </a:p>
-        </p:txBody>
-      </p:sp>
-      <p:sp>
-        <p:nvSpPr>
-          <p:cNvPr id="11" name="Rectangle 10"/>
+              <a:t>학업, 경험</a:t>
+            </a:r>
+          </a:p>
+        </p:txBody>
+      </p:sp>
+      <p:sp>
+        <p:nvSpPr>
+          <p:cNvPr id="5" name="Rectangle 4"/>
           <p:cNvSpPr/>
           <p:nvPr/>
         </p:nvSpPr>
         <p:spPr>
           <a:xfrm>
-            <a:off x="548640" y="3145155"/>
-            <a:ext cx="6355080" cy="19050"/>
+            <a:off x="1371600" y="2505075"/>
+            <a:ext cx="7178040" cy="19050"/>
           </a:xfrm>
           <a:prstGeom prst="rect">
             <a:avLst/>
@@ -3885,14 +3705,14 @@
       </p:sp>
       <p:cxnSp>
         <p:nvCxnSpPr>
-          <p:cNvPr id="12" name="Connector 11"/>
+          <p:cNvPr id="6" name="Connector 5"/>
           <p:cNvCxnSpPr/>
           <p:nvPr/>
         </p:nvCxnSpPr>
         <p:spPr>
           <a:xfrm>
-            <a:off x="6903720" y="3154680"/>
-            <a:ext cx="411480" cy="768096"/>
+            <a:off x="8549640" y="2514600"/>
+            <a:ext cx="292608" cy="557784"/>
           </a:xfrm>
           <a:prstGeom prst="line">
             <a:avLst/>
@@ -3906,13 +3726,120 @@
       </p:cxnSp>
       <p:sp>
         <p:nvSpPr>
-          <p:cNvPr id="13" name="Oval 12"/>
+          <p:cNvPr id="7" name="TextBox 6"/>
+          <p:cNvSpPr txBox="1"/>
+          <p:nvPr/>
+        </p:nvSpPr>
+        <p:spPr>
+          <a:xfrm>
+            <a:off x="548640" y="3794760"/>
+            <a:ext cx="731520" cy="182880"/>
+          </a:xfrm>
+          <a:prstGeom prst="rect">
+            <a:avLst/>
+          </a:prstGeom>
+          <a:noFill/>
+        </p:spPr>
+        <p:txBody>
+          <a:bodyPr wrap="none" lIns="0" tIns="0" rIns="0" bIns="0" anchor="t">
+            <a:spAutoFit/>
+          </a:bodyPr>
+          <a:lstStyle/>
+          <a:p>
+            <a:pPr algn="l">
+              <a:lnSpc>
+                <a:spcPct val="115000"/>
+              </a:lnSpc>
+            </a:pPr>
+            <a:r>
+              <a:rPr sz="900" b="0">
+                <a:solidFill>
+                  <a:srgbClr val="6B6B6B"/>
+                </a:solidFill>
+                <a:latin typeface="Pretendard Medium"/>
+                <a:ea typeface="Pretendard Medium"/>
+                <a:cs typeface="Pretendard Medium"/>
+              </a:rPr>
+              <a:t>프로젝트</a:t>
+            </a:r>
+          </a:p>
+        </p:txBody>
+      </p:sp>
+      <p:sp>
+        <p:nvSpPr>
+          <p:cNvPr id="8" name="Rectangle 7"/>
           <p:cNvSpPr/>
           <p:nvPr/>
         </p:nvSpPr>
         <p:spPr>
           <a:xfrm>
-            <a:off x="1115568" y="2944368"/>
+            <a:off x="1371600" y="3876675"/>
+            <a:ext cx="7178040" cy="19050"/>
+          </a:xfrm>
+          <a:prstGeom prst="rect">
+            <a:avLst/>
+          </a:prstGeom>
+          <a:solidFill>
+            <a:srgbClr val="000000"/>
+          </a:solidFill>
+          <a:ln>
+            <a:noFill/>
+          </a:ln>
+          <a:effectLst/>
+        </p:spPr>
+        <p:style>
+          <a:lnRef idx="1">
+            <a:schemeClr val="accent1"/>
+          </a:lnRef>
+          <a:fillRef idx="3">
+            <a:schemeClr val="accent1"/>
+          </a:fillRef>
+          <a:effectRef idx="2">
+            <a:schemeClr val="accent1"/>
+          </a:effectRef>
+          <a:fontRef idx="minor">
+            <a:schemeClr val="lt1"/>
+          </a:fontRef>
+        </p:style>
+        <p:txBody>
+          <a:bodyPr rtlCol="0" anchor="ctr"/>
+          <a:lstStyle/>
+          <a:p>
+            <a:pPr algn="ctr"/>
+            <a:endParaRPr/>
+          </a:p>
+        </p:txBody>
+      </p:sp>
+      <p:cxnSp>
+        <p:nvCxnSpPr>
+          <p:cNvPr id="9" name="Connector 8"/>
+          <p:cNvCxnSpPr/>
+          <p:nvPr/>
+        </p:nvCxnSpPr>
+        <p:spPr>
+          <a:xfrm flipV="1">
+            <a:off x="8549640" y="3328416"/>
+            <a:ext cx="292608" cy="557784"/>
+          </a:xfrm>
+          <a:prstGeom prst="line">
+            <a:avLst/>
+          </a:prstGeom>
+          <a:ln w="19050">
+            <a:solidFill>
+              <a:srgbClr val="000000"/>
+            </a:solidFill>
+          </a:ln>
+        </p:spPr>
+      </p:cxnSp>
+      <p:sp>
+        <p:nvSpPr>
+          <p:cNvPr id="10" name="Oval 9"/>
+          <p:cNvSpPr/>
+          <p:nvPr/>
+        </p:nvSpPr>
+        <p:spPr>
+          <a:xfrm>
+            <a:off x="1618488" y="2304288"/>
             <a:ext cx="420624" cy="420624"/>
           </a:xfrm>
           <a:prstGeom prst="ellipse">
@@ -3951,224 +3878,16 @@
           </a:p>
         </p:txBody>
       </p:sp>
-      <p:cxnSp>
-        <p:nvCxnSpPr>
-          <p:cNvPr id="14" name="Connector 13"/>
-          <p:cNvCxnSpPr/>
-          <p:nvPr/>
-        </p:nvCxnSpPr>
-        <p:spPr>
-          <a:xfrm flipV="1">
-            <a:off x="1257300" y="3182112"/>
-            <a:ext cx="0" cy="64008"/>
-          </a:xfrm>
-          <a:prstGeom prst="line">
-            <a:avLst/>
-          </a:prstGeom>
-          <a:ln w="19050">
-            <a:solidFill>
-              <a:srgbClr val="000000"/>
-            </a:solidFill>
-          </a:ln>
-        </p:spPr>
-      </p:cxnSp>
-      <p:cxnSp>
-        <p:nvCxnSpPr>
-          <p:cNvPr id="15" name="Connector 14"/>
-          <p:cNvCxnSpPr/>
-          <p:nvPr/>
-        </p:nvCxnSpPr>
-        <p:spPr>
-          <a:xfrm flipV="1">
-            <a:off x="1325880" y="3108960"/>
-            <a:ext cx="0" cy="137160"/>
-          </a:xfrm>
-          <a:prstGeom prst="line">
-            <a:avLst/>
-          </a:prstGeom>
-          <a:ln w="19050">
-            <a:solidFill>
-              <a:srgbClr val="000000"/>
-            </a:solidFill>
-          </a:ln>
-        </p:spPr>
-      </p:cxnSp>
-      <p:cxnSp>
-        <p:nvCxnSpPr>
-          <p:cNvPr id="16" name="Connector 15"/>
-          <p:cNvCxnSpPr/>
-          <p:nvPr/>
-        </p:nvCxnSpPr>
-        <p:spPr>
-          <a:xfrm flipV="1">
-            <a:off x="1394460" y="3063240"/>
-            <a:ext cx="0" cy="182880"/>
-          </a:xfrm>
-          <a:prstGeom prst="line">
-            <a:avLst/>
-          </a:prstGeom>
-          <a:ln w="19050">
-            <a:solidFill>
-              <a:srgbClr val="000000"/>
-            </a:solidFill>
-          </a:ln>
-        </p:spPr>
-      </p:cxnSp>
-      <p:sp>
-        <p:nvSpPr>
-          <p:cNvPr id="17" name="TextBox 16"/>
-          <p:cNvSpPr txBox="1"/>
-          <p:nvPr/>
-        </p:nvSpPr>
-        <p:spPr>
-          <a:xfrm>
-            <a:off x="1115568" y="2221992"/>
-            <a:ext cx="2103120" cy="685800"/>
-          </a:xfrm>
-          <a:prstGeom prst="rect">
-            <a:avLst/>
-          </a:prstGeom>
-          <a:noFill/>
-        </p:spPr>
-        <p:txBody>
-          <a:bodyPr wrap="none" lIns="0" tIns="0" rIns="0" bIns="0" anchor="t">
-            <a:spAutoFit/>
-          </a:bodyPr>
-          <a:lstStyle/>
-          <a:p>
-            <a:pPr algn="l">
-              <a:lnSpc>
-                <a:spcPct val="130000"/>
-              </a:lnSpc>
-            </a:pPr>
-            <a:r>
-              <a:rPr sz="1100" b="1">
-                <a:solidFill>
-                  <a:srgbClr val="000000"/>
-                </a:solidFill>
-                <a:latin typeface="Pretendard"/>
-                <a:ea typeface="Pretendard"/>
-                <a:cs typeface="Pretendard"/>
-              </a:rPr>
-              <a:t>통계학 학사</a:t>
-            </a:r>
-          </a:p>
-          <a:p>
-            <a:pPr algn="l">
-              <a:lnSpc>
-                <a:spcPct val="130000"/>
-              </a:lnSpc>
-            </a:pPr>
-            <a:r>
-              <a:rPr sz="950" b="0">
-                <a:solidFill>
-                  <a:srgbClr val="6B6B6B"/>
-                </a:solidFill>
-                <a:latin typeface="Pretendard"/>
-                <a:ea typeface="Pretendard"/>
-                <a:cs typeface="Pretendard"/>
-              </a:rPr>
-              <a:t>통계적 추론과 모델링</a:t>
-            </a:r>
-          </a:p>
-          <a:p>
-            <a:pPr algn="l">
-              <a:lnSpc>
-                <a:spcPct val="130000"/>
-              </a:lnSpc>
-            </a:pPr>
-            <a:r>
-              <a:rPr sz="850" b="0">
-                <a:solidFill>
-                  <a:srgbClr val="9A9A9A"/>
-                </a:solidFill>
-                <a:latin typeface="Pretendard"/>
-                <a:ea typeface="Pretendard"/>
-                <a:cs typeface="Pretendard"/>
-              </a:rPr>
-              <a:t>2021.03 ~ 2025.08</a:t>
-            </a:r>
-          </a:p>
-        </p:txBody>
-      </p:sp>
-      <p:sp>
-        <p:nvSpPr>
-          <p:cNvPr id="18" name="Oval 17"/>
+      <p:sp>
+        <p:nvSpPr>
+          <p:cNvPr id="11" name="Freeform 10"/>
           <p:cNvSpPr/>
           <p:nvPr/>
         </p:nvSpPr>
         <p:spPr>
           <a:xfrm>
-            <a:off x="3310128" y="2944368"/>
-            <a:ext cx="420624" cy="420624"/>
-          </a:xfrm>
-          <a:prstGeom prst="ellipse">
-            <a:avLst/>
-          </a:prstGeom>
-          <a:solidFill>
-            <a:srgbClr val="FFFFFF"/>
-          </a:solidFill>
-          <a:ln w="19050">
-            <a:solidFill>
-              <a:srgbClr val="000000"/>
-            </a:solidFill>
-          </a:ln>
-          <a:effectLst/>
-        </p:spPr>
-        <p:style>
-          <a:lnRef idx="1">
-            <a:schemeClr val="accent1"/>
-          </a:lnRef>
-          <a:fillRef idx="3">
-            <a:schemeClr val="accent1"/>
-          </a:fillRef>
-          <a:effectRef idx="2">
-            <a:schemeClr val="accent1"/>
-          </a:effectRef>
-          <a:fontRef idx="minor">
-            <a:schemeClr val="lt1"/>
-          </a:fontRef>
-        </p:style>
-        <p:txBody>
-          <a:bodyPr rtlCol="0" anchor="ctr"/>
-          <a:lstStyle/>
-          <a:p>
-            <a:pPr algn="ctr"/>
-            <a:endParaRPr/>
-          </a:p>
-        </p:txBody>
-      </p:sp>
-      <p:cxnSp>
-        <p:nvCxnSpPr>
-          <p:cNvPr id="19" name="Connector 18"/>
-          <p:cNvCxnSpPr/>
-          <p:nvPr/>
-        </p:nvCxnSpPr>
-        <p:spPr>
-          <a:xfrm flipV="1">
-            <a:off x="3447288" y="3044952"/>
-            <a:ext cx="0" cy="219456"/>
-          </a:xfrm>
-          <a:prstGeom prst="line">
-            <a:avLst/>
-          </a:prstGeom>
-          <a:ln w="19050">
-            <a:solidFill>
-              <a:srgbClr val="000000"/>
-            </a:solidFill>
-          </a:ln>
-        </p:spPr>
-      </p:cxnSp>
-      <p:sp>
-        <p:nvSpPr>
-          <p:cNvPr id="20" name="Freeform 19"/>
-          <p:cNvSpPr/>
-          <p:nvPr/>
-        </p:nvSpPr>
-        <p:spPr>
-          <a:xfrm>
-            <a:off x="3447288" y="3054096"/>
-            <a:ext cx="164592" cy="100584"/>
+            <a:off x="1709928" y="2432304"/>
+            <a:ext cx="237744" cy="109728"/>
           </a:xfrm>
           <a:custGeom>
             <a:avLst/>
@@ -4177,15 +3896,18 @@
             <a:cxnLst/>
             <a:rect l="l" t="t" r="r" b="b"/>
             <a:pathLst>
-              <a:path w="164592" h="100584">
+              <a:path w="237744" h="109728">
                 <a:moveTo>
-                  <a:pt x="0" y="0"/>
+                  <a:pt x="0" y="54864"/>
                 </a:moveTo>
                 <a:lnTo>
-                  <a:pt x="164592" y="50292"/>
+                  <a:pt x="118872" y="0"/>
                 </a:lnTo>
                 <a:lnTo>
-                  <a:pt x="0" y="100584"/>
+                  <a:pt x="237744" y="54864"/>
+                </a:lnTo>
+                <a:lnTo>
+                  <a:pt x="118872" y="109728"/>
                 </a:lnTo>
                 <a:close/>
               </a:path>
@@ -4224,840 +3946,14 @@
       </p:sp>
       <p:sp>
         <p:nvSpPr>
-          <p:cNvPr id="21" name="TextBox 20"/>
-          <p:cNvSpPr txBox="1"/>
-          <p:nvPr/>
-        </p:nvSpPr>
-        <p:spPr>
-          <a:xfrm>
-            <a:off x="3310128" y="2221992"/>
-            <a:ext cx="2103120" cy="685800"/>
-          </a:xfrm>
-          <a:prstGeom prst="rect">
-            <a:avLst/>
-          </a:prstGeom>
-          <a:noFill/>
-        </p:spPr>
-        <p:txBody>
-          <a:bodyPr wrap="none" lIns="0" tIns="0" rIns="0" bIns="0" anchor="t">
-            <a:spAutoFit/>
-          </a:bodyPr>
-          <a:lstStyle/>
-          <a:p>
-            <a:pPr algn="l">
-              <a:lnSpc>
-                <a:spcPct val="130000"/>
-              </a:lnSpc>
-            </a:pPr>
-            <a:r>
-              <a:rPr sz="1100" b="1">
-                <a:solidFill>
-                  <a:srgbClr val="000000"/>
-                </a:solidFill>
-                <a:latin typeface="Pretendard"/>
-                <a:ea typeface="Pretendard"/>
-                <a:cs typeface="Pretendard"/>
-              </a:rPr>
-              <a:t>데이터사이언스 학회</a:t>
-            </a:r>
-          </a:p>
-          <a:p>
-            <a:pPr algn="l">
-              <a:lnSpc>
-                <a:spcPct val="130000"/>
-              </a:lnSpc>
-            </a:pPr>
-            <a:r>
-              <a:rPr sz="950" b="0">
-                <a:solidFill>
-                  <a:srgbClr val="6B6B6B"/>
-                </a:solidFill>
-                <a:latin typeface="Pretendard"/>
-                <a:ea typeface="Pretendard"/>
-                <a:cs typeface="Pretendard"/>
-              </a:rPr>
-              <a:t>학회장, 프로젝트 리딩</a:t>
-            </a:r>
-          </a:p>
-          <a:p>
-            <a:pPr algn="l">
-              <a:lnSpc>
-                <a:spcPct val="130000"/>
-              </a:lnSpc>
-            </a:pPr>
-            <a:r>
-              <a:rPr sz="850" b="0">
-                <a:solidFill>
-                  <a:srgbClr val="9A9A9A"/>
-                </a:solidFill>
-                <a:latin typeface="Pretendard"/>
-                <a:ea typeface="Pretendard"/>
-                <a:cs typeface="Pretendard"/>
-              </a:rPr>
-              <a:t>2025.01 ~ 2026.06</a:t>
-            </a:r>
-          </a:p>
-        </p:txBody>
-      </p:sp>
-      <p:sp>
-        <p:nvSpPr>
-          <p:cNvPr id="22" name="Oval 21"/>
+          <p:cNvPr id="12" name="Freeform 11"/>
           <p:cNvSpPr/>
           <p:nvPr/>
         </p:nvSpPr>
         <p:spPr>
           <a:xfrm>
-            <a:off x="5276088" y="2944368"/>
-            <a:ext cx="420624" cy="420624"/>
-          </a:xfrm>
-          <a:prstGeom prst="ellipse">
-            <a:avLst/>
-          </a:prstGeom>
-          <a:solidFill>
-            <a:srgbClr val="FFFFFF"/>
-          </a:solidFill>
-          <a:ln w="19050">
-            <a:solidFill>
-              <a:srgbClr val="000000"/>
-            </a:solidFill>
-          </a:ln>
-          <a:effectLst/>
-        </p:spPr>
-        <p:style>
-          <a:lnRef idx="1">
-            <a:schemeClr val="accent1"/>
-          </a:lnRef>
-          <a:fillRef idx="3">
-            <a:schemeClr val="accent1"/>
-          </a:fillRef>
-          <a:effectRef idx="2">
-            <a:schemeClr val="accent1"/>
-          </a:effectRef>
-          <a:fontRef idx="minor">
-            <a:schemeClr val="lt1"/>
-          </a:fontRef>
-        </p:style>
-        <p:txBody>
-          <a:bodyPr rtlCol="0" anchor="ctr"/>
-          <a:lstStyle/>
-          <a:p>
-            <a:pPr algn="ctr"/>
-            <a:endParaRPr/>
-          </a:p>
-        </p:txBody>
-      </p:sp>
-      <p:cxnSp>
-        <p:nvCxnSpPr>
-          <p:cNvPr id="23" name="Connector 22"/>
-          <p:cNvCxnSpPr/>
-          <p:nvPr/>
-        </p:nvCxnSpPr>
-        <p:spPr>
-          <a:xfrm flipV="1">
-            <a:off x="5399532" y="3063240"/>
-            <a:ext cx="86868" cy="36576"/>
-          </a:xfrm>
-          <a:prstGeom prst="line">
-            <a:avLst/>
-          </a:prstGeom>
-          <a:ln w="9525">
-            <a:solidFill>
-              <a:srgbClr val="000000"/>
-            </a:solidFill>
-          </a:ln>
-        </p:spPr>
-      </p:cxnSp>
-      <p:cxnSp>
-        <p:nvCxnSpPr>
-          <p:cNvPr id="24" name="Connector 23"/>
-          <p:cNvCxnSpPr/>
-          <p:nvPr/>
-        </p:nvCxnSpPr>
-        <p:spPr>
-          <a:xfrm>
-            <a:off x="5399532" y="3099816"/>
-            <a:ext cx="86868" cy="54864"/>
-          </a:xfrm>
-          <a:prstGeom prst="line">
-            <a:avLst/>
-          </a:prstGeom>
-          <a:ln w="9525">
-            <a:solidFill>
-              <a:srgbClr val="000000"/>
-            </a:solidFill>
-          </a:ln>
-        </p:spPr>
-      </p:cxnSp>
-      <p:cxnSp>
-        <p:nvCxnSpPr>
-          <p:cNvPr id="25" name="Connector 24"/>
-          <p:cNvCxnSpPr/>
-          <p:nvPr/>
-        </p:nvCxnSpPr>
-        <p:spPr>
-          <a:xfrm>
-            <a:off x="5399532" y="3099816"/>
-            <a:ext cx="86868" cy="146304"/>
-          </a:xfrm>
-          <a:prstGeom prst="line">
-            <a:avLst/>
-          </a:prstGeom>
-          <a:ln w="9525">
-            <a:solidFill>
-              <a:srgbClr val="000000"/>
-            </a:solidFill>
-          </a:ln>
-        </p:spPr>
-      </p:cxnSp>
-      <p:cxnSp>
-        <p:nvCxnSpPr>
-          <p:cNvPr id="26" name="Connector 25"/>
-          <p:cNvCxnSpPr/>
-          <p:nvPr/>
-        </p:nvCxnSpPr>
-        <p:spPr>
-          <a:xfrm flipV="1">
-            <a:off x="5399532" y="3063240"/>
-            <a:ext cx="86868" cy="146304"/>
-          </a:xfrm>
-          <a:prstGeom prst="line">
-            <a:avLst/>
-          </a:prstGeom>
-          <a:ln w="9525">
-            <a:solidFill>
-              <a:srgbClr val="000000"/>
-            </a:solidFill>
-          </a:ln>
-        </p:spPr>
-      </p:cxnSp>
-      <p:cxnSp>
-        <p:nvCxnSpPr>
-          <p:cNvPr id="27" name="Connector 26"/>
-          <p:cNvCxnSpPr/>
-          <p:nvPr/>
-        </p:nvCxnSpPr>
-        <p:spPr>
-          <a:xfrm flipV="1">
-            <a:off x="5399532" y="3154680"/>
-            <a:ext cx="86868" cy="54864"/>
-          </a:xfrm>
-          <a:prstGeom prst="line">
-            <a:avLst/>
-          </a:prstGeom>
-          <a:ln w="9525">
-            <a:solidFill>
-              <a:srgbClr val="000000"/>
-            </a:solidFill>
-          </a:ln>
-        </p:spPr>
-      </p:cxnSp>
-      <p:cxnSp>
-        <p:nvCxnSpPr>
-          <p:cNvPr id="28" name="Connector 27"/>
-          <p:cNvCxnSpPr/>
-          <p:nvPr/>
-        </p:nvCxnSpPr>
-        <p:spPr>
-          <a:xfrm>
-            <a:off x="5399532" y="3209544"/>
-            <a:ext cx="86868" cy="36576"/>
-          </a:xfrm>
-          <a:prstGeom prst="line">
-            <a:avLst/>
-          </a:prstGeom>
-          <a:ln w="9525">
-            <a:solidFill>
-              <a:srgbClr val="000000"/>
-            </a:solidFill>
-          </a:ln>
-        </p:spPr>
-      </p:cxnSp>
-      <p:cxnSp>
-        <p:nvCxnSpPr>
-          <p:cNvPr id="29" name="Connector 28"/>
-          <p:cNvCxnSpPr/>
-          <p:nvPr/>
-        </p:nvCxnSpPr>
-        <p:spPr>
-          <a:xfrm>
-            <a:off x="5486400" y="3063240"/>
-            <a:ext cx="86868" cy="91440"/>
-          </a:xfrm>
-          <a:prstGeom prst="line">
-            <a:avLst/>
-          </a:prstGeom>
-          <a:ln w="9525">
-            <a:solidFill>
-              <a:srgbClr val="000000"/>
-            </a:solidFill>
-          </a:ln>
-        </p:spPr>
-      </p:cxnSp>
-      <p:cxnSp>
-        <p:nvCxnSpPr>
-          <p:cNvPr id="30" name="Connector 29"/>
-          <p:cNvCxnSpPr/>
-          <p:nvPr/>
-        </p:nvCxnSpPr>
-        <p:spPr>
-          <a:xfrm>
-            <a:off x="5486400" y="3154680"/>
-            <a:ext cx="86868" cy="0"/>
-          </a:xfrm>
-          <a:prstGeom prst="line">
-            <a:avLst/>
-          </a:prstGeom>
-          <a:ln w="9525">
-            <a:solidFill>
-              <a:srgbClr val="000000"/>
-            </a:solidFill>
-          </a:ln>
-        </p:spPr>
-      </p:cxnSp>
-      <p:cxnSp>
-        <p:nvCxnSpPr>
-          <p:cNvPr id="31" name="Connector 30"/>
-          <p:cNvCxnSpPr/>
-          <p:nvPr/>
-        </p:nvCxnSpPr>
-        <p:spPr>
-          <a:xfrm flipV="1">
-            <a:off x="5486400" y="3154680"/>
-            <a:ext cx="86868" cy="91440"/>
-          </a:xfrm>
-          <a:prstGeom prst="line">
-            <a:avLst/>
-          </a:prstGeom>
-          <a:ln w="9525">
-            <a:solidFill>
-              <a:srgbClr val="000000"/>
-            </a:solidFill>
-          </a:ln>
-        </p:spPr>
-      </p:cxnSp>
-      <p:sp>
-        <p:nvSpPr>
-          <p:cNvPr id="32" name="Oval 31"/>
-          <p:cNvSpPr/>
-          <p:nvPr/>
-        </p:nvSpPr>
-        <p:spPr>
-          <a:xfrm>
-            <a:off x="5378958" y="3079242"/>
-            <a:ext cx="41148" cy="41148"/>
-          </a:xfrm>
-          <a:prstGeom prst="ellipse">
-            <a:avLst/>
-          </a:prstGeom>
-          <a:solidFill>
-            <a:srgbClr val="FFFFFF"/>
-          </a:solidFill>
-          <a:ln w="15875">
-            <a:solidFill>
-              <a:srgbClr val="000000"/>
-            </a:solidFill>
-          </a:ln>
-          <a:effectLst/>
-        </p:spPr>
-        <p:style>
-          <a:lnRef idx="1">
-            <a:schemeClr val="accent1"/>
-          </a:lnRef>
-          <a:fillRef idx="3">
-            <a:schemeClr val="accent1"/>
-          </a:fillRef>
-          <a:effectRef idx="2">
-            <a:schemeClr val="accent1"/>
-          </a:effectRef>
-          <a:fontRef idx="minor">
-            <a:schemeClr val="lt1"/>
-          </a:fontRef>
-        </p:style>
-        <p:txBody>
-          <a:bodyPr rtlCol="0" anchor="ctr"/>
-          <a:lstStyle/>
-          <a:p>
-            <a:pPr algn="ctr"/>
-            <a:endParaRPr/>
-          </a:p>
-        </p:txBody>
-      </p:sp>
-      <p:sp>
-        <p:nvSpPr>
-          <p:cNvPr id="33" name="Oval 32"/>
-          <p:cNvSpPr/>
-          <p:nvPr/>
-        </p:nvSpPr>
-        <p:spPr>
-          <a:xfrm>
-            <a:off x="5378958" y="3188970"/>
-            <a:ext cx="41148" cy="41148"/>
-          </a:xfrm>
-          <a:prstGeom prst="ellipse">
-            <a:avLst/>
-          </a:prstGeom>
-          <a:solidFill>
-            <a:srgbClr val="FFFFFF"/>
-          </a:solidFill>
-          <a:ln w="15875">
-            <a:solidFill>
-              <a:srgbClr val="000000"/>
-            </a:solidFill>
-          </a:ln>
-          <a:effectLst/>
-        </p:spPr>
-        <p:style>
-          <a:lnRef idx="1">
-            <a:schemeClr val="accent1"/>
-          </a:lnRef>
-          <a:fillRef idx="3">
-            <a:schemeClr val="accent1"/>
-          </a:fillRef>
-          <a:effectRef idx="2">
-            <a:schemeClr val="accent1"/>
-          </a:effectRef>
-          <a:fontRef idx="minor">
-            <a:schemeClr val="lt1"/>
-          </a:fontRef>
-        </p:style>
-        <p:txBody>
-          <a:bodyPr rtlCol="0" anchor="ctr"/>
-          <a:lstStyle/>
-          <a:p>
-            <a:pPr algn="ctr"/>
-            <a:endParaRPr/>
-          </a:p>
-        </p:txBody>
-      </p:sp>
-      <p:sp>
-        <p:nvSpPr>
-          <p:cNvPr id="34" name="Oval 33"/>
-          <p:cNvSpPr/>
-          <p:nvPr/>
-        </p:nvSpPr>
-        <p:spPr>
-          <a:xfrm>
-            <a:off x="5465826" y="3042666"/>
-            <a:ext cx="41148" cy="41148"/>
-          </a:xfrm>
-          <a:prstGeom prst="ellipse">
-            <a:avLst/>
-          </a:prstGeom>
-          <a:solidFill>
-            <a:srgbClr val="FFFFFF"/>
-          </a:solidFill>
-          <a:ln w="15875">
-            <a:solidFill>
-              <a:srgbClr val="000000"/>
-            </a:solidFill>
-          </a:ln>
-          <a:effectLst/>
-        </p:spPr>
-        <p:style>
-          <a:lnRef idx="1">
-            <a:schemeClr val="accent1"/>
-          </a:lnRef>
-          <a:fillRef idx="3">
-            <a:schemeClr val="accent1"/>
-          </a:fillRef>
-          <a:effectRef idx="2">
-            <a:schemeClr val="accent1"/>
-          </a:effectRef>
-          <a:fontRef idx="minor">
-            <a:schemeClr val="lt1"/>
-          </a:fontRef>
-        </p:style>
-        <p:txBody>
-          <a:bodyPr rtlCol="0" anchor="ctr"/>
-          <a:lstStyle/>
-          <a:p>
-            <a:pPr algn="ctr"/>
-            <a:endParaRPr/>
-          </a:p>
-        </p:txBody>
-      </p:sp>
-      <p:sp>
-        <p:nvSpPr>
-          <p:cNvPr id="35" name="Oval 34"/>
-          <p:cNvSpPr/>
-          <p:nvPr/>
-        </p:nvSpPr>
-        <p:spPr>
-          <a:xfrm>
-            <a:off x="5465826" y="3134106"/>
-            <a:ext cx="41148" cy="41148"/>
-          </a:xfrm>
-          <a:prstGeom prst="ellipse">
-            <a:avLst/>
-          </a:prstGeom>
-          <a:solidFill>
-            <a:srgbClr val="FFFFFF"/>
-          </a:solidFill>
-          <a:ln w="15875">
-            <a:solidFill>
-              <a:srgbClr val="000000"/>
-            </a:solidFill>
-          </a:ln>
-          <a:effectLst/>
-        </p:spPr>
-        <p:style>
-          <a:lnRef idx="1">
-            <a:schemeClr val="accent1"/>
-          </a:lnRef>
-          <a:fillRef idx="3">
-            <a:schemeClr val="accent1"/>
-          </a:fillRef>
-          <a:effectRef idx="2">
-            <a:schemeClr val="accent1"/>
-          </a:effectRef>
-          <a:fontRef idx="minor">
-            <a:schemeClr val="lt1"/>
-          </a:fontRef>
-        </p:style>
-        <p:txBody>
-          <a:bodyPr rtlCol="0" anchor="ctr"/>
-          <a:lstStyle/>
-          <a:p>
-            <a:pPr algn="ctr"/>
-            <a:endParaRPr/>
-          </a:p>
-        </p:txBody>
-      </p:sp>
-      <p:sp>
-        <p:nvSpPr>
-          <p:cNvPr id="36" name="Oval 35"/>
-          <p:cNvSpPr/>
-          <p:nvPr/>
-        </p:nvSpPr>
-        <p:spPr>
-          <a:xfrm>
-            <a:off x="5465826" y="3225546"/>
-            <a:ext cx="41148" cy="41148"/>
-          </a:xfrm>
-          <a:prstGeom prst="ellipse">
-            <a:avLst/>
-          </a:prstGeom>
-          <a:solidFill>
-            <a:srgbClr val="FFFFFF"/>
-          </a:solidFill>
-          <a:ln w="15875">
-            <a:solidFill>
-              <a:srgbClr val="000000"/>
-            </a:solidFill>
-          </a:ln>
-          <a:effectLst/>
-        </p:spPr>
-        <p:style>
-          <a:lnRef idx="1">
-            <a:schemeClr val="accent1"/>
-          </a:lnRef>
-          <a:fillRef idx="3">
-            <a:schemeClr val="accent1"/>
-          </a:fillRef>
-          <a:effectRef idx="2">
-            <a:schemeClr val="accent1"/>
-          </a:effectRef>
-          <a:fontRef idx="minor">
-            <a:schemeClr val="lt1"/>
-          </a:fontRef>
-        </p:style>
-        <p:txBody>
-          <a:bodyPr rtlCol="0" anchor="ctr"/>
-          <a:lstStyle/>
-          <a:p>
-            <a:pPr algn="ctr"/>
-            <a:endParaRPr/>
-          </a:p>
-        </p:txBody>
-      </p:sp>
-      <p:sp>
-        <p:nvSpPr>
-          <p:cNvPr id="37" name="Oval 36"/>
-          <p:cNvSpPr/>
-          <p:nvPr/>
-        </p:nvSpPr>
-        <p:spPr>
-          <a:xfrm>
-            <a:off x="5552694" y="3134106"/>
-            <a:ext cx="41148" cy="41148"/>
-          </a:xfrm>
-          <a:prstGeom prst="ellipse">
-            <a:avLst/>
-          </a:prstGeom>
-          <a:solidFill>
-            <a:srgbClr val="FFFFFF"/>
-          </a:solidFill>
-          <a:ln w="15875">
-            <a:solidFill>
-              <a:srgbClr val="000000"/>
-            </a:solidFill>
-          </a:ln>
-          <a:effectLst/>
-        </p:spPr>
-        <p:style>
-          <a:lnRef idx="1">
-            <a:schemeClr val="accent1"/>
-          </a:lnRef>
-          <a:fillRef idx="3">
-            <a:schemeClr val="accent1"/>
-          </a:fillRef>
-          <a:effectRef idx="2">
-            <a:schemeClr val="accent1"/>
-          </a:effectRef>
-          <a:fontRef idx="minor">
-            <a:schemeClr val="lt1"/>
-          </a:fontRef>
-        </p:style>
-        <p:txBody>
-          <a:bodyPr rtlCol="0" anchor="ctr"/>
-          <a:lstStyle/>
-          <a:p>
-            <a:pPr algn="ctr"/>
-            <a:endParaRPr/>
-          </a:p>
-        </p:txBody>
-      </p:sp>
-      <p:sp>
-        <p:nvSpPr>
-          <p:cNvPr id="38" name="TextBox 37"/>
-          <p:cNvSpPr txBox="1"/>
-          <p:nvPr/>
-        </p:nvSpPr>
-        <p:spPr>
-          <a:xfrm>
-            <a:off x="5276088" y="2221992"/>
-            <a:ext cx="2103120" cy="685800"/>
-          </a:xfrm>
-          <a:prstGeom prst="rect">
-            <a:avLst/>
-          </a:prstGeom>
-          <a:noFill/>
-        </p:spPr>
-        <p:txBody>
-          <a:bodyPr wrap="none" lIns="0" tIns="0" rIns="0" bIns="0" anchor="t">
-            <a:spAutoFit/>
-          </a:bodyPr>
-          <a:lstStyle/>
-          <a:p>
-            <a:pPr algn="l">
-              <a:lnSpc>
-                <a:spcPct val="130000"/>
-              </a:lnSpc>
-            </a:pPr>
-            <a:r>
-              <a:rPr sz="1100" b="1">
-                <a:solidFill>
-                  <a:srgbClr val="000000"/>
-                </a:solidFill>
-                <a:latin typeface="Pretendard"/>
-                <a:ea typeface="Pretendard"/>
-                <a:cs typeface="Pretendard"/>
-              </a:rPr>
-              <a:t>통계학 석사</a:t>
-            </a:r>
-          </a:p>
-          <a:p>
-            <a:pPr algn="l">
-              <a:lnSpc>
-                <a:spcPct val="130000"/>
-              </a:lnSpc>
-            </a:pPr>
-            <a:r>
-              <a:rPr sz="950" b="0">
-                <a:solidFill>
-                  <a:srgbClr val="6B6B6B"/>
-                </a:solidFill>
-                <a:latin typeface="Pretendard"/>
-                <a:ea typeface="Pretendard"/>
-                <a:cs typeface="Pretendard"/>
-              </a:rPr>
-              <a:t>딥러닝 모델 설계</a:t>
-            </a:r>
-          </a:p>
-          <a:p>
-            <a:pPr algn="l">
-              <a:lnSpc>
-                <a:spcPct val="130000"/>
-              </a:lnSpc>
-            </a:pPr>
-            <a:r>
-              <a:rPr sz="850" b="0">
-                <a:solidFill>
-                  <a:srgbClr val="9A9A9A"/>
-                </a:solidFill>
-                <a:latin typeface="Pretendard"/>
-                <a:ea typeface="Pretendard"/>
-                <a:cs typeface="Pretendard"/>
-              </a:rPr>
-              <a:t>2025.09 ~</a:t>
-            </a:r>
-          </a:p>
-        </p:txBody>
-      </p:sp>
-      <p:sp>
-        <p:nvSpPr>
-          <p:cNvPr id="39" name="TextBox 38"/>
-          <p:cNvSpPr txBox="1"/>
-          <p:nvPr/>
-        </p:nvSpPr>
-        <p:spPr>
-          <a:xfrm>
-            <a:off x="548640" y="5074920"/>
-            <a:ext cx="914400" cy="182880"/>
-          </a:xfrm>
-          <a:prstGeom prst="rect">
-            <a:avLst/>
-          </a:prstGeom>
-          <a:noFill/>
-        </p:spPr>
-        <p:txBody>
-          <a:bodyPr wrap="none" lIns="0" tIns="0" rIns="0" bIns="0" anchor="t">
-            <a:spAutoFit/>
-          </a:bodyPr>
-          <a:lstStyle/>
-          <a:p>
-            <a:pPr algn="l">
-              <a:lnSpc>
-                <a:spcPct val="115000"/>
-              </a:lnSpc>
-            </a:pPr>
-            <a:r>
-              <a:rPr sz="850" b="0">
-                <a:solidFill>
-                  <a:srgbClr val="9A9A9A"/>
-                </a:solidFill>
-                <a:latin typeface="Pretendard Medium"/>
-                <a:ea typeface="Pretendard Medium"/>
-                <a:cs typeface="Pretendard Medium"/>
-              </a:rPr>
-              <a:t>프로젝트</a:t>
-            </a:r>
-          </a:p>
-        </p:txBody>
-      </p:sp>
-      <p:sp>
-        <p:nvSpPr>
-          <p:cNvPr id="40" name="Rectangle 39"/>
-          <p:cNvSpPr/>
-          <p:nvPr/>
-        </p:nvSpPr>
-        <p:spPr>
-          <a:xfrm>
-            <a:off x="548640" y="4973955"/>
-            <a:ext cx="6355080" cy="19050"/>
-          </a:xfrm>
-          <a:prstGeom prst="rect">
-            <a:avLst/>
-          </a:prstGeom>
-          <a:solidFill>
-            <a:srgbClr val="000000"/>
-          </a:solidFill>
-          <a:ln>
-            <a:noFill/>
-          </a:ln>
-          <a:effectLst/>
-        </p:spPr>
-        <p:style>
-          <a:lnRef idx="1">
-            <a:schemeClr val="accent1"/>
-          </a:lnRef>
-          <a:fillRef idx="3">
-            <a:schemeClr val="accent1"/>
-          </a:fillRef>
-          <a:effectRef idx="2">
-            <a:schemeClr val="accent1"/>
-          </a:effectRef>
-          <a:fontRef idx="minor">
-            <a:schemeClr val="lt1"/>
-          </a:fontRef>
-        </p:style>
-        <p:txBody>
-          <a:bodyPr rtlCol="0" anchor="ctr"/>
-          <a:lstStyle/>
-          <a:p>
-            <a:pPr algn="ctr"/>
-            <a:endParaRPr/>
-          </a:p>
-        </p:txBody>
-      </p:sp>
-      <p:cxnSp>
-        <p:nvCxnSpPr>
-          <p:cNvPr id="41" name="Connector 40"/>
-          <p:cNvCxnSpPr/>
-          <p:nvPr/>
-        </p:nvCxnSpPr>
-        <p:spPr>
-          <a:xfrm flipV="1">
-            <a:off x="6903720" y="4215384"/>
-            <a:ext cx="411480" cy="768096"/>
-          </a:xfrm>
-          <a:prstGeom prst="line">
-            <a:avLst/>
-          </a:prstGeom>
-          <a:ln w="19050">
-            <a:solidFill>
-              <a:srgbClr val="000000"/>
-            </a:solidFill>
-          </a:ln>
-        </p:spPr>
-      </p:cxnSp>
-      <p:sp>
-        <p:nvSpPr>
-          <p:cNvPr id="42" name="Oval 41"/>
-          <p:cNvSpPr/>
-          <p:nvPr/>
-        </p:nvSpPr>
-        <p:spPr>
-          <a:xfrm>
-            <a:off x="1984248" y="4773168"/>
-            <a:ext cx="420624" cy="420624"/>
-          </a:xfrm>
-          <a:prstGeom prst="ellipse">
-            <a:avLst/>
-          </a:prstGeom>
-          <a:solidFill>
-            <a:srgbClr val="FFFFFF"/>
-          </a:solidFill>
-          <a:ln w="19050">
-            <a:solidFill>
-              <a:srgbClr val="000000"/>
-            </a:solidFill>
-          </a:ln>
-          <a:effectLst/>
-        </p:spPr>
-        <p:style>
-          <a:lnRef idx="1">
-            <a:schemeClr val="accent1"/>
-          </a:lnRef>
-          <a:fillRef idx="3">
-            <a:schemeClr val="accent1"/>
-          </a:fillRef>
-          <a:effectRef idx="2">
-            <a:schemeClr val="accent1"/>
-          </a:effectRef>
-          <a:fontRef idx="minor">
-            <a:schemeClr val="lt1"/>
-          </a:fontRef>
-        </p:style>
-        <p:txBody>
-          <a:bodyPr rtlCol="0" anchor="ctr"/>
-          <a:lstStyle/>
-          <a:p>
-            <a:pPr algn="ctr"/>
-            <a:endParaRPr/>
-          </a:p>
-        </p:txBody>
-      </p:sp>
-      <p:sp>
-        <p:nvSpPr>
-          <p:cNvPr id="43" name="Freeform 42"/>
-          <p:cNvSpPr/>
-          <p:nvPr/>
-        </p:nvSpPr>
-        <p:spPr>
-          <a:xfrm>
-            <a:off x="2093976" y="4873752"/>
-            <a:ext cx="210312" cy="210312"/>
+            <a:off x="1764792" y="2514600"/>
+            <a:ext cx="128015" cy="64008"/>
           </a:xfrm>
           <a:custGeom>
             <a:avLst/>
@@ -5066,15 +3962,18 @@
             <a:cxnLst/>
             <a:rect l="l" t="t" r="r" b="b"/>
             <a:pathLst>
-              <a:path w="210312" h="210312">
+              <a:path w="128015" h="64008">
                 <a:moveTo>
                   <a:pt x="0" y="0"/>
                 </a:moveTo>
                 <a:lnTo>
-                  <a:pt x="0" y="210312"/>
+                  <a:pt x="0" y="64008"/>
                 </a:lnTo>
                 <a:lnTo>
-                  <a:pt x="210312" y="210312"/>
+                  <a:pt x="128015" y="64008"/>
+                </a:lnTo>
+                <a:lnTo>
+                  <a:pt x="128015" y="0"/>
                 </a:lnTo>
               </a:path>
             </a:pathLst>
@@ -5110,87 +4009,37 @@
           </a:p>
         </p:txBody>
       </p:sp>
-      <p:sp>
-        <p:nvSpPr>
-          <p:cNvPr id="44" name="Freeform 43"/>
-          <p:cNvSpPr/>
-          <p:nvPr/>
-        </p:nvSpPr>
-        <p:spPr>
-          <a:xfrm>
-            <a:off x="2093976" y="4901184"/>
-            <a:ext cx="192024" cy="109728"/>
-          </a:xfrm>
-          <a:custGeom>
-            <a:avLst/>
-            <a:gdLst/>
-            <a:ahLst/>
-            <a:cxnLst/>
-            <a:rect l="l" t="t" r="r" b="b"/>
-            <a:pathLst>
-              <a:path w="192024" h="109728">
-                <a:moveTo>
-                  <a:pt x="0" y="0"/>
-                </a:moveTo>
-                <a:lnTo>
-                  <a:pt x="54864" y="0"/>
-                </a:lnTo>
-                <a:lnTo>
-                  <a:pt x="54864" y="54864"/>
-                </a:lnTo>
-                <a:lnTo>
-                  <a:pt x="109727" y="54864"/>
-                </a:lnTo>
-                <a:lnTo>
-                  <a:pt x="109727" y="109728"/>
-                </a:lnTo>
-                <a:lnTo>
-                  <a:pt x="192024" y="109728"/>
-                </a:lnTo>
-              </a:path>
-            </a:pathLst>
-          </a:custGeom>
-          <a:noFill/>
-          <a:ln w="19050">
+      <p:cxnSp>
+        <p:nvCxnSpPr>
+          <p:cNvPr id="13" name="Connector 12"/>
+          <p:cNvCxnSpPr/>
+          <p:nvPr/>
+        </p:nvCxnSpPr>
+        <p:spPr>
+          <a:xfrm>
+            <a:off x="1929384" y="2496312"/>
+            <a:ext cx="0" cy="82296"/>
+          </a:xfrm>
+          <a:prstGeom prst="line">
+            <a:avLst/>
+          </a:prstGeom>
+          <a:ln w="12700">
             <a:solidFill>
               <a:srgbClr val="000000"/>
             </a:solidFill>
           </a:ln>
-          <a:effectLst/>
-        </p:spPr>
-        <p:style>
-          <a:lnRef idx="1">
-            <a:schemeClr val="accent1"/>
-          </a:lnRef>
-          <a:fillRef idx="3">
-            <a:schemeClr val="accent1"/>
-          </a:fillRef>
-          <a:effectRef idx="2">
-            <a:schemeClr val="accent1"/>
-          </a:effectRef>
-          <a:fontRef idx="minor">
-            <a:schemeClr val="lt1"/>
-          </a:fontRef>
-        </p:style>
-        <p:txBody>
-          <a:bodyPr rtlCol="0" anchor="ctr"/>
-          <a:lstStyle/>
-          <a:p>
-            <a:pPr algn="ctr"/>
-            <a:endParaRPr/>
-          </a:p>
-        </p:txBody>
-      </p:sp>
-      <p:sp>
-        <p:nvSpPr>
-          <p:cNvPr id="45" name="TextBox 44"/>
+        </p:spPr>
+      </p:cxnSp>
+      <p:sp>
+        <p:nvSpPr>
+          <p:cNvPr id="14" name="TextBox 13"/>
           <p:cNvSpPr txBox="1"/>
           <p:nvPr/>
         </p:nvSpPr>
         <p:spPr>
           <a:xfrm>
-            <a:off x="1984248" y="5294376"/>
-            <a:ext cx="2103120" cy="685800"/>
+            <a:off x="1618488" y="1472184"/>
+            <a:ext cx="2011680" cy="658368"/>
           </a:xfrm>
           <a:prstGeom prst="rect">
             <a:avLst/>
@@ -5217,7 +4066,7 @@
                 <a:ea typeface="Pretendard"/>
                 <a:cs typeface="Pretendard"/>
               </a:rPr>
-              <a:t>생존분석 연구보조</a:t>
+              <a:t>통계학 학사</a:t>
             </a:r>
           </a:p>
           <a:p>
@@ -5227,7 +4076,7 @@
               </a:lnSpc>
             </a:pPr>
             <a:r>
-              <a:rPr sz="950" b="0">
+              <a:rPr sz="900" b="0">
                 <a:solidFill>
                   <a:srgbClr val="6B6B6B"/>
                 </a:solidFill>
@@ -5235,7 +4084,7 @@
                 <a:ea typeface="Pretendard"/>
                 <a:cs typeface="Pretendard"/>
               </a:rPr>
-              <a:t>사건 시점 분석</a:t>
+              <a:t>통계적 추론과 모델링</a:t>
             </a:r>
           </a:p>
           <a:p>
@@ -5253,20 +4102,20 @@
                 <a:ea typeface="Pretendard"/>
                 <a:cs typeface="Pretendard"/>
               </a:rPr>
-              <a:t>2025.06 ~ 2026.08</a:t>
-            </a:r>
-          </a:p>
-        </p:txBody>
-      </p:sp>
-      <p:sp>
-        <p:nvSpPr>
-          <p:cNvPr id="46" name="Oval 45"/>
+              <a:t>2021.03 ~ 2025.08</a:t>
+            </a:r>
+          </a:p>
+        </p:txBody>
+      </p:sp>
+      <p:sp>
+        <p:nvSpPr>
+          <p:cNvPr id="15" name="Oval 14"/>
           <p:cNvSpPr/>
           <p:nvPr/>
         </p:nvSpPr>
         <p:spPr>
           <a:xfrm>
-            <a:off x="3904487" y="4773168"/>
+            <a:off x="3447288" y="2304288"/>
             <a:ext cx="420624" cy="420624"/>
           </a:xfrm>
           <a:prstGeom prst="ellipse">
@@ -5305,42 +4154,96 @@
           </a:p>
         </p:txBody>
       </p:sp>
-      <p:cxnSp>
-        <p:nvCxnSpPr>
-          <p:cNvPr id="47" name="Connector 46"/>
-          <p:cNvCxnSpPr/>
-          <p:nvPr/>
-        </p:nvCxnSpPr>
-        <p:spPr>
-          <a:xfrm>
-            <a:off x="4037076" y="5047488"/>
-            <a:ext cx="155448" cy="0"/>
-          </a:xfrm>
-          <a:prstGeom prst="line">
-            <a:avLst/>
-          </a:prstGeom>
-          <a:ln w="12700">
+      <p:sp>
+        <p:nvSpPr>
+          <p:cNvPr id="16" name="Freeform 15"/>
+          <p:cNvSpPr/>
+          <p:nvPr/>
+        </p:nvSpPr>
+        <p:spPr>
+          <a:xfrm>
+            <a:off x="3557016" y="2441448"/>
+            <a:ext cx="201168" cy="164592"/>
+          </a:xfrm>
+          <a:custGeom>
+            <a:avLst/>
+            <a:gdLst/>
+            <a:ahLst/>
+            <a:cxnLst/>
+            <a:rect l="l" t="t" r="r" b="b"/>
+            <a:pathLst>
+              <a:path w="201168" h="164592">
+                <a:moveTo>
+                  <a:pt x="0" y="0"/>
+                </a:moveTo>
+                <a:lnTo>
+                  <a:pt x="201168" y="0"/>
+                </a:lnTo>
+                <a:lnTo>
+                  <a:pt x="201168" y="109728"/>
+                </a:lnTo>
+                <a:lnTo>
+                  <a:pt x="82296" y="109728"/>
+                </a:lnTo>
+                <a:lnTo>
+                  <a:pt x="36576" y="164592"/>
+                </a:lnTo>
+                <a:lnTo>
+                  <a:pt x="45720" y="109728"/>
+                </a:lnTo>
+                <a:lnTo>
+                  <a:pt x="0" y="109728"/>
+                </a:lnTo>
+                <a:close/>
+              </a:path>
+            </a:pathLst>
+          </a:custGeom>
+          <a:noFill/>
+          <a:ln w="15875">
             <a:solidFill>
               <a:srgbClr val="000000"/>
             </a:solidFill>
           </a:ln>
-        </p:spPr>
-      </p:cxnSp>
+          <a:effectLst/>
+        </p:spPr>
+        <p:style>
+          <a:lnRef idx="1">
+            <a:schemeClr val="accent1"/>
+          </a:lnRef>
+          <a:fillRef idx="3">
+            <a:schemeClr val="accent1"/>
+          </a:fillRef>
+          <a:effectRef idx="2">
+            <a:schemeClr val="accent1"/>
+          </a:effectRef>
+          <a:fontRef idx="minor">
+            <a:schemeClr val="lt1"/>
+          </a:fontRef>
+        </p:style>
+        <p:txBody>
+          <a:bodyPr rtlCol="0" anchor="ctr"/>
+          <a:lstStyle/>
+          <a:p>
+            <a:pPr algn="ctr"/>
+            <a:endParaRPr/>
+          </a:p>
+        </p:txBody>
+      </p:sp>
       <p:cxnSp>
         <p:nvCxnSpPr>
-          <p:cNvPr id="48" name="Connector 47"/>
+          <p:cNvPr id="17" name="Connector 16"/>
           <p:cNvCxnSpPr/>
           <p:nvPr/>
         </p:nvCxnSpPr>
         <p:spPr>
-          <a:xfrm flipH="1" flipV="1">
-            <a:off x="4114800" y="4905756"/>
-            <a:ext cx="77724" cy="141732"/>
+          <a:xfrm>
+            <a:off x="3598164" y="2482596"/>
+            <a:ext cx="118872" cy="0"/>
           </a:xfrm>
           <a:prstGeom prst="line">
             <a:avLst/>
           </a:prstGeom>
-          <a:ln w="12700">
+          <a:ln w="11430">
             <a:solidFill>
               <a:srgbClr val="000000"/>
             </a:solidFill>
@@ -5349,19 +4252,19 @@
       </p:cxnSp>
       <p:cxnSp>
         <p:nvCxnSpPr>
-          <p:cNvPr id="49" name="Connector 48"/>
+          <p:cNvPr id="18" name="Connector 17"/>
           <p:cNvCxnSpPr/>
           <p:nvPr/>
         </p:nvCxnSpPr>
         <p:spPr>
-          <a:xfrm flipH="1">
-            <a:off x="4037076" y="4905756"/>
-            <a:ext cx="77724" cy="141732"/>
+          <a:xfrm>
+            <a:off x="3598164" y="2514600"/>
+            <a:ext cx="118872" cy="0"/>
           </a:xfrm>
           <a:prstGeom prst="line">
             <a:avLst/>
           </a:prstGeom>
-          <a:ln w="12700">
+          <a:ln w="11430">
             <a:solidFill>
               <a:srgbClr val="000000"/>
             </a:solidFill>
@@ -5370,14 +4273,91 @@
       </p:cxnSp>
       <p:sp>
         <p:nvSpPr>
-          <p:cNvPr id="50" name="Oval 49"/>
+          <p:cNvPr id="19" name="TextBox 18"/>
+          <p:cNvSpPr txBox="1"/>
+          <p:nvPr/>
+        </p:nvSpPr>
+        <p:spPr>
+          <a:xfrm>
+            <a:off x="3447288" y="1472184"/>
+            <a:ext cx="2011680" cy="658368"/>
+          </a:xfrm>
+          <a:prstGeom prst="rect">
+            <a:avLst/>
+          </a:prstGeom>
+          <a:noFill/>
+        </p:spPr>
+        <p:txBody>
+          <a:bodyPr wrap="none" lIns="0" tIns="0" rIns="0" bIns="0" anchor="t">
+            <a:spAutoFit/>
+          </a:bodyPr>
+          <a:lstStyle/>
+          <a:p>
+            <a:pPr algn="l">
+              <a:lnSpc>
+                <a:spcPct val="130000"/>
+              </a:lnSpc>
+            </a:pPr>
+            <a:r>
+              <a:rPr sz="1100" b="1">
+                <a:solidFill>
+                  <a:srgbClr val="000000"/>
+                </a:solidFill>
+                <a:latin typeface="Pretendard"/>
+                <a:ea typeface="Pretendard"/>
+                <a:cs typeface="Pretendard"/>
+              </a:rPr>
+              <a:t>외국인 학생 멘토링</a:t>
+            </a:r>
+          </a:p>
+          <a:p>
+            <a:pPr algn="l">
+              <a:lnSpc>
+                <a:spcPct val="130000"/>
+              </a:lnSpc>
+            </a:pPr>
+            <a:r>
+              <a:rPr sz="900" b="0">
+                <a:solidFill>
+                  <a:srgbClr val="6B6B6B"/>
+                </a:solidFill>
+                <a:latin typeface="Pretendard"/>
+                <a:ea typeface="Pretendard"/>
+                <a:cs typeface="Pretendard"/>
+              </a:rPr>
+              <a:t>통계학 전공 학업 지원</a:t>
+            </a:r>
+          </a:p>
+          <a:p>
+            <a:pPr algn="l">
+              <a:lnSpc>
+                <a:spcPct val="130000"/>
+              </a:lnSpc>
+            </a:pPr>
+            <a:r>
+              <a:rPr sz="850" b="0">
+                <a:solidFill>
+                  <a:srgbClr val="9A9A9A"/>
+                </a:solidFill>
+                <a:latin typeface="Pretendard"/>
+                <a:ea typeface="Pretendard"/>
+                <a:cs typeface="Pretendard"/>
+              </a:rPr>
+              <a:t>2024.09 ~ 2024.12</a:t>
+            </a:r>
+          </a:p>
+        </p:txBody>
+      </p:sp>
+      <p:sp>
+        <p:nvSpPr>
+          <p:cNvPr id="20" name="Oval 19"/>
           <p:cNvSpPr/>
           <p:nvPr/>
         </p:nvSpPr>
         <p:spPr>
           <a:xfrm>
-            <a:off x="4007358" y="5017770"/>
-            <a:ext cx="59436" cy="59436"/>
+            <a:off x="5276088" y="2304288"/>
+            <a:ext cx="420624" cy="420624"/>
           </a:xfrm>
           <a:prstGeom prst="ellipse">
             <a:avLst/>
@@ -5417,14 +4397,333 @@
       </p:sp>
       <p:sp>
         <p:nvSpPr>
-          <p:cNvPr id="51" name="Oval 50"/>
+          <p:cNvPr id="21" name="Oval 20"/>
           <p:cNvSpPr/>
           <p:nvPr/>
         </p:nvSpPr>
         <p:spPr>
           <a:xfrm>
-            <a:off x="4162806" y="5017770"/>
-            <a:ext cx="59436" cy="59436"/>
+            <a:off x="5404104" y="2436876"/>
+            <a:ext cx="64008" cy="64008"/>
+          </a:xfrm>
+          <a:prstGeom prst="ellipse">
+            <a:avLst/>
+          </a:prstGeom>
+          <a:solidFill>
+            <a:srgbClr val="FFFFFF"/>
+          </a:solidFill>
+          <a:ln w="15875">
+            <a:solidFill>
+              <a:srgbClr val="000000"/>
+            </a:solidFill>
+          </a:ln>
+          <a:effectLst/>
+        </p:spPr>
+        <p:style>
+          <a:lnRef idx="1">
+            <a:schemeClr val="accent1"/>
+          </a:lnRef>
+          <a:fillRef idx="3">
+            <a:schemeClr val="accent1"/>
+          </a:fillRef>
+          <a:effectRef idx="2">
+            <a:schemeClr val="accent1"/>
+          </a:effectRef>
+          <a:fontRef idx="minor">
+            <a:schemeClr val="lt1"/>
+          </a:fontRef>
+        </p:style>
+        <p:txBody>
+          <a:bodyPr rtlCol="0" anchor="ctr"/>
+          <a:lstStyle/>
+          <a:p>
+            <a:pPr algn="ctr"/>
+            <a:endParaRPr/>
+          </a:p>
+        </p:txBody>
+      </p:sp>
+      <p:sp>
+        <p:nvSpPr>
+          <p:cNvPr id="22" name="Freeform 21"/>
+          <p:cNvSpPr/>
+          <p:nvPr/>
+        </p:nvSpPr>
+        <p:spPr>
+          <a:xfrm>
+            <a:off x="5385816" y="2542032"/>
+            <a:ext cx="100584" cy="54864"/>
+          </a:xfrm>
+          <a:custGeom>
+            <a:avLst/>
+            <a:gdLst/>
+            <a:ahLst/>
+            <a:cxnLst/>
+            <a:rect l="l" t="t" r="r" b="b"/>
+            <a:pathLst>
+              <a:path w="100584" h="54864">
+                <a:moveTo>
+                  <a:pt x="0" y="54864"/>
+                </a:moveTo>
+                <a:lnTo>
+                  <a:pt x="9144" y="0"/>
+                </a:lnTo>
+                <a:lnTo>
+                  <a:pt x="91440" y="0"/>
+                </a:lnTo>
+                <a:lnTo>
+                  <a:pt x="100584" y="54864"/>
+                </a:lnTo>
+              </a:path>
+            </a:pathLst>
+          </a:custGeom>
+          <a:noFill/>
+          <a:ln w="15875">
+            <a:solidFill>
+              <a:srgbClr val="000000"/>
+            </a:solidFill>
+          </a:ln>
+          <a:effectLst/>
+        </p:spPr>
+        <p:style>
+          <a:lnRef idx="1">
+            <a:schemeClr val="accent1"/>
+          </a:lnRef>
+          <a:fillRef idx="3">
+            <a:schemeClr val="accent1"/>
+          </a:fillRef>
+          <a:effectRef idx="2">
+            <a:schemeClr val="accent1"/>
+          </a:effectRef>
+          <a:fontRef idx="minor">
+            <a:schemeClr val="lt1"/>
+          </a:fontRef>
+        </p:style>
+        <p:txBody>
+          <a:bodyPr rtlCol="0" anchor="ctr"/>
+          <a:lstStyle/>
+          <a:p>
+            <a:pPr algn="ctr"/>
+            <a:endParaRPr/>
+          </a:p>
+        </p:txBody>
+      </p:sp>
+      <p:sp>
+        <p:nvSpPr>
+          <p:cNvPr id="23" name="Oval 22"/>
+          <p:cNvSpPr/>
+          <p:nvPr/>
+        </p:nvSpPr>
+        <p:spPr>
+          <a:xfrm>
+            <a:off x="5513831" y="2441448"/>
+            <a:ext cx="54864" cy="54864"/>
+          </a:xfrm>
+          <a:prstGeom prst="ellipse">
+            <a:avLst/>
+          </a:prstGeom>
+          <a:solidFill>
+            <a:srgbClr val="FFFFFF"/>
+          </a:solidFill>
+          <a:ln w="15875">
+            <a:solidFill>
+              <a:srgbClr val="000000"/>
+            </a:solidFill>
+          </a:ln>
+          <a:effectLst/>
+        </p:spPr>
+        <p:style>
+          <a:lnRef idx="1">
+            <a:schemeClr val="accent1"/>
+          </a:lnRef>
+          <a:fillRef idx="3">
+            <a:schemeClr val="accent1"/>
+          </a:fillRef>
+          <a:effectRef idx="2">
+            <a:schemeClr val="accent1"/>
+          </a:effectRef>
+          <a:fontRef idx="minor">
+            <a:schemeClr val="lt1"/>
+          </a:fontRef>
+        </p:style>
+        <p:txBody>
+          <a:bodyPr rtlCol="0" anchor="ctr"/>
+          <a:lstStyle/>
+          <a:p>
+            <a:pPr algn="ctr"/>
+            <a:endParaRPr/>
+          </a:p>
+        </p:txBody>
+      </p:sp>
+      <p:sp>
+        <p:nvSpPr>
+          <p:cNvPr id="24" name="Freeform 23"/>
+          <p:cNvSpPr/>
+          <p:nvPr/>
+        </p:nvSpPr>
+        <p:spPr>
+          <a:xfrm>
+            <a:off x="5490972" y="2542032"/>
+            <a:ext cx="100583" cy="54864"/>
+          </a:xfrm>
+          <a:custGeom>
+            <a:avLst/>
+            <a:gdLst/>
+            <a:ahLst/>
+            <a:cxnLst/>
+            <a:rect l="l" t="t" r="r" b="b"/>
+            <a:pathLst>
+              <a:path w="100583" h="54864">
+                <a:moveTo>
+                  <a:pt x="0" y="54864"/>
+                </a:moveTo>
+                <a:lnTo>
+                  <a:pt x="9144" y="0"/>
+                </a:lnTo>
+                <a:lnTo>
+                  <a:pt x="91440" y="0"/>
+                </a:lnTo>
+                <a:lnTo>
+                  <a:pt x="100583" y="54864"/>
+                </a:lnTo>
+              </a:path>
+            </a:pathLst>
+          </a:custGeom>
+          <a:noFill/>
+          <a:ln w="15875">
+            <a:solidFill>
+              <a:srgbClr val="000000"/>
+            </a:solidFill>
+          </a:ln>
+          <a:effectLst/>
+        </p:spPr>
+        <p:style>
+          <a:lnRef idx="1">
+            <a:schemeClr val="accent1"/>
+          </a:lnRef>
+          <a:fillRef idx="3">
+            <a:schemeClr val="accent1"/>
+          </a:fillRef>
+          <a:effectRef idx="2">
+            <a:schemeClr val="accent1"/>
+          </a:effectRef>
+          <a:fontRef idx="minor">
+            <a:schemeClr val="lt1"/>
+          </a:fontRef>
+        </p:style>
+        <p:txBody>
+          <a:bodyPr rtlCol="0" anchor="ctr"/>
+          <a:lstStyle/>
+          <a:p>
+            <a:pPr algn="ctr"/>
+            <a:endParaRPr/>
+          </a:p>
+        </p:txBody>
+      </p:sp>
+      <p:sp>
+        <p:nvSpPr>
+          <p:cNvPr id="25" name="TextBox 24"/>
+          <p:cNvSpPr txBox="1"/>
+          <p:nvPr/>
+        </p:nvSpPr>
+        <p:spPr>
+          <a:xfrm>
+            <a:off x="5276088" y="1252728"/>
+            <a:ext cx="2011680" cy="877824"/>
+          </a:xfrm>
+          <a:prstGeom prst="rect">
+            <a:avLst/>
+          </a:prstGeom>
+          <a:noFill/>
+        </p:spPr>
+        <p:txBody>
+          <a:bodyPr wrap="none" lIns="0" tIns="0" rIns="0" bIns="0" anchor="t">
+            <a:spAutoFit/>
+          </a:bodyPr>
+          <a:lstStyle/>
+          <a:p>
+            <a:pPr algn="l">
+              <a:lnSpc>
+                <a:spcPct val="130000"/>
+              </a:lnSpc>
+            </a:pPr>
+            <a:r>
+              <a:rPr sz="1100" b="1">
+                <a:solidFill>
+                  <a:srgbClr val="000000"/>
+                </a:solidFill>
+                <a:latin typeface="Pretendard"/>
+                <a:ea typeface="Pretendard"/>
+                <a:cs typeface="Pretendard"/>
+              </a:rPr>
+              <a:t>데이터사이언스 학회</a:t>
+            </a:r>
+          </a:p>
+          <a:p>
+            <a:pPr algn="l">
+              <a:lnSpc>
+                <a:spcPct val="130000"/>
+              </a:lnSpc>
+            </a:pPr>
+            <a:r>
+              <a:rPr sz="900" b="0">
+                <a:solidFill>
+                  <a:srgbClr val="6B6B6B"/>
+                </a:solidFill>
+                <a:latin typeface="Pretendard"/>
+                <a:ea typeface="Pretendard"/>
+                <a:cs typeface="Pretendard"/>
+              </a:rPr>
+              <a:t>학회장, 운영팀장</a:t>
+            </a:r>
+          </a:p>
+          <a:p>
+            <a:pPr algn="l">
+              <a:lnSpc>
+                <a:spcPct val="130000"/>
+              </a:lnSpc>
+            </a:pPr>
+            <a:r>
+              <a:rPr sz="900" b="0">
+                <a:solidFill>
+                  <a:srgbClr val="6B6B6B"/>
+                </a:solidFill>
+                <a:latin typeface="Pretendard"/>
+                <a:ea typeface="Pretendard"/>
+                <a:cs typeface="Pretendard"/>
+              </a:rPr>
+              <a:t>스터디 진행, 프로젝트 진행</a:t>
+            </a:r>
+          </a:p>
+          <a:p>
+            <a:pPr algn="l">
+              <a:lnSpc>
+                <a:spcPct val="130000"/>
+              </a:lnSpc>
+            </a:pPr>
+            <a:r>
+              <a:rPr sz="850" b="0">
+                <a:solidFill>
+                  <a:srgbClr val="9A9A9A"/>
+                </a:solidFill>
+                <a:latin typeface="Pretendard"/>
+                <a:ea typeface="Pretendard"/>
+                <a:cs typeface="Pretendard"/>
+              </a:rPr>
+              <a:t>2025.01 ~ 2026.07</a:t>
+            </a:r>
+          </a:p>
+        </p:txBody>
+      </p:sp>
+      <p:sp>
+        <p:nvSpPr>
+          <p:cNvPr id="26" name="Oval 25"/>
+          <p:cNvSpPr/>
+          <p:nvPr/>
+        </p:nvSpPr>
+        <p:spPr>
+          <a:xfrm>
+            <a:off x="7196327" y="2304288"/>
+            <a:ext cx="420624" cy="420624"/>
           </a:xfrm>
           <a:prstGeom prst="ellipse">
             <a:avLst/>
@@ -5464,185 +4763,14 @@
       </p:sp>
       <p:sp>
         <p:nvSpPr>
-          <p:cNvPr id="52" name="Oval 51"/>
+          <p:cNvPr id="27" name="Freeform 26"/>
           <p:cNvSpPr/>
           <p:nvPr/>
         </p:nvSpPr>
         <p:spPr>
           <a:xfrm>
-            <a:off x="4085082" y="4876038"/>
-            <a:ext cx="59436" cy="59436"/>
-          </a:xfrm>
-          <a:prstGeom prst="ellipse">
-            <a:avLst/>
-          </a:prstGeom>
-          <a:solidFill>
-            <a:srgbClr val="FFFFFF"/>
-          </a:solidFill>
-          <a:ln w="19050">
-            <a:solidFill>
-              <a:srgbClr val="000000"/>
-            </a:solidFill>
-          </a:ln>
-          <a:effectLst/>
-        </p:spPr>
-        <p:style>
-          <a:lnRef idx="1">
-            <a:schemeClr val="accent1"/>
-          </a:lnRef>
-          <a:fillRef idx="3">
-            <a:schemeClr val="accent1"/>
-          </a:fillRef>
-          <a:effectRef idx="2">
-            <a:schemeClr val="accent1"/>
-          </a:effectRef>
-          <a:fontRef idx="minor">
-            <a:schemeClr val="lt1"/>
-          </a:fontRef>
-        </p:style>
-        <p:txBody>
-          <a:bodyPr rtlCol="0" anchor="ctr"/>
-          <a:lstStyle/>
-          <a:p>
-            <a:pPr algn="ctr"/>
-            <a:endParaRPr/>
-          </a:p>
-        </p:txBody>
-      </p:sp>
-      <p:sp>
-        <p:nvSpPr>
-          <p:cNvPr id="53" name="TextBox 52"/>
-          <p:cNvSpPr txBox="1"/>
-          <p:nvPr/>
-        </p:nvSpPr>
-        <p:spPr>
-          <a:xfrm>
-            <a:off x="3904487" y="5294376"/>
-            <a:ext cx="2103120" cy="685800"/>
-          </a:xfrm>
-          <a:prstGeom prst="rect">
-            <a:avLst/>
-          </a:prstGeom>
-          <a:noFill/>
-        </p:spPr>
-        <p:txBody>
-          <a:bodyPr wrap="none" lIns="0" tIns="0" rIns="0" bIns="0" anchor="t">
-            <a:spAutoFit/>
-          </a:bodyPr>
-          <a:lstStyle/>
-          <a:p>
-            <a:pPr algn="l">
-              <a:lnSpc>
-                <a:spcPct val="130000"/>
-              </a:lnSpc>
-            </a:pPr>
-            <a:r>
-              <a:rPr sz="1100" b="1">
-                <a:solidFill>
-                  <a:srgbClr val="000000"/>
-                </a:solidFill>
-                <a:latin typeface="Pretendard"/>
-                <a:ea typeface="Pretendard"/>
-                <a:cs typeface="Pretendard"/>
-              </a:rPr>
-              <a:t>멀티에이전트 시스템 3건</a:t>
-            </a:r>
-          </a:p>
-          <a:p>
-            <a:pPr algn="l">
-              <a:lnSpc>
-                <a:spcPct val="130000"/>
-              </a:lnSpc>
-            </a:pPr>
-            <a:r>
-              <a:rPr sz="950" b="0">
-                <a:solidFill>
-                  <a:srgbClr val="6B6B6B"/>
-                </a:solidFill>
-                <a:latin typeface="Pretendard"/>
-                <a:ea typeface="Pretendard"/>
-                <a:cs typeface="Pretendard"/>
-              </a:rPr>
-              <a:t>데이터와 AI 시스템 연결</a:t>
-            </a:r>
-          </a:p>
-          <a:p>
-            <a:pPr algn="l">
-              <a:lnSpc>
-                <a:spcPct val="130000"/>
-              </a:lnSpc>
-            </a:pPr>
-            <a:r>
-              <a:rPr sz="850" b="0">
-                <a:solidFill>
-                  <a:srgbClr val="9A9A9A"/>
-                </a:solidFill>
-                <a:latin typeface="Pretendard"/>
-                <a:ea typeface="Pretendard"/>
-                <a:cs typeface="Pretendard"/>
-              </a:rPr>
-              <a:t>2025.07 ~ 2026.06</a:t>
-            </a:r>
-          </a:p>
-        </p:txBody>
-      </p:sp>
-      <p:sp>
-        <p:nvSpPr>
-          <p:cNvPr id="54" name="Oval 53"/>
-          <p:cNvSpPr/>
-          <p:nvPr/>
-        </p:nvSpPr>
-        <p:spPr>
-          <a:xfrm>
-            <a:off x="5687568" y="4773168"/>
-            <a:ext cx="420624" cy="420624"/>
-          </a:xfrm>
-          <a:prstGeom prst="ellipse">
-            <a:avLst/>
-          </a:prstGeom>
-          <a:solidFill>
-            <a:srgbClr val="FFFFFF"/>
-          </a:solidFill>
-          <a:ln w="19050">
-            <a:solidFill>
-              <a:srgbClr val="000000"/>
-            </a:solidFill>
-          </a:ln>
-          <a:effectLst/>
-        </p:spPr>
-        <p:style>
-          <a:lnRef idx="1">
-            <a:schemeClr val="accent1"/>
-          </a:lnRef>
-          <a:fillRef idx="3">
-            <a:schemeClr val="accent1"/>
-          </a:fillRef>
-          <a:effectRef idx="2">
-            <a:schemeClr val="accent1"/>
-          </a:effectRef>
-          <a:fontRef idx="minor">
-            <a:schemeClr val="lt1"/>
-          </a:fontRef>
-        </p:style>
-        <p:txBody>
-          <a:bodyPr rtlCol="0" anchor="ctr"/>
-          <a:lstStyle/>
-          <a:p>
-            <a:pPr algn="ctr"/>
-            <a:endParaRPr/>
-          </a:p>
-        </p:txBody>
-      </p:sp>
-      <p:sp>
-        <p:nvSpPr>
-          <p:cNvPr id="55" name="Freeform 54"/>
-          <p:cNvSpPr/>
-          <p:nvPr/>
-        </p:nvSpPr>
-        <p:spPr>
-          <a:xfrm>
-            <a:off x="5797296" y="4887468"/>
-            <a:ext cx="201168" cy="100584"/>
+            <a:off x="7287768" y="2432304"/>
+            <a:ext cx="237744" cy="109728"/>
           </a:xfrm>
           <a:custGeom>
             <a:avLst/>
@@ -5651,18 +4779,18 @@
             <a:cxnLst/>
             <a:rect l="l" t="t" r="r" b="b"/>
             <a:pathLst>
-              <a:path w="201168" h="100584">
+              <a:path w="237744" h="109728">
                 <a:moveTo>
-                  <a:pt x="0" y="50292"/>
+                  <a:pt x="0" y="54864"/>
                 </a:moveTo>
                 <a:lnTo>
-                  <a:pt x="100584" y="0"/>
+                  <a:pt x="118872" y="0"/>
                 </a:lnTo>
                 <a:lnTo>
-                  <a:pt x="201168" y="50292"/>
+                  <a:pt x="237744" y="54864"/>
                 </a:lnTo>
                 <a:lnTo>
-                  <a:pt x="100584" y="100584"/>
+                  <a:pt x="118872" y="109728"/>
                 </a:lnTo>
                 <a:close/>
               </a:path>
@@ -5701,14 +4829,14 @@
       </p:sp>
       <p:sp>
         <p:nvSpPr>
-          <p:cNvPr id="56" name="Freeform 55"/>
+          <p:cNvPr id="28" name="Freeform 27"/>
           <p:cNvSpPr/>
           <p:nvPr/>
         </p:nvSpPr>
         <p:spPr>
           <a:xfrm>
-            <a:off x="5797296" y="4978907"/>
-            <a:ext cx="201168" cy="50293"/>
+            <a:off x="7342631" y="2514600"/>
+            <a:ext cx="128017" cy="64008"/>
           </a:xfrm>
           <a:custGeom>
             <a:avLst/>
@@ -5717,15 +4845,18 @@
             <a:cxnLst/>
             <a:rect l="l" t="t" r="r" b="b"/>
             <a:pathLst>
-              <a:path w="201168" h="50293">
+              <a:path w="128017" h="64008">
                 <a:moveTo>
                   <a:pt x="0" y="0"/>
                 </a:moveTo>
                 <a:lnTo>
-                  <a:pt x="100584" y="50293"/>
+                  <a:pt x="0" y="64008"/>
                 </a:lnTo>
                 <a:lnTo>
-                  <a:pt x="201168" y="0"/>
+                  <a:pt x="128017" y="64008"/>
+                </a:lnTo>
+                <a:lnTo>
+                  <a:pt x="128017" y="0"/>
                 </a:lnTo>
               </a:path>
             </a:pathLst>
@@ -5761,78 +4892,37 @@
           </a:p>
         </p:txBody>
       </p:sp>
-      <p:sp>
-        <p:nvSpPr>
-          <p:cNvPr id="57" name="Freeform 56"/>
-          <p:cNvSpPr/>
-          <p:nvPr/>
-        </p:nvSpPr>
-        <p:spPr>
-          <a:xfrm>
-            <a:off x="5797296" y="5038344"/>
-            <a:ext cx="201168" cy="50292"/>
-          </a:xfrm>
-          <a:custGeom>
-            <a:avLst/>
-            <a:gdLst/>
-            <a:ahLst/>
-            <a:cxnLst/>
-            <a:rect l="l" t="t" r="r" b="b"/>
-            <a:pathLst>
-              <a:path w="201168" h="50292">
-                <a:moveTo>
-                  <a:pt x="0" y="0"/>
-                </a:moveTo>
-                <a:lnTo>
-                  <a:pt x="100584" y="50292"/>
-                </a:lnTo>
-                <a:lnTo>
-                  <a:pt x="201168" y="0"/>
-                </a:lnTo>
-              </a:path>
-            </a:pathLst>
-          </a:custGeom>
-          <a:noFill/>
-          <a:ln w="19050">
+      <p:cxnSp>
+        <p:nvCxnSpPr>
+          <p:cNvPr id="29" name="Connector 28"/>
+          <p:cNvCxnSpPr/>
+          <p:nvPr/>
+        </p:nvCxnSpPr>
+        <p:spPr>
+          <a:xfrm>
+            <a:off x="7507223" y="2496312"/>
+            <a:ext cx="0" cy="82296"/>
+          </a:xfrm>
+          <a:prstGeom prst="line">
+            <a:avLst/>
+          </a:prstGeom>
+          <a:ln w="12700">
             <a:solidFill>
               <a:srgbClr val="000000"/>
             </a:solidFill>
           </a:ln>
-          <a:effectLst/>
-        </p:spPr>
-        <p:style>
-          <a:lnRef idx="1">
-            <a:schemeClr val="accent1"/>
-          </a:lnRef>
-          <a:fillRef idx="3">
-            <a:schemeClr val="accent1"/>
-          </a:fillRef>
-          <a:effectRef idx="2">
-            <a:schemeClr val="accent1"/>
-          </a:effectRef>
-          <a:fontRef idx="minor">
-            <a:schemeClr val="lt1"/>
-          </a:fontRef>
-        </p:style>
-        <p:txBody>
-          <a:bodyPr rtlCol="0" anchor="ctr"/>
-          <a:lstStyle/>
-          <a:p>
-            <a:pPr algn="ctr"/>
-            <a:endParaRPr/>
-          </a:p>
-        </p:txBody>
-      </p:sp>
-      <p:sp>
-        <p:nvSpPr>
-          <p:cNvPr id="58" name="TextBox 57"/>
+        </p:spPr>
+      </p:cxnSp>
+      <p:sp>
+        <p:nvSpPr>
+          <p:cNvPr id="30" name="TextBox 29"/>
           <p:cNvSpPr txBox="1"/>
           <p:nvPr/>
         </p:nvSpPr>
         <p:spPr>
           <a:xfrm>
-            <a:off x="5687568" y="5294376"/>
-            <a:ext cx="2103120" cy="685800"/>
+            <a:off x="7196327" y="1472184"/>
+            <a:ext cx="2011680" cy="658368"/>
           </a:xfrm>
           <a:prstGeom prst="rect">
             <a:avLst/>
@@ -5859,7 +4949,7 @@
                 <a:ea typeface="Pretendard"/>
                 <a:cs typeface="Pretendard"/>
               </a:rPr>
-              <a:t>3D CT 멀티모달 모델</a:t>
+              <a:t>통계학 석사</a:t>
             </a:r>
           </a:p>
           <a:p>
@@ -5869,7 +4959,7 @@
               </a:lnSpc>
             </a:pPr>
             <a:r>
-              <a:rPr sz="950" b="0">
+              <a:rPr sz="900" b="0">
                 <a:solidFill>
                   <a:srgbClr val="6B6B6B"/>
                 </a:solidFill>
@@ -5877,7 +4967,7 @@
                 <a:ea typeface="Pretendard"/>
                 <a:cs typeface="Pretendard"/>
               </a:rPr>
-              <a:t>표현 학습과 평가</a:t>
+              <a:t>딥러닝</a:t>
             </a:r>
           </a:p>
           <a:p>
@@ -5895,21 +4985,336 @@
                 <a:ea typeface="Pretendard"/>
                 <a:cs typeface="Pretendard"/>
               </a:rPr>
-              <a:t>2025.09 ~ 2026.02</a:t>
-            </a:r>
-          </a:p>
-        </p:txBody>
-      </p:sp>
-      <p:sp>
-        <p:nvSpPr>
-          <p:cNvPr id="59" name="Oval 58"/>
+              <a:t>2025.09 ~ 2027.02</a:t>
+            </a:r>
+          </a:p>
+        </p:txBody>
+      </p:sp>
+      <p:cxnSp>
+        <p:nvCxnSpPr>
+          <p:cNvPr id="31" name="Connector 30"/>
+          <p:cNvCxnSpPr/>
+          <p:nvPr/>
+        </p:nvCxnSpPr>
+        <p:spPr>
+          <a:xfrm>
+            <a:off x="1600200" y="3959352"/>
+            <a:ext cx="0" cy="237744"/>
+          </a:xfrm>
+          <a:prstGeom prst="line">
+            <a:avLst/>
+          </a:prstGeom>
+          <a:ln w="7620">
+            <a:solidFill>
+              <a:srgbClr val="9A9A9A"/>
+            </a:solidFill>
+          </a:ln>
+        </p:spPr>
+      </p:cxnSp>
+      <p:cxnSp>
+        <p:nvCxnSpPr>
+          <p:cNvPr id="32" name="Connector 31"/>
+          <p:cNvCxnSpPr/>
+          <p:nvPr/>
+        </p:nvCxnSpPr>
+        <p:spPr>
+          <a:xfrm>
+            <a:off x="2073728" y="3959352"/>
+            <a:ext cx="0" cy="804672"/>
+          </a:xfrm>
+          <a:prstGeom prst="line">
+            <a:avLst/>
+          </a:prstGeom>
+          <a:ln w="7620">
+            <a:solidFill>
+              <a:srgbClr val="9A9A9A"/>
+            </a:solidFill>
+          </a:ln>
+        </p:spPr>
+      </p:cxnSp>
+      <p:cxnSp>
+        <p:nvCxnSpPr>
+          <p:cNvPr id="33" name="Connector 32"/>
+          <p:cNvCxnSpPr/>
+          <p:nvPr/>
+        </p:nvCxnSpPr>
+        <p:spPr>
+          <a:xfrm>
+            <a:off x="2547257" y="3959352"/>
+            <a:ext cx="0" cy="1371600"/>
+          </a:xfrm>
+          <a:prstGeom prst="line">
+            <a:avLst/>
+          </a:prstGeom>
+          <a:ln w="7620">
+            <a:solidFill>
+              <a:srgbClr val="9A9A9A"/>
+            </a:solidFill>
+          </a:ln>
+        </p:spPr>
+      </p:cxnSp>
+      <p:cxnSp>
+        <p:nvCxnSpPr>
+          <p:cNvPr id="34" name="Connector 33"/>
+          <p:cNvCxnSpPr/>
+          <p:nvPr/>
+        </p:nvCxnSpPr>
+        <p:spPr>
+          <a:xfrm>
+            <a:off x="3020785" y="3959352"/>
+            <a:ext cx="0" cy="237744"/>
+          </a:xfrm>
+          <a:prstGeom prst="line">
+            <a:avLst/>
+          </a:prstGeom>
+          <a:ln w="7620">
+            <a:solidFill>
+              <a:srgbClr val="9A9A9A"/>
+            </a:solidFill>
+          </a:ln>
+        </p:spPr>
+      </p:cxnSp>
+      <p:cxnSp>
+        <p:nvCxnSpPr>
+          <p:cNvPr id="35" name="Connector 34"/>
+          <p:cNvCxnSpPr/>
+          <p:nvPr/>
+        </p:nvCxnSpPr>
+        <p:spPr>
+          <a:xfrm>
+            <a:off x="3494314" y="3959352"/>
+            <a:ext cx="0" cy="804672"/>
+          </a:xfrm>
+          <a:prstGeom prst="line">
+            <a:avLst/>
+          </a:prstGeom>
+          <a:ln w="7620">
+            <a:solidFill>
+              <a:srgbClr val="9A9A9A"/>
+            </a:solidFill>
+          </a:ln>
+        </p:spPr>
+      </p:cxnSp>
+      <p:cxnSp>
+        <p:nvCxnSpPr>
+          <p:cNvPr id="36" name="Connector 35"/>
+          <p:cNvCxnSpPr/>
+          <p:nvPr/>
+        </p:nvCxnSpPr>
+        <p:spPr>
+          <a:xfrm>
+            <a:off x="3967842" y="3959352"/>
+            <a:ext cx="0" cy="1371600"/>
+          </a:xfrm>
+          <a:prstGeom prst="line">
+            <a:avLst/>
+          </a:prstGeom>
+          <a:ln w="7620">
+            <a:solidFill>
+              <a:srgbClr val="9A9A9A"/>
+            </a:solidFill>
+          </a:ln>
+        </p:spPr>
+      </p:cxnSp>
+      <p:cxnSp>
+        <p:nvCxnSpPr>
+          <p:cNvPr id="37" name="Connector 36"/>
+          <p:cNvCxnSpPr/>
+          <p:nvPr/>
+        </p:nvCxnSpPr>
+        <p:spPr>
+          <a:xfrm>
+            <a:off x="4441371" y="3959352"/>
+            <a:ext cx="0" cy="237744"/>
+          </a:xfrm>
+          <a:prstGeom prst="line">
+            <a:avLst/>
+          </a:prstGeom>
+          <a:ln w="7620">
+            <a:solidFill>
+              <a:srgbClr val="9A9A9A"/>
+            </a:solidFill>
+          </a:ln>
+        </p:spPr>
+      </p:cxnSp>
+      <p:cxnSp>
+        <p:nvCxnSpPr>
+          <p:cNvPr id="38" name="Connector 37"/>
+          <p:cNvCxnSpPr/>
+          <p:nvPr/>
+        </p:nvCxnSpPr>
+        <p:spPr>
+          <a:xfrm>
+            <a:off x="4914900" y="3959352"/>
+            <a:ext cx="0" cy="804672"/>
+          </a:xfrm>
+          <a:prstGeom prst="line">
+            <a:avLst/>
+          </a:prstGeom>
+          <a:ln w="7620">
+            <a:solidFill>
+              <a:srgbClr val="9A9A9A"/>
+            </a:solidFill>
+          </a:ln>
+        </p:spPr>
+      </p:cxnSp>
+      <p:cxnSp>
+        <p:nvCxnSpPr>
+          <p:cNvPr id="39" name="Connector 38"/>
+          <p:cNvCxnSpPr/>
+          <p:nvPr/>
+        </p:nvCxnSpPr>
+        <p:spPr>
+          <a:xfrm>
+            <a:off x="5388428" y="3959352"/>
+            <a:ext cx="0" cy="1371600"/>
+          </a:xfrm>
+          <a:prstGeom prst="line">
+            <a:avLst/>
+          </a:prstGeom>
+          <a:ln w="7620">
+            <a:solidFill>
+              <a:srgbClr val="9A9A9A"/>
+            </a:solidFill>
+          </a:ln>
+        </p:spPr>
+      </p:cxnSp>
+      <p:cxnSp>
+        <p:nvCxnSpPr>
+          <p:cNvPr id="40" name="Connector 39"/>
+          <p:cNvCxnSpPr/>
+          <p:nvPr/>
+        </p:nvCxnSpPr>
+        <p:spPr>
+          <a:xfrm>
+            <a:off x="5861957" y="3959352"/>
+            <a:ext cx="0" cy="237744"/>
+          </a:xfrm>
+          <a:prstGeom prst="line">
+            <a:avLst/>
+          </a:prstGeom>
+          <a:ln w="7620">
+            <a:solidFill>
+              <a:srgbClr val="9A9A9A"/>
+            </a:solidFill>
+          </a:ln>
+        </p:spPr>
+      </p:cxnSp>
+      <p:cxnSp>
+        <p:nvCxnSpPr>
+          <p:cNvPr id="41" name="Connector 40"/>
+          <p:cNvCxnSpPr/>
+          <p:nvPr/>
+        </p:nvCxnSpPr>
+        <p:spPr>
+          <a:xfrm>
+            <a:off x="6335485" y="3959352"/>
+            <a:ext cx="0" cy="804672"/>
+          </a:xfrm>
+          <a:prstGeom prst="line">
+            <a:avLst/>
+          </a:prstGeom>
+          <a:ln w="7620">
+            <a:solidFill>
+              <a:srgbClr val="9A9A9A"/>
+            </a:solidFill>
+          </a:ln>
+        </p:spPr>
+      </p:cxnSp>
+      <p:cxnSp>
+        <p:nvCxnSpPr>
+          <p:cNvPr id="42" name="Connector 41"/>
+          <p:cNvCxnSpPr/>
+          <p:nvPr/>
+        </p:nvCxnSpPr>
+        <p:spPr>
+          <a:xfrm>
+            <a:off x="6809014" y="3959352"/>
+            <a:ext cx="0" cy="1371600"/>
+          </a:xfrm>
+          <a:prstGeom prst="line">
+            <a:avLst/>
+          </a:prstGeom>
+          <a:ln w="7620">
+            <a:solidFill>
+              <a:srgbClr val="9A9A9A"/>
+            </a:solidFill>
+          </a:ln>
+        </p:spPr>
+      </p:cxnSp>
+      <p:cxnSp>
+        <p:nvCxnSpPr>
+          <p:cNvPr id="43" name="Connector 42"/>
+          <p:cNvCxnSpPr/>
+          <p:nvPr/>
+        </p:nvCxnSpPr>
+        <p:spPr>
+          <a:xfrm>
+            <a:off x="7282542" y="3959352"/>
+            <a:ext cx="0" cy="237744"/>
+          </a:xfrm>
+          <a:prstGeom prst="line">
+            <a:avLst/>
+          </a:prstGeom>
+          <a:ln w="7620">
+            <a:solidFill>
+              <a:srgbClr val="9A9A9A"/>
+            </a:solidFill>
+          </a:ln>
+        </p:spPr>
+      </p:cxnSp>
+      <p:cxnSp>
+        <p:nvCxnSpPr>
+          <p:cNvPr id="44" name="Connector 43"/>
+          <p:cNvCxnSpPr/>
+          <p:nvPr/>
+        </p:nvCxnSpPr>
+        <p:spPr>
+          <a:xfrm>
+            <a:off x="7756071" y="3959352"/>
+            <a:ext cx="0" cy="804672"/>
+          </a:xfrm>
+          <a:prstGeom prst="line">
+            <a:avLst/>
+          </a:prstGeom>
+          <a:ln w="7620">
+            <a:solidFill>
+              <a:srgbClr val="9A9A9A"/>
+            </a:solidFill>
+          </a:ln>
+        </p:spPr>
+      </p:cxnSp>
+      <p:cxnSp>
+        <p:nvCxnSpPr>
+          <p:cNvPr id="45" name="Connector 44"/>
+          <p:cNvCxnSpPr/>
+          <p:nvPr/>
+        </p:nvCxnSpPr>
+        <p:spPr>
+          <a:xfrm>
+            <a:off x="8229600" y="3959352"/>
+            <a:ext cx="0" cy="1371600"/>
+          </a:xfrm>
+          <a:prstGeom prst="line">
+            <a:avLst/>
+          </a:prstGeom>
+          <a:ln w="7620">
+            <a:solidFill>
+              <a:srgbClr val="9A9A9A"/>
+            </a:solidFill>
+          </a:ln>
+        </p:spPr>
+      </p:cxnSp>
+      <p:sp>
+        <p:nvSpPr>
+          <p:cNvPr id="46" name="Oval 45"/>
           <p:cNvSpPr/>
           <p:nvPr/>
         </p:nvSpPr>
         <p:spPr>
           <a:xfrm>
-            <a:off x="7232904" y="3712464"/>
-            <a:ext cx="713232" cy="713232"/>
+            <a:off x="1545336" y="3831336"/>
+            <a:ext cx="109728" cy="109728"/>
           </a:xfrm>
           <a:prstGeom prst="ellipse">
             <a:avLst/>
@@ -5947,14 +5352,1604 @@
       </p:sp>
       <p:sp>
         <p:nvSpPr>
-          <p:cNvPr id="60" name="Freeform 59"/>
+          <p:cNvPr id="47" name="TextBox 46"/>
+          <p:cNvSpPr txBox="1"/>
+          <p:nvPr/>
+        </p:nvSpPr>
+        <p:spPr>
+          <a:xfrm>
+            <a:off x="1563624" y="4178808"/>
+            <a:ext cx="1453895" cy="365760"/>
+          </a:xfrm>
+          <a:prstGeom prst="rect">
+            <a:avLst/>
+          </a:prstGeom>
+          <a:solidFill>
+            <a:srgbClr val="FFFFFF"/>
+          </a:solidFill>
+        </p:spPr>
+        <p:txBody>
+          <a:bodyPr wrap="none" lIns="0" tIns="0" rIns="0" bIns="0" anchor="t">
+            <a:spAutoFit/>
+          </a:bodyPr>
+          <a:lstStyle/>
+          <a:p>
+            <a:pPr algn="l">
+              <a:lnSpc>
+                <a:spcPct val="120000"/>
+              </a:lnSpc>
+            </a:pPr>
+            <a:r>
+              <a:rPr sz="850" b="0">
+                <a:solidFill>
+                  <a:srgbClr val="000000"/>
+                </a:solidFill>
+                <a:latin typeface="Pretendard SemiBold"/>
+                <a:ea typeface="Pretendard SemiBold"/>
+                <a:cs typeface="Pretendard SemiBold"/>
+              </a:rPr>
+              <a:t>민간의료보험과 건강지표 분석</a:t>
+            </a:r>
+          </a:p>
+          <a:p>
+            <a:pPr algn="l">
+              <a:lnSpc>
+                <a:spcPct val="120000"/>
+              </a:lnSpc>
+            </a:pPr>
+            <a:r>
+              <a:rPr sz="750" b="0">
+                <a:solidFill>
+                  <a:srgbClr val="9A9A9A"/>
+                </a:solidFill>
+                <a:latin typeface="Pretendard"/>
+                <a:ea typeface="Pretendard"/>
+                <a:cs typeface="Pretendard"/>
+              </a:rPr>
+              <a:t>2023</a:t>
+            </a:r>
+          </a:p>
+        </p:txBody>
+      </p:sp>
+      <p:sp>
+        <p:nvSpPr>
+          <p:cNvPr id="48" name="Oval 47"/>
           <p:cNvSpPr/>
           <p:nvPr/>
         </p:nvSpPr>
         <p:spPr>
           <a:xfrm>
-            <a:off x="7507224" y="3968496"/>
-            <a:ext cx="164592" cy="210312"/>
+            <a:off x="2018864" y="3831336"/>
+            <a:ext cx="109728" cy="109728"/>
+          </a:xfrm>
+          <a:prstGeom prst="ellipse">
+            <a:avLst/>
+          </a:prstGeom>
+          <a:solidFill>
+            <a:srgbClr val="000000"/>
+          </a:solidFill>
+          <a:ln>
+            <a:noFill/>
+          </a:ln>
+          <a:effectLst/>
+        </p:spPr>
+        <p:style>
+          <a:lnRef idx="1">
+            <a:schemeClr val="accent1"/>
+          </a:lnRef>
+          <a:fillRef idx="3">
+            <a:schemeClr val="accent1"/>
+          </a:fillRef>
+          <a:effectRef idx="2">
+            <a:schemeClr val="accent1"/>
+          </a:effectRef>
+          <a:fontRef idx="minor">
+            <a:schemeClr val="lt1"/>
+          </a:fontRef>
+        </p:style>
+        <p:txBody>
+          <a:bodyPr rtlCol="0" anchor="ctr"/>
+          <a:lstStyle/>
+          <a:p>
+            <a:pPr algn="ctr"/>
+            <a:endParaRPr/>
+          </a:p>
+        </p:txBody>
+      </p:sp>
+      <p:sp>
+        <p:nvSpPr>
+          <p:cNvPr id="49" name="TextBox 48"/>
+          <p:cNvSpPr txBox="1"/>
+          <p:nvPr/>
+        </p:nvSpPr>
+        <p:spPr>
+          <a:xfrm>
+            <a:off x="2037152" y="4745736"/>
+            <a:ext cx="1185062" cy="365760"/>
+          </a:xfrm>
+          <a:prstGeom prst="rect">
+            <a:avLst/>
+          </a:prstGeom>
+          <a:solidFill>
+            <a:srgbClr val="FFFFFF"/>
+          </a:solidFill>
+        </p:spPr>
+        <p:txBody>
+          <a:bodyPr wrap="none" lIns="0" tIns="0" rIns="0" bIns="0" anchor="t">
+            <a:spAutoFit/>
+          </a:bodyPr>
+          <a:lstStyle/>
+          <a:p>
+            <a:pPr algn="l">
+              <a:lnSpc>
+                <a:spcPct val="120000"/>
+              </a:lnSpc>
+            </a:pPr>
+            <a:r>
+              <a:rPr sz="850" b="0">
+                <a:solidFill>
+                  <a:srgbClr val="000000"/>
+                </a:solidFill>
+                <a:latin typeface="Pretendard SemiBold"/>
+                <a:ea typeface="Pretendard SemiBold"/>
+                <a:cs typeface="Pretendard SemiBold"/>
+              </a:rPr>
+              <a:t>제주 특산물 가격 예측</a:t>
+            </a:r>
+          </a:p>
+          <a:p>
+            <a:pPr algn="l">
+              <a:lnSpc>
+                <a:spcPct val="120000"/>
+              </a:lnSpc>
+            </a:pPr>
+            <a:r>
+              <a:rPr sz="750" b="0">
+                <a:solidFill>
+                  <a:srgbClr val="9A9A9A"/>
+                </a:solidFill>
+                <a:latin typeface="Pretendard"/>
+                <a:ea typeface="Pretendard"/>
+                <a:cs typeface="Pretendard"/>
+              </a:rPr>
+              <a:t>2023</a:t>
+            </a:r>
+          </a:p>
+        </p:txBody>
+      </p:sp>
+      <p:sp>
+        <p:nvSpPr>
+          <p:cNvPr id="50" name="Oval 49"/>
+          <p:cNvSpPr/>
+          <p:nvPr/>
+        </p:nvSpPr>
+        <p:spPr>
+          <a:xfrm>
+            <a:off x="2492393" y="3831336"/>
+            <a:ext cx="109728" cy="109728"/>
+          </a:xfrm>
+          <a:prstGeom prst="ellipse">
+            <a:avLst/>
+          </a:prstGeom>
+          <a:solidFill>
+            <a:srgbClr val="000000"/>
+          </a:solidFill>
+          <a:ln>
+            <a:noFill/>
+          </a:ln>
+          <a:effectLst/>
+        </p:spPr>
+        <p:style>
+          <a:lnRef idx="1">
+            <a:schemeClr val="accent1"/>
+          </a:lnRef>
+          <a:fillRef idx="3">
+            <a:schemeClr val="accent1"/>
+          </a:fillRef>
+          <a:effectRef idx="2">
+            <a:schemeClr val="accent1"/>
+          </a:effectRef>
+          <a:fontRef idx="minor">
+            <a:schemeClr val="lt1"/>
+          </a:fontRef>
+        </p:style>
+        <p:txBody>
+          <a:bodyPr rtlCol="0" anchor="ctr"/>
+          <a:lstStyle/>
+          <a:p>
+            <a:pPr algn="ctr"/>
+            <a:endParaRPr/>
+          </a:p>
+        </p:txBody>
+      </p:sp>
+      <p:sp>
+        <p:nvSpPr>
+          <p:cNvPr id="51" name="TextBox 50"/>
+          <p:cNvSpPr txBox="1"/>
+          <p:nvPr/>
+        </p:nvSpPr>
+        <p:spPr>
+          <a:xfrm>
+            <a:off x="2510681" y="5312664"/>
+            <a:ext cx="1364284" cy="365760"/>
+          </a:xfrm>
+          <a:prstGeom prst="rect">
+            <a:avLst/>
+          </a:prstGeom>
+          <a:solidFill>
+            <a:srgbClr val="FFFFFF"/>
+          </a:solidFill>
+        </p:spPr>
+        <p:txBody>
+          <a:bodyPr wrap="none" lIns="0" tIns="0" rIns="0" bIns="0" anchor="t">
+            <a:spAutoFit/>
+          </a:bodyPr>
+          <a:lstStyle/>
+          <a:p>
+            <a:pPr algn="l">
+              <a:lnSpc>
+                <a:spcPct val="120000"/>
+              </a:lnSpc>
+            </a:pPr>
+            <a:r>
+              <a:rPr sz="850" b="0">
+                <a:solidFill>
+                  <a:srgbClr val="000000"/>
+                </a:solidFill>
+                <a:latin typeface="Pretendard SemiBold"/>
+                <a:ea typeface="Pretendard SemiBold"/>
+                <a:cs typeface="Pretendard SemiBold"/>
+              </a:rPr>
+              <a:t>스마트팜 참외 수확량 예측</a:t>
+            </a:r>
+          </a:p>
+          <a:p>
+            <a:pPr algn="l">
+              <a:lnSpc>
+                <a:spcPct val="120000"/>
+              </a:lnSpc>
+            </a:pPr>
+            <a:r>
+              <a:rPr sz="750" b="0">
+                <a:solidFill>
+                  <a:srgbClr val="9A9A9A"/>
+                </a:solidFill>
+                <a:latin typeface="Pretendard"/>
+                <a:ea typeface="Pretendard"/>
+                <a:cs typeface="Pretendard"/>
+              </a:rPr>
+              <a:t>2024.08 ~ 2024.10</a:t>
+            </a:r>
+          </a:p>
+        </p:txBody>
+      </p:sp>
+      <p:sp>
+        <p:nvSpPr>
+          <p:cNvPr id="52" name="Oval 51"/>
+          <p:cNvSpPr/>
+          <p:nvPr/>
+        </p:nvSpPr>
+        <p:spPr>
+          <a:xfrm>
+            <a:off x="2965921" y="3831336"/>
+            <a:ext cx="109728" cy="109728"/>
+          </a:xfrm>
+          <a:prstGeom prst="ellipse">
+            <a:avLst/>
+          </a:prstGeom>
+          <a:solidFill>
+            <a:srgbClr val="000000"/>
+          </a:solidFill>
+          <a:ln>
+            <a:noFill/>
+          </a:ln>
+          <a:effectLst/>
+        </p:spPr>
+        <p:style>
+          <a:lnRef idx="1">
+            <a:schemeClr val="accent1"/>
+          </a:lnRef>
+          <a:fillRef idx="3">
+            <a:schemeClr val="accent1"/>
+          </a:fillRef>
+          <a:effectRef idx="2">
+            <a:schemeClr val="accent1"/>
+          </a:effectRef>
+          <a:fontRef idx="minor">
+            <a:schemeClr val="lt1"/>
+          </a:fontRef>
+        </p:style>
+        <p:txBody>
+          <a:bodyPr rtlCol="0" anchor="ctr"/>
+          <a:lstStyle/>
+          <a:p>
+            <a:pPr algn="ctr"/>
+            <a:endParaRPr/>
+          </a:p>
+        </p:txBody>
+      </p:sp>
+      <p:sp>
+        <p:nvSpPr>
+          <p:cNvPr id="53" name="TextBox 52"/>
+          <p:cNvSpPr txBox="1"/>
+          <p:nvPr/>
+        </p:nvSpPr>
+        <p:spPr>
+          <a:xfrm>
+            <a:off x="2984209" y="4178808"/>
+            <a:ext cx="1364284" cy="365760"/>
+          </a:xfrm>
+          <a:prstGeom prst="rect">
+            <a:avLst/>
+          </a:prstGeom>
+          <a:solidFill>
+            <a:srgbClr val="FFFFFF"/>
+          </a:solidFill>
+        </p:spPr>
+        <p:txBody>
+          <a:bodyPr wrap="none" lIns="0" tIns="0" rIns="0" bIns="0" anchor="t">
+            <a:spAutoFit/>
+          </a:bodyPr>
+          <a:lstStyle/>
+          <a:p>
+            <a:pPr algn="l">
+              <a:lnSpc>
+                <a:spcPct val="120000"/>
+              </a:lnSpc>
+            </a:pPr>
+            <a:r>
+              <a:rPr sz="850" b="0">
+                <a:solidFill>
+                  <a:srgbClr val="000000"/>
+                </a:solidFill>
+                <a:latin typeface="Pretendard SemiBold"/>
+                <a:ea typeface="Pretendard SemiBold"/>
+                <a:cs typeface="Pretendard SemiBold"/>
+              </a:rPr>
+              <a:t>저해상도 조류 이미지 분류</a:t>
+            </a:r>
+          </a:p>
+          <a:p>
+            <a:pPr algn="l">
+              <a:lnSpc>
+                <a:spcPct val="120000"/>
+              </a:lnSpc>
+            </a:pPr>
+            <a:r>
+              <a:rPr sz="750" b="0">
+                <a:solidFill>
+                  <a:srgbClr val="9A9A9A"/>
+                </a:solidFill>
+                <a:latin typeface="Pretendard"/>
+                <a:ea typeface="Pretendard"/>
+                <a:cs typeface="Pretendard"/>
+              </a:rPr>
+              <a:t>2025.01 ~ 2025.03</a:t>
+            </a:r>
+          </a:p>
+        </p:txBody>
+      </p:sp>
+      <p:sp>
+        <p:nvSpPr>
+          <p:cNvPr id="54" name="Oval 53"/>
+          <p:cNvSpPr/>
+          <p:nvPr/>
+        </p:nvSpPr>
+        <p:spPr>
+          <a:xfrm>
+            <a:off x="3439450" y="3831336"/>
+            <a:ext cx="109728" cy="109728"/>
+          </a:xfrm>
+          <a:prstGeom prst="ellipse">
+            <a:avLst/>
+          </a:prstGeom>
+          <a:solidFill>
+            <a:srgbClr val="000000"/>
+          </a:solidFill>
+          <a:ln>
+            <a:noFill/>
+          </a:ln>
+          <a:effectLst/>
+        </p:spPr>
+        <p:style>
+          <a:lnRef idx="1">
+            <a:schemeClr val="accent1"/>
+          </a:lnRef>
+          <a:fillRef idx="3">
+            <a:schemeClr val="accent1"/>
+          </a:fillRef>
+          <a:effectRef idx="2">
+            <a:schemeClr val="accent1"/>
+          </a:effectRef>
+          <a:fontRef idx="minor">
+            <a:schemeClr val="lt1"/>
+          </a:fontRef>
+        </p:style>
+        <p:txBody>
+          <a:bodyPr rtlCol="0" anchor="ctr"/>
+          <a:lstStyle/>
+          <a:p>
+            <a:pPr algn="ctr"/>
+            <a:endParaRPr/>
+          </a:p>
+        </p:txBody>
+      </p:sp>
+      <p:sp>
+        <p:nvSpPr>
+          <p:cNvPr id="55" name="TextBox 54"/>
+          <p:cNvSpPr txBox="1"/>
+          <p:nvPr/>
+        </p:nvSpPr>
+        <p:spPr>
+          <a:xfrm>
+            <a:off x="3457738" y="4745736"/>
+            <a:ext cx="1364284" cy="365760"/>
+          </a:xfrm>
+          <a:prstGeom prst="rect">
+            <a:avLst/>
+          </a:prstGeom>
+          <a:solidFill>
+            <a:srgbClr val="FFFFFF"/>
+          </a:solidFill>
+        </p:spPr>
+        <p:txBody>
+          <a:bodyPr wrap="none" lIns="0" tIns="0" rIns="0" bIns="0" anchor="t">
+            <a:spAutoFit/>
+          </a:bodyPr>
+          <a:lstStyle/>
+          <a:p>
+            <a:pPr algn="l">
+              <a:lnSpc>
+                <a:spcPct val="120000"/>
+              </a:lnSpc>
+            </a:pPr>
+            <a:r>
+              <a:rPr sz="850" b="0">
+                <a:solidFill>
+                  <a:srgbClr val="000000"/>
+                </a:solidFill>
+                <a:latin typeface="Pretendard SemiBold"/>
+                <a:ea typeface="Pretendard SemiBold"/>
+                <a:cs typeface="Pretendard SemiBold"/>
+              </a:rPr>
+              <a:t>오늘의집 리뷰 요약 시스템</a:t>
+            </a:r>
+          </a:p>
+          <a:p>
+            <a:pPr algn="l">
+              <a:lnSpc>
+                <a:spcPct val="120000"/>
+              </a:lnSpc>
+            </a:pPr>
+            <a:r>
+              <a:rPr sz="750" b="0">
+                <a:solidFill>
+                  <a:srgbClr val="9A9A9A"/>
+                </a:solidFill>
+                <a:latin typeface="Pretendard"/>
+                <a:ea typeface="Pretendard"/>
+                <a:cs typeface="Pretendard"/>
+              </a:rPr>
+              <a:t>2025.03 ~ 2025.08</a:t>
+            </a:r>
+          </a:p>
+        </p:txBody>
+      </p:sp>
+      <p:sp>
+        <p:nvSpPr>
+          <p:cNvPr id="56" name="Oval 55"/>
+          <p:cNvSpPr/>
+          <p:nvPr/>
+        </p:nvSpPr>
+        <p:spPr>
+          <a:xfrm>
+            <a:off x="3912978" y="3831336"/>
+            <a:ext cx="109728" cy="109728"/>
+          </a:xfrm>
+          <a:prstGeom prst="ellipse">
+            <a:avLst/>
+          </a:prstGeom>
+          <a:solidFill>
+            <a:srgbClr val="000000"/>
+          </a:solidFill>
+          <a:ln>
+            <a:noFill/>
+          </a:ln>
+          <a:effectLst/>
+        </p:spPr>
+        <p:style>
+          <a:lnRef idx="1">
+            <a:schemeClr val="accent1"/>
+          </a:lnRef>
+          <a:fillRef idx="3">
+            <a:schemeClr val="accent1"/>
+          </a:fillRef>
+          <a:effectRef idx="2">
+            <a:schemeClr val="accent1"/>
+          </a:effectRef>
+          <a:fontRef idx="minor">
+            <a:schemeClr val="lt1"/>
+          </a:fontRef>
+        </p:style>
+        <p:txBody>
+          <a:bodyPr rtlCol="0" anchor="ctr"/>
+          <a:lstStyle/>
+          <a:p>
+            <a:pPr algn="ctr"/>
+            <a:endParaRPr/>
+          </a:p>
+        </p:txBody>
+      </p:sp>
+      <p:sp>
+        <p:nvSpPr>
+          <p:cNvPr id="57" name="TextBox 56"/>
+          <p:cNvSpPr txBox="1"/>
+          <p:nvPr/>
+        </p:nvSpPr>
+        <p:spPr>
+          <a:xfrm>
+            <a:off x="3931266" y="5312664"/>
+            <a:ext cx="1274673" cy="365760"/>
+          </a:xfrm>
+          <a:prstGeom prst="rect">
+            <a:avLst/>
+          </a:prstGeom>
+          <a:solidFill>
+            <a:srgbClr val="FFFFFF"/>
+          </a:solidFill>
+        </p:spPr>
+        <p:txBody>
+          <a:bodyPr wrap="none" lIns="0" tIns="0" rIns="0" bIns="0" anchor="t">
+            <a:spAutoFit/>
+          </a:bodyPr>
+          <a:lstStyle/>
+          <a:p>
+            <a:pPr algn="l">
+              <a:lnSpc>
+                <a:spcPct val="120000"/>
+              </a:lnSpc>
+            </a:pPr>
+            <a:r>
+              <a:rPr sz="850" b="0">
+                <a:solidFill>
+                  <a:srgbClr val="000000"/>
+                </a:solidFill>
+                <a:latin typeface="Pretendard SemiBold"/>
+                <a:ea typeface="Pretendard SemiBold"/>
+                <a:cs typeface="Pretendard SemiBold"/>
+              </a:rPr>
+              <a:t>AutoML 이미지 분류</a:t>
+            </a:r>
+          </a:p>
+          <a:p>
+            <a:pPr algn="l">
+              <a:lnSpc>
+                <a:spcPct val="120000"/>
+              </a:lnSpc>
+            </a:pPr>
+            <a:r>
+              <a:rPr sz="750" b="0">
+                <a:solidFill>
+                  <a:srgbClr val="9A9A9A"/>
+                </a:solidFill>
+                <a:latin typeface="Pretendard"/>
+                <a:ea typeface="Pretendard"/>
+                <a:cs typeface="Pretendard"/>
+              </a:rPr>
+              <a:t>2025.05</a:t>
+            </a:r>
+          </a:p>
+        </p:txBody>
+      </p:sp>
+      <p:sp>
+        <p:nvSpPr>
+          <p:cNvPr id="58" name="Oval 57"/>
+          <p:cNvSpPr/>
+          <p:nvPr/>
+        </p:nvSpPr>
+        <p:spPr>
+          <a:xfrm>
+            <a:off x="4386507" y="3831336"/>
+            <a:ext cx="109728" cy="109728"/>
+          </a:xfrm>
+          <a:prstGeom prst="ellipse">
+            <a:avLst/>
+          </a:prstGeom>
+          <a:solidFill>
+            <a:srgbClr val="000000"/>
+          </a:solidFill>
+          <a:ln>
+            <a:noFill/>
+          </a:ln>
+          <a:effectLst/>
+        </p:spPr>
+        <p:style>
+          <a:lnRef idx="1">
+            <a:schemeClr val="accent1"/>
+          </a:lnRef>
+          <a:fillRef idx="3">
+            <a:schemeClr val="accent1"/>
+          </a:fillRef>
+          <a:effectRef idx="2">
+            <a:schemeClr val="accent1"/>
+          </a:effectRef>
+          <a:fontRef idx="minor">
+            <a:schemeClr val="lt1"/>
+          </a:fontRef>
+        </p:style>
+        <p:txBody>
+          <a:bodyPr rtlCol="0" anchor="ctr"/>
+          <a:lstStyle/>
+          <a:p>
+            <a:pPr algn="ctr"/>
+            <a:endParaRPr/>
+          </a:p>
+        </p:txBody>
+      </p:sp>
+      <p:sp>
+        <p:nvSpPr>
+          <p:cNvPr id="59" name="TextBox 58"/>
+          <p:cNvSpPr txBox="1"/>
+          <p:nvPr/>
+        </p:nvSpPr>
+        <p:spPr>
+          <a:xfrm>
+            <a:off x="4404795" y="4178808"/>
+            <a:ext cx="1185062" cy="365760"/>
+          </a:xfrm>
+          <a:prstGeom prst="rect">
+            <a:avLst/>
+          </a:prstGeom>
+          <a:solidFill>
+            <a:srgbClr val="FFFFFF"/>
+          </a:solidFill>
+        </p:spPr>
+        <p:txBody>
+          <a:bodyPr wrap="none" lIns="0" tIns="0" rIns="0" bIns="0" anchor="t">
+            <a:spAutoFit/>
+          </a:bodyPr>
+          <a:lstStyle/>
+          <a:p>
+            <a:pPr algn="l">
+              <a:lnSpc>
+                <a:spcPct val="120000"/>
+              </a:lnSpc>
+            </a:pPr>
+            <a:r>
+              <a:rPr sz="850" b="0">
+                <a:solidFill>
+                  <a:srgbClr val="000000"/>
+                </a:solidFill>
+                <a:latin typeface="Pretendard SemiBold"/>
+                <a:ea typeface="Pretendard SemiBold"/>
+                <a:cs typeface="Pretendard SemiBold"/>
+              </a:rPr>
+              <a:t>담낭선암 생존분석 연구</a:t>
+            </a:r>
+          </a:p>
+          <a:p>
+            <a:pPr algn="l">
+              <a:lnSpc>
+                <a:spcPct val="120000"/>
+              </a:lnSpc>
+            </a:pPr>
+            <a:r>
+              <a:rPr sz="750" b="0">
+                <a:solidFill>
+                  <a:srgbClr val="9A9A9A"/>
+                </a:solidFill>
+                <a:latin typeface="Pretendard"/>
+                <a:ea typeface="Pretendard"/>
+                <a:cs typeface="Pretendard"/>
+              </a:rPr>
+              <a:t>2025.06 ~ 2025.08</a:t>
+            </a:r>
+          </a:p>
+        </p:txBody>
+      </p:sp>
+      <p:sp>
+        <p:nvSpPr>
+          <p:cNvPr id="60" name="Oval 59"/>
+          <p:cNvSpPr/>
+          <p:nvPr/>
+        </p:nvSpPr>
+        <p:spPr>
+          <a:xfrm>
+            <a:off x="4860036" y="3831336"/>
+            <a:ext cx="109728" cy="109728"/>
+          </a:xfrm>
+          <a:prstGeom prst="ellipse">
+            <a:avLst/>
+          </a:prstGeom>
+          <a:solidFill>
+            <a:srgbClr val="000000"/>
+          </a:solidFill>
+          <a:ln>
+            <a:noFill/>
+          </a:ln>
+          <a:effectLst/>
+        </p:spPr>
+        <p:style>
+          <a:lnRef idx="1">
+            <a:schemeClr val="accent1"/>
+          </a:lnRef>
+          <a:fillRef idx="3">
+            <a:schemeClr val="accent1"/>
+          </a:fillRef>
+          <a:effectRef idx="2">
+            <a:schemeClr val="accent1"/>
+          </a:effectRef>
+          <a:fontRef idx="minor">
+            <a:schemeClr val="lt1"/>
+          </a:fontRef>
+        </p:style>
+        <p:txBody>
+          <a:bodyPr rtlCol="0" anchor="ctr"/>
+          <a:lstStyle/>
+          <a:p>
+            <a:pPr algn="ctr"/>
+            <a:endParaRPr/>
+          </a:p>
+        </p:txBody>
+      </p:sp>
+      <p:sp>
+        <p:nvSpPr>
+          <p:cNvPr id="61" name="TextBox 60"/>
+          <p:cNvSpPr txBox="1"/>
+          <p:nvPr/>
+        </p:nvSpPr>
+        <p:spPr>
+          <a:xfrm>
+            <a:off x="4878324" y="4745736"/>
+            <a:ext cx="1364284" cy="365760"/>
+          </a:xfrm>
+          <a:prstGeom prst="rect">
+            <a:avLst/>
+          </a:prstGeom>
+          <a:solidFill>
+            <a:srgbClr val="FFFFFF"/>
+          </a:solidFill>
+        </p:spPr>
+        <p:txBody>
+          <a:bodyPr wrap="none" lIns="0" tIns="0" rIns="0" bIns="0" anchor="t">
+            <a:spAutoFit/>
+          </a:bodyPr>
+          <a:lstStyle/>
+          <a:p>
+            <a:pPr algn="l">
+              <a:lnSpc>
+                <a:spcPct val="120000"/>
+              </a:lnSpc>
+            </a:pPr>
+            <a:r>
+              <a:rPr sz="850" b="0">
+                <a:solidFill>
+                  <a:srgbClr val="000000"/>
+                </a:solidFill>
+                <a:latin typeface="Pretendard SemiBold"/>
+                <a:ea typeface="Pretendard SemiBold"/>
+                <a:cs typeface="Pretendard SemiBold"/>
+              </a:rPr>
+              <a:t>시각장애인용 피부질환 예측</a:t>
+            </a:r>
+          </a:p>
+          <a:p>
+            <a:pPr algn="l">
+              <a:lnSpc>
+                <a:spcPct val="120000"/>
+              </a:lnSpc>
+            </a:pPr>
+            <a:r>
+              <a:rPr sz="750" b="0">
+                <a:solidFill>
+                  <a:srgbClr val="9A9A9A"/>
+                </a:solidFill>
+                <a:latin typeface="Pretendard"/>
+                <a:ea typeface="Pretendard"/>
+                <a:cs typeface="Pretendard"/>
+              </a:rPr>
+              <a:t>2025.07</a:t>
+            </a:r>
+          </a:p>
+        </p:txBody>
+      </p:sp>
+      <p:sp>
+        <p:nvSpPr>
+          <p:cNvPr id="62" name="Oval 61"/>
+          <p:cNvSpPr/>
+          <p:nvPr/>
+        </p:nvSpPr>
+        <p:spPr>
+          <a:xfrm>
+            <a:off x="5333564" y="3831336"/>
+            <a:ext cx="109728" cy="109728"/>
+          </a:xfrm>
+          <a:prstGeom prst="ellipse">
+            <a:avLst/>
+          </a:prstGeom>
+          <a:solidFill>
+            <a:srgbClr val="000000"/>
+          </a:solidFill>
+          <a:ln>
+            <a:noFill/>
+          </a:ln>
+          <a:effectLst/>
+        </p:spPr>
+        <p:style>
+          <a:lnRef idx="1">
+            <a:schemeClr val="accent1"/>
+          </a:lnRef>
+          <a:fillRef idx="3">
+            <a:schemeClr val="accent1"/>
+          </a:fillRef>
+          <a:effectRef idx="2">
+            <a:schemeClr val="accent1"/>
+          </a:effectRef>
+          <a:fontRef idx="minor">
+            <a:schemeClr val="lt1"/>
+          </a:fontRef>
+        </p:style>
+        <p:txBody>
+          <a:bodyPr rtlCol="0" anchor="ctr"/>
+          <a:lstStyle/>
+          <a:p>
+            <a:pPr algn="ctr"/>
+            <a:endParaRPr/>
+          </a:p>
+        </p:txBody>
+      </p:sp>
+      <p:sp>
+        <p:nvSpPr>
+          <p:cNvPr id="63" name="TextBox 62"/>
+          <p:cNvSpPr txBox="1"/>
+          <p:nvPr/>
+        </p:nvSpPr>
+        <p:spPr>
+          <a:xfrm>
+            <a:off x="5351852" y="5312664"/>
+            <a:ext cx="1042416" cy="365760"/>
+          </a:xfrm>
+          <a:prstGeom prst="rect">
+            <a:avLst/>
+          </a:prstGeom>
+          <a:solidFill>
+            <a:srgbClr val="FFFFFF"/>
+          </a:solidFill>
+        </p:spPr>
+        <p:txBody>
+          <a:bodyPr wrap="none" lIns="0" tIns="0" rIns="0" bIns="0" anchor="t">
+            <a:spAutoFit/>
+          </a:bodyPr>
+          <a:lstStyle/>
+          <a:p>
+            <a:pPr algn="l">
+              <a:lnSpc>
+                <a:spcPct val="120000"/>
+              </a:lnSpc>
+            </a:pPr>
+            <a:r>
+              <a:rPr sz="850" b="0">
+                <a:solidFill>
+                  <a:srgbClr val="000000"/>
+                </a:solidFill>
+                <a:latin typeface="Pretendard SemiBold"/>
+                <a:ea typeface="Pretendard SemiBold"/>
+                <a:cs typeface="Pretendard SemiBold"/>
+              </a:rPr>
+              <a:t>환헤지 멀티에이전트</a:t>
+            </a:r>
+          </a:p>
+          <a:p>
+            <a:pPr algn="l">
+              <a:lnSpc>
+                <a:spcPct val="120000"/>
+              </a:lnSpc>
+            </a:pPr>
+            <a:r>
+              <a:rPr sz="750" b="0">
+                <a:solidFill>
+                  <a:srgbClr val="9A9A9A"/>
+                </a:solidFill>
+                <a:latin typeface="Pretendard"/>
+                <a:ea typeface="Pretendard"/>
+                <a:cs typeface="Pretendard"/>
+              </a:rPr>
+              <a:t>2025.07 ~ 2025.12</a:t>
+            </a:r>
+          </a:p>
+        </p:txBody>
+      </p:sp>
+      <p:sp>
+        <p:nvSpPr>
+          <p:cNvPr id="64" name="Oval 63"/>
+          <p:cNvSpPr/>
+          <p:nvPr/>
+        </p:nvSpPr>
+        <p:spPr>
+          <a:xfrm>
+            <a:off x="5807093" y="3831336"/>
+            <a:ext cx="109728" cy="109728"/>
+          </a:xfrm>
+          <a:prstGeom prst="ellipse">
+            <a:avLst/>
+          </a:prstGeom>
+          <a:solidFill>
+            <a:srgbClr val="000000"/>
+          </a:solidFill>
+          <a:ln>
+            <a:noFill/>
+          </a:ln>
+          <a:effectLst/>
+        </p:spPr>
+        <p:style>
+          <a:lnRef idx="1">
+            <a:schemeClr val="accent1"/>
+          </a:lnRef>
+          <a:fillRef idx="3">
+            <a:schemeClr val="accent1"/>
+          </a:fillRef>
+          <a:effectRef idx="2">
+            <a:schemeClr val="accent1"/>
+          </a:effectRef>
+          <a:fontRef idx="minor">
+            <a:schemeClr val="lt1"/>
+          </a:fontRef>
+        </p:style>
+        <p:txBody>
+          <a:bodyPr rtlCol="0" anchor="ctr"/>
+          <a:lstStyle/>
+          <a:p>
+            <a:pPr algn="ctr"/>
+            <a:endParaRPr/>
+          </a:p>
+        </p:txBody>
+      </p:sp>
+      <p:sp>
+        <p:nvSpPr>
+          <p:cNvPr id="65" name="TextBox 64"/>
+          <p:cNvSpPr txBox="1"/>
+          <p:nvPr/>
+        </p:nvSpPr>
+        <p:spPr>
+          <a:xfrm>
+            <a:off x="5825381" y="4178808"/>
+            <a:ext cx="1185062" cy="365760"/>
+          </a:xfrm>
+          <a:prstGeom prst="rect">
+            <a:avLst/>
+          </a:prstGeom>
+          <a:solidFill>
+            <a:srgbClr val="FFFFFF"/>
+          </a:solidFill>
+        </p:spPr>
+        <p:txBody>
+          <a:bodyPr wrap="none" lIns="0" tIns="0" rIns="0" bIns="0" anchor="t">
+            <a:spAutoFit/>
+          </a:bodyPr>
+          <a:lstStyle/>
+          <a:p>
+            <a:pPr algn="l">
+              <a:lnSpc>
+                <a:spcPct val="120000"/>
+              </a:lnSpc>
+            </a:pPr>
+            <a:r>
+              <a:rPr sz="850" b="0">
+                <a:solidFill>
+                  <a:srgbClr val="000000"/>
+                </a:solidFill>
+                <a:latin typeface="Pretendard SemiBold"/>
+                <a:ea typeface="Pretendard SemiBold"/>
+                <a:cs typeface="Pretendard SemiBold"/>
+              </a:rPr>
+              <a:t>건물별 전력사용량 예측</a:t>
+            </a:r>
+          </a:p>
+          <a:p>
+            <a:pPr algn="l">
+              <a:lnSpc>
+                <a:spcPct val="120000"/>
+              </a:lnSpc>
+            </a:pPr>
+            <a:r>
+              <a:rPr sz="750" b="0">
+                <a:solidFill>
+                  <a:srgbClr val="9A9A9A"/>
+                </a:solidFill>
+                <a:latin typeface="Pretendard"/>
+                <a:ea typeface="Pretendard"/>
+                <a:cs typeface="Pretendard"/>
+              </a:rPr>
+              <a:t>2025.08 ~ 2025.09</a:t>
+            </a:r>
+          </a:p>
+        </p:txBody>
+      </p:sp>
+      <p:sp>
+        <p:nvSpPr>
+          <p:cNvPr id="66" name="Oval 65"/>
+          <p:cNvSpPr/>
+          <p:nvPr/>
+        </p:nvSpPr>
+        <p:spPr>
+          <a:xfrm>
+            <a:off x="6280621" y="3831336"/>
+            <a:ext cx="109728" cy="109728"/>
+          </a:xfrm>
+          <a:prstGeom prst="ellipse">
+            <a:avLst/>
+          </a:prstGeom>
+          <a:solidFill>
+            <a:srgbClr val="000000"/>
+          </a:solidFill>
+          <a:ln>
+            <a:noFill/>
+          </a:ln>
+          <a:effectLst/>
+        </p:spPr>
+        <p:style>
+          <a:lnRef idx="1">
+            <a:schemeClr val="accent1"/>
+          </a:lnRef>
+          <a:fillRef idx="3">
+            <a:schemeClr val="accent1"/>
+          </a:fillRef>
+          <a:effectRef idx="2">
+            <a:schemeClr val="accent1"/>
+          </a:effectRef>
+          <a:fontRef idx="minor">
+            <a:schemeClr val="lt1"/>
+          </a:fontRef>
+        </p:style>
+        <p:txBody>
+          <a:bodyPr rtlCol="0" anchor="ctr"/>
+          <a:lstStyle/>
+          <a:p>
+            <a:pPr algn="ctr"/>
+            <a:endParaRPr/>
+          </a:p>
+        </p:txBody>
+      </p:sp>
+      <p:sp>
+        <p:nvSpPr>
+          <p:cNvPr id="67" name="TextBox 66"/>
+          <p:cNvSpPr txBox="1"/>
+          <p:nvPr/>
+        </p:nvSpPr>
+        <p:spPr>
+          <a:xfrm>
+            <a:off x="6298909" y="4745736"/>
+            <a:ext cx="1364284" cy="365760"/>
+          </a:xfrm>
+          <a:prstGeom prst="rect">
+            <a:avLst/>
+          </a:prstGeom>
+          <a:solidFill>
+            <a:srgbClr val="FFFFFF"/>
+          </a:solidFill>
+        </p:spPr>
+        <p:txBody>
+          <a:bodyPr wrap="none" lIns="0" tIns="0" rIns="0" bIns="0" anchor="t">
+            <a:spAutoFit/>
+          </a:bodyPr>
+          <a:lstStyle/>
+          <a:p>
+            <a:pPr algn="l">
+              <a:lnSpc>
+                <a:spcPct val="120000"/>
+              </a:lnSpc>
+            </a:pPr>
+            <a:r>
+              <a:rPr sz="850" b="0">
+                <a:solidFill>
+                  <a:srgbClr val="000000"/>
+                </a:solidFill>
+                <a:latin typeface="Pretendard SemiBold"/>
+                <a:ea typeface="Pretendard SemiBold"/>
+                <a:cs typeface="Pretendard SemiBold"/>
+              </a:rPr>
+              <a:t>3D 의료 파운데이션 모델</a:t>
+            </a:r>
+          </a:p>
+          <a:p>
+            <a:pPr algn="l">
+              <a:lnSpc>
+                <a:spcPct val="120000"/>
+              </a:lnSpc>
+            </a:pPr>
+            <a:r>
+              <a:rPr sz="750" b="0">
+                <a:solidFill>
+                  <a:srgbClr val="9A9A9A"/>
+                </a:solidFill>
+                <a:latin typeface="Pretendard"/>
+                <a:ea typeface="Pretendard"/>
+                <a:cs typeface="Pretendard"/>
+              </a:rPr>
+              <a:t>2025.09 ~ 2026.02</a:t>
+            </a:r>
+          </a:p>
+        </p:txBody>
+      </p:sp>
+      <p:sp>
+        <p:nvSpPr>
+          <p:cNvPr id="68" name="Oval 67"/>
+          <p:cNvSpPr/>
+          <p:nvPr/>
+        </p:nvSpPr>
+        <p:spPr>
+          <a:xfrm>
+            <a:off x="6754150" y="3831336"/>
+            <a:ext cx="109728" cy="109728"/>
+          </a:xfrm>
+          <a:prstGeom prst="ellipse">
+            <a:avLst/>
+          </a:prstGeom>
+          <a:solidFill>
+            <a:srgbClr val="000000"/>
+          </a:solidFill>
+          <a:ln>
+            <a:noFill/>
+          </a:ln>
+          <a:effectLst/>
+        </p:spPr>
+        <p:style>
+          <a:lnRef idx="1">
+            <a:schemeClr val="accent1"/>
+          </a:lnRef>
+          <a:fillRef idx="3">
+            <a:schemeClr val="accent1"/>
+          </a:fillRef>
+          <a:effectRef idx="2">
+            <a:schemeClr val="accent1"/>
+          </a:effectRef>
+          <a:fontRef idx="minor">
+            <a:schemeClr val="lt1"/>
+          </a:fontRef>
+        </p:style>
+        <p:txBody>
+          <a:bodyPr rtlCol="0" anchor="ctr"/>
+          <a:lstStyle/>
+          <a:p>
+            <a:pPr algn="ctr"/>
+            <a:endParaRPr/>
+          </a:p>
+        </p:txBody>
+      </p:sp>
+      <p:sp>
+        <p:nvSpPr>
+          <p:cNvPr id="69" name="TextBox 68"/>
+          <p:cNvSpPr txBox="1"/>
+          <p:nvPr/>
+        </p:nvSpPr>
+        <p:spPr>
+          <a:xfrm>
+            <a:off x="6772438" y="5312664"/>
+            <a:ext cx="1543507" cy="365760"/>
+          </a:xfrm>
+          <a:prstGeom prst="rect">
+            <a:avLst/>
+          </a:prstGeom>
+          <a:solidFill>
+            <a:srgbClr val="FFFFFF"/>
+          </a:solidFill>
+        </p:spPr>
+        <p:txBody>
+          <a:bodyPr wrap="none" lIns="0" tIns="0" rIns="0" bIns="0" anchor="t">
+            <a:spAutoFit/>
+          </a:bodyPr>
+          <a:lstStyle/>
+          <a:p>
+            <a:pPr algn="l">
+              <a:lnSpc>
+                <a:spcPct val="120000"/>
+              </a:lnSpc>
+            </a:pPr>
+            <a:r>
+              <a:rPr sz="850" b="0">
+                <a:solidFill>
+                  <a:srgbClr val="000000"/>
+                </a:solidFill>
+                <a:latin typeface="Pretendard SemiBold"/>
+                <a:ea typeface="Pretendard SemiBold"/>
+                <a:cs typeface="Pretendard SemiBold"/>
+              </a:rPr>
+              <a:t>의료 데이터 다변량 평균 비교</a:t>
+            </a:r>
+          </a:p>
+          <a:p>
+            <a:pPr algn="l">
+              <a:lnSpc>
+                <a:spcPct val="120000"/>
+              </a:lnSpc>
+            </a:pPr>
+            <a:r>
+              <a:rPr sz="750" b="0">
+                <a:solidFill>
+                  <a:srgbClr val="9A9A9A"/>
+                </a:solidFill>
+                <a:latin typeface="Pretendard"/>
+                <a:ea typeface="Pretendard"/>
+                <a:cs typeface="Pretendard"/>
+              </a:rPr>
+              <a:t>2025.10</a:t>
+            </a:r>
+          </a:p>
+        </p:txBody>
+      </p:sp>
+      <p:sp>
+        <p:nvSpPr>
+          <p:cNvPr id="70" name="Oval 69"/>
+          <p:cNvSpPr/>
+          <p:nvPr/>
+        </p:nvSpPr>
+        <p:spPr>
+          <a:xfrm>
+            <a:off x="7227678" y="3831336"/>
+            <a:ext cx="109728" cy="109728"/>
+          </a:xfrm>
+          <a:prstGeom prst="ellipse">
+            <a:avLst/>
+          </a:prstGeom>
+          <a:solidFill>
+            <a:srgbClr val="000000"/>
+          </a:solidFill>
+          <a:ln>
+            <a:noFill/>
+          </a:ln>
+          <a:effectLst/>
+        </p:spPr>
+        <p:style>
+          <a:lnRef idx="1">
+            <a:schemeClr val="accent1"/>
+          </a:lnRef>
+          <a:fillRef idx="3">
+            <a:schemeClr val="accent1"/>
+          </a:fillRef>
+          <a:effectRef idx="2">
+            <a:schemeClr val="accent1"/>
+          </a:effectRef>
+          <a:fontRef idx="minor">
+            <a:schemeClr val="lt1"/>
+          </a:fontRef>
+        </p:style>
+        <p:txBody>
+          <a:bodyPr rtlCol="0" anchor="ctr"/>
+          <a:lstStyle/>
+          <a:p>
+            <a:pPr algn="ctr"/>
+            <a:endParaRPr/>
+          </a:p>
+        </p:txBody>
+      </p:sp>
+      <p:sp>
+        <p:nvSpPr>
+          <p:cNvPr id="71" name="TextBox 70"/>
+          <p:cNvSpPr txBox="1"/>
+          <p:nvPr/>
+        </p:nvSpPr>
+        <p:spPr>
+          <a:xfrm>
+            <a:off x="7245966" y="4178808"/>
+            <a:ext cx="1185062" cy="365760"/>
+          </a:xfrm>
+          <a:prstGeom prst="rect">
+            <a:avLst/>
+          </a:prstGeom>
+          <a:solidFill>
+            <a:srgbClr val="FFFFFF"/>
+          </a:solidFill>
+        </p:spPr>
+        <p:txBody>
+          <a:bodyPr wrap="none" lIns="0" tIns="0" rIns="0" bIns="0" anchor="t">
+            <a:spAutoFit/>
+          </a:bodyPr>
+          <a:lstStyle/>
+          <a:p>
+            <a:pPr algn="l">
+              <a:lnSpc>
+                <a:spcPct val="120000"/>
+              </a:lnSpc>
+            </a:pPr>
+            <a:r>
+              <a:rPr sz="850" b="0">
+                <a:solidFill>
+                  <a:srgbClr val="000000"/>
+                </a:solidFill>
+                <a:latin typeface="Pretendard SemiBold"/>
+                <a:ea typeface="Pretendard SemiBold"/>
+                <a:cs typeface="Pretendard SemiBold"/>
+              </a:rPr>
+              <a:t>전차 제원 PCA 분석</a:t>
+            </a:r>
+          </a:p>
+          <a:p>
+            <a:pPr algn="l">
+              <a:lnSpc>
+                <a:spcPct val="120000"/>
+              </a:lnSpc>
+            </a:pPr>
+            <a:r>
+              <a:rPr sz="750" b="0">
+                <a:solidFill>
+                  <a:srgbClr val="9A9A9A"/>
+                </a:solidFill>
+                <a:latin typeface="Pretendard"/>
+                <a:ea typeface="Pretendard"/>
+                <a:cs typeface="Pretendard"/>
+              </a:rPr>
+              <a:t>2025.11</a:t>
+            </a:r>
+          </a:p>
+        </p:txBody>
+      </p:sp>
+      <p:sp>
+        <p:nvSpPr>
+          <p:cNvPr id="72" name="Oval 71"/>
+          <p:cNvSpPr/>
+          <p:nvPr/>
+        </p:nvSpPr>
+        <p:spPr>
+          <a:xfrm>
+            <a:off x="7701207" y="3831336"/>
+            <a:ext cx="109728" cy="109728"/>
+          </a:xfrm>
+          <a:prstGeom prst="ellipse">
+            <a:avLst/>
+          </a:prstGeom>
+          <a:solidFill>
+            <a:srgbClr val="000000"/>
+          </a:solidFill>
+          <a:ln>
+            <a:noFill/>
+          </a:ln>
+          <a:effectLst/>
+        </p:spPr>
+        <p:style>
+          <a:lnRef idx="1">
+            <a:schemeClr val="accent1"/>
+          </a:lnRef>
+          <a:fillRef idx="3">
+            <a:schemeClr val="accent1"/>
+          </a:fillRef>
+          <a:effectRef idx="2">
+            <a:schemeClr val="accent1"/>
+          </a:effectRef>
+          <a:fontRef idx="minor">
+            <a:schemeClr val="lt1"/>
+          </a:fontRef>
+        </p:style>
+        <p:txBody>
+          <a:bodyPr rtlCol="0" anchor="ctr"/>
+          <a:lstStyle/>
+          <a:p>
+            <a:pPr algn="ctr"/>
+            <a:endParaRPr/>
+          </a:p>
+        </p:txBody>
+      </p:sp>
+      <p:sp>
+        <p:nvSpPr>
+          <p:cNvPr id="73" name="TextBox 72"/>
+          <p:cNvSpPr txBox="1"/>
+          <p:nvPr/>
+        </p:nvSpPr>
+        <p:spPr>
+          <a:xfrm>
+            <a:off x="7719495" y="4745736"/>
+            <a:ext cx="1185062" cy="365760"/>
+          </a:xfrm>
+          <a:prstGeom prst="rect">
+            <a:avLst/>
+          </a:prstGeom>
+          <a:solidFill>
+            <a:srgbClr val="FFFFFF"/>
+          </a:solidFill>
+        </p:spPr>
+        <p:txBody>
+          <a:bodyPr wrap="none" lIns="0" tIns="0" rIns="0" bIns="0" anchor="t">
+            <a:spAutoFit/>
+          </a:bodyPr>
+          <a:lstStyle/>
+          <a:p>
+            <a:pPr algn="l">
+              <a:lnSpc>
+                <a:spcPct val="120000"/>
+              </a:lnSpc>
+            </a:pPr>
+            <a:r>
+              <a:rPr sz="850" b="0">
+                <a:solidFill>
+                  <a:srgbClr val="000000"/>
+                </a:solidFill>
+                <a:latin typeface="Pretendard SemiBold"/>
+                <a:ea typeface="Pretendard SemiBold"/>
+                <a:cs typeface="Pretendard SemiBold"/>
+              </a:rPr>
+              <a:t>확률론 시험 자동 채점</a:t>
+            </a:r>
+          </a:p>
+          <a:p>
+            <a:pPr algn="l">
+              <a:lnSpc>
+                <a:spcPct val="120000"/>
+              </a:lnSpc>
+            </a:pPr>
+            <a:r>
+              <a:rPr sz="750" b="0">
+                <a:solidFill>
+                  <a:srgbClr val="9A9A9A"/>
+                </a:solidFill>
+                <a:latin typeface="Pretendard"/>
+                <a:ea typeface="Pretendard"/>
+                <a:cs typeface="Pretendard"/>
+              </a:rPr>
+              <a:t>2026.02 ~ 2026.03</a:t>
+            </a:r>
+          </a:p>
+        </p:txBody>
+      </p:sp>
+      <p:sp>
+        <p:nvSpPr>
+          <p:cNvPr id="74" name="Oval 73"/>
+          <p:cNvSpPr/>
+          <p:nvPr/>
+        </p:nvSpPr>
+        <p:spPr>
+          <a:xfrm>
+            <a:off x="8174736" y="3831336"/>
+            <a:ext cx="109728" cy="109728"/>
+          </a:xfrm>
+          <a:prstGeom prst="ellipse">
+            <a:avLst/>
+          </a:prstGeom>
+          <a:solidFill>
+            <a:srgbClr val="000000"/>
+          </a:solidFill>
+          <a:ln>
+            <a:noFill/>
+          </a:ln>
+          <a:effectLst/>
+        </p:spPr>
+        <p:style>
+          <a:lnRef idx="1">
+            <a:schemeClr val="accent1"/>
+          </a:lnRef>
+          <a:fillRef idx="3">
+            <a:schemeClr val="accent1"/>
+          </a:fillRef>
+          <a:effectRef idx="2">
+            <a:schemeClr val="accent1"/>
+          </a:effectRef>
+          <a:fontRef idx="minor">
+            <a:schemeClr val="lt1"/>
+          </a:fontRef>
+        </p:style>
+        <p:txBody>
+          <a:bodyPr rtlCol="0" anchor="ctr"/>
+          <a:lstStyle/>
+          <a:p>
+            <a:pPr algn="ctr"/>
+            <a:endParaRPr/>
+          </a:p>
+        </p:txBody>
+      </p:sp>
+      <p:sp>
+        <p:nvSpPr>
+          <p:cNvPr id="75" name="TextBox 74"/>
+          <p:cNvSpPr txBox="1"/>
+          <p:nvPr/>
+        </p:nvSpPr>
+        <p:spPr>
+          <a:xfrm>
+            <a:off x="8193024" y="5312664"/>
+            <a:ext cx="1722729" cy="365760"/>
+          </a:xfrm>
+          <a:prstGeom prst="rect">
+            <a:avLst/>
+          </a:prstGeom>
+          <a:solidFill>
+            <a:srgbClr val="FFFFFF"/>
+          </a:solidFill>
+        </p:spPr>
+        <p:txBody>
+          <a:bodyPr wrap="none" lIns="0" tIns="0" rIns="0" bIns="0" anchor="t">
+            <a:spAutoFit/>
+          </a:bodyPr>
+          <a:lstStyle/>
+          <a:p>
+            <a:pPr algn="l">
+              <a:lnSpc>
+                <a:spcPct val="120000"/>
+              </a:lnSpc>
+            </a:pPr>
+            <a:r>
+              <a:rPr sz="850" b="0">
+                <a:solidFill>
+                  <a:srgbClr val="000000"/>
+                </a:solidFill>
+                <a:latin typeface="Pretendard SemiBold"/>
+                <a:ea typeface="Pretendard SemiBold"/>
+                <a:cs typeface="Pretendard SemiBold"/>
+              </a:rPr>
+              <a:t>자율주행 ODD 위험평가 에이전트</a:t>
+            </a:r>
+          </a:p>
+          <a:p>
+            <a:pPr algn="l">
+              <a:lnSpc>
+                <a:spcPct val="120000"/>
+              </a:lnSpc>
+            </a:pPr>
+            <a:r>
+              <a:rPr sz="750" b="0">
+                <a:solidFill>
+                  <a:srgbClr val="9A9A9A"/>
+                </a:solidFill>
+                <a:latin typeface="Pretendard"/>
+                <a:ea typeface="Pretendard"/>
+                <a:cs typeface="Pretendard"/>
+              </a:rPr>
+              <a:t>2026.05 ~ 2026.06</a:t>
+            </a:r>
+          </a:p>
+        </p:txBody>
+      </p:sp>
+      <p:sp>
+        <p:nvSpPr>
+          <p:cNvPr id="76" name="Oval 75"/>
+          <p:cNvSpPr/>
+          <p:nvPr/>
+        </p:nvSpPr>
+        <p:spPr>
+          <a:xfrm>
+            <a:off x="8778240" y="2880360"/>
+            <a:ext cx="640080" cy="640080"/>
+          </a:xfrm>
+          <a:prstGeom prst="ellipse">
+            <a:avLst/>
+          </a:prstGeom>
+          <a:solidFill>
+            <a:srgbClr val="000000"/>
+          </a:solidFill>
+          <a:ln>
+            <a:noFill/>
+          </a:ln>
+          <a:effectLst/>
+        </p:spPr>
+        <p:style>
+          <a:lnRef idx="1">
+            <a:schemeClr val="accent1"/>
+          </a:lnRef>
+          <a:fillRef idx="3">
+            <a:schemeClr val="accent1"/>
+          </a:fillRef>
+          <a:effectRef idx="2">
+            <a:schemeClr val="accent1"/>
+          </a:effectRef>
+          <a:fontRef idx="minor">
+            <a:schemeClr val="lt1"/>
+          </a:fontRef>
+        </p:style>
+        <p:txBody>
+          <a:bodyPr rtlCol="0" anchor="ctr"/>
+          <a:lstStyle/>
+          <a:p>
+            <a:pPr algn="ctr"/>
+            <a:endParaRPr/>
+          </a:p>
+        </p:txBody>
+      </p:sp>
+      <p:sp>
+        <p:nvSpPr>
+          <p:cNvPr id="77" name="Freeform 76"/>
+          <p:cNvSpPr/>
+          <p:nvPr/>
+        </p:nvSpPr>
+        <p:spPr>
+          <a:xfrm>
+            <a:off x="8979407" y="3154680"/>
+            <a:ext cx="237745" cy="137160"/>
           </a:xfrm>
           <a:custGeom>
             <a:avLst/>
@@ -5963,18 +6958,18 @@
             <a:cxnLst/>
             <a:rect l="l" t="t" r="r" b="b"/>
             <a:pathLst>
-              <a:path w="164592" h="210312">
+              <a:path w="237745" h="137160">
                 <a:moveTo>
-                  <a:pt x="0" y="210312"/>
+                  <a:pt x="0" y="0"/>
                 </a:moveTo>
                 <a:lnTo>
-                  <a:pt x="0" y="0"/>
+                  <a:pt x="237745" y="0"/>
                 </a:lnTo>
                 <a:lnTo>
-                  <a:pt x="164592" y="0"/>
+                  <a:pt x="237745" y="137160"/>
                 </a:lnTo>
                 <a:lnTo>
-                  <a:pt x="164592" y="210312"/>
+                  <a:pt x="0" y="137160"/>
                 </a:lnTo>
                 <a:close/>
               </a:path>
@@ -6011,16 +7006,81 @@
           </a:p>
         </p:txBody>
       </p:sp>
+      <p:sp>
+        <p:nvSpPr>
+          <p:cNvPr id="78" name="Freeform 77"/>
+          <p:cNvSpPr/>
+          <p:nvPr/>
+        </p:nvSpPr>
+        <p:spPr>
+          <a:xfrm>
+            <a:off x="9057132" y="3108960"/>
+            <a:ext cx="82296" cy="45720"/>
+          </a:xfrm>
+          <a:custGeom>
+            <a:avLst/>
+            <a:gdLst/>
+            <a:ahLst/>
+            <a:cxnLst/>
+            <a:rect l="l" t="t" r="r" b="b"/>
+            <a:pathLst>
+              <a:path w="82296" h="45720">
+                <a:moveTo>
+                  <a:pt x="0" y="45720"/>
+                </a:moveTo>
+                <a:lnTo>
+                  <a:pt x="0" y="0"/>
+                </a:lnTo>
+                <a:lnTo>
+                  <a:pt x="82296" y="0"/>
+                </a:lnTo>
+                <a:lnTo>
+                  <a:pt x="82296" y="45720"/>
+                </a:lnTo>
+              </a:path>
+            </a:pathLst>
+          </a:custGeom>
+          <a:noFill/>
+          <a:ln w="19050">
+            <a:solidFill>
+              <a:srgbClr val="FFFFFF"/>
+            </a:solidFill>
+          </a:ln>
+          <a:effectLst/>
+        </p:spPr>
+        <p:style>
+          <a:lnRef idx="1">
+            <a:schemeClr val="accent1"/>
+          </a:lnRef>
+          <a:fillRef idx="3">
+            <a:schemeClr val="accent1"/>
+          </a:fillRef>
+          <a:effectRef idx="2">
+            <a:schemeClr val="accent1"/>
+          </a:effectRef>
+          <a:fontRef idx="minor">
+            <a:schemeClr val="lt1"/>
+          </a:fontRef>
+        </p:style>
+        <p:txBody>
+          <a:bodyPr rtlCol="0" anchor="ctr"/>
+          <a:lstStyle/>
+          <a:p>
+            <a:pPr algn="ctr"/>
+            <a:endParaRPr/>
+          </a:p>
+        </p:txBody>
+      </p:sp>
       <p:cxnSp>
         <p:nvCxnSpPr>
-          <p:cNvPr id="61" name="Connector 60"/>
+          <p:cNvPr id="79" name="Connector 78"/>
           <p:cNvCxnSpPr/>
           <p:nvPr/>
         </p:nvCxnSpPr>
         <p:spPr>
           <a:xfrm>
-            <a:off x="7548372" y="4023360"/>
-            <a:ext cx="82296" cy="0"/>
+            <a:off x="8979407" y="3209544"/>
+            <a:ext cx="237745" cy="0"/>
           </a:xfrm>
           <a:prstGeom prst="line">
             <a:avLst/>
@@ -6032,58 +7092,16 @@
           </a:ln>
         </p:spPr>
       </p:cxnSp>
-      <p:cxnSp>
-        <p:nvCxnSpPr>
-          <p:cNvPr id="62" name="Connector 61"/>
-          <p:cNvCxnSpPr/>
-          <p:nvPr/>
-        </p:nvCxnSpPr>
-        <p:spPr>
-          <a:xfrm>
-            <a:off x="7548372" y="4078224"/>
-            <a:ext cx="82296" cy="0"/>
-          </a:xfrm>
-          <a:prstGeom prst="line">
-            <a:avLst/>
-          </a:prstGeom>
-          <a:ln w="12700">
-            <a:solidFill>
-              <a:srgbClr val="FFFFFF"/>
-            </a:solidFill>
-          </a:ln>
-        </p:spPr>
-      </p:cxnSp>
-      <p:cxnSp>
-        <p:nvCxnSpPr>
-          <p:cNvPr id="63" name="Connector 62"/>
-          <p:cNvCxnSpPr/>
-          <p:nvPr/>
-        </p:nvCxnSpPr>
-        <p:spPr>
-          <a:xfrm>
-            <a:off x="7589520" y="4123944"/>
-            <a:ext cx="0" cy="54864"/>
-          </a:xfrm>
-          <a:prstGeom prst="line">
-            <a:avLst/>
-          </a:prstGeom>
-          <a:ln w="12700">
-            <a:solidFill>
-              <a:srgbClr val="FFFFFF"/>
-            </a:solidFill>
-          </a:ln>
-        </p:spPr>
-      </p:cxnSp>
-      <p:sp>
-        <p:nvSpPr>
-          <p:cNvPr id="64" name="TextBox 63"/>
+      <p:sp>
+        <p:nvSpPr>
+          <p:cNvPr id="80" name="TextBox 79"/>
           <p:cNvSpPr txBox="1"/>
           <p:nvPr/>
         </p:nvSpPr>
         <p:spPr>
           <a:xfrm>
-            <a:off x="7315200" y="4526280"/>
-            <a:ext cx="2194560" cy="822960"/>
+            <a:off x="8778240" y="2240280"/>
+            <a:ext cx="1828800" cy="640080"/>
           </a:xfrm>
           <a:prstGeom prst="rect">
             <a:avLst/>
@@ -6102,7 +7120,7 @@
               </a:lnSpc>
             </a:pPr>
             <a:r>
-              <a:rPr sz="1250" b="1">
+              <a:rPr sz="1200" b="1">
                 <a:solidFill>
                   <a:srgbClr val="000000"/>
                 </a:solidFill>
@@ -6110,7 +7128,7 @@
                 <a:ea typeface="Pretendard"/>
                 <a:cs typeface="Pretendard"/>
               </a:rPr>
-              <a:t>BCG X 인턴</a:t>
+              <a:t>BCG 인턴</a:t>
             </a:r>
           </a:p>
           <a:p>
@@ -6120,7 +7138,7 @@
               </a:lnSpc>
             </a:pPr>
             <a:r>
-              <a:rPr sz="950" b="0">
+              <a:rPr sz="900" b="0">
                 <a:solidFill>
                   <a:srgbClr val="6B6B6B"/>
                 </a:solidFill>
@@ -6128,7 +7146,7 @@
                 <a:ea typeface="Pretendard"/>
                 <a:cs typeface="Pretendard"/>
               </a:rPr>
-              <a:t>데이터마트, 예측 모델, 분석 화면</a:t>
+              <a:t>실제 산업 현장에서의 모델링</a:t>
             </a:r>
           </a:p>
           <a:p>
@@ -6146,21 +7164,21 @@
                 <a:ea typeface="Pretendard"/>
                 <a:cs typeface="Pretendard"/>
               </a:rPr>
-              <a:t>2026.06 ~ 2026.09</a:t>
+              <a:t>2026.06 ~ 2026.08</a:t>
             </a:r>
           </a:p>
         </p:txBody>
       </p:sp>
       <p:cxnSp>
         <p:nvCxnSpPr>
-          <p:cNvPr id="65" name="Connector 64"/>
+          <p:cNvPr id="81" name="Connector 80"/>
           <p:cNvCxnSpPr/>
           <p:nvPr/>
         </p:nvCxnSpPr>
         <p:spPr>
           <a:xfrm>
-            <a:off x="7946136" y="4069080"/>
-            <a:ext cx="1316736" cy="0"/>
+            <a:off x="9418319" y="3200400"/>
+            <a:ext cx="658369" cy="0"/>
           </a:xfrm>
           <a:prstGeom prst="line">
             <a:avLst/>
@@ -6174,14 +7192,14 @@
       </p:cxnSp>
       <p:sp>
         <p:nvSpPr>
-          <p:cNvPr id="66" name="Oval 65"/>
+          <p:cNvPr id="82" name="Oval 81"/>
           <p:cNvSpPr/>
           <p:nvPr/>
         </p:nvSpPr>
         <p:spPr>
           <a:xfrm>
-            <a:off x="9262872" y="3913632"/>
-            <a:ext cx="310896" cy="310896"/>
+            <a:off x="10076688" y="2990088"/>
+            <a:ext cx="420624" cy="420624"/>
           </a:xfrm>
           <a:prstGeom prst="ellipse">
             <a:avLst/>
@@ -6221,14 +7239,122 @@
       </p:sp>
       <p:sp>
         <p:nvSpPr>
-          <p:cNvPr id="67" name="TextBox 66"/>
+          <p:cNvPr id="83" name="Freeform 82"/>
+          <p:cNvSpPr/>
+          <p:nvPr/>
+        </p:nvSpPr>
+        <p:spPr>
+          <a:xfrm>
+            <a:off x="10177272" y="3127248"/>
+            <a:ext cx="219456" cy="146304"/>
+          </a:xfrm>
+          <a:custGeom>
+            <a:avLst/>
+            <a:gdLst/>
+            <a:ahLst/>
+            <a:cxnLst/>
+            <a:rect l="l" t="t" r="r" b="b"/>
+            <a:pathLst>
+              <a:path w="219456" h="146304">
+                <a:moveTo>
+                  <a:pt x="0" y="0"/>
+                </a:moveTo>
+                <a:lnTo>
+                  <a:pt x="219456" y="0"/>
+                </a:lnTo>
+                <a:lnTo>
+                  <a:pt x="219456" y="146304"/>
+                </a:lnTo>
+                <a:lnTo>
+                  <a:pt x="0" y="146304"/>
+                </a:lnTo>
+                <a:close/>
+              </a:path>
+            </a:pathLst>
+          </a:custGeom>
+          <a:noFill/>
+          <a:ln w="19050">
+            <a:solidFill>
+              <a:srgbClr val="000000"/>
+            </a:solidFill>
+          </a:ln>
+          <a:effectLst/>
+        </p:spPr>
+        <p:style>
+          <a:lnRef idx="1">
+            <a:schemeClr val="accent1"/>
+          </a:lnRef>
+          <a:fillRef idx="3">
+            <a:schemeClr val="accent1"/>
+          </a:fillRef>
+          <a:effectRef idx="2">
+            <a:schemeClr val="accent1"/>
+          </a:effectRef>
+          <a:fontRef idx="minor">
+            <a:schemeClr val="lt1"/>
+          </a:fontRef>
+        </p:style>
+        <p:txBody>
+          <a:bodyPr rtlCol="0" anchor="ctr"/>
+          <a:lstStyle/>
+          <a:p>
+            <a:pPr algn="ctr"/>
+            <a:endParaRPr/>
+          </a:p>
+        </p:txBody>
+      </p:sp>
+      <p:cxnSp>
+        <p:nvCxnSpPr>
+          <p:cNvPr id="84" name="Connector 83"/>
+          <p:cNvCxnSpPr/>
+          <p:nvPr/>
+        </p:nvCxnSpPr>
+        <p:spPr>
+          <a:xfrm>
+            <a:off x="10177272" y="3168396"/>
+            <a:ext cx="219456" cy="0"/>
+          </a:xfrm>
+          <a:prstGeom prst="line">
+            <a:avLst/>
+          </a:prstGeom>
+          <a:ln w="25400">
+            <a:solidFill>
+              <a:srgbClr val="000000"/>
+            </a:solidFill>
+          </a:ln>
+        </p:spPr>
+      </p:cxnSp>
+      <p:cxnSp>
+        <p:nvCxnSpPr>
+          <p:cNvPr id="85" name="Connector 84"/>
+          <p:cNvCxnSpPr/>
+          <p:nvPr/>
+        </p:nvCxnSpPr>
+        <p:spPr>
+          <a:xfrm>
+            <a:off x="10213848" y="3236976"/>
+            <a:ext cx="54864" cy="0"/>
+          </a:xfrm>
+          <a:prstGeom prst="line">
+            <a:avLst/>
+          </a:prstGeom>
+          <a:ln w="12700">
+            <a:solidFill>
+              <a:srgbClr val="000000"/>
+            </a:solidFill>
+          </a:ln>
+        </p:spPr>
+      </p:cxnSp>
+      <p:sp>
+        <p:nvSpPr>
+          <p:cNvPr id="86" name="TextBox 85"/>
           <p:cNvSpPr txBox="1"/>
           <p:nvPr/>
         </p:nvSpPr>
         <p:spPr>
           <a:xfrm>
-            <a:off x="9692640" y="3822191"/>
-            <a:ext cx="1950415" cy="548640"/>
+            <a:off x="10012680" y="3529584"/>
+            <a:ext cx="1630375" cy="457200"/>
           </a:xfrm>
           <a:prstGeom prst="rect">
             <a:avLst/>
@@ -6247,7 +7373,7 @@
               </a:lnSpc>
             </a:pPr>
             <a:r>
-              <a:rPr sz="1400" b="1">
+              <a:rPr sz="1300" b="1">
                 <a:solidFill>
                   <a:srgbClr val="000000"/>
                 </a:solidFill>
@@ -6265,7 +7391,7 @@
               </a:lnSpc>
             </a:pPr>
             <a:r>
-              <a:rPr sz="1000" b="0">
+              <a:rPr sz="900" b="0">
                 <a:solidFill>
                   <a:srgbClr val="6B6B6B"/>
                 </a:solidFill>
@@ -7393,7 +8519,7 @@
                 <a:ea typeface="Pretendard"/>
                 <a:cs typeface="Pretendard"/>
               </a:rPr>
-              <a:t>2회</a:t>
+              <a:t>4회</a:t>
             </a:r>
           </a:p>
         </p:txBody>

--- a/ppt/역량PT_김연주.pptx
+++ b/ppt/역량PT_김연주.pptx
@@ -227,7 +227,7 @@
             </a:lvl1pPr>
           </a:lstStyle>
           <a:p>
-            <a:fld id="{6FD4DE19-E75C-4715-95F5-1D0E12C882BD}" type="datetimeFigureOut">
+            <a:fld id="{28F0D82B-D895-4D42-A981-CE089BE57174}" type="datetimeFigureOut">
               <a:rPr lang="ko-KR" altLang="en-US" smtClean="0"/>
               <a:t>2026-10-22</a:t>
             </a:fld>
@@ -385,7 +385,7 @@
             </a:lvl1pPr>
           </a:lstStyle>
           <a:p>
-            <a:fld id="{4A1FCCD6-4DDE-428A-A3E3-A7B38B9DF13D}" type="slidenum">
+            <a:fld id="{7998ECD1-3277-426A-80B1-CD5AC56483C5}" type="slidenum">
               <a:rPr lang="ko-KR" altLang="en-US" smtClean="0"/>
               <a:t>‹#›</a:t>
             </a:fld>
@@ -396,7 +396,7 @@
     </p:spTree>
     <p:extLst>
       <p:ext uri="{BB962C8B-B14F-4D97-AF65-F5344CB8AC3E}">
-        <p14:creationId xmlns:p14="http://schemas.microsoft.com/office/powerpoint/2010/main" val="486947192"/>
+        <p14:creationId xmlns:p14="http://schemas.microsoft.com/office/powerpoint/2010/main" val="2692567856"/>
       </p:ext>
     </p:extLst>
   </p:cSld>
@@ -8351,7 +8351,7 @@
                 <a:ea typeface="Pretendard"/>
                 <a:cs typeface="Pretendard"/>
               </a:rPr>
-              <a:t>14%</a:t>
+              <a:t>13%</a:t>
             </a:r>
           </a:p>
         </p:txBody>
@@ -8560,7 +8560,7 @@
                 <a:ea typeface="Pretendard"/>
                 <a:cs typeface="Pretendard"/>
               </a:rPr>
-              <a:t>분기별 재학습 13회와 비슷한 오차</a:t>
+              <a:t>분기별 재학습 13회보다 낮은 오차</a:t>
             </a:r>
           </a:p>
         </p:txBody>

--- a/ppt/역량PT_김연주.pptx
+++ b/ppt/역량PT_김연주.pptx
@@ -227,7 +227,7 @@
             </a:lvl1pPr>
           </a:lstStyle>
           <a:p>
-            <a:fld id="{28F0D82B-D895-4D42-A981-CE089BE57174}" type="datetimeFigureOut">
+            <a:fld id="{209FF3C9-5004-495D-9F28-18ED95FD2F2B}" type="datetimeFigureOut">
               <a:rPr lang="ko-KR" altLang="en-US" smtClean="0"/>
               <a:t>2026-10-22</a:t>
             </a:fld>
@@ -385,7 +385,7 @@
             </a:lvl1pPr>
           </a:lstStyle>
           <a:p>
-            <a:fld id="{7998ECD1-3277-426A-80B1-CD5AC56483C5}" type="slidenum">
+            <a:fld id="{E9AE9C64-59EB-4D8A-ACEB-ED5DCDD6D10A}" type="slidenum">
               <a:rPr lang="ko-KR" altLang="en-US" smtClean="0"/>
               <a:t>‹#›</a:t>
             </a:fld>
@@ -396,7 +396,7 @@
     </p:spTree>
     <p:extLst>
       <p:ext uri="{BB962C8B-B14F-4D97-AF65-F5344CB8AC3E}">
-        <p14:creationId xmlns:p14="http://schemas.microsoft.com/office/powerpoint/2010/main" val="2692567856"/>
+        <p14:creationId xmlns:p14="http://schemas.microsoft.com/office/powerpoint/2010/main" val="2453072735"/>
       </p:ext>
     </p:extLst>
   </p:cSld>
@@ -4038,7 +4038,7 @@
         </p:nvSpPr>
         <p:spPr>
           <a:xfrm>
-            <a:off x="1618488" y="1472184"/>
+            <a:off x="1618488" y="1435608"/>
             <a:ext cx="2011680" cy="658368"/>
           </a:xfrm>
           <a:prstGeom prst="rect">
@@ -4279,7 +4279,7 @@
         </p:nvSpPr>
         <p:spPr>
           <a:xfrm>
-            <a:off x="3447288" y="1472184"/>
+            <a:off x="3447288" y="1435608"/>
             <a:ext cx="2011680" cy="658368"/>
           </a:xfrm>
           <a:prstGeom prst="rect">
@@ -4627,7 +4627,7 @@
         </p:nvSpPr>
         <p:spPr>
           <a:xfrm>
-            <a:off x="5276088" y="1252728"/>
+            <a:off x="5276088" y="1435608"/>
             <a:ext cx="2011680" cy="877824"/>
           </a:xfrm>
           <a:prstGeom prst="rect">
@@ -4655,7 +4655,7 @@
                 <a:ea typeface="Pretendard"/>
                 <a:cs typeface="Pretendard"/>
               </a:rPr>
-              <a:t>데이터사이언스 학회</a:t>
+              <a:t>인공지능 학회</a:t>
             </a:r>
           </a:p>
           <a:p>
@@ -4921,7 +4921,7 @@
         </p:nvSpPr>
         <p:spPr>
           <a:xfrm>
-            <a:off x="7196327" y="1472184"/>
+            <a:off x="7196327" y="1435608"/>
             <a:ext cx="2011680" cy="658368"/>
           </a:xfrm>
           <a:prstGeom prst="rect">
@@ -5019,7 +5019,7 @@
         </p:nvCxnSpPr>
         <p:spPr>
           <a:xfrm>
-            <a:off x="2073728" y="3959352"/>
+            <a:off x="2263140" y="3959352"/>
             <a:ext cx="0" cy="804672"/>
           </a:xfrm>
           <a:prstGeom prst="line">
@@ -5040,7 +5040,7 @@
         </p:nvCxnSpPr>
         <p:spPr>
           <a:xfrm>
-            <a:off x="2547257" y="3959352"/>
+            <a:off x="2926080" y="3959352"/>
             <a:ext cx="0" cy="1371600"/>
           </a:xfrm>
           <a:prstGeom prst="line">
@@ -5061,7 +5061,7 @@
         </p:nvCxnSpPr>
         <p:spPr>
           <a:xfrm>
-            <a:off x="3020785" y="3959352"/>
+            <a:off x="3589020" y="3959352"/>
             <a:ext cx="0" cy="237744"/>
           </a:xfrm>
           <a:prstGeom prst="line">
@@ -5082,7 +5082,7 @@
         </p:nvCxnSpPr>
         <p:spPr>
           <a:xfrm>
-            <a:off x="3494314" y="3959352"/>
+            <a:off x="4251960" y="3959352"/>
             <a:ext cx="0" cy="804672"/>
           </a:xfrm>
           <a:prstGeom prst="line">
@@ -5103,7 +5103,7 @@
         </p:nvCxnSpPr>
         <p:spPr>
           <a:xfrm>
-            <a:off x="3967842" y="3959352"/>
+            <a:off x="4914900" y="3959352"/>
             <a:ext cx="0" cy="1371600"/>
           </a:xfrm>
           <a:prstGeom prst="line">
@@ -5124,7 +5124,7 @@
         </p:nvCxnSpPr>
         <p:spPr>
           <a:xfrm>
-            <a:off x="4441371" y="3959352"/>
+            <a:off x="5577840" y="3959352"/>
             <a:ext cx="0" cy="237744"/>
           </a:xfrm>
           <a:prstGeom prst="line">
@@ -5145,7 +5145,7 @@
         </p:nvCxnSpPr>
         <p:spPr>
           <a:xfrm>
-            <a:off x="4914900" y="3959352"/>
+            <a:off x="6240780" y="3959352"/>
             <a:ext cx="0" cy="804672"/>
           </a:xfrm>
           <a:prstGeom prst="line">
@@ -5166,7 +5166,7 @@
         </p:nvCxnSpPr>
         <p:spPr>
           <a:xfrm>
-            <a:off x="5388428" y="3959352"/>
+            <a:off x="6903720" y="3959352"/>
             <a:ext cx="0" cy="1371600"/>
           </a:xfrm>
           <a:prstGeom prst="line">
@@ -5187,7 +5187,7 @@
         </p:nvCxnSpPr>
         <p:spPr>
           <a:xfrm>
-            <a:off x="5861957" y="3959352"/>
+            <a:off x="7566660" y="3959352"/>
             <a:ext cx="0" cy="237744"/>
           </a:xfrm>
           <a:prstGeom prst="line">
@@ -5208,7 +5208,7 @@
         </p:nvCxnSpPr>
         <p:spPr>
           <a:xfrm>
-            <a:off x="6335485" y="3959352"/>
+            <a:off x="8229600" y="3959352"/>
             <a:ext cx="0" cy="804672"/>
           </a:xfrm>
           <a:prstGeom prst="line">
@@ -5221,93 +5221,9 @@
           </a:ln>
         </p:spPr>
       </p:cxnSp>
-      <p:cxnSp>
-        <p:nvCxnSpPr>
-          <p:cNvPr id="42" name="Connector 41"/>
-          <p:cNvCxnSpPr/>
-          <p:nvPr/>
-        </p:nvCxnSpPr>
-        <p:spPr>
-          <a:xfrm>
-            <a:off x="6809014" y="3959352"/>
-            <a:ext cx="0" cy="1371600"/>
-          </a:xfrm>
-          <a:prstGeom prst="line">
-            <a:avLst/>
-          </a:prstGeom>
-          <a:ln w="7620">
-            <a:solidFill>
-              <a:srgbClr val="9A9A9A"/>
-            </a:solidFill>
-          </a:ln>
-        </p:spPr>
-      </p:cxnSp>
-      <p:cxnSp>
-        <p:nvCxnSpPr>
-          <p:cNvPr id="43" name="Connector 42"/>
-          <p:cNvCxnSpPr/>
-          <p:nvPr/>
-        </p:nvCxnSpPr>
-        <p:spPr>
-          <a:xfrm>
-            <a:off x="7282542" y="3959352"/>
-            <a:ext cx="0" cy="237744"/>
-          </a:xfrm>
-          <a:prstGeom prst="line">
-            <a:avLst/>
-          </a:prstGeom>
-          <a:ln w="7620">
-            <a:solidFill>
-              <a:srgbClr val="9A9A9A"/>
-            </a:solidFill>
-          </a:ln>
-        </p:spPr>
-      </p:cxnSp>
-      <p:cxnSp>
-        <p:nvCxnSpPr>
-          <p:cNvPr id="44" name="Connector 43"/>
-          <p:cNvCxnSpPr/>
-          <p:nvPr/>
-        </p:nvCxnSpPr>
-        <p:spPr>
-          <a:xfrm>
-            <a:off x="7756071" y="3959352"/>
-            <a:ext cx="0" cy="804672"/>
-          </a:xfrm>
-          <a:prstGeom prst="line">
-            <a:avLst/>
-          </a:prstGeom>
-          <a:ln w="7620">
-            <a:solidFill>
-              <a:srgbClr val="9A9A9A"/>
-            </a:solidFill>
-          </a:ln>
-        </p:spPr>
-      </p:cxnSp>
-      <p:cxnSp>
-        <p:nvCxnSpPr>
-          <p:cNvPr id="45" name="Connector 44"/>
-          <p:cNvCxnSpPr/>
-          <p:nvPr/>
-        </p:nvCxnSpPr>
-        <p:spPr>
-          <a:xfrm>
-            <a:off x="8229600" y="3959352"/>
-            <a:ext cx="0" cy="1371600"/>
-          </a:xfrm>
-          <a:prstGeom prst="line">
-            <a:avLst/>
-          </a:prstGeom>
-          <a:ln w="7620">
-            <a:solidFill>
-              <a:srgbClr val="9A9A9A"/>
-            </a:solidFill>
-          </a:ln>
-        </p:spPr>
-      </p:cxnSp>
-      <p:sp>
-        <p:nvSpPr>
-          <p:cNvPr id="46" name="Oval 45"/>
+      <p:sp>
+        <p:nvSpPr>
+          <p:cNvPr id="42" name="Oval 41"/>
           <p:cNvSpPr/>
           <p:nvPr/>
         </p:nvSpPr>
@@ -5352,332 +5268,14 @@
       </p:sp>
       <p:sp>
         <p:nvSpPr>
-          <p:cNvPr id="47" name="TextBox 46"/>
+          <p:cNvPr id="43" name="TextBox 42"/>
           <p:cNvSpPr txBox="1"/>
           <p:nvPr/>
         </p:nvSpPr>
         <p:spPr>
           <a:xfrm>
             <a:off x="1563624" y="4178808"/>
-            <a:ext cx="1453895" cy="365760"/>
-          </a:xfrm>
-          <a:prstGeom prst="rect">
-            <a:avLst/>
-          </a:prstGeom>
-          <a:solidFill>
-            <a:srgbClr val="FFFFFF"/>
-          </a:solidFill>
-        </p:spPr>
-        <p:txBody>
-          <a:bodyPr wrap="none" lIns="0" tIns="0" rIns="0" bIns="0" anchor="t">
-            <a:spAutoFit/>
-          </a:bodyPr>
-          <a:lstStyle/>
-          <a:p>
-            <a:pPr algn="l">
-              <a:lnSpc>
-                <a:spcPct val="120000"/>
-              </a:lnSpc>
-            </a:pPr>
-            <a:r>
-              <a:rPr sz="850" b="0">
-                <a:solidFill>
-                  <a:srgbClr val="000000"/>
-                </a:solidFill>
-                <a:latin typeface="Pretendard SemiBold"/>
-                <a:ea typeface="Pretendard SemiBold"/>
-                <a:cs typeface="Pretendard SemiBold"/>
-              </a:rPr>
-              <a:t>민간의료보험과 건강지표 분석</a:t>
-            </a:r>
-          </a:p>
-          <a:p>
-            <a:pPr algn="l">
-              <a:lnSpc>
-                <a:spcPct val="120000"/>
-              </a:lnSpc>
-            </a:pPr>
-            <a:r>
-              <a:rPr sz="750" b="0">
-                <a:solidFill>
-                  <a:srgbClr val="9A9A9A"/>
-                </a:solidFill>
-                <a:latin typeface="Pretendard"/>
-                <a:ea typeface="Pretendard"/>
-                <a:cs typeface="Pretendard"/>
-              </a:rPr>
-              <a:t>2023</a:t>
-            </a:r>
-          </a:p>
-        </p:txBody>
-      </p:sp>
-      <p:sp>
-        <p:nvSpPr>
-          <p:cNvPr id="48" name="Oval 47"/>
-          <p:cNvSpPr/>
-          <p:nvPr/>
-        </p:nvSpPr>
-        <p:spPr>
-          <a:xfrm>
-            <a:off x="2018864" y="3831336"/>
-            <a:ext cx="109728" cy="109728"/>
-          </a:xfrm>
-          <a:prstGeom prst="ellipse">
-            <a:avLst/>
-          </a:prstGeom>
-          <a:solidFill>
-            <a:srgbClr val="000000"/>
-          </a:solidFill>
-          <a:ln>
-            <a:noFill/>
-          </a:ln>
-          <a:effectLst/>
-        </p:spPr>
-        <p:style>
-          <a:lnRef idx="1">
-            <a:schemeClr val="accent1"/>
-          </a:lnRef>
-          <a:fillRef idx="3">
-            <a:schemeClr val="accent1"/>
-          </a:fillRef>
-          <a:effectRef idx="2">
-            <a:schemeClr val="accent1"/>
-          </a:effectRef>
-          <a:fontRef idx="minor">
-            <a:schemeClr val="lt1"/>
-          </a:fontRef>
-        </p:style>
-        <p:txBody>
-          <a:bodyPr rtlCol="0" anchor="ctr"/>
-          <a:lstStyle/>
-          <a:p>
-            <a:pPr algn="ctr"/>
-            <a:endParaRPr/>
-          </a:p>
-        </p:txBody>
-      </p:sp>
-      <p:sp>
-        <p:nvSpPr>
-          <p:cNvPr id="49" name="TextBox 48"/>
-          <p:cNvSpPr txBox="1"/>
-          <p:nvPr/>
-        </p:nvSpPr>
-        <p:spPr>
-          <a:xfrm>
-            <a:off x="2037152" y="4745736"/>
-            <a:ext cx="1185062" cy="365760"/>
-          </a:xfrm>
-          <a:prstGeom prst="rect">
-            <a:avLst/>
-          </a:prstGeom>
-          <a:solidFill>
-            <a:srgbClr val="FFFFFF"/>
-          </a:solidFill>
-        </p:spPr>
-        <p:txBody>
-          <a:bodyPr wrap="none" lIns="0" tIns="0" rIns="0" bIns="0" anchor="t">
-            <a:spAutoFit/>
-          </a:bodyPr>
-          <a:lstStyle/>
-          <a:p>
-            <a:pPr algn="l">
-              <a:lnSpc>
-                <a:spcPct val="120000"/>
-              </a:lnSpc>
-            </a:pPr>
-            <a:r>
-              <a:rPr sz="850" b="0">
-                <a:solidFill>
-                  <a:srgbClr val="000000"/>
-                </a:solidFill>
-                <a:latin typeface="Pretendard SemiBold"/>
-                <a:ea typeface="Pretendard SemiBold"/>
-                <a:cs typeface="Pretendard SemiBold"/>
-              </a:rPr>
-              <a:t>제주 특산물 가격 예측</a:t>
-            </a:r>
-          </a:p>
-          <a:p>
-            <a:pPr algn="l">
-              <a:lnSpc>
-                <a:spcPct val="120000"/>
-              </a:lnSpc>
-            </a:pPr>
-            <a:r>
-              <a:rPr sz="750" b="0">
-                <a:solidFill>
-                  <a:srgbClr val="9A9A9A"/>
-                </a:solidFill>
-                <a:latin typeface="Pretendard"/>
-                <a:ea typeface="Pretendard"/>
-                <a:cs typeface="Pretendard"/>
-              </a:rPr>
-              <a:t>2023</a:t>
-            </a:r>
-          </a:p>
-        </p:txBody>
-      </p:sp>
-      <p:sp>
-        <p:nvSpPr>
-          <p:cNvPr id="50" name="Oval 49"/>
-          <p:cNvSpPr/>
-          <p:nvPr/>
-        </p:nvSpPr>
-        <p:spPr>
-          <a:xfrm>
-            <a:off x="2492393" y="3831336"/>
-            <a:ext cx="109728" cy="109728"/>
-          </a:xfrm>
-          <a:prstGeom prst="ellipse">
-            <a:avLst/>
-          </a:prstGeom>
-          <a:solidFill>
-            <a:srgbClr val="000000"/>
-          </a:solidFill>
-          <a:ln>
-            <a:noFill/>
-          </a:ln>
-          <a:effectLst/>
-        </p:spPr>
-        <p:style>
-          <a:lnRef idx="1">
-            <a:schemeClr val="accent1"/>
-          </a:lnRef>
-          <a:fillRef idx="3">
-            <a:schemeClr val="accent1"/>
-          </a:fillRef>
-          <a:effectRef idx="2">
-            <a:schemeClr val="accent1"/>
-          </a:effectRef>
-          <a:fontRef idx="minor">
-            <a:schemeClr val="lt1"/>
-          </a:fontRef>
-        </p:style>
-        <p:txBody>
-          <a:bodyPr rtlCol="0" anchor="ctr"/>
-          <a:lstStyle/>
-          <a:p>
-            <a:pPr algn="ctr"/>
-            <a:endParaRPr/>
-          </a:p>
-        </p:txBody>
-      </p:sp>
-      <p:sp>
-        <p:nvSpPr>
-          <p:cNvPr id="51" name="TextBox 50"/>
-          <p:cNvSpPr txBox="1"/>
-          <p:nvPr/>
-        </p:nvSpPr>
-        <p:spPr>
-          <a:xfrm>
-            <a:off x="2510681" y="5312664"/>
-            <a:ext cx="1364284" cy="365760"/>
-          </a:xfrm>
-          <a:prstGeom prst="rect">
-            <a:avLst/>
-          </a:prstGeom>
-          <a:solidFill>
-            <a:srgbClr val="FFFFFF"/>
-          </a:solidFill>
-        </p:spPr>
-        <p:txBody>
-          <a:bodyPr wrap="none" lIns="0" tIns="0" rIns="0" bIns="0" anchor="t">
-            <a:spAutoFit/>
-          </a:bodyPr>
-          <a:lstStyle/>
-          <a:p>
-            <a:pPr algn="l">
-              <a:lnSpc>
-                <a:spcPct val="120000"/>
-              </a:lnSpc>
-            </a:pPr>
-            <a:r>
-              <a:rPr sz="850" b="0">
-                <a:solidFill>
-                  <a:srgbClr val="000000"/>
-                </a:solidFill>
-                <a:latin typeface="Pretendard SemiBold"/>
-                <a:ea typeface="Pretendard SemiBold"/>
-                <a:cs typeface="Pretendard SemiBold"/>
-              </a:rPr>
-              <a:t>스마트팜 참외 수확량 예측</a:t>
-            </a:r>
-          </a:p>
-          <a:p>
-            <a:pPr algn="l">
-              <a:lnSpc>
-                <a:spcPct val="120000"/>
-              </a:lnSpc>
-            </a:pPr>
-            <a:r>
-              <a:rPr sz="750" b="0">
-                <a:solidFill>
-                  <a:srgbClr val="9A9A9A"/>
-                </a:solidFill>
-                <a:latin typeface="Pretendard"/>
-                <a:ea typeface="Pretendard"/>
-                <a:cs typeface="Pretendard"/>
-              </a:rPr>
-              <a:t>2024.08 ~ 2024.10</a:t>
-            </a:r>
-          </a:p>
-        </p:txBody>
-      </p:sp>
-      <p:sp>
-        <p:nvSpPr>
-          <p:cNvPr id="52" name="Oval 51"/>
-          <p:cNvSpPr/>
-          <p:nvPr/>
-        </p:nvSpPr>
-        <p:spPr>
-          <a:xfrm>
-            <a:off x="2965921" y="3831336"/>
-            <a:ext cx="109728" cy="109728"/>
-          </a:xfrm>
-          <a:prstGeom prst="ellipse">
-            <a:avLst/>
-          </a:prstGeom>
-          <a:solidFill>
-            <a:srgbClr val="000000"/>
-          </a:solidFill>
-          <a:ln>
-            <a:noFill/>
-          </a:ln>
-          <a:effectLst/>
-        </p:spPr>
-        <p:style>
-          <a:lnRef idx="1">
-            <a:schemeClr val="accent1"/>
-          </a:lnRef>
-          <a:fillRef idx="3">
-            <a:schemeClr val="accent1"/>
-          </a:fillRef>
-          <a:effectRef idx="2">
-            <a:schemeClr val="accent1"/>
-          </a:effectRef>
-          <a:fontRef idx="minor">
-            <a:schemeClr val="lt1"/>
-          </a:fontRef>
-        </p:style>
-        <p:txBody>
-          <a:bodyPr rtlCol="0" anchor="ctr"/>
-          <a:lstStyle/>
-          <a:p>
-            <a:pPr algn="ctr"/>
-            <a:endParaRPr/>
-          </a:p>
-        </p:txBody>
-      </p:sp>
-      <p:sp>
-        <p:nvSpPr>
-          <p:cNvPr id="53" name="TextBox 52"/>
-          <p:cNvSpPr txBox="1"/>
-          <p:nvPr/>
-        </p:nvSpPr>
-        <p:spPr>
-          <a:xfrm>
-            <a:off x="2984209" y="4178808"/>
-            <a:ext cx="1364284" cy="365760"/>
+            <a:ext cx="1393728" cy="411480"/>
           </a:xfrm>
           <a:prstGeom prst="rect">
             <a:avLst/>
@@ -5731,13 +5329,13 @@
       </p:sp>
       <p:sp>
         <p:nvSpPr>
-          <p:cNvPr id="54" name="Oval 53"/>
+          <p:cNvPr id="44" name="Oval 43"/>
           <p:cNvSpPr/>
           <p:nvPr/>
         </p:nvSpPr>
         <p:spPr>
           <a:xfrm>
-            <a:off x="3439450" y="3831336"/>
+            <a:off x="2208276" y="3831336"/>
             <a:ext cx="109728" cy="109728"/>
           </a:xfrm>
           <a:prstGeom prst="ellipse">
@@ -5776,14 +5374,14 @@
       </p:sp>
       <p:sp>
         <p:nvSpPr>
-          <p:cNvPr id="55" name="TextBox 54"/>
+          <p:cNvPr id="45" name="TextBox 44"/>
           <p:cNvSpPr txBox="1"/>
           <p:nvPr/>
         </p:nvSpPr>
         <p:spPr>
           <a:xfrm>
-            <a:off x="3457738" y="4745736"/>
-            <a:ext cx="1364284" cy="365760"/>
+            <a:off x="2226564" y="4745736"/>
+            <a:ext cx="1393728" cy="411480"/>
           </a:xfrm>
           <a:prstGeom prst="rect">
             <a:avLst/>
@@ -5837,13 +5435,13 @@
       </p:sp>
       <p:sp>
         <p:nvSpPr>
-          <p:cNvPr id="56" name="Oval 55"/>
+          <p:cNvPr id="46" name="Oval 45"/>
           <p:cNvSpPr/>
           <p:nvPr/>
         </p:nvSpPr>
         <p:spPr>
           <a:xfrm>
-            <a:off x="3912978" y="3831336"/>
+            <a:off x="2871216" y="3831336"/>
             <a:ext cx="109728" cy="109728"/>
           </a:xfrm>
           <a:prstGeom prst="ellipse">
@@ -5882,14 +5480,14 @@
       </p:sp>
       <p:sp>
         <p:nvSpPr>
-          <p:cNvPr id="57" name="TextBox 56"/>
+          <p:cNvPr id="47" name="TextBox 46"/>
           <p:cNvSpPr txBox="1"/>
           <p:nvPr/>
         </p:nvSpPr>
         <p:spPr>
           <a:xfrm>
-            <a:off x="3931266" y="5312664"/>
-            <a:ext cx="1274673" cy="365760"/>
+            <a:off x="2889504" y="5312664"/>
+            <a:ext cx="1302014" cy="411480"/>
           </a:xfrm>
           <a:prstGeom prst="rect">
             <a:avLst/>
@@ -5943,13 +5541,13 @@
       </p:sp>
       <p:sp>
         <p:nvSpPr>
-          <p:cNvPr id="58" name="Oval 57"/>
+          <p:cNvPr id="48" name="Oval 47"/>
           <p:cNvSpPr/>
           <p:nvPr/>
         </p:nvSpPr>
         <p:spPr>
           <a:xfrm>
-            <a:off x="4386507" y="3831336"/>
+            <a:off x="3534156" y="3831336"/>
             <a:ext cx="109728" cy="109728"/>
           </a:xfrm>
           <a:prstGeom prst="ellipse">
@@ -5988,14 +5586,14 @@
       </p:sp>
       <p:sp>
         <p:nvSpPr>
-          <p:cNvPr id="59" name="TextBox 58"/>
+          <p:cNvPr id="49" name="TextBox 48"/>
           <p:cNvSpPr txBox="1"/>
           <p:nvPr/>
         </p:nvSpPr>
         <p:spPr>
           <a:xfrm>
-            <a:off x="4404795" y="4178808"/>
-            <a:ext cx="1185062" cy="365760"/>
+            <a:off x="3552444" y="4178808"/>
+            <a:ext cx="1760585" cy="411480"/>
           </a:xfrm>
           <a:prstGeom prst="rect">
             <a:avLst/>
@@ -6024,7 +5622,7 @@
                 <a:ea typeface="Pretendard SemiBold"/>
                 <a:cs typeface="Pretendard SemiBold"/>
               </a:rPr>
-              <a:t>담낭선암 생존분석 연구</a:t>
+              <a:t>담낭암 생존분석 연구 (대형병원)</a:t>
             </a:r>
           </a:p>
           <a:p>
@@ -6049,13 +5647,13 @@
       </p:sp>
       <p:sp>
         <p:nvSpPr>
-          <p:cNvPr id="60" name="Oval 59"/>
+          <p:cNvPr id="50" name="Oval 49"/>
           <p:cNvSpPr/>
           <p:nvPr/>
         </p:nvSpPr>
         <p:spPr>
           <a:xfrm>
-            <a:off x="4860036" y="3831336"/>
+            <a:off x="4197096" y="3831336"/>
             <a:ext cx="109728" cy="109728"/>
           </a:xfrm>
           <a:prstGeom prst="ellipse">
@@ -6094,14 +5692,14 @@
       </p:sp>
       <p:sp>
         <p:nvSpPr>
-          <p:cNvPr id="61" name="TextBox 60"/>
+          <p:cNvPr id="51" name="TextBox 50"/>
           <p:cNvSpPr txBox="1"/>
           <p:nvPr/>
         </p:nvSpPr>
         <p:spPr>
           <a:xfrm>
-            <a:off x="4878324" y="4745736"/>
-            <a:ext cx="1364284" cy="365760"/>
+            <a:off x="4215384" y="4745736"/>
+            <a:ext cx="1393728" cy="411480"/>
           </a:xfrm>
           <a:prstGeom prst="rect">
             <a:avLst/>
@@ -6155,14 +5753,14 @@
       </p:sp>
       <p:sp>
         <p:nvSpPr>
-          <p:cNvPr id="62" name="Oval 61"/>
+          <p:cNvPr id="52" name="Oval 51"/>
           <p:cNvSpPr/>
           <p:nvPr/>
         </p:nvSpPr>
         <p:spPr>
           <a:xfrm>
-            <a:off x="5333564" y="3831336"/>
-            <a:ext cx="109728" cy="109728"/>
+            <a:off x="4837176" y="3808476"/>
+            <a:ext cx="155448" cy="155448"/>
           </a:xfrm>
           <a:prstGeom prst="ellipse">
             <a:avLst/>
@@ -6200,14 +5798,14 @@
       </p:sp>
       <p:sp>
         <p:nvSpPr>
-          <p:cNvPr id="63" name="TextBox 62"/>
+          <p:cNvPr id="53" name="TextBox 52"/>
           <p:cNvSpPr txBox="1"/>
           <p:nvPr/>
         </p:nvSpPr>
         <p:spPr>
           <a:xfrm>
-            <a:off x="5351852" y="5312664"/>
-            <a:ext cx="1042416" cy="365760"/>
+            <a:off x="4878324" y="5312664"/>
+            <a:ext cx="1242669" cy="411480"/>
           </a:xfrm>
           <a:prstGeom prst="rect">
             <a:avLst/>
@@ -6228,13 +5826,13 @@
               </a:lnSpc>
             </a:pPr>
             <a:r>
-              <a:rPr sz="850" b="0">
+              <a:rPr sz="1050" b="1">
                 <a:solidFill>
                   <a:srgbClr val="000000"/>
                 </a:solidFill>
-                <a:latin typeface="Pretendard SemiBold"/>
-                <a:ea typeface="Pretendard SemiBold"/>
-                <a:cs typeface="Pretendard SemiBold"/>
+                <a:latin typeface="Pretendard"/>
+                <a:ea typeface="Pretendard"/>
+                <a:cs typeface="Pretendard"/>
               </a:rPr>
               <a:t>환헤지 멀티에이전트</a:t>
             </a:r>
@@ -6246,9 +5844,9 @@
               </a:lnSpc>
             </a:pPr>
             <a:r>
-              <a:rPr sz="750" b="0">
+              <a:rPr sz="800" b="0">
                 <a:solidFill>
-                  <a:srgbClr val="9A9A9A"/>
+                  <a:srgbClr val="6B6B6B"/>
                 </a:solidFill>
                 <a:latin typeface="Pretendard"/>
                 <a:ea typeface="Pretendard"/>
@@ -6261,13 +5859,13 @@
       </p:sp>
       <p:sp>
         <p:nvSpPr>
-          <p:cNvPr id="64" name="Oval 63"/>
+          <p:cNvPr id="54" name="Oval 53"/>
           <p:cNvSpPr/>
           <p:nvPr/>
         </p:nvSpPr>
         <p:spPr>
           <a:xfrm>
-            <a:off x="5807093" y="3831336"/>
+            <a:off x="5522976" y="3831336"/>
             <a:ext cx="109728" cy="109728"/>
           </a:xfrm>
           <a:prstGeom prst="ellipse">
@@ -6306,14 +5904,14 @@
       </p:sp>
       <p:sp>
         <p:nvSpPr>
-          <p:cNvPr id="65" name="TextBox 64"/>
+          <p:cNvPr id="55" name="TextBox 54"/>
           <p:cNvSpPr txBox="1"/>
           <p:nvPr/>
         </p:nvSpPr>
         <p:spPr>
           <a:xfrm>
-            <a:off x="5825381" y="4178808"/>
-            <a:ext cx="1185062" cy="365760"/>
+            <a:off x="5541264" y="4178808"/>
+            <a:ext cx="1210299" cy="411480"/>
           </a:xfrm>
           <a:prstGeom prst="rect">
             <a:avLst/>
@@ -6367,14 +5965,14 @@
       </p:sp>
       <p:sp>
         <p:nvSpPr>
-          <p:cNvPr id="66" name="Oval 65"/>
+          <p:cNvPr id="56" name="Oval 55"/>
           <p:cNvSpPr/>
           <p:nvPr/>
         </p:nvSpPr>
         <p:spPr>
           <a:xfrm>
-            <a:off x="6280621" y="3831336"/>
-            <a:ext cx="109728" cy="109728"/>
+            <a:off x="6163056" y="3808476"/>
+            <a:ext cx="155448" cy="155448"/>
           </a:xfrm>
           <a:prstGeom prst="ellipse">
             <a:avLst/>
@@ -6412,14 +6010,14 @@
       </p:sp>
       <p:sp>
         <p:nvSpPr>
-          <p:cNvPr id="67" name="TextBox 66"/>
+          <p:cNvPr id="57" name="TextBox 56"/>
           <p:cNvSpPr txBox="1"/>
           <p:nvPr/>
         </p:nvSpPr>
         <p:spPr>
           <a:xfrm>
-            <a:off x="6298909" y="4745736"/>
-            <a:ext cx="1364284" cy="365760"/>
+            <a:off x="6204204" y="4745736"/>
+            <a:ext cx="1695846" cy="411480"/>
           </a:xfrm>
           <a:prstGeom prst="rect">
             <a:avLst/>
@@ -6440,13 +6038,13 @@
               </a:lnSpc>
             </a:pPr>
             <a:r>
-              <a:rPr sz="850" b="0">
+              <a:rPr sz="1050" b="1">
                 <a:solidFill>
                   <a:srgbClr val="000000"/>
                 </a:solidFill>
-                <a:latin typeface="Pretendard SemiBold"/>
-                <a:ea typeface="Pretendard SemiBold"/>
-                <a:cs typeface="Pretendard SemiBold"/>
+                <a:latin typeface="Pretendard"/>
+                <a:ea typeface="Pretendard"/>
+                <a:cs typeface="Pretendard"/>
               </a:rPr>
               <a:t>3D 의료 파운데이션 모델</a:t>
             </a:r>
@@ -6458,9 +6056,9 @@
               </a:lnSpc>
             </a:pPr>
             <a:r>
-              <a:rPr sz="750" b="0">
+              <a:rPr sz="800" b="0">
                 <a:solidFill>
-                  <a:srgbClr val="9A9A9A"/>
+                  <a:srgbClr val="6B6B6B"/>
                 </a:solidFill>
                 <a:latin typeface="Pretendard"/>
                 <a:ea typeface="Pretendard"/>
@@ -6473,13 +6071,13 @@
       </p:sp>
       <p:sp>
         <p:nvSpPr>
-          <p:cNvPr id="68" name="Oval 67"/>
+          <p:cNvPr id="58" name="Oval 57"/>
           <p:cNvSpPr/>
           <p:nvPr/>
         </p:nvSpPr>
         <p:spPr>
           <a:xfrm>
-            <a:off x="6754150" y="3831336"/>
+            <a:off x="6848856" y="3831336"/>
             <a:ext cx="109728" cy="109728"/>
           </a:xfrm>
           <a:prstGeom prst="ellipse">
@@ -6518,14 +6116,14 @@
       </p:sp>
       <p:sp>
         <p:nvSpPr>
-          <p:cNvPr id="69" name="TextBox 68"/>
+          <p:cNvPr id="59" name="TextBox 58"/>
           <p:cNvSpPr txBox="1"/>
           <p:nvPr/>
         </p:nvSpPr>
         <p:spPr>
           <a:xfrm>
-            <a:off x="6772438" y="5312664"/>
-            <a:ext cx="1543507" cy="365760"/>
+            <a:off x="6867144" y="5312664"/>
+            <a:ext cx="1577157" cy="411480"/>
           </a:xfrm>
           <a:prstGeom prst="rect">
             <a:avLst/>
@@ -6579,14 +6177,14 @@
       </p:sp>
       <p:sp>
         <p:nvSpPr>
-          <p:cNvPr id="70" name="Oval 69"/>
+          <p:cNvPr id="60" name="Oval 59"/>
           <p:cNvSpPr/>
           <p:nvPr/>
         </p:nvSpPr>
         <p:spPr>
           <a:xfrm>
-            <a:off x="7227678" y="3831336"/>
-            <a:ext cx="109728" cy="109728"/>
+            <a:off x="7488936" y="3808476"/>
+            <a:ext cx="155448" cy="155448"/>
           </a:xfrm>
           <a:prstGeom prst="ellipse">
             <a:avLst/>
@@ -6624,14 +6222,14 @@
       </p:sp>
       <p:sp>
         <p:nvSpPr>
-          <p:cNvPr id="71" name="TextBox 70"/>
+          <p:cNvPr id="61" name="TextBox 60"/>
           <p:cNvSpPr txBox="1"/>
           <p:nvPr/>
         </p:nvSpPr>
         <p:spPr>
           <a:xfrm>
-            <a:off x="7245966" y="4178808"/>
-            <a:ext cx="1185062" cy="365760"/>
+            <a:off x="7530084" y="4178808"/>
+            <a:ext cx="1469257" cy="411480"/>
           </a:xfrm>
           <a:prstGeom prst="rect">
             <a:avLst/>
@@ -6652,15 +6250,15 @@
               </a:lnSpc>
             </a:pPr>
             <a:r>
-              <a:rPr sz="850" b="0">
+              <a:rPr sz="1050" b="1">
                 <a:solidFill>
                   <a:srgbClr val="000000"/>
                 </a:solidFill>
-                <a:latin typeface="Pretendard SemiBold"/>
-                <a:ea typeface="Pretendard SemiBold"/>
-                <a:cs typeface="Pretendard SemiBold"/>
+                <a:latin typeface="Pretendard"/>
+                <a:ea typeface="Pretendard"/>
+                <a:cs typeface="Pretendard"/>
               </a:rPr>
-              <a:t>전차 제원 PCA 분석</a:t>
+              <a:t>확률론 시험 자동 채점</a:t>
             </a:r>
           </a:p>
           <a:p>
@@ -6670,29 +6268,29 @@
               </a:lnSpc>
             </a:pPr>
             <a:r>
-              <a:rPr sz="750" b="0">
+              <a:rPr sz="800" b="0">
                 <a:solidFill>
-                  <a:srgbClr val="9A9A9A"/>
+                  <a:srgbClr val="6B6B6B"/>
                 </a:solidFill>
                 <a:latin typeface="Pretendard"/>
                 <a:ea typeface="Pretendard"/>
                 <a:cs typeface="Pretendard"/>
               </a:rPr>
-              <a:t>2025.11</a:t>
-            </a:r>
-          </a:p>
-        </p:txBody>
-      </p:sp>
-      <p:sp>
-        <p:nvSpPr>
-          <p:cNvPr id="72" name="Oval 71"/>
+              <a:t>2026.02 ~ 2026.03</a:t>
+            </a:r>
+          </a:p>
+        </p:txBody>
+      </p:sp>
+      <p:sp>
+        <p:nvSpPr>
+          <p:cNvPr id="62" name="Oval 61"/>
           <p:cNvSpPr/>
           <p:nvPr/>
         </p:nvSpPr>
         <p:spPr>
           <a:xfrm>
-            <a:off x="7701207" y="3831336"/>
-            <a:ext cx="109728" cy="109728"/>
+            <a:off x="8151875" y="3808476"/>
+            <a:ext cx="155448" cy="155448"/>
           </a:xfrm>
           <a:prstGeom prst="ellipse">
             <a:avLst/>
@@ -6730,14 +6328,14 @@
       </p:sp>
       <p:sp>
         <p:nvSpPr>
-          <p:cNvPr id="73" name="TextBox 72"/>
+          <p:cNvPr id="63" name="TextBox 62"/>
           <p:cNvSpPr txBox="1"/>
           <p:nvPr/>
         </p:nvSpPr>
         <p:spPr>
           <a:xfrm>
-            <a:off x="7719495" y="4745736"/>
-            <a:ext cx="1185062" cy="365760"/>
+            <a:off x="8193024" y="4745736"/>
+            <a:ext cx="2149022" cy="411480"/>
           </a:xfrm>
           <a:prstGeom prst="rect">
             <a:avLst/>
@@ -6758,15 +6356,15 @@
               </a:lnSpc>
             </a:pPr>
             <a:r>
-              <a:rPr sz="850" b="0">
+              <a:rPr sz="1050" b="1">
                 <a:solidFill>
                   <a:srgbClr val="000000"/>
                 </a:solidFill>
-                <a:latin typeface="Pretendard SemiBold"/>
-                <a:ea typeface="Pretendard SemiBold"/>
-                <a:cs typeface="Pretendard SemiBold"/>
+                <a:latin typeface="Pretendard"/>
+                <a:ea typeface="Pretendard"/>
+                <a:cs typeface="Pretendard"/>
               </a:rPr>
-              <a:t>확률론 시험 자동 채점</a:t>
+              <a:t>자율주행 ODD 위험평가 에이전트</a:t>
             </a:r>
           </a:p>
           <a:p>
@@ -6776,29 +6374,29 @@
               </a:lnSpc>
             </a:pPr>
             <a:r>
-              <a:rPr sz="750" b="0">
+              <a:rPr sz="800" b="0">
                 <a:solidFill>
-                  <a:srgbClr val="9A9A9A"/>
+                  <a:srgbClr val="6B6B6B"/>
                 </a:solidFill>
                 <a:latin typeface="Pretendard"/>
                 <a:ea typeface="Pretendard"/>
                 <a:cs typeface="Pretendard"/>
               </a:rPr>
-              <a:t>2026.02 ~ 2026.03</a:t>
-            </a:r>
-          </a:p>
-        </p:txBody>
-      </p:sp>
-      <p:sp>
-        <p:nvSpPr>
-          <p:cNvPr id="74" name="Oval 73"/>
+              <a:t>2026.05 ~ 2026.06</a:t>
+            </a:r>
+          </a:p>
+        </p:txBody>
+      </p:sp>
+      <p:sp>
+        <p:nvSpPr>
+          <p:cNvPr id="64" name="Oval 63"/>
           <p:cNvSpPr/>
           <p:nvPr/>
         </p:nvSpPr>
         <p:spPr>
           <a:xfrm>
-            <a:off x="8174736" y="3831336"/>
-            <a:ext cx="109728" cy="109728"/>
+            <a:off x="8778240" y="2880360"/>
+            <a:ext cx="640080" cy="640080"/>
           </a:xfrm>
           <a:prstGeom prst="ellipse">
             <a:avLst/>
@@ -6836,113 +6434,7 @@
       </p:sp>
       <p:sp>
         <p:nvSpPr>
-          <p:cNvPr id="75" name="TextBox 74"/>
-          <p:cNvSpPr txBox="1"/>
-          <p:nvPr/>
-        </p:nvSpPr>
-        <p:spPr>
-          <a:xfrm>
-            <a:off x="8193024" y="5312664"/>
-            <a:ext cx="1722729" cy="365760"/>
-          </a:xfrm>
-          <a:prstGeom prst="rect">
-            <a:avLst/>
-          </a:prstGeom>
-          <a:solidFill>
-            <a:srgbClr val="FFFFFF"/>
-          </a:solidFill>
-        </p:spPr>
-        <p:txBody>
-          <a:bodyPr wrap="none" lIns="0" tIns="0" rIns="0" bIns="0" anchor="t">
-            <a:spAutoFit/>
-          </a:bodyPr>
-          <a:lstStyle/>
-          <a:p>
-            <a:pPr algn="l">
-              <a:lnSpc>
-                <a:spcPct val="120000"/>
-              </a:lnSpc>
-            </a:pPr>
-            <a:r>
-              <a:rPr sz="850" b="0">
-                <a:solidFill>
-                  <a:srgbClr val="000000"/>
-                </a:solidFill>
-                <a:latin typeface="Pretendard SemiBold"/>
-                <a:ea typeface="Pretendard SemiBold"/>
-                <a:cs typeface="Pretendard SemiBold"/>
-              </a:rPr>
-              <a:t>자율주행 ODD 위험평가 에이전트</a:t>
-            </a:r>
-          </a:p>
-          <a:p>
-            <a:pPr algn="l">
-              <a:lnSpc>
-                <a:spcPct val="120000"/>
-              </a:lnSpc>
-            </a:pPr>
-            <a:r>
-              <a:rPr sz="750" b="0">
-                <a:solidFill>
-                  <a:srgbClr val="9A9A9A"/>
-                </a:solidFill>
-                <a:latin typeface="Pretendard"/>
-                <a:ea typeface="Pretendard"/>
-                <a:cs typeface="Pretendard"/>
-              </a:rPr>
-              <a:t>2026.05 ~ 2026.06</a:t>
-            </a:r>
-          </a:p>
-        </p:txBody>
-      </p:sp>
-      <p:sp>
-        <p:nvSpPr>
-          <p:cNvPr id="76" name="Oval 75"/>
-          <p:cNvSpPr/>
-          <p:nvPr/>
-        </p:nvSpPr>
-        <p:spPr>
-          <a:xfrm>
-            <a:off x="8778240" y="2880360"/>
-            <a:ext cx="640080" cy="640080"/>
-          </a:xfrm>
-          <a:prstGeom prst="ellipse">
-            <a:avLst/>
-          </a:prstGeom>
-          <a:solidFill>
-            <a:srgbClr val="000000"/>
-          </a:solidFill>
-          <a:ln>
-            <a:noFill/>
-          </a:ln>
-          <a:effectLst/>
-        </p:spPr>
-        <p:style>
-          <a:lnRef idx="1">
-            <a:schemeClr val="accent1"/>
-          </a:lnRef>
-          <a:fillRef idx="3">
-            <a:schemeClr val="accent1"/>
-          </a:fillRef>
-          <a:effectRef idx="2">
-            <a:schemeClr val="accent1"/>
-          </a:effectRef>
-          <a:fontRef idx="minor">
-            <a:schemeClr val="lt1"/>
-          </a:fontRef>
-        </p:style>
-        <p:txBody>
-          <a:bodyPr rtlCol="0" anchor="ctr"/>
-          <a:lstStyle/>
-          <a:p>
-            <a:pPr algn="ctr"/>
-            <a:endParaRPr/>
-          </a:p>
-        </p:txBody>
-      </p:sp>
-      <p:sp>
-        <p:nvSpPr>
-          <p:cNvPr id="77" name="Freeform 76"/>
+          <p:cNvPr id="65" name="Freeform 64"/>
           <p:cNvSpPr/>
           <p:nvPr/>
         </p:nvSpPr>
@@ -7008,7 +6500,7 @@
       </p:sp>
       <p:sp>
         <p:nvSpPr>
-          <p:cNvPr id="78" name="Freeform 77"/>
+          <p:cNvPr id="66" name="Freeform 65"/>
           <p:cNvSpPr/>
           <p:nvPr/>
         </p:nvSpPr>
@@ -7073,7 +6565,7 @@
       </p:sp>
       <p:cxnSp>
         <p:nvCxnSpPr>
-          <p:cNvPr id="79" name="Connector 78"/>
+          <p:cNvPr id="67" name="Connector 66"/>
           <p:cNvCxnSpPr/>
           <p:nvPr/>
         </p:nvCxnSpPr>
@@ -7094,7 +6586,7 @@
       </p:cxnSp>
       <p:sp>
         <p:nvSpPr>
-          <p:cNvPr id="80" name="TextBox 79"/>
+          <p:cNvPr id="68" name="TextBox 67"/>
           <p:cNvSpPr txBox="1"/>
           <p:nvPr/>
         </p:nvSpPr>
@@ -7164,14 +6656,14 @@
                 <a:ea typeface="Pretendard"/>
                 <a:cs typeface="Pretendard"/>
               </a:rPr>
-              <a:t>2026.06 ~ 2026.08</a:t>
+              <a:t>2026.06 ~ 2026.09</a:t>
             </a:r>
           </a:p>
         </p:txBody>
       </p:sp>
       <p:cxnSp>
         <p:nvCxnSpPr>
-          <p:cNvPr id="81" name="Connector 80"/>
+          <p:cNvPr id="69" name="Connector 68"/>
           <p:cNvCxnSpPr/>
           <p:nvPr/>
         </p:nvCxnSpPr>
@@ -7192,7 +6684,7 @@
       </p:cxnSp>
       <p:sp>
         <p:nvSpPr>
-          <p:cNvPr id="82" name="Oval 81"/>
+          <p:cNvPr id="70" name="Oval 69"/>
           <p:cNvSpPr/>
           <p:nvPr/>
         </p:nvSpPr>
@@ -7239,7 +6731,7 @@
       </p:sp>
       <p:sp>
         <p:nvSpPr>
-          <p:cNvPr id="83" name="Freeform 82"/>
+          <p:cNvPr id="71" name="Freeform 70"/>
           <p:cNvSpPr/>
           <p:nvPr/>
         </p:nvSpPr>
@@ -7305,7 +6797,7 @@
       </p:sp>
       <p:cxnSp>
         <p:nvCxnSpPr>
-          <p:cNvPr id="84" name="Connector 83"/>
+          <p:cNvPr id="72" name="Connector 71"/>
           <p:cNvCxnSpPr/>
           <p:nvPr/>
         </p:nvCxnSpPr>
@@ -7326,7 +6818,7 @@
       </p:cxnSp>
       <p:cxnSp>
         <p:nvCxnSpPr>
-          <p:cNvPr id="85" name="Connector 84"/>
+          <p:cNvPr id="73" name="Connector 72"/>
           <p:cNvCxnSpPr/>
           <p:nvPr/>
         </p:nvCxnSpPr>
@@ -7347,14 +6839,14 @@
       </p:cxnSp>
       <p:sp>
         <p:nvSpPr>
-          <p:cNvPr id="86" name="TextBox 85"/>
+          <p:cNvPr id="74" name="TextBox 73"/>
           <p:cNvSpPr txBox="1"/>
           <p:nvPr/>
         </p:nvSpPr>
         <p:spPr>
           <a:xfrm>
             <a:off x="10012680" y="3529584"/>
-            <a:ext cx="1630375" cy="457200"/>
+            <a:ext cx="1630375" cy="274320"/>
           </a:xfrm>
           <a:prstGeom prst="rect">
             <a:avLst/>
@@ -7369,7 +6861,7 @@
           <a:p>
             <a:pPr algn="l">
               <a:lnSpc>
-                <a:spcPct val="130000"/>
+                <a:spcPct val="115000"/>
               </a:lnSpc>
             </a:pPr>
             <a:r>
@@ -7382,24 +6874,6 @@
                 <a:cs typeface="Pretendard"/>
               </a:rPr>
               <a:t>현대카드</a:t>
-            </a:r>
-          </a:p>
-          <a:p>
-            <a:pPr algn="l">
-              <a:lnSpc>
-                <a:spcPct val="130000"/>
-              </a:lnSpc>
-            </a:pPr>
-            <a:r>
-              <a:rPr sz="900" b="0">
-                <a:solidFill>
-                  <a:srgbClr val="6B6B6B"/>
-                </a:solidFill>
-                <a:latin typeface="Pretendard"/>
-                <a:ea typeface="Pretendard"/>
-                <a:cs typeface="Pretendard"/>
-              </a:rPr>
-              <a:t>리스크 모형 운영</a:t>
             </a:r>
           </a:p>
         </p:txBody>

--- a/ppt/역량PT_김연주.pptx
+++ b/ppt/역량PT_김연주.pptx
@@ -227,7 +227,7 @@
             </a:lvl1pPr>
           </a:lstStyle>
           <a:p>
-            <a:fld id="{209FF3C9-5004-495D-9F28-18ED95FD2F2B}" type="datetimeFigureOut">
+            <a:fld id="{713E98C4-CD34-45ED-B2E4-B525025A6EC8}" type="datetimeFigureOut">
               <a:rPr lang="ko-KR" altLang="en-US" smtClean="0"/>
               <a:t>2026-10-22</a:t>
             </a:fld>
@@ -385,7 +385,7 @@
             </a:lvl1pPr>
           </a:lstStyle>
           <a:p>
-            <a:fld id="{E9AE9C64-59EB-4D8A-ACEB-ED5DCDD6D10A}" type="slidenum">
+            <a:fld id="{3BB541F3-7B14-402A-B200-7AF8BB3D2F38}" type="slidenum">
               <a:rPr lang="ko-KR" altLang="en-US" smtClean="0"/>
               <a:t>‹#›</a:t>
             </a:fld>
@@ -396,7 +396,7 @@
     </p:spTree>
     <p:extLst>
       <p:ext uri="{BB962C8B-B14F-4D97-AF65-F5344CB8AC3E}">
-        <p14:creationId xmlns:p14="http://schemas.microsoft.com/office/powerpoint/2010/main" val="2453072735"/>
+        <p14:creationId xmlns:p14="http://schemas.microsoft.com/office/powerpoint/2010/main" val="2574171125"/>
       </p:ext>
     </p:extLst>
   </p:cSld>
@@ -6592,8 +6592,8 @@
         </p:nvSpPr>
         <p:spPr>
           <a:xfrm>
-            <a:off x="8778240" y="2240280"/>
-            <a:ext cx="1828800" cy="640080"/>
+            <a:off x="8823959" y="1527048"/>
+            <a:ext cx="2651760" cy="1289304"/>
           </a:xfrm>
           <a:prstGeom prst="rect">
             <a:avLst/>
@@ -6608,7 +6608,7 @@
           <a:p>
             <a:pPr algn="l">
               <a:lnSpc>
-                <a:spcPct val="130000"/>
+                <a:spcPct val="125000"/>
               </a:lnSpc>
             </a:pPr>
             <a:r>
@@ -6626,7 +6626,7 @@
           <a:p>
             <a:pPr algn="l">
               <a:lnSpc>
-                <a:spcPct val="130000"/>
+                <a:spcPct val="125000"/>
               </a:lnSpc>
             </a:pPr>
             <a:r>
@@ -6638,13 +6638,67 @@
                 <a:ea typeface="Pretendard"/>
                 <a:cs typeface="Pretendard"/>
               </a:rPr>
-              <a:t>실제 산업 현장에서의 모델링</a:t>
+              <a:t>•  데이터마트 제작</a:t>
             </a:r>
           </a:p>
           <a:p>
             <a:pPr algn="l">
               <a:lnSpc>
-                <a:spcPct val="130000"/>
+                <a:spcPct val="125000"/>
+              </a:lnSpc>
+            </a:pPr>
+            <a:r>
+              <a:rPr sz="900" b="0">
+                <a:solidFill>
+                  <a:srgbClr val="6B6B6B"/>
+                </a:solidFill>
+                <a:latin typeface="Pretendard"/>
+                <a:ea typeface="Pretendard"/>
+                <a:cs typeface="Pretendard"/>
+              </a:rPr>
+              <a:t>•  불량 확률 예측</a:t>
+            </a:r>
+          </a:p>
+          <a:p>
+            <a:pPr algn="l">
+              <a:lnSpc>
+                <a:spcPct val="125000"/>
+              </a:lnSpc>
+            </a:pPr>
+            <a:r>
+              <a:rPr sz="900" b="0">
+                <a:solidFill>
+                  <a:srgbClr val="6B6B6B"/>
+                </a:solidFill>
+                <a:latin typeface="Pretendard"/>
+                <a:ea typeface="Pretendard"/>
+                <a:cs typeface="Pretendard"/>
+              </a:rPr>
+              <a:t>•  SHAP 분석 (CTP-CTQ matrix)</a:t>
+            </a:r>
+          </a:p>
+          <a:p>
+            <a:pPr algn="l">
+              <a:lnSpc>
+                <a:spcPct val="125000"/>
+              </a:lnSpc>
+            </a:pPr>
+            <a:r>
+              <a:rPr sz="900" b="0">
+                <a:solidFill>
+                  <a:srgbClr val="6B6B6B"/>
+                </a:solidFill>
+                <a:latin typeface="Pretendard"/>
+                <a:ea typeface="Pretendard"/>
+                <a:cs typeface="Pretendard"/>
+              </a:rPr>
+              <a:t>•  LLM 에이전트 및 인터페이스 개발</a:t>
+            </a:r>
+          </a:p>
+          <a:p>
+            <a:pPr algn="l">
+              <a:lnSpc>
+                <a:spcPct val="125000"/>
               </a:lnSpc>
             </a:pPr>
             <a:r>

--- a/ppt/역량PT_김연주.pptx
+++ b/ppt/역량PT_김연주.pptx
@@ -4,9 +4,6 @@
   <p:sldMasterIdLst>
     <p:sldMasterId id="2147483648" r:id="rId1"/>
   </p:sldMasterIdLst>
-  <p:notesMasterIdLst>
-    <p:notesMasterId r:id="rId4"/>
-  </p:notesMasterIdLst>
   <p:sldIdLst>
     <p:sldId id="256" r:id="rId2"/>
     <p:sldId id="257" r:id="rId3"/>
@@ -16,21 +13,16 @@
   <p:embeddedFontLst>
     <p:embeddedFont>
       <p:font typeface="Pretendard" panose="02000003000000020004" pitchFamily="2" charset="-127"/>
-      <p:regular r:id="rId5"/>
-      <p:bold r:id="rId6"/>
+      <p:regular r:id="rId4"/>
+      <p:bold r:id="rId5"/>
     </p:embeddedFont>
     <p:embeddedFont>
       <p:font typeface="Pretendard Medium" panose="02000003000000020004" pitchFamily="2" charset="-127"/>
-      <p:regular r:id="rId7"/>
+      <p:regular r:id="rId6"/>
     </p:embeddedFont>
     <p:embeddedFont>
       <p:font typeface="Pretendard SemiBold" panose="02000003000000020004" pitchFamily="2" charset="-127"/>
-      <p:bold r:id="rId8"/>
-    </p:embeddedFont>
-    <p:embeddedFont>
-      <p:font typeface="맑은 고딕" panose="020B0503020000020004" pitchFamily="50" charset="-127"/>
-      <p:regular r:id="rId9"/>
-      <p:bold r:id="rId10"/>
+      <p:bold r:id="rId7"/>
     </p:embeddedFont>
   </p:embeddedFontLst>
   <p:defaultTextStyle>
@@ -145,423 +137,6 @@
     </p:ext>
   </p:extLst>
 </p:presentation>
-</file>
-
-<file path=ppt/notesMasters/notesMaster1.xml><?xml version="1.0" encoding="utf-8"?>
-<p:notesMaster xmlns:a="http://schemas.openxmlformats.org/drawingml/2006/main" xmlns:r="http://schemas.openxmlformats.org/officeDocument/2006/relationships" xmlns:p="http://schemas.openxmlformats.org/presentationml/2006/main">
-  <p:cSld>
-    <p:bg>
-      <p:bgRef idx="1001">
-        <a:schemeClr val="bg1"/>
-      </p:bgRef>
-    </p:bg>
-    <p:spTree>
-      <p:nvGrpSpPr>
-        <p:cNvPr id="1" name=""/>
-        <p:cNvGrpSpPr/>
-        <p:nvPr/>
-      </p:nvGrpSpPr>
-      <p:grpSpPr>
-        <a:xfrm>
-          <a:off x="0" y="0"/>
-          <a:ext cx="0" cy="0"/>
-          <a:chOff x="0" y="0"/>
-          <a:chExt cx="0" cy="0"/>
-        </a:xfrm>
-      </p:grpSpPr>
-      <p:sp>
-        <p:nvSpPr>
-          <p:cNvPr id="2" name="머리글 개체 틀 1"/>
-          <p:cNvSpPr>
-            <a:spLocks noGrp="1"/>
-          </p:cNvSpPr>
-          <p:nvPr>
-            <p:ph type="hdr" sz="quarter"/>
-          </p:nvPr>
-        </p:nvSpPr>
-        <p:spPr>
-          <a:xfrm>
-            <a:off x="0" y="0"/>
-            <a:ext cx="2971800" cy="458788"/>
-          </a:xfrm>
-          <a:prstGeom prst="rect">
-            <a:avLst/>
-          </a:prstGeom>
-        </p:spPr>
-        <p:txBody>
-          <a:bodyPr vert="horz" lIns="91440" tIns="45720" rIns="91440" bIns="45720" rtlCol="0"/>
-          <a:lstStyle>
-            <a:lvl1pPr algn="l">
-              <a:defRPr sz="1200"/>
-            </a:lvl1pPr>
-          </a:lstStyle>
-          <a:p>
-            <a:endParaRPr lang="ko-KR" altLang="en-US"/>
-          </a:p>
-        </p:txBody>
-      </p:sp>
-      <p:sp>
-        <p:nvSpPr>
-          <p:cNvPr id="3" name="날짜 개체 틀 2"/>
-          <p:cNvSpPr>
-            <a:spLocks noGrp="1"/>
-          </p:cNvSpPr>
-          <p:nvPr>
-            <p:ph type="dt" idx="1"/>
-          </p:nvPr>
-        </p:nvSpPr>
-        <p:spPr>
-          <a:xfrm>
-            <a:off x="3884613" y="0"/>
-            <a:ext cx="2971800" cy="458788"/>
-          </a:xfrm>
-          <a:prstGeom prst="rect">
-            <a:avLst/>
-          </a:prstGeom>
-        </p:spPr>
-        <p:txBody>
-          <a:bodyPr vert="horz" lIns="91440" tIns="45720" rIns="91440" bIns="45720" rtlCol="0"/>
-          <a:lstStyle>
-            <a:lvl1pPr algn="r">
-              <a:defRPr sz="1200"/>
-            </a:lvl1pPr>
-          </a:lstStyle>
-          <a:p>
-            <a:fld id="{713E98C4-CD34-45ED-B2E4-B525025A6EC8}" type="datetimeFigureOut">
-              <a:rPr lang="ko-KR" altLang="en-US" smtClean="0"/>
-              <a:t>2026-10-22</a:t>
-            </a:fld>
-            <a:endParaRPr lang="ko-KR" altLang="en-US"/>
-          </a:p>
-        </p:txBody>
-      </p:sp>
-      <p:sp>
-        <p:nvSpPr>
-          <p:cNvPr id="4" name="슬라이드 이미지 개체 틀 3"/>
-          <p:cNvSpPr>
-            <a:spLocks noGrp="1" noRot="1" noChangeAspect="1"/>
-          </p:cNvSpPr>
-          <p:nvPr>
-            <p:ph type="sldImg" idx="2"/>
-          </p:nvPr>
-        </p:nvSpPr>
-        <p:spPr>
-          <a:xfrm>
-            <a:off x="685800" y="1143000"/>
-            <a:ext cx="5486400" cy="3086100"/>
-          </a:xfrm>
-          <a:prstGeom prst="rect">
-            <a:avLst/>
-          </a:prstGeom>
-          <a:noFill/>
-          <a:ln w="12700">
-            <a:solidFill>
-              <a:prstClr val="black"/>
-            </a:solidFill>
-          </a:ln>
-        </p:spPr>
-        <p:txBody>
-          <a:bodyPr vert="horz" lIns="91440" tIns="45720" rIns="91440" bIns="45720" rtlCol="0" anchor="ctr"/>
-          <a:lstStyle/>
-          <a:p>
-            <a:endParaRPr lang="ko-KR" altLang="en-US"/>
-          </a:p>
-        </p:txBody>
-      </p:sp>
-      <p:sp>
-        <p:nvSpPr>
-          <p:cNvPr id="5" name="슬라이드 노트 개체 틀 4"/>
-          <p:cNvSpPr>
-            <a:spLocks noGrp="1"/>
-          </p:cNvSpPr>
-          <p:nvPr>
-            <p:ph type="body" sz="quarter" idx="3"/>
-          </p:nvPr>
-        </p:nvSpPr>
-        <p:spPr>
-          <a:xfrm>
-            <a:off x="685800" y="4400550"/>
-            <a:ext cx="5486400" cy="3600450"/>
-          </a:xfrm>
-          <a:prstGeom prst="rect">
-            <a:avLst/>
-          </a:prstGeom>
-        </p:spPr>
-        <p:txBody>
-          <a:bodyPr vert="horz" lIns="91440" tIns="45720" rIns="91440" bIns="45720" rtlCol="0"/>
-          <a:lstStyle/>
-          <a:p>
-            <a:pPr lvl="0"/>
-            <a:r>
-              <a:rPr lang="ko-KR" altLang="en-US"/>
-              <a:t>마스터 텍스트 스타일을 편집하려면 클릭</a:t>
-            </a:r>
-          </a:p>
-          <a:p>
-            <a:pPr lvl="1"/>
-            <a:r>
-              <a:rPr lang="ko-KR" altLang="en-US"/>
-              <a:t>두 번째 수준</a:t>
-            </a:r>
-          </a:p>
-          <a:p>
-            <a:pPr lvl="2"/>
-            <a:r>
-              <a:rPr lang="ko-KR" altLang="en-US"/>
-              <a:t>세 번째 수준</a:t>
-            </a:r>
-          </a:p>
-          <a:p>
-            <a:pPr lvl="3"/>
-            <a:r>
-              <a:rPr lang="ko-KR" altLang="en-US"/>
-              <a:t>네 번째 수준</a:t>
-            </a:r>
-          </a:p>
-          <a:p>
-            <a:pPr lvl="4"/>
-            <a:r>
-              <a:rPr lang="ko-KR" altLang="en-US"/>
-              <a:t>다섯 번째 수준</a:t>
-            </a:r>
-          </a:p>
-        </p:txBody>
-      </p:sp>
-      <p:sp>
-        <p:nvSpPr>
-          <p:cNvPr id="6" name="바닥글 개체 틀 5"/>
-          <p:cNvSpPr>
-            <a:spLocks noGrp="1"/>
-          </p:cNvSpPr>
-          <p:nvPr>
-            <p:ph type="ftr" sz="quarter" idx="4"/>
-          </p:nvPr>
-        </p:nvSpPr>
-        <p:spPr>
-          <a:xfrm>
-            <a:off x="0" y="8685213"/>
-            <a:ext cx="2971800" cy="458787"/>
-          </a:xfrm>
-          <a:prstGeom prst="rect">
-            <a:avLst/>
-          </a:prstGeom>
-        </p:spPr>
-        <p:txBody>
-          <a:bodyPr vert="horz" lIns="91440" tIns="45720" rIns="91440" bIns="45720" rtlCol="0" anchor="b"/>
-          <a:lstStyle>
-            <a:lvl1pPr algn="l">
-              <a:defRPr sz="1200"/>
-            </a:lvl1pPr>
-          </a:lstStyle>
-          <a:p>
-            <a:endParaRPr lang="ko-KR" altLang="en-US"/>
-          </a:p>
-        </p:txBody>
-      </p:sp>
-      <p:sp>
-        <p:nvSpPr>
-          <p:cNvPr id="7" name="슬라이드 번호 개체 틀 6"/>
-          <p:cNvSpPr>
-            <a:spLocks noGrp="1"/>
-          </p:cNvSpPr>
-          <p:nvPr>
-            <p:ph type="sldNum" sz="quarter" idx="5"/>
-          </p:nvPr>
-        </p:nvSpPr>
-        <p:spPr>
-          <a:xfrm>
-            <a:off x="3884613" y="8685213"/>
-            <a:ext cx="2971800" cy="458787"/>
-          </a:xfrm>
-          <a:prstGeom prst="rect">
-            <a:avLst/>
-          </a:prstGeom>
-        </p:spPr>
-        <p:txBody>
-          <a:bodyPr vert="horz" lIns="91440" tIns="45720" rIns="91440" bIns="45720" rtlCol="0" anchor="b"/>
-          <a:lstStyle>
-            <a:lvl1pPr algn="r">
-              <a:defRPr sz="1200"/>
-            </a:lvl1pPr>
-          </a:lstStyle>
-          <a:p>
-            <a:fld id="{3BB541F3-7B14-402A-B200-7AF8BB3D2F38}" type="slidenum">
-              <a:rPr lang="ko-KR" altLang="en-US" smtClean="0"/>
-              <a:t>‹#›</a:t>
-            </a:fld>
-            <a:endParaRPr lang="ko-KR" altLang="en-US"/>
-          </a:p>
-        </p:txBody>
-      </p:sp>
-    </p:spTree>
-    <p:extLst>
-      <p:ext uri="{BB962C8B-B14F-4D97-AF65-F5344CB8AC3E}">
-        <p14:creationId xmlns:p14="http://schemas.microsoft.com/office/powerpoint/2010/main" val="2574171125"/>
-      </p:ext>
-    </p:extLst>
-  </p:cSld>
-  <p:clrMap bg1="lt1" tx1="dk1" bg2="lt2" tx2="dk2" accent1="accent1" accent2="accent2" accent3="accent3" accent4="accent4" accent5="accent5" accent6="accent6" hlink="hlink" folHlink="folHlink"/>
-  <p:notesStyle>
-    <a:lvl1pPr marL="0" algn="l" defTabSz="914400" rtl="0" eaLnBrk="1" latinLnBrk="1" hangingPunct="1">
-      <a:defRPr sz="1200" kern="1200">
-        <a:solidFill>
-          <a:schemeClr val="tx1"/>
-        </a:solidFill>
-        <a:latin typeface="+mn-lt"/>
-        <a:ea typeface="+mn-ea"/>
-        <a:cs typeface="+mn-cs"/>
-      </a:defRPr>
-    </a:lvl1pPr>
-    <a:lvl2pPr marL="457200" algn="l" defTabSz="914400" rtl="0" eaLnBrk="1" latinLnBrk="1" hangingPunct="1">
-      <a:defRPr sz="1200" kern="1200">
-        <a:solidFill>
-          <a:schemeClr val="tx1"/>
-        </a:solidFill>
-        <a:latin typeface="+mn-lt"/>
-        <a:ea typeface="+mn-ea"/>
-        <a:cs typeface="+mn-cs"/>
-      </a:defRPr>
-    </a:lvl2pPr>
-    <a:lvl3pPr marL="914400" algn="l" defTabSz="914400" rtl="0" eaLnBrk="1" latinLnBrk="1" hangingPunct="1">
-      <a:defRPr sz="1200" kern="1200">
-        <a:solidFill>
-          <a:schemeClr val="tx1"/>
-        </a:solidFill>
-        <a:latin typeface="+mn-lt"/>
-        <a:ea typeface="+mn-ea"/>
-        <a:cs typeface="+mn-cs"/>
-      </a:defRPr>
-    </a:lvl3pPr>
-    <a:lvl4pPr marL="1371600" algn="l" defTabSz="914400" rtl="0" eaLnBrk="1" latinLnBrk="1" hangingPunct="1">
-      <a:defRPr sz="1200" kern="1200">
-        <a:solidFill>
-          <a:schemeClr val="tx1"/>
-        </a:solidFill>
-        <a:latin typeface="+mn-lt"/>
-        <a:ea typeface="+mn-ea"/>
-        <a:cs typeface="+mn-cs"/>
-      </a:defRPr>
-    </a:lvl4pPr>
-    <a:lvl5pPr marL="1828800" algn="l" defTabSz="914400" rtl="0" eaLnBrk="1" latinLnBrk="1" hangingPunct="1">
-      <a:defRPr sz="1200" kern="1200">
-        <a:solidFill>
-          <a:schemeClr val="tx1"/>
-        </a:solidFill>
-        <a:latin typeface="+mn-lt"/>
-        <a:ea typeface="+mn-ea"/>
-        <a:cs typeface="+mn-cs"/>
-      </a:defRPr>
-    </a:lvl5pPr>
-    <a:lvl6pPr marL="2286000" algn="l" defTabSz="914400" rtl="0" eaLnBrk="1" latinLnBrk="1" hangingPunct="1">
-      <a:defRPr sz="1200" kern="1200">
-        <a:solidFill>
-          <a:schemeClr val="tx1"/>
-        </a:solidFill>
-        <a:latin typeface="+mn-lt"/>
-        <a:ea typeface="+mn-ea"/>
-        <a:cs typeface="+mn-cs"/>
-      </a:defRPr>
-    </a:lvl6pPr>
-    <a:lvl7pPr marL="2743200" algn="l" defTabSz="914400" rtl="0" eaLnBrk="1" latinLnBrk="1" hangingPunct="1">
-      <a:defRPr sz="1200" kern="1200">
-        <a:solidFill>
-          <a:schemeClr val="tx1"/>
-        </a:solidFill>
-        <a:latin typeface="+mn-lt"/>
-        <a:ea typeface="+mn-ea"/>
-        <a:cs typeface="+mn-cs"/>
-      </a:defRPr>
-    </a:lvl7pPr>
-    <a:lvl8pPr marL="3200400" algn="l" defTabSz="914400" rtl="0" eaLnBrk="1" latinLnBrk="1" hangingPunct="1">
-      <a:defRPr sz="1200" kern="1200">
-        <a:solidFill>
-          <a:schemeClr val="tx1"/>
-        </a:solidFill>
-        <a:latin typeface="+mn-lt"/>
-        <a:ea typeface="+mn-ea"/>
-        <a:cs typeface="+mn-cs"/>
-      </a:defRPr>
-    </a:lvl8pPr>
-    <a:lvl9pPr marL="3657600" algn="l" defTabSz="914400" rtl="0" eaLnBrk="1" latinLnBrk="1" hangingPunct="1">
-      <a:defRPr sz="1200" kern="1200">
-        <a:solidFill>
-          <a:schemeClr val="tx1"/>
-        </a:solidFill>
-        <a:latin typeface="+mn-lt"/>
-        <a:ea typeface="+mn-ea"/>
-        <a:cs typeface="+mn-cs"/>
-      </a:defRPr>
-    </a:lvl9pPr>
-  </p:notesStyle>
-</p:notesMaster>
-</file>
-
-<file path=ppt/notesSlides/notesSlide1.xml><?xml version="1.0" encoding="utf-8"?>
-<p:notes xmlns:a="http://schemas.openxmlformats.org/drawingml/2006/main" xmlns:r="http://schemas.openxmlformats.org/officeDocument/2006/relationships" xmlns:p="http://schemas.openxmlformats.org/presentationml/2006/main">
-  <p:cSld>
-    <p:spTree>
-      <p:nvGrpSpPr>
-        <p:cNvPr id="1" name=""/>
-        <p:cNvGrpSpPr/>
-        <p:nvPr/>
-      </p:nvGrpSpPr>
-      <p:grpSpPr>
-        <a:xfrm>
-          <a:off x="0" y="0"/>
-          <a:ext cx="0" cy="0"/>
-          <a:chOff x="0" y="0"/>
-          <a:chExt cx="0" cy="0"/>
-        </a:xfrm>
-      </p:grpSpPr>
-      <p:sp>
-        <p:nvSpPr>
-          <p:cNvPr id="2" name="Slide Image Placeholder 1"/>
-          <p:cNvSpPr>
-            <a:spLocks noGrp="1" noRot="1" noChangeAspect="1"/>
-          </p:cNvSpPr>
-          <p:nvPr>
-            <p:ph type="sldImg" idx="2"/>
-          </p:nvPr>
-        </p:nvSpPr>
-        <p:spPr/>
-      </p:sp>
-      <p:sp>
-        <p:nvSpPr>
-          <p:cNvPr id="3" name="Notes Placeholder 2"/>
-          <p:cNvSpPr>
-            <a:spLocks noGrp="1"/>
-          </p:cNvSpPr>
-          <p:nvPr>
-            <p:ph type="body" sz="quarter" idx="3"/>
-          </p:nvPr>
-        </p:nvSpPr>
-        <p:spPr/>
-        <p:txBody>
-          <a:bodyPr/>
-          <a:lstStyle/>
-          <a:p>
-            <a:endParaRPr/>
-          </a:p>
-        </p:txBody>
-      </p:sp>
-      <p:sp>
-        <p:nvSpPr>
-          <p:cNvPr id="4" name="Slide Number Placeholder 3"/>
-          <p:cNvSpPr>
-            <a:spLocks noGrp="1"/>
-          </p:cNvSpPr>
-          <p:nvPr>
-            <p:ph type="sldNum" sz="quarter" idx="5"/>
-          </p:nvPr>
-        </p:nvSpPr>
-        <p:spPr/>
-      </p:sp>
-    </p:spTree>
-  </p:cSld>
-  <p:clrMapOvr>
-    <a:masterClrMapping/>
-  </p:clrMapOvr>
-</p:notes>
 </file>
 
 <file path=ppt/slideLayouts/slideLayout1.xml><?xml version="1.0" encoding="utf-8"?>
@@ -6993,7 +6568,7 @@
                 <a:ea typeface="Pretendard"/>
                 <a:cs typeface="Pretendard"/>
               </a:rPr>
-              <a:t>02 Project</a:t>
+              <a:t>02 New Project</a:t>
             </a:r>
           </a:p>
         </p:txBody>
@@ -7034,7 +6609,7 @@
                 <a:ea typeface="Pretendard Medium"/>
                 <a:cs typeface="Pretendard Medium"/>
               </a:rPr>
-              <a:t>신용평가모형 운영 자동화</a:t>
+              <a:t>대출 부실 예측모형 자동 점검 시스템</a:t>
             </a:r>
           </a:p>
         </p:txBody>
@@ -7092,8 +6667,8 @@
         </p:nvSpPr>
         <p:spPr>
           <a:xfrm>
-            <a:off x="548640" y="1609344"/>
-            <a:ext cx="2224963" cy="274320"/>
+            <a:off x="548640" y="1691640"/>
+            <a:ext cx="5486400" cy="228600"/>
           </a:xfrm>
           <a:prstGeom prst="rect">
             <a:avLst/>
@@ -7112,18 +6687,48 @@
               </a:lnSpc>
             </a:pPr>
             <a:r>
-              <a:rPr sz="1100" b="0">
-                <a:solidFill>
-                  <a:srgbClr val="9A9A9A"/>
+              <a:rPr sz="1000" b="0">
+                <a:solidFill>
+                  <a:srgbClr val="6B6B6B"/>
                 </a:solidFill>
                 <a:latin typeface="Pretendard Medium"/>
                 <a:ea typeface="Pretendard Medium"/>
                 <a:cs typeface="Pretendard Medium"/>
               </a:rPr>
-              <a:t>1  </a:t>
-            </a:r>
-            <a:r>
-              <a:rPr sz="1200" b="1">
+              <a:t>문제</a:t>
+            </a:r>
+          </a:p>
+        </p:txBody>
+      </p:sp>
+      <p:sp>
+        <p:nvSpPr>
+          <p:cNvPr id="6" name="TextBox 5"/>
+          <p:cNvSpPr txBox="1"/>
+          <p:nvPr/>
+        </p:nvSpPr>
+        <p:spPr>
+          <a:xfrm>
+            <a:off x="548640" y="1938528"/>
+            <a:ext cx="5486400" cy="548640"/>
+          </a:xfrm>
+          <a:prstGeom prst="rect">
+            <a:avLst/>
+          </a:prstGeom>
+          <a:noFill/>
+        </p:spPr>
+        <p:txBody>
+          <a:bodyPr wrap="none" lIns="0" tIns="0" rIns="0" bIns="0" anchor="t">
+            <a:spAutoFit/>
+          </a:bodyPr>
+          <a:lstStyle/>
+          <a:p>
+            <a:pPr algn="l">
+              <a:lnSpc>
+                <a:spcPct val="135000"/>
+              </a:lnSpc>
+            </a:pPr>
+            <a:r>
+              <a:rPr sz="1300" b="1">
                 <a:solidFill>
                   <a:srgbClr val="000000"/>
                 </a:solidFill>
@@ -7131,83 +6736,63 @@
                 <a:ea typeface="Pretendard"/>
                 <a:cs typeface="Pretendard"/>
               </a:rPr>
-              <a:t>정기 실행</a:t>
-            </a:r>
-          </a:p>
-        </p:txBody>
-      </p:sp>
-      <p:sp>
-        <p:nvSpPr>
-          <p:cNvPr id="6" name="Freeform 5"/>
-          <p:cNvSpPr/>
-          <p:nvPr/>
-        </p:nvSpPr>
-        <p:spPr>
-          <a:xfrm>
-            <a:off x="2828467" y="1645920"/>
-            <a:ext cx="73152" cy="146304"/>
-          </a:xfrm>
-          <a:custGeom>
-            <a:avLst/>
-            <a:gdLst/>
-            <a:ahLst/>
-            <a:cxnLst/>
-            <a:rect l="l" t="t" r="r" b="b"/>
-            <a:pathLst>
-              <a:path w="73152" h="146304">
-                <a:moveTo>
-                  <a:pt x="0" y="0"/>
-                </a:moveTo>
-                <a:lnTo>
-                  <a:pt x="73152" y="73152"/>
-                </a:lnTo>
-                <a:lnTo>
-                  <a:pt x="0" y="146304"/>
-                </a:lnTo>
-              </a:path>
-            </a:pathLst>
-          </a:custGeom>
-          <a:noFill/>
-          <a:ln w="12700">
-            <a:solidFill>
-              <a:srgbClr val="9A9A9A"/>
-            </a:solidFill>
-          </a:ln>
-          <a:effectLst/>
-        </p:spPr>
-        <p:style>
-          <a:lnRef idx="1">
-            <a:schemeClr val="accent1"/>
-          </a:lnRef>
-          <a:fillRef idx="3">
-            <a:schemeClr val="accent1"/>
-          </a:fillRef>
-          <a:effectRef idx="2">
-            <a:schemeClr val="accent1"/>
-          </a:effectRef>
-          <a:fontRef idx="minor">
-            <a:schemeClr val="lt1"/>
-          </a:fontRef>
-        </p:style>
-        <p:txBody>
-          <a:bodyPr rtlCol="0" anchor="ctr"/>
-          <a:lstStyle/>
-          <a:p>
-            <a:pPr algn="ctr"/>
-            <a:endParaRPr/>
-          </a:p>
-        </p:txBody>
-      </p:sp>
-      <p:sp>
-        <p:nvSpPr>
-          <p:cNvPr id="7" name="TextBox 6"/>
+              <a:t>대출 심사에 쓰는 부실 예측모형은 시간이 지나면 실제와 어긋남</a:t>
+            </a:r>
+          </a:p>
+          <a:p>
+            <a:pPr algn="l">
+              <a:lnSpc>
+                <a:spcPct val="135000"/>
+              </a:lnSpc>
+            </a:pPr>
+            <a:r>
+              <a:rPr sz="1000" b="0">
+                <a:solidFill>
+                  <a:srgbClr val="6B6B6B"/>
+                </a:solidFill>
+                <a:latin typeface="Pretendard"/>
+                <a:ea typeface="Pretendard"/>
+                <a:cs typeface="Pretendard"/>
+              </a:rPr>
+              <a:t>실제 부실률은 오르는데 모형의 예상은 내려감 (실행 후 2년 안에 갚지 못한 대출의 비율)</a:t>
+            </a:r>
+          </a:p>
+        </p:txBody>
+      </p:sp>
+      <p:pic>
+        <p:nvPicPr>
+          <p:cNvPr id="7" name="Picture 6" descr="chart_default.png"/>
+          <p:cNvPicPr>
+            <a:picLocks noChangeAspect="1"/>
+          </p:cNvPicPr>
+          <p:nvPr/>
+        </p:nvPicPr>
+        <p:blipFill>
+          <a:blip r:embed="rId2"/>
+          <a:stretch>
+            <a:fillRect/>
+          </a:stretch>
+        </p:blipFill>
+        <p:spPr>
+          <a:xfrm>
+            <a:off x="502919" y="2697480"/>
+            <a:ext cx="5486400" cy="2654709"/>
+          </a:xfrm>
+          <a:prstGeom prst="rect">
+            <a:avLst/>
+          </a:prstGeom>
+        </p:spPr>
+      </p:pic>
+      <p:sp>
+        <p:nvSpPr>
+          <p:cNvPr id="8" name="TextBox 7"/>
           <p:cNvSpPr txBox="1"/>
           <p:nvPr/>
         </p:nvSpPr>
         <p:spPr>
           <a:xfrm>
-            <a:off x="3011347" y="1609344"/>
-            <a:ext cx="2224963" cy="274320"/>
+            <a:off x="6537959" y="1691640"/>
+            <a:ext cx="5105095" cy="228600"/>
           </a:xfrm>
           <a:prstGeom prst="rect">
             <a:avLst/>
@@ -7226,89 +6811,16 @@
               </a:lnSpc>
             </a:pPr>
             <a:r>
-              <a:rPr sz="1100" b="0">
-                <a:solidFill>
-                  <a:srgbClr val="9A9A9A"/>
+              <a:rPr sz="1000" b="0">
+                <a:solidFill>
+                  <a:srgbClr val="6B6B6B"/>
                 </a:solidFill>
                 <a:latin typeface="Pretendard Medium"/>
                 <a:ea typeface="Pretendard Medium"/>
                 <a:cs typeface="Pretendard Medium"/>
               </a:rPr>
-              <a:t>2  </a:t>
-            </a:r>
-            <a:r>
-              <a:rPr sz="1200" b="1">
-                <a:solidFill>
-                  <a:srgbClr val="000000"/>
-                </a:solidFill>
-                <a:latin typeface="Pretendard"/>
-                <a:ea typeface="Pretendard"/>
-                <a:cs typeface="Pretendard"/>
-              </a:rPr>
-              <a:t>점검</a:t>
-            </a:r>
-          </a:p>
-        </p:txBody>
-      </p:sp>
-      <p:sp>
-        <p:nvSpPr>
-          <p:cNvPr id="8" name="Freeform 7"/>
-          <p:cNvSpPr/>
-          <p:nvPr/>
-        </p:nvSpPr>
-        <p:spPr>
-          <a:xfrm>
-            <a:off x="5236311" y="1645920"/>
-            <a:ext cx="73152" cy="146304"/>
-          </a:xfrm>
-          <a:custGeom>
-            <a:avLst/>
-            <a:gdLst/>
-            <a:ahLst/>
-            <a:cxnLst/>
-            <a:rect l="l" t="t" r="r" b="b"/>
-            <a:pathLst>
-              <a:path w="73152" h="146304">
-                <a:moveTo>
-                  <a:pt x="0" y="0"/>
-                </a:moveTo>
-                <a:lnTo>
-                  <a:pt x="73152" y="73152"/>
-                </a:lnTo>
-                <a:lnTo>
-                  <a:pt x="0" y="146304"/>
-                </a:lnTo>
-              </a:path>
-            </a:pathLst>
-          </a:custGeom>
-          <a:noFill/>
-          <a:ln w="12700">
-            <a:solidFill>
-              <a:srgbClr val="9A9A9A"/>
-            </a:solidFill>
-          </a:ln>
-          <a:effectLst/>
-        </p:spPr>
-        <p:style>
-          <a:lnRef idx="1">
-            <a:schemeClr val="accent1"/>
-          </a:lnRef>
-          <a:fillRef idx="3">
-            <a:schemeClr val="accent1"/>
-          </a:fillRef>
-          <a:effectRef idx="2">
-            <a:schemeClr val="accent1"/>
-          </a:effectRef>
-          <a:fontRef idx="minor">
-            <a:schemeClr val="lt1"/>
-          </a:fontRef>
-        </p:style>
-        <p:txBody>
-          <a:bodyPr rtlCol="0" anchor="ctr"/>
-          <a:lstStyle/>
-          <a:p>
-            <a:pPr algn="ctr"/>
-            <a:endParaRPr/>
+              <a:t>시스템이 하는 일</a:t>
+            </a:r>
           </a:p>
         </p:txBody>
       </p:sp>
@@ -7320,8 +6832,8 @@
         </p:nvSpPr>
         <p:spPr>
           <a:xfrm>
-            <a:off x="5419191" y="1609344"/>
-            <a:ext cx="2224963" cy="274320"/>
+            <a:off x="6537959" y="1965960"/>
+            <a:ext cx="5105095" cy="274320"/>
           </a:xfrm>
           <a:prstGeom prst="rect">
             <a:avLst/>
@@ -7340,102 +6852,40 @@
               </a:lnSpc>
             </a:pPr>
             <a:r>
-              <a:rPr sz="1100" b="0">
+              <a:rPr sz="1100" b="1">
                 <a:solidFill>
                   <a:srgbClr val="9A9A9A"/>
-                </a:solidFill>
-                <a:latin typeface="Pretendard Medium"/>
-                <a:ea typeface="Pretendard Medium"/>
-                <a:cs typeface="Pretendard Medium"/>
-              </a:rPr>
-              <a:t>3  </a:t>
-            </a:r>
-            <a:r>
-              <a:rPr sz="1200" b="1">
-                <a:solidFill>
-                  <a:srgbClr val="000000"/>
                 </a:solidFill>
                 <a:latin typeface="Pretendard"/>
                 <a:ea typeface="Pretendard"/>
                 <a:cs typeface="Pretendard"/>
               </a:rPr>
-              <a:t>개선안 검증</a:t>
-            </a:r>
-          </a:p>
-        </p:txBody>
-      </p:sp>
-      <p:sp>
-        <p:nvSpPr>
-          <p:cNvPr id="10" name="Freeform 9"/>
-          <p:cNvSpPr/>
-          <p:nvPr/>
-        </p:nvSpPr>
-        <p:spPr>
-          <a:xfrm>
-            <a:off x="7644155" y="1645920"/>
-            <a:ext cx="73152" cy="146304"/>
-          </a:xfrm>
-          <a:custGeom>
-            <a:avLst/>
-            <a:gdLst/>
-            <a:ahLst/>
-            <a:cxnLst/>
-            <a:rect l="l" t="t" r="r" b="b"/>
-            <a:pathLst>
-              <a:path w="73152" h="146304">
-                <a:moveTo>
-                  <a:pt x="0" y="0"/>
-                </a:moveTo>
-                <a:lnTo>
-                  <a:pt x="73152" y="73152"/>
-                </a:lnTo>
-                <a:lnTo>
-                  <a:pt x="0" y="146304"/>
-                </a:lnTo>
-              </a:path>
-            </a:pathLst>
-          </a:custGeom>
-          <a:noFill/>
-          <a:ln w="12700">
-            <a:solidFill>
-              <a:srgbClr val="9A9A9A"/>
-            </a:solidFill>
-          </a:ln>
-          <a:effectLst/>
-        </p:spPr>
-        <p:style>
-          <a:lnRef idx="1">
-            <a:schemeClr val="accent1"/>
-          </a:lnRef>
-          <a:fillRef idx="3">
-            <a:schemeClr val="accent1"/>
-          </a:fillRef>
-          <a:effectRef idx="2">
-            <a:schemeClr val="accent1"/>
-          </a:effectRef>
-          <a:fontRef idx="minor">
-            <a:schemeClr val="lt1"/>
-          </a:fontRef>
-        </p:style>
-        <p:txBody>
-          <a:bodyPr rtlCol="0" anchor="ctr"/>
-          <a:lstStyle/>
-          <a:p>
-            <a:pPr algn="ctr"/>
-            <a:endParaRPr/>
-          </a:p>
-        </p:txBody>
-      </p:sp>
-      <p:sp>
-        <p:nvSpPr>
-          <p:cNvPr id="11" name="TextBox 10"/>
+              <a:t>1  </a:t>
+            </a:r>
+            <a:r>
+              <a:rPr sz="1100" b="0">
+                <a:solidFill>
+                  <a:srgbClr val="000000"/>
+                </a:solidFill>
+                <a:latin typeface="Pretendard"/>
+                <a:ea typeface="Pretendard"/>
+                <a:cs typeface="Pretendard"/>
+              </a:rPr>
+              <a:t>3개월마다 모형의 예상 부실률과 실제 부실률을 비교</a:t>
+            </a:r>
+          </a:p>
+        </p:txBody>
+      </p:sp>
+      <p:sp>
+        <p:nvSpPr>
+          <p:cNvPr id="10" name="TextBox 9"/>
           <p:cNvSpPr txBox="1"/>
           <p:nvPr/>
         </p:nvSpPr>
         <p:spPr>
           <a:xfrm>
-            <a:off x="7827035" y="1609344"/>
-            <a:ext cx="2224963" cy="274320"/>
+            <a:off x="6537959" y="2295144"/>
+            <a:ext cx="5105095" cy="274320"/>
           </a:xfrm>
           <a:prstGeom prst="rect">
             <a:avLst/>
@@ -7454,40 +6904,40 @@
               </a:lnSpc>
             </a:pPr>
             <a:r>
-              <a:rPr sz="1100" b="0">
+              <a:rPr sz="1100" b="1">
                 <a:solidFill>
                   <a:srgbClr val="9A9A9A"/>
-                </a:solidFill>
-                <a:latin typeface="Pretendard Medium"/>
-                <a:ea typeface="Pretendard Medium"/>
-                <a:cs typeface="Pretendard Medium"/>
-              </a:rPr>
-              <a:t>4  </a:t>
-            </a:r>
-            <a:r>
-              <a:rPr sz="1200" b="1">
-                <a:solidFill>
-                  <a:srgbClr val="000000"/>
                 </a:solidFill>
                 <a:latin typeface="Pretendard"/>
                 <a:ea typeface="Pretendard"/>
                 <a:cs typeface="Pretendard"/>
               </a:rPr>
-              <a:t>보고</a:t>
-            </a:r>
-          </a:p>
-        </p:txBody>
-      </p:sp>
-      <p:sp>
-        <p:nvSpPr>
-          <p:cNvPr id="12" name="TextBox 11"/>
+              <a:t>2  </a:t>
+            </a:r>
+            <a:r>
+              <a:rPr sz="1100" b="0">
+                <a:solidFill>
+                  <a:srgbClr val="000000"/>
+                </a:solidFill>
+                <a:latin typeface="Pretendard"/>
+                <a:ea typeface="Pretendard"/>
+                <a:cs typeface="Pretendard"/>
+              </a:rPr>
+              <a:t>차이가 크면 수정안 11개를 1년 전 자료로 만들고 그 뒤 결과로 시험</a:t>
+            </a:r>
+          </a:p>
+        </p:txBody>
+      </p:sp>
+      <p:sp>
+        <p:nvSpPr>
+          <p:cNvPr id="11" name="TextBox 10"/>
           <p:cNvSpPr txBox="1"/>
           <p:nvPr/>
         </p:nvSpPr>
         <p:spPr>
           <a:xfrm>
-            <a:off x="10088575" y="1636776"/>
-            <a:ext cx="1554480" cy="274320"/>
+            <a:off x="6537959" y="2624328"/>
+            <a:ext cx="5105095" cy="274320"/>
           </a:xfrm>
           <a:prstGeom prst="rect">
             <a:avLst/>
@@ -7506,29 +6956,40 @@
               </a:lnSpc>
             </a:pPr>
             <a:r>
-              <a:rPr sz="900" b="0">
-                <a:solidFill>
-                  <a:srgbClr val="6B6B6B"/>
+              <a:rPr sz="1100" b="1">
+                <a:solidFill>
+                  <a:srgbClr val="9A9A9A"/>
                 </a:solidFill>
                 <a:latin typeface="Pretendard"/>
                 <a:ea typeface="Pretendard"/>
                 <a:cs typeface="Pretendard"/>
               </a:rPr>
-              <a:t>모형 변경은 담당자 승인</a:t>
-            </a:r>
-          </a:p>
-        </p:txBody>
-      </p:sp>
-      <p:sp>
-        <p:nvSpPr>
-          <p:cNvPr id="13" name="Rectangle 12"/>
+              <a:t>3  </a:t>
+            </a:r>
+            <a:r>
+              <a:rPr sz="1100" b="0">
+                <a:solidFill>
+                  <a:srgbClr val="000000"/>
+                </a:solidFill>
+                <a:latin typeface="Pretendard"/>
+                <a:ea typeface="Pretendard"/>
+                <a:cs typeface="Pretendard"/>
+              </a:rPr>
+              <a:t>기준을 넘은 수정안만 담당자에게 보고. 적용 여부는 담당자가 결정</a:t>
+            </a:r>
+          </a:p>
+        </p:txBody>
+      </p:sp>
+      <p:sp>
+        <p:nvSpPr>
+          <p:cNvPr id="12" name="Rectangle 11"/>
           <p:cNvSpPr/>
           <p:nvPr/>
         </p:nvSpPr>
         <p:spPr>
           <a:xfrm>
-            <a:off x="548640" y="2006917"/>
-            <a:ext cx="11094415" cy="9525"/>
+            <a:off x="6537959" y="3031045"/>
+            <a:ext cx="5105095" cy="9525"/>
           </a:xfrm>
           <a:prstGeom prst="rect">
             <a:avLst/>
@@ -7564,9 +7025,368 @@
           </a:p>
         </p:txBody>
       </p:sp>
+      <p:sp>
+        <p:nvSpPr>
+          <p:cNvPr id="13" name="TextBox 12"/>
+          <p:cNvSpPr txBox="1"/>
+          <p:nvPr/>
+        </p:nvSpPr>
+        <p:spPr>
+          <a:xfrm>
+            <a:off x="6537959" y="3154680"/>
+            <a:ext cx="5105095" cy="228600"/>
+          </a:xfrm>
+          <a:prstGeom prst="rect">
+            <a:avLst/>
+          </a:prstGeom>
+          <a:noFill/>
+        </p:spPr>
+        <p:txBody>
+          <a:bodyPr wrap="none" lIns="0" tIns="0" rIns="0" bIns="0" anchor="t">
+            <a:spAutoFit/>
+          </a:bodyPr>
+          <a:lstStyle/>
+          <a:p>
+            <a:pPr algn="l">
+              <a:lnSpc>
+                <a:spcPct val="115000"/>
+              </a:lnSpc>
+            </a:pPr>
+            <a:r>
+              <a:rPr sz="1000" b="0">
+                <a:solidFill>
+                  <a:srgbClr val="6B6B6B"/>
+                </a:solidFill>
+                <a:latin typeface="Pretendard Medium"/>
+                <a:ea typeface="Pretendard Medium"/>
+                <a:cs typeface="Pretendard Medium"/>
+              </a:rPr>
+              <a:t>결과  2015~2018년 13개 분기 재실행</a:t>
+            </a:r>
+          </a:p>
+        </p:txBody>
+      </p:sp>
+      <p:sp>
+        <p:nvSpPr>
+          <p:cNvPr id="14" name="TextBox 13"/>
+          <p:cNvSpPr txBox="1"/>
+          <p:nvPr/>
+        </p:nvSpPr>
+        <p:spPr>
+          <a:xfrm>
+            <a:off x="6537959" y="3456432"/>
+            <a:ext cx="2377440" cy="411480"/>
+          </a:xfrm>
+          <a:prstGeom prst="rect">
+            <a:avLst/>
+          </a:prstGeom>
+          <a:noFill/>
+        </p:spPr>
+        <p:txBody>
+          <a:bodyPr wrap="none" lIns="0" tIns="0" rIns="0" bIns="0" anchor="t">
+            <a:spAutoFit/>
+          </a:bodyPr>
+          <a:lstStyle/>
+          <a:p>
+            <a:pPr algn="l">
+              <a:lnSpc>
+                <a:spcPct val="115000"/>
+              </a:lnSpc>
+            </a:pPr>
+            <a:r>
+              <a:rPr sz="2000" b="1">
+                <a:solidFill>
+                  <a:srgbClr val="000000"/>
+                </a:solidFill>
+                <a:latin typeface="Pretendard"/>
+                <a:ea typeface="Pretendard"/>
+                <a:cs typeface="Pretendard"/>
+              </a:rPr>
+              <a:t>6개월 빠름</a:t>
+            </a:r>
+          </a:p>
+        </p:txBody>
+      </p:sp>
+      <p:sp>
+        <p:nvSpPr>
+          <p:cNvPr id="15" name="TextBox 14"/>
+          <p:cNvSpPr txBox="1"/>
+          <p:nvPr/>
+        </p:nvSpPr>
+        <p:spPr>
+          <a:xfrm>
+            <a:off x="8961119" y="3474720"/>
+            <a:ext cx="2681935" cy="640080"/>
+          </a:xfrm>
+          <a:prstGeom prst="rect">
+            <a:avLst/>
+          </a:prstGeom>
+          <a:noFill/>
+        </p:spPr>
+        <p:txBody>
+          <a:bodyPr wrap="none" lIns="0" tIns="0" rIns="0" bIns="0" anchor="t">
+            <a:spAutoFit/>
+          </a:bodyPr>
+          <a:lstStyle/>
+          <a:p>
+            <a:pPr algn="l">
+              <a:lnSpc>
+                <a:spcPct val="125000"/>
+              </a:lnSpc>
+            </a:pPr>
+            <a:r>
+              <a:rPr sz="1050" b="0">
+                <a:solidFill>
+                  <a:srgbClr val="000000"/>
+                </a:solidFill>
+                <a:latin typeface="Pretendard SemiBold"/>
+                <a:ea typeface="Pretendard SemiBold"/>
+                <a:cs typeface="Pretendard SemiBold"/>
+              </a:rPr>
+              <a:t>문제 발견 시점</a:t>
+            </a:r>
+          </a:p>
+          <a:p>
+            <a:pPr algn="l">
+              <a:lnSpc>
+                <a:spcPct val="125000"/>
+              </a:lnSpc>
+            </a:pPr>
+            <a:r>
+              <a:rPr sz="900" b="0">
+                <a:solidFill>
+                  <a:srgbClr val="6B6B6B"/>
+                </a:solidFill>
+                <a:latin typeface="Pretendard"/>
+                <a:ea typeface="Pretendard"/>
+                <a:cs typeface="Pretendard"/>
+              </a:rPr>
+              <a:t>대출 1년 결과를 함께 확인</a:t>
+            </a:r>
+          </a:p>
+        </p:txBody>
+      </p:sp>
+      <p:sp>
+        <p:nvSpPr>
+          <p:cNvPr id="16" name="TextBox 15"/>
+          <p:cNvSpPr txBox="1"/>
+          <p:nvPr/>
+        </p:nvSpPr>
+        <p:spPr>
+          <a:xfrm>
+            <a:off x="6537959" y="4206240"/>
+            <a:ext cx="2377440" cy="411480"/>
+          </a:xfrm>
+          <a:prstGeom prst="rect">
+            <a:avLst/>
+          </a:prstGeom>
+          <a:noFill/>
+        </p:spPr>
+        <p:txBody>
+          <a:bodyPr wrap="none" lIns="0" tIns="0" rIns="0" bIns="0" anchor="t">
+            <a:spAutoFit/>
+          </a:bodyPr>
+          <a:lstStyle/>
+          <a:p>
+            <a:pPr algn="l">
+              <a:lnSpc>
+                <a:spcPct val="115000"/>
+              </a:lnSpc>
+            </a:pPr>
+            <a:r>
+              <a:rPr sz="2000" b="1">
+                <a:solidFill>
+                  <a:srgbClr val="000000"/>
+                </a:solidFill>
+                <a:latin typeface="Pretendard"/>
+                <a:ea typeface="Pretendard"/>
+                <a:cs typeface="Pretendard"/>
+              </a:rPr>
+              <a:t>33%에서 13%로</a:t>
+            </a:r>
+          </a:p>
+        </p:txBody>
+      </p:sp>
+      <p:sp>
+        <p:nvSpPr>
+          <p:cNvPr id="17" name="TextBox 16"/>
+          <p:cNvSpPr txBox="1"/>
+          <p:nvPr/>
+        </p:nvSpPr>
+        <p:spPr>
+          <a:xfrm>
+            <a:off x="8961119" y="4224527"/>
+            <a:ext cx="2681935" cy="640080"/>
+          </a:xfrm>
+          <a:prstGeom prst="rect">
+            <a:avLst/>
+          </a:prstGeom>
+          <a:noFill/>
+        </p:spPr>
+        <p:txBody>
+          <a:bodyPr wrap="none" lIns="0" tIns="0" rIns="0" bIns="0" anchor="t">
+            <a:spAutoFit/>
+          </a:bodyPr>
+          <a:lstStyle/>
+          <a:p>
+            <a:pPr algn="l">
+              <a:lnSpc>
+                <a:spcPct val="125000"/>
+              </a:lnSpc>
+            </a:pPr>
+            <a:r>
+              <a:rPr sz="1050" b="0">
+                <a:solidFill>
+                  <a:srgbClr val="000000"/>
+                </a:solidFill>
+                <a:latin typeface="Pretendard SemiBold"/>
+                <a:ea typeface="Pretendard SemiBold"/>
+                <a:cs typeface="Pretendard SemiBold"/>
+              </a:rPr>
+              <a:t>예상 부실률과 실제의 차이</a:t>
+            </a:r>
+          </a:p>
+          <a:p>
+            <a:pPr algn="l">
+              <a:lnSpc>
+                <a:spcPct val="125000"/>
+              </a:lnSpc>
+            </a:pPr>
+            <a:r>
+              <a:rPr sz="900" b="0">
+                <a:solidFill>
+                  <a:srgbClr val="6B6B6B"/>
+                </a:solidFill>
+                <a:latin typeface="Pretendard"/>
+                <a:ea typeface="Pretendard"/>
+                <a:cs typeface="Pretendard"/>
+              </a:rPr>
+              <a:t>2018년 1분기 권고 적용, 대출 46만 건</a:t>
+            </a:r>
+          </a:p>
+        </p:txBody>
+      </p:sp>
+      <p:sp>
+        <p:nvSpPr>
+          <p:cNvPr id="18" name="TextBox 17"/>
+          <p:cNvSpPr txBox="1"/>
+          <p:nvPr/>
+        </p:nvSpPr>
+        <p:spPr>
+          <a:xfrm>
+            <a:off x="6537959" y="4956048"/>
+            <a:ext cx="2377440" cy="411480"/>
+          </a:xfrm>
+          <a:prstGeom prst="rect">
+            <a:avLst/>
+          </a:prstGeom>
+          <a:noFill/>
+        </p:spPr>
+        <p:txBody>
+          <a:bodyPr wrap="none" lIns="0" tIns="0" rIns="0" bIns="0" anchor="t">
+            <a:spAutoFit/>
+          </a:bodyPr>
+          <a:lstStyle/>
+          <a:p>
+            <a:pPr algn="l">
+              <a:lnSpc>
+                <a:spcPct val="115000"/>
+              </a:lnSpc>
+            </a:pPr>
+            <a:r>
+              <a:rPr sz="2000" b="1">
+                <a:solidFill>
+                  <a:srgbClr val="000000"/>
+                </a:solidFill>
+                <a:latin typeface="Pretendard"/>
+                <a:ea typeface="Pretendard"/>
+                <a:cs typeface="Pretendard"/>
+              </a:rPr>
+              <a:t>13회에서 4회로</a:t>
+            </a:r>
+          </a:p>
+        </p:txBody>
+      </p:sp>
+      <p:sp>
+        <p:nvSpPr>
+          <p:cNvPr id="19" name="TextBox 18"/>
+          <p:cNvSpPr txBox="1"/>
+          <p:nvPr/>
+        </p:nvSpPr>
+        <p:spPr>
+          <a:xfrm>
+            <a:off x="8961119" y="4974336"/>
+            <a:ext cx="2681935" cy="640080"/>
+          </a:xfrm>
+          <a:prstGeom prst="rect">
+            <a:avLst/>
+          </a:prstGeom>
+          <a:noFill/>
+        </p:spPr>
+        <p:txBody>
+          <a:bodyPr wrap="none" lIns="0" tIns="0" rIns="0" bIns="0" anchor="t">
+            <a:spAutoFit/>
+          </a:bodyPr>
+          <a:lstStyle/>
+          <a:p>
+            <a:pPr algn="l">
+              <a:lnSpc>
+                <a:spcPct val="125000"/>
+              </a:lnSpc>
+            </a:pPr>
+            <a:r>
+              <a:rPr sz="1050" b="0">
+                <a:solidFill>
+                  <a:srgbClr val="000000"/>
+                </a:solidFill>
+                <a:latin typeface="Pretendard SemiBold"/>
+                <a:ea typeface="Pretendard SemiBold"/>
+                <a:cs typeface="Pretendard SemiBold"/>
+              </a:rPr>
+              <a:t>3년간 모형 교체 횟수</a:t>
+            </a:r>
+          </a:p>
+          <a:p>
+            <a:pPr algn="l">
+              <a:lnSpc>
+                <a:spcPct val="125000"/>
+              </a:lnSpc>
+            </a:pPr>
+            <a:r>
+              <a:rPr sz="900" b="0">
+                <a:solidFill>
+                  <a:srgbClr val="6B6B6B"/>
+                </a:solidFill>
+                <a:latin typeface="Pretendard"/>
+                <a:ea typeface="Pretendard"/>
+                <a:cs typeface="Pretendard"/>
+              </a:rPr>
+              <a:t>3개월마다 새로 학습하는 방식 대비</a:t>
+            </a:r>
+          </a:p>
+          <a:p>
+            <a:pPr algn="l">
+              <a:lnSpc>
+                <a:spcPct val="125000"/>
+              </a:lnSpc>
+            </a:pPr>
+            <a:r>
+              <a:rPr sz="900" b="0">
+                <a:solidFill>
+                  <a:srgbClr val="6B6B6B"/>
+                </a:solidFill>
+                <a:latin typeface="Pretendard"/>
+                <a:ea typeface="Pretendard"/>
+                <a:cs typeface="Pretendard"/>
+              </a:rPr>
+              <a:t>평균 차이 19.4%에서 17.3%로</a:t>
+            </a:r>
+          </a:p>
+        </p:txBody>
+      </p:sp>
       <p:pic>
         <p:nvPicPr>
-          <p:cNvPr id="14" name="Picture 13" descr="app_card.png"/>
+          <p:cNvPr id="20" name="Picture 19" descr="qr.png"/>
           <p:cNvPicPr>
             <a:picLocks noChangeAspect="1"/>
           </p:cNvPicPr>
@@ -7580,29 +7400,83 @@
         </p:blipFill>
         <p:spPr>
           <a:xfrm>
-            <a:off x="548640" y="2212848"/>
-            <a:ext cx="6400800" cy="3561265"/>
+            <a:off x="548640" y="5486400"/>
+            <a:ext cx="868680" cy="868680"/>
           </a:xfrm>
           <a:prstGeom prst="rect">
             <a:avLst/>
           </a:prstGeom>
-          <a:ln w="9525">
-            <a:solidFill>
-              <a:srgbClr val="DDDDDD"/>
-            </a:solidFill>
-          </a:ln>
         </p:spPr>
       </p:pic>
       <p:sp>
         <p:nvSpPr>
-          <p:cNvPr id="15" name="TextBox 14"/>
+          <p:cNvPr id="21" name="TextBox 20"/>
           <p:cNvSpPr txBox="1"/>
           <p:nvPr/>
         </p:nvSpPr>
         <p:spPr>
           <a:xfrm>
-            <a:off x="548640" y="5819833"/>
-            <a:ext cx="6400800" cy="182880"/>
+            <a:off x="1554479" y="5650992"/>
+            <a:ext cx="4114800" cy="548640"/>
+          </a:xfrm>
+          <a:prstGeom prst="rect">
+            <a:avLst/>
+          </a:prstGeom>
+          <a:noFill/>
+        </p:spPr>
+        <p:txBody>
+          <a:bodyPr wrap="none" lIns="0" tIns="0" rIns="0" bIns="0" anchor="t">
+            <a:spAutoFit/>
+          </a:bodyPr>
+          <a:lstStyle/>
+          <a:p>
+            <a:pPr algn="l">
+              <a:lnSpc>
+                <a:spcPct val="130000"/>
+              </a:lnSpc>
+            </a:pPr>
+            <a:r>
+              <a:rPr sz="1100" b="1">
+                <a:solidFill>
+                  <a:srgbClr val="000000"/>
+                </a:solidFill>
+                <a:latin typeface="Pretendard"/>
+                <a:ea typeface="Pretendard"/>
+                <a:cs typeface="Pretendard"/>
+              </a:rPr>
+              <a:t>결과 화면 (직접 조작 가능)</a:t>
+            </a:r>
+          </a:p>
+          <a:p>
+            <a:pPr algn="l">
+              <a:lnSpc>
+                <a:spcPct val="130000"/>
+              </a:lnSpc>
+            </a:pPr>
+            <a:r>
+              <a:rPr sz="950" b="0">
+                <a:solidFill>
+                  <a:srgbClr val="6B6B6B"/>
+                </a:solidFill>
+                <a:latin typeface="Pretendard"/>
+                <a:ea typeface="Pretendard"/>
+                <a:cs typeface="Pretendard"/>
+              </a:rPr>
+              <a:t>kjhoeakjy.github.io/csm-auto</a:t>
+            </a:r>
+          </a:p>
+        </p:txBody>
+      </p:sp>
+      <p:sp>
+        <p:nvSpPr>
+          <p:cNvPr id="22" name="TextBox 21"/>
+          <p:cNvSpPr txBox="1"/>
+          <p:nvPr/>
+        </p:nvSpPr>
+        <p:spPr>
+          <a:xfrm>
+            <a:off x="6537959" y="6400800"/>
+            <a:ext cx="5105095" cy="274320"/>
           </a:xfrm>
           <a:prstGeom prst="rect">
             <a:avLst/>
@@ -7621,7 +7495,7 @@
               </a:lnSpc>
             </a:pPr>
             <a:r>
-              <a:rPr sz="800" b="0">
+              <a:rPr sz="750" b="0">
                 <a:solidFill>
                   <a:srgbClr val="9A9A9A"/>
                 </a:solidFill>
@@ -7629,507 +7503,7 @@
                 <a:ea typeface="Pretendard"/>
                 <a:cs typeface="Pretendard"/>
               </a:rPr>
-              <a:t>2018년 1분기 판단 화면</a:t>
-            </a:r>
-          </a:p>
-        </p:txBody>
-      </p:sp>
-      <p:sp>
-        <p:nvSpPr>
-          <p:cNvPr id="16" name="TextBox 15"/>
-          <p:cNvSpPr txBox="1"/>
-          <p:nvPr/>
-        </p:nvSpPr>
-        <p:spPr>
-          <a:xfrm>
-            <a:off x="7406640" y="2212848"/>
-            <a:ext cx="4236415" cy="201168"/>
-          </a:xfrm>
-          <a:prstGeom prst="rect">
-            <a:avLst/>
-          </a:prstGeom>
-          <a:noFill/>
-        </p:spPr>
-        <p:txBody>
-          <a:bodyPr wrap="none" lIns="0" tIns="0" rIns="0" bIns="0" anchor="t">
-            <a:spAutoFit/>
-          </a:bodyPr>
-          <a:lstStyle/>
-          <a:p>
-            <a:pPr algn="l">
-              <a:lnSpc>
-                <a:spcPct val="115000"/>
-              </a:lnSpc>
-            </a:pPr>
-            <a:r>
-              <a:rPr sz="900" b="0">
-                <a:solidFill>
-                  <a:srgbClr val="6B6B6B"/>
-                </a:solidFill>
-                <a:latin typeface="Pretendard Medium"/>
-                <a:ea typeface="Pretendard Medium"/>
-                <a:cs typeface="Pretendard Medium"/>
-              </a:rPr>
-              <a:t>이상 감지 시점</a:t>
-            </a:r>
-          </a:p>
-        </p:txBody>
-      </p:sp>
-      <p:sp>
-        <p:nvSpPr>
-          <p:cNvPr id="17" name="TextBox 16"/>
-          <p:cNvSpPr txBox="1"/>
-          <p:nvPr/>
-        </p:nvSpPr>
-        <p:spPr>
-          <a:xfrm>
-            <a:off x="7406640" y="2450591"/>
-            <a:ext cx="4236415" cy="502920"/>
-          </a:xfrm>
-          <a:prstGeom prst="rect">
-            <a:avLst/>
-          </a:prstGeom>
-          <a:noFill/>
-        </p:spPr>
-        <p:txBody>
-          <a:bodyPr wrap="none" lIns="0" tIns="0" rIns="0" bIns="0" anchor="t">
-            <a:spAutoFit/>
-          </a:bodyPr>
-          <a:lstStyle/>
-          <a:p>
-            <a:pPr algn="l">
-              <a:lnSpc>
-                <a:spcPct val="115000"/>
-              </a:lnSpc>
-            </a:pPr>
-            <a:r>
-              <a:rPr sz="3000" b="1">
-                <a:solidFill>
-                  <a:srgbClr val="000000"/>
-                </a:solidFill>
-                <a:latin typeface="Pretendard"/>
-                <a:ea typeface="Pretendard"/>
-                <a:cs typeface="Pretendard"/>
-              </a:rPr>
-              <a:t>2분기 앞당김</a:t>
-            </a:r>
-          </a:p>
-        </p:txBody>
-      </p:sp>
-      <p:sp>
-        <p:nvSpPr>
-          <p:cNvPr id="18" name="TextBox 17"/>
-          <p:cNvSpPr txBox="1"/>
-          <p:nvPr/>
-        </p:nvSpPr>
-        <p:spPr>
-          <a:xfrm>
-            <a:off x="7406640" y="3035808"/>
-            <a:ext cx="4236415" cy="228600"/>
-          </a:xfrm>
-          <a:prstGeom prst="rect">
-            <a:avLst/>
-          </a:prstGeom>
-          <a:noFill/>
-        </p:spPr>
-        <p:txBody>
-          <a:bodyPr wrap="none" lIns="0" tIns="0" rIns="0" bIns="0" anchor="t">
-            <a:spAutoFit/>
-          </a:bodyPr>
-          <a:lstStyle/>
-          <a:p>
-            <a:pPr algn="l">
-              <a:lnSpc>
-                <a:spcPct val="115000"/>
-              </a:lnSpc>
-            </a:pPr>
-            <a:r>
-              <a:rPr sz="900" b="0">
-                <a:solidFill>
-                  <a:srgbClr val="6B6B6B"/>
-                </a:solidFill>
-                <a:latin typeface="Pretendard"/>
-                <a:ea typeface="Pretendard"/>
-                <a:cs typeface="Pretendard"/>
-              </a:rPr>
-              <a:t>12개월 중간 신호 사용</a:t>
-            </a:r>
-          </a:p>
-        </p:txBody>
-      </p:sp>
-      <p:sp>
-        <p:nvSpPr>
-          <p:cNvPr id="19" name="Rectangle 18"/>
-          <p:cNvSpPr/>
-          <p:nvPr/>
-        </p:nvSpPr>
-        <p:spPr>
-          <a:xfrm>
-            <a:off x="7406640" y="3424237"/>
-            <a:ext cx="4236415" cy="9525"/>
-          </a:xfrm>
-          <a:prstGeom prst="rect">
-            <a:avLst/>
-          </a:prstGeom>
-          <a:solidFill>
-            <a:srgbClr val="DDDDDD"/>
-          </a:solidFill>
-          <a:ln>
-            <a:noFill/>
-          </a:ln>
-          <a:effectLst/>
-        </p:spPr>
-        <p:style>
-          <a:lnRef idx="1">
-            <a:schemeClr val="accent1"/>
-          </a:lnRef>
-          <a:fillRef idx="3">
-            <a:schemeClr val="accent1"/>
-          </a:fillRef>
-          <a:effectRef idx="2">
-            <a:schemeClr val="accent1"/>
-          </a:effectRef>
-          <a:fontRef idx="minor">
-            <a:schemeClr val="lt1"/>
-          </a:fontRef>
-        </p:style>
-        <p:txBody>
-          <a:bodyPr rtlCol="0" anchor="ctr"/>
-          <a:lstStyle/>
-          <a:p>
-            <a:pPr algn="ctr"/>
-            <a:endParaRPr/>
-          </a:p>
-        </p:txBody>
-      </p:sp>
-      <p:sp>
-        <p:nvSpPr>
-          <p:cNvPr id="20" name="TextBox 19"/>
-          <p:cNvSpPr txBox="1"/>
-          <p:nvPr/>
-        </p:nvSpPr>
-        <p:spPr>
-          <a:xfrm>
-            <a:off x="7406640" y="3538728"/>
-            <a:ext cx="4236415" cy="201168"/>
-          </a:xfrm>
-          <a:prstGeom prst="rect">
-            <a:avLst/>
-          </a:prstGeom>
-          <a:noFill/>
-        </p:spPr>
-        <p:txBody>
-          <a:bodyPr wrap="none" lIns="0" tIns="0" rIns="0" bIns="0" anchor="t">
-            <a:spAutoFit/>
-          </a:bodyPr>
-          <a:lstStyle/>
-          <a:p>
-            <a:pPr algn="l">
-              <a:lnSpc>
-                <a:spcPct val="115000"/>
-              </a:lnSpc>
-            </a:pPr>
-            <a:r>
-              <a:rPr sz="900" b="0">
-                <a:solidFill>
-                  <a:srgbClr val="6B6B6B"/>
-                </a:solidFill>
-                <a:latin typeface="Pretendard Medium"/>
-                <a:ea typeface="Pretendard Medium"/>
-                <a:cs typeface="Pretendard Medium"/>
-              </a:rPr>
-              <a:t>예측 오차</a:t>
-            </a:r>
-          </a:p>
-        </p:txBody>
-      </p:sp>
-      <p:sp>
-        <p:nvSpPr>
-          <p:cNvPr id="21" name="TextBox 20"/>
-          <p:cNvSpPr txBox="1"/>
-          <p:nvPr/>
-        </p:nvSpPr>
-        <p:spPr>
-          <a:xfrm>
-            <a:off x="7406640" y="3776472"/>
-            <a:ext cx="4236415" cy="502920"/>
-          </a:xfrm>
-          <a:prstGeom prst="rect">
-            <a:avLst/>
-          </a:prstGeom>
-          <a:noFill/>
-        </p:spPr>
-        <p:txBody>
-          <a:bodyPr wrap="none" lIns="0" tIns="0" rIns="0" bIns="0" anchor="t">
-            <a:spAutoFit/>
-          </a:bodyPr>
-          <a:lstStyle/>
-          <a:p>
-            <a:pPr algn="l">
-              <a:lnSpc>
-                <a:spcPct val="115000"/>
-              </a:lnSpc>
-            </a:pPr>
-            <a:r>
-              <a:rPr sz="3000" b="1">
-                <a:solidFill>
-                  <a:srgbClr val="000000"/>
-                </a:solidFill>
-                <a:latin typeface="Pretendard"/>
-                <a:ea typeface="Pretendard"/>
-                <a:cs typeface="Pretendard"/>
-              </a:rPr>
-              <a:t>13%</a:t>
-            </a:r>
-          </a:p>
-        </p:txBody>
-      </p:sp>
-      <p:sp>
-        <p:nvSpPr>
-          <p:cNvPr id="22" name="TextBox 21"/>
-          <p:cNvSpPr txBox="1"/>
-          <p:nvPr/>
-        </p:nvSpPr>
-        <p:spPr>
-          <a:xfrm>
-            <a:off x="7406640" y="4361688"/>
-            <a:ext cx="4236415" cy="228600"/>
-          </a:xfrm>
-          <a:prstGeom prst="rect">
-            <a:avLst/>
-          </a:prstGeom>
-          <a:noFill/>
-        </p:spPr>
-        <p:txBody>
-          <a:bodyPr wrap="none" lIns="0" tIns="0" rIns="0" bIns="0" anchor="t">
-            <a:spAutoFit/>
-          </a:bodyPr>
-          <a:lstStyle/>
-          <a:p>
-            <a:pPr algn="l">
-              <a:lnSpc>
-                <a:spcPct val="115000"/>
-              </a:lnSpc>
-            </a:pPr>
-            <a:r>
-              <a:rPr sz="900" b="0">
-                <a:solidFill>
-                  <a:srgbClr val="6B6B6B"/>
-                </a:solidFill>
-                <a:latin typeface="Pretendard"/>
-                <a:ea typeface="Pretendard"/>
-                <a:cs typeface="Pretendard"/>
-              </a:rPr>
-              <a:t>적용 전 33%. 2018년 1분기 보유 대출 46만 건</a:t>
-            </a:r>
-          </a:p>
-        </p:txBody>
-      </p:sp>
-      <p:sp>
-        <p:nvSpPr>
-          <p:cNvPr id="23" name="Rectangle 22"/>
-          <p:cNvSpPr/>
-          <p:nvPr/>
-        </p:nvSpPr>
-        <p:spPr>
-          <a:xfrm>
-            <a:off x="7406640" y="4750117"/>
-            <a:ext cx="4236415" cy="9525"/>
-          </a:xfrm>
-          <a:prstGeom prst="rect">
-            <a:avLst/>
-          </a:prstGeom>
-          <a:solidFill>
-            <a:srgbClr val="DDDDDD"/>
-          </a:solidFill>
-          <a:ln>
-            <a:noFill/>
-          </a:ln>
-          <a:effectLst/>
-        </p:spPr>
-        <p:style>
-          <a:lnRef idx="1">
-            <a:schemeClr val="accent1"/>
-          </a:lnRef>
-          <a:fillRef idx="3">
-            <a:schemeClr val="accent1"/>
-          </a:fillRef>
-          <a:effectRef idx="2">
-            <a:schemeClr val="accent1"/>
-          </a:effectRef>
-          <a:fontRef idx="minor">
-            <a:schemeClr val="lt1"/>
-          </a:fontRef>
-        </p:style>
-        <p:txBody>
-          <a:bodyPr rtlCol="0" anchor="ctr"/>
-          <a:lstStyle/>
-          <a:p>
-            <a:pPr algn="ctr"/>
-            <a:endParaRPr/>
-          </a:p>
-        </p:txBody>
-      </p:sp>
-      <p:sp>
-        <p:nvSpPr>
-          <p:cNvPr id="24" name="TextBox 23"/>
-          <p:cNvSpPr txBox="1"/>
-          <p:nvPr/>
-        </p:nvSpPr>
-        <p:spPr>
-          <a:xfrm>
-            <a:off x="7406640" y="4864608"/>
-            <a:ext cx="4236415" cy="201168"/>
-          </a:xfrm>
-          <a:prstGeom prst="rect">
-            <a:avLst/>
-          </a:prstGeom>
-          <a:noFill/>
-        </p:spPr>
-        <p:txBody>
-          <a:bodyPr wrap="none" lIns="0" tIns="0" rIns="0" bIns="0" anchor="t">
-            <a:spAutoFit/>
-          </a:bodyPr>
-          <a:lstStyle/>
-          <a:p>
-            <a:pPr algn="l">
-              <a:lnSpc>
-                <a:spcPct val="115000"/>
-              </a:lnSpc>
-            </a:pPr>
-            <a:r>
-              <a:rPr sz="900" b="0">
-                <a:solidFill>
-                  <a:srgbClr val="6B6B6B"/>
-                </a:solidFill>
-                <a:latin typeface="Pretendard Medium"/>
-                <a:ea typeface="Pretendard Medium"/>
-                <a:cs typeface="Pretendard Medium"/>
-              </a:rPr>
-              <a:t>모형 변경 횟수</a:t>
-            </a:r>
-          </a:p>
-        </p:txBody>
-      </p:sp>
-      <p:sp>
-        <p:nvSpPr>
-          <p:cNvPr id="25" name="TextBox 24"/>
-          <p:cNvSpPr txBox="1"/>
-          <p:nvPr/>
-        </p:nvSpPr>
-        <p:spPr>
-          <a:xfrm>
-            <a:off x="7406640" y="5102352"/>
-            <a:ext cx="4236415" cy="502920"/>
-          </a:xfrm>
-          <a:prstGeom prst="rect">
-            <a:avLst/>
-          </a:prstGeom>
-          <a:noFill/>
-        </p:spPr>
-        <p:txBody>
-          <a:bodyPr wrap="none" lIns="0" tIns="0" rIns="0" bIns="0" anchor="t">
-            <a:spAutoFit/>
-          </a:bodyPr>
-          <a:lstStyle/>
-          <a:p>
-            <a:pPr algn="l">
-              <a:lnSpc>
-                <a:spcPct val="115000"/>
-              </a:lnSpc>
-            </a:pPr>
-            <a:r>
-              <a:rPr sz="3000" b="1">
-                <a:solidFill>
-                  <a:srgbClr val="000000"/>
-                </a:solidFill>
-                <a:latin typeface="Pretendard"/>
-                <a:ea typeface="Pretendard"/>
-                <a:cs typeface="Pretendard"/>
-              </a:rPr>
-              <a:t>4회</a:t>
-            </a:r>
-          </a:p>
-        </p:txBody>
-      </p:sp>
-      <p:sp>
-        <p:nvSpPr>
-          <p:cNvPr id="26" name="TextBox 25"/>
-          <p:cNvSpPr txBox="1"/>
-          <p:nvPr/>
-        </p:nvSpPr>
-        <p:spPr>
-          <a:xfrm>
-            <a:off x="7406640" y="5687568"/>
-            <a:ext cx="4236415" cy="228600"/>
-          </a:xfrm>
-          <a:prstGeom prst="rect">
-            <a:avLst/>
-          </a:prstGeom>
-          <a:noFill/>
-        </p:spPr>
-        <p:txBody>
-          <a:bodyPr wrap="none" lIns="0" tIns="0" rIns="0" bIns="0" anchor="t">
-            <a:spAutoFit/>
-          </a:bodyPr>
-          <a:lstStyle/>
-          <a:p>
-            <a:pPr algn="l">
-              <a:lnSpc>
-                <a:spcPct val="115000"/>
-              </a:lnSpc>
-            </a:pPr>
-            <a:r>
-              <a:rPr sz="900" b="0">
-                <a:solidFill>
-                  <a:srgbClr val="6B6B6B"/>
-                </a:solidFill>
-                <a:latin typeface="Pretendard"/>
-                <a:ea typeface="Pretendard"/>
-                <a:cs typeface="Pretendard"/>
-              </a:rPr>
-              <a:t>분기별 재학습 13회보다 낮은 오차</a:t>
-            </a:r>
-          </a:p>
-        </p:txBody>
-      </p:sp>
-      <p:sp>
-        <p:nvSpPr>
-          <p:cNvPr id="27" name="TextBox 26"/>
-          <p:cNvSpPr txBox="1"/>
-          <p:nvPr/>
-        </p:nvSpPr>
-        <p:spPr>
-          <a:xfrm>
-            <a:off x="548640" y="6510528"/>
-            <a:ext cx="11094415" cy="182880"/>
-          </a:xfrm>
-          <a:prstGeom prst="rect">
-            <a:avLst/>
-          </a:prstGeom>
-          <a:noFill/>
-        </p:spPr>
-        <p:txBody>
-          <a:bodyPr wrap="none" lIns="0" tIns="0" rIns="0" bIns="0" anchor="t">
-            <a:spAutoFit/>
-          </a:bodyPr>
-          <a:lstStyle/>
-          <a:p>
-            <a:pPr algn="l">
-              <a:lnSpc>
-                <a:spcPct val="115000"/>
-              </a:lnSpc>
-            </a:pPr>
-            <a:r>
-              <a:rPr sz="750" b="0">
-                <a:solidFill>
-                  <a:srgbClr val="9A9A9A"/>
-                </a:solidFill>
-                <a:latin typeface="Pretendard"/>
-                <a:ea typeface="Pretendard"/>
-                <a:cs typeface="Pretendard"/>
-              </a:rPr>
-              <a:t>Lending Club 공개 대출 데이터로 과거 분기를 재현한 프로토타입. 판단에는 당시 데이터만 쓰고, 평가는 이후 확정된 결과로 함</a:t>
+              <a:t>Lending Club 공개 대출 226만 건 사용. 각 시점의 판단에는 그 시점까지의 정보만 사용. 실제 금융회사 운영 아님</a:t>
             </a:r>
           </a:p>
         </p:txBody>
@@ -8460,319 +7834,4 @@
   </a:objectDefaults>
   <a:extraClrSchemeLst/>
 </a:theme>
-</file>
-
-<file path=ppt/theme/theme2.xml><?xml version="1.0" encoding="utf-8"?>
-<a:theme xmlns:a="http://schemas.openxmlformats.org/drawingml/2006/main" name="Office 테마">
-  <a:themeElements>
-    <a:clrScheme name="Office">
-      <a:dk1>
-        <a:sysClr val="windowText" lastClr="000000"/>
-      </a:dk1>
-      <a:lt1>
-        <a:sysClr val="window" lastClr="FFFFFF"/>
-      </a:lt1>
-      <a:dk2>
-        <a:srgbClr val="0E2841"/>
-      </a:dk2>
-      <a:lt2>
-        <a:srgbClr val="E8E8E8"/>
-      </a:lt2>
-      <a:accent1>
-        <a:srgbClr val="156082"/>
-      </a:accent1>
-      <a:accent2>
-        <a:srgbClr val="E97132"/>
-      </a:accent2>
-      <a:accent3>
-        <a:srgbClr val="196B24"/>
-      </a:accent3>
-      <a:accent4>
-        <a:srgbClr val="0F9ED5"/>
-      </a:accent4>
-      <a:accent5>
-        <a:srgbClr val="A02B93"/>
-      </a:accent5>
-      <a:accent6>
-        <a:srgbClr val="4EA72E"/>
-      </a:accent6>
-      <a:hlink>
-        <a:srgbClr val="467886"/>
-      </a:hlink>
-      <a:folHlink>
-        <a:srgbClr val="96607D"/>
-      </a:folHlink>
-    </a:clrScheme>
-    <a:fontScheme name="Office">
-      <a:majorFont>
-        <a:latin typeface="맑은 고딕" panose="02110004020202020204"/>
-        <a:ea typeface=""/>
-        <a:cs typeface=""/>
-        <a:font script="Jpan" typeface="游ゴシック Light"/>
-        <a:font script="Hang" typeface="맑은 고딕"/>
-        <a:font script="Hans" typeface="等线 Light"/>
-        <a:font script="Hant" typeface="新細明體"/>
-        <a:font script="Arab" typeface="Times New Roman"/>
-        <a:font script="Hebr" typeface="Times New Roman"/>
-        <a:font script="Thai" typeface="Angsana New"/>
-        <a:font script="Ethi" typeface="Nyala"/>
-        <a:font script="Beng" typeface="Vrinda"/>
-        <a:font script="Gujr" typeface="Shruti"/>
-        <a:font script="Khmr" typeface="MoolBoran"/>
-        <a:font script="Knda" typeface="Tunga"/>
-        <a:font script="Guru" typeface="Raavi"/>
-        <a:font script="Cans" typeface="Euphemia"/>
-        <a:font script="Cher" typeface="Plantagenet Cherokee"/>
-        <a:font script="Yiii" typeface="Microsoft Yi Baiti"/>
-        <a:font script="Tibt" typeface="Microsoft Himalaya"/>
-        <a:font script="Thaa" typeface="MV Boli"/>
-        <a:font script="Deva" typeface="Mangal"/>
-        <a:font script="Telu" typeface="Gautami"/>
-        <a:font script="Taml" typeface="Latha"/>
-        <a:font script="Syrc" typeface="Estrangelo Edessa"/>
-        <a:font script="Orya" typeface="Kalinga"/>
-        <a:font script="Mlym" typeface="Kartika"/>
-        <a:font script="Laoo" typeface="DokChampa"/>
-        <a:font script="Sinh" typeface="Iskoola Pota"/>
-        <a:font script="Mong" typeface="Mongolian Baiti"/>
-        <a:font script="Viet" typeface="Times New Roman"/>
-        <a:font script="Uigh" typeface="Microsoft Uighur"/>
-        <a:font script="Geor" typeface="Sylfaen"/>
-        <a:font script="Armn" typeface="Arial"/>
-        <a:font script="Bugi" typeface="Leelawadee UI"/>
-        <a:font script="Bopo" typeface="Microsoft JhengHei"/>
-        <a:font script="Java" typeface="Javanese Text"/>
-        <a:font script="Lisu" typeface="Segoe UI"/>
-        <a:font script="Mymr" typeface="Myanmar Text"/>
-        <a:font script="Nkoo" typeface="Ebrima"/>
-        <a:font script="Olck" typeface="Nirmala UI"/>
-        <a:font script="Osma" typeface="Ebrima"/>
-        <a:font script="Phag" typeface="Phagspa"/>
-        <a:font script="Syrn" typeface="Estrangelo Edessa"/>
-        <a:font script="Syrj" typeface="Estrangelo Edessa"/>
-        <a:font script="Syre" typeface="Estrangelo Edessa"/>
-        <a:font script="Sora" typeface="Nirmala UI"/>
-        <a:font script="Tale" typeface="Microsoft Tai Le"/>
-        <a:font script="Talu" typeface="Microsoft New Tai Lue"/>
-        <a:font script="Tfng" typeface="Ebrima"/>
-      </a:majorFont>
-      <a:minorFont>
-        <a:latin typeface="맑은 고딕" panose="02110004020202020204"/>
-        <a:ea typeface=""/>
-        <a:cs typeface=""/>
-        <a:font script="Jpan" typeface="游ゴシック"/>
-        <a:font script="Hang" typeface="맑은 고딕"/>
-        <a:font script="Hans" typeface="等线"/>
-        <a:font script="Hant" typeface="新細明體"/>
-        <a:font script="Arab" typeface="Arial"/>
-        <a:font script="Hebr" typeface="Arial"/>
-        <a:font script="Thai" typeface="Cordia New"/>
-        <a:font script="Ethi" typeface="Nyala"/>
-        <a:font script="Beng" typeface="Vrinda"/>
-        <a:font script="Gujr" typeface="Shruti"/>
-        <a:font script="Khmr" typeface="DaunPenh"/>
-        <a:font script="Knda" typeface="Tunga"/>
-        <a:font script="Guru" typeface="Raavi"/>
-        <a:font script="Cans" typeface="Euphemia"/>
-        <a:font script="Cher" typeface="Plantagenet Cherokee"/>
-        <a:font script="Yiii" typeface="Microsoft Yi Baiti"/>
-        <a:font script="Tibt" typeface="Microsoft Himalaya"/>
-        <a:font script="Thaa" typeface="MV Boli"/>
-        <a:font script="Deva" typeface="Mangal"/>
-        <a:font script="Telu" typeface="Gautami"/>
-        <a:font script="Taml" typeface="Latha"/>
-        <a:font script="Syrc" typeface="Estrangelo Edessa"/>
-        <a:font script="Orya" typeface="Kalinga"/>
-        <a:font script="Mlym" typeface="Kartika"/>
-        <a:font script="Laoo" typeface="DokChampa"/>
-        <a:font script="Sinh" typeface="Iskoola Pota"/>
-        <a:font script="Mong" typeface="Mongolian Baiti"/>
-        <a:font script="Viet" typeface="Arial"/>
-        <a:font script="Uigh" typeface="Microsoft Uighur"/>
-        <a:font script="Geor" typeface="Sylfaen"/>
-        <a:font script="Armn" typeface="Arial"/>
-        <a:font script="Bugi" typeface="Leelawadee UI"/>
-        <a:font script="Bopo" typeface="Microsoft JhengHei"/>
-        <a:font script="Java" typeface="Javanese Text"/>
-        <a:font script="Lisu" typeface="Segoe UI"/>
-        <a:font script="Mymr" typeface="Myanmar Text"/>
-        <a:font script="Nkoo" typeface="Ebrima"/>
-        <a:font script="Olck" typeface="Nirmala UI"/>
-        <a:font script="Osma" typeface="Ebrima"/>
-        <a:font script="Phag" typeface="Phagspa"/>
-        <a:font script="Syrn" typeface="Estrangelo Edessa"/>
-        <a:font script="Syrj" typeface="Estrangelo Edessa"/>
-        <a:font script="Syre" typeface="Estrangelo Edessa"/>
-        <a:font script="Sora" typeface="Nirmala UI"/>
-        <a:font script="Tale" typeface="Microsoft Tai Le"/>
-        <a:font script="Talu" typeface="Microsoft New Tai Lue"/>
-        <a:font script="Tfng" typeface="Ebrima"/>
-      </a:minorFont>
-    </a:fontScheme>
-    <a:fmtScheme name="Office">
-      <a:fillStyleLst>
-        <a:solidFill>
-          <a:schemeClr val="phClr"/>
-        </a:solidFill>
-        <a:gradFill rotWithShape="1">
-          <a:gsLst>
-            <a:gs pos="0">
-              <a:schemeClr val="phClr">
-                <a:lumMod val="110000"/>
-                <a:satMod val="105000"/>
-                <a:tint val="67000"/>
-              </a:schemeClr>
-            </a:gs>
-            <a:gs pos="50000">
-              <a:schemeClr val="phClr">
-                <a:lumMod val="105000"/>
-                <a:satMod val="103000"/>
-                <a:tint val="73000"/>
-              </a:schemeClr>
-            </a:gs>
-            <a:gs pos="100000">
-              <a:schemeClr val="phClr">
-                <a:lumMod val="105000"/>
-                <a:satMod val="109000"/>
-                <a:tint val="81000"/>
-              </a:schemeClr>
-            </a:gs>
-          </a:gsLst>
-          <a:lin ang="5400000" scaled="0"/>
-        </a:gradFill>
-        <a:gradFill rotWithShape="1">
-          <a:gsLst>
-            <a:gs pos="0">
-              <a:schemeClr val="phClr">
-                <a:satMod val="103000"/>
-                <a:lumMod val="102000"/>
-                <a:tint val="94000"/>
-              </a:schemeClr>
-            </a:gs>
-            <a:gs pos="50000">
-              <a:schemeClr val="phClr">
-                <a:satMod val="110000"/>
-                <a:lumMod val="100000"/>
-                <a:shade val="100000"/>
-              </a:schemeClr>
-            </a:gs>
-            <a:gs pos="100000">
-              <a:schemeClr val="phClr">
-                <a:lumMod val="99000"/>
-                <a:satMod val="120000"/>
-                <a:shade val="78000"/>
-              </a:schemeClr>
-            </a:gs>
-          </a:gsLst>
-          <a:lin ang="5400000" scaled="0"/>
-        </a:gradFill>
-      </a:fillStyleLst>
-      <a:lnStyleLst>
-        <a:ln w="12700" cap="flat" cmpd="sng" algn="ctr">
-          <a:solidFill>
-            <a:schemeClr val="phClr"/>
-          </a:solidFill>
-          <a:prstDash val="solid"/>
-          <a:miter lim="800000"/>
-        </a:ln>
-        <a:ln w="19050" cap="flat" cmpd="sng" algn="ctr">
-          <a:solidFill>
-            <a:schemeClr val="phClr"/>
-          </a:solidFill>
-          <a:prstDash val="solid"/>
-          <a:miter lim="800000"/>
-        </a:ln>
-        <a:ln w="25400" cap="flat" cmpd="sng" algn="ctr">
-          <a:solidFill>
-            <a:schemeClr val="phClr"/>
-          </a:solidFill>
-          <a:prstDash val="solid"/>
-          <a:miter lim="800000"/>
-        </a:ln>
-      </a:lnStyleLst>
-      <a:effectStyleLst>
-        <a:effectStyle>
-          <a:effectLst/>
-        </a:effectStyle>
-        <a:effectStyle>
-          <a:effectLst/>
-        </a:effectStyle>
-        <a:effectStyle>
-          <a:effectLst>
-            <a:outerShdw blurRad="57150" dist="19050" dir="5400000" algn="ctr" rotWithShape="0">
-              <a:srgbClr val="000000">
-                <a:alpha val="63000"/>
-              </a:srgbClr>
-            </a:outerShdw>
-          </a:effectLst>
-        </a:effectStyle>
-      </a:effectStyleLst>
-      <a:bgFillStyleLst>
-        <a:solidFill>
-          <a:schemeClr val="phClr"/>
-        </a:solidFill>
-        <a:solidFill>
-          <a:schemeClr val="phClr">
-            <a:tint val="95000"/>
-            <a:satMod val="170000"/>
-          </a:schemeClr>
-        </a:solidFill>
-        <a:gradFill rotWithShape="1">
-          <a:gsLst>
-            <a:gs pos="0">
-              <a:schemeClr val="phClr">
-                <a:tint val="93000"/>
-                <a:satMod val="150000"/>
-                <a:shade val="98000"/>
-                <a:lumMod val="102000"/>
-              </a:schemeClr>
-            </a:gs>
-            <a:gs pos="50000">
-              <a:schemeClr val="phClr">
-                <a:tint val="98000"/>
-                <a:satMod val="130000"/>
-                <a:shade val="90000"/>
-                <a:lumMod val="103000"/>
-              </a:schemeClr>
-            </a:gs>
-            <a:gs pos="100000">
-              <a:schemeClr val="phClr">
-                <a:shade val="63000"/>
-                <a:satMod val="120000"/>
-              </a:schemeClr>
-            </a:gs>
-          </a:gsLst>
-          <a:lin ang="5400000" scaled="0"/>
-        </a:gradFill>
-      </a:bgFillStyleLst>
-    </a:fmtScheme>
-  </a:themeElements>
-  <a:objectDefaults>
-    <a:lnDef>
-      <a:spPr/>
-      <a:bodyPr/>
-      <a:lstStyle/>
-      <a:style>
-        <a:lnRef idx="2">
-          <a:schemeClr val="accent1"/>
-        </a:lnRef>
-        <a:fillRef idx="0">
-          <a:schemeClr val="accent1"/>
-        </a:fillRef>
-        <a:effectRef idx="1">
-          <a:schemeClr val="accent1"/>
-        </a:effectRef>
-        <a:fontRef idx="minor">
-          <a:schemeClr val="tx1"/>
-        </a:fontRef>
-      </a:style>
-    </a:lnDef>
-  </a:objectDefaults>
-  <a:extraClrSchemeLst/>
-  <a:extLst>
-    <a:ext uri="{05A4C25C-085E-4340-85A3-A5531E510DB2}">
-      <thm15:themeFamily xmlns:thm15="http://schemas.microsoft.com/office/thememl/2012/main" name="Office Theme" id="{2E142A2C-CD16-42D6-873A-C26D2A0506FA}" vid="{1BDDFF52-6CD6-40A5-AB3C-68EB2F1E4D0A}"/>
-    </a:ext>
-  </a:extLst>
-</a:theme>
 </file>
--- a/ppt/역량PT_김연주.pptx
+++ b/ppt/역량PT_김연주.pptx
@@ -6736,7 +6736,7 @@
                 <a:ea typeface="Pretendard"/>
                 <a:cs typeface="Pretendard"/>
               </a:rPr>
-              <a:t>대출 심사에 쓰는 부실 예측모형은 시간이 지나면 실제와 어긋남</a:t>
+              <a:t>시간 경과에 따른 부실 예측모형 정확도 저하</a:t>
             </a:r>
           </a:p>
           <a:p>
@@ -6754,7 +6754,7 @@
                 <a:ea typeface="Pretendard"/>
                 <a:cs typeface="Pretendard"/>
               </a:rPr>
-              <a:t>실제 부실률은 오르는데 모형의 예상은 내려감 (실행 후 2년 안에 갚지 못한 대출의 비율)</a:t>
+              <a:t>실제 부실률 상승, 모형 예측치 하락 (부실률: 대출 실행 후 2년 내 미상환 비율)</a:t>
             </a:r>
           </a:p>
         </p:txBody>
@@ -6819,7 +6819,7 @@
                 <a:ea typeface="Pretendard Medium"/>
                 <a:cs typeface="Pretendard Medium"/>
               </a:rPr>
-              <a:t>시스템이 하는 일</a:t>
+              <a:t>작동 방식</a:t>
             </a:r>
           </a:p>
         </p:txBody>
@@ -6871,7 +6871,7 @@
                 <a:ea typeface="Pretendard"/>
                 <a:cs typeface="Pretendard"/>
               </a:rPr>
-              <a:t>3개월마다 모형의 예상 부실률과 실제 부실률을 비교</a:t>
+              <a:t>분기별 예측 부실률·실제 부실률 비교</a:t>
             </a:r>
           </a:p>
         </p:txBody>
@@ -6923,7 +6923,7 @@
                 <a:ea typeface="Pretendard"/>
                 <a:cs typeface="Pretendard"/>
               </a:rPr>
-              <a:t>차이가 크면 수정안 11개를 1년 전 자료로 만들고 그 뒤 결과로 시험</a:t>
+              <a:t>오차 확대 시 수정안 11종 검증 (1년 전 자료로 수립, 이후 실적으로 평가)</a:t>
             </a:r>
           </a:p>
         </p:txBody>
@@ -6975,7 +6975,7 @@
                 <a:ea typeface="Pretendard"/>
                 <a:cs typeface="Pretendard"/>
               </a:rPr>
-              <a:t>기준을 넘은 수정안만 담당자에게 보고. 적용 여부는 담당자가 결정</a:t>
+              <a:t>기준 충족안만 담당자 보고, 적용 여부는 담당자 결정</a:t>
             </a:r>
           </a:p>
         </p:txBody>
@@ -7061,7 +7061,7 @@
                 <a:ea typeface="Pretendard Medium"/>
                 <a:cs typeface="Pretendard Medium"/>
               </a:rPr>
-              <a:t>결과  2015~2018년 13개 분기 재실행</a:t>
+              <a:t>성과  2015~2018년 13개 분기 재현</a:t>
             </a:r>
           </a:p>
         </p:txBody>
@@ -7102,7 +7102,7 @@
                 <a:ea typeface="Pretendard"/>
                 <a:cs typeface="Pretendard"/>
               </a:rPr>
-              <a:t>6개월 빠름</a:t>
+              <a:t>6개월 단축</a:t>
             </a:r>
           </a:p>
         </p:txBody>
@@ -7143,7 +7143,7 @@
                 <a:ea typeface="Pretendard SemiBold"/>
                 <a:cs typeface="Pretendard SemiBold"/>
               </a:rPr>
-              <a:t>문제 발견 시점</a:t>
+              <a:t>이상 감지 시점</a:t>
             </a:r>
           </a:p>
           <a:p>
@@ -7161,7 +7161,7 @@
                 <a:ea typeface="Pretendard"/>
                 <a:cs typeface="Pretendard"/>
               </a:rPr>
-              <a:t>대출 1년 결과를 함께 확인</a:t>
+              <a:t>대출 1년 실적 병행 확인</a:t>
             </a:r>
           </a:p>
         </p:txBody>
@@ -7202,7 +7202,7 @@
                 <a:ea typeface="Pretendard"/>
                 <a:cs typeface="Pretendard"/>
               </a:rPr>
-              <a:t>33%에서 13%로</a:t>
+              <a:t>13%</a:t>
             </a:r>
           </a:p>
         </p:txBody>
@@ -7243,7 +7243,7 @@
                 <a:ea typeface="Pretendard SemiBold"/>
                 <a:cs typeface="Pretendard SemiBold"/>
               </a:rPr>
-              <a:t>예상 부실률과 실제의 차이</a:t>
+              <a:t>예측 오차 (권고안 적용 후)</a:t>
             </a:r>
           </a:p>
           <a:p>
@@ -7261,7 +7261,25 @@
                 <a:ea typeface="Pretendard"/>
                 <a:cs typeface="Pretendard"/>
               </a:rPr>
-              <a:t>2018년 1분기 권고 적용, 대출 46만 건</a:t>
+              <a:t>적용 전 33%</a:t>
+            </a:r>
+          </a:p>
+          <a:p>
+            <a:pPr algn="l">
+              <a:lnSpc>
+                <a:spcPct val="125000"/>
+              </a:lnSpc>
+            </a:pPr>
+            <a:r>
+              <a:rPr sz="900" b="0">
+                <a:solidFill>
+                  <a:srgbClr val="6B6B6B"/>
+                </a:solidFill>
+                <a:latin typeface="Pretendard"/>
+                <a:ea typeface="Pretendard"/>
+                <a:cs typeface="Pretendard"/>
+              </a:rPr>
+              <a:t>2018년 1분기 보유 대출 46만 건 기준</a:t>
             </a:r>
           </a:p>
         </p:txBody>
@@ -7302,7 +7320,7 @@
                 <a:ea typeface="Pretendard"/>
                 <a:cs typeface="Pretendard"/>
               </a:rPr>
-              <a:t>13회에서 4회로</a:t>
+              <a:t>4회</a:t>
             </a:r>
           </a:p>
         </p:txBody>
@@ -7343,7 +7361,7 @@
                 <a:ea typeface="Pretendard SemiBold"/>
                 <a:cs typeface="Pretendard SemiBold"/>
               </a:rPr>
-              <a:t>3년간 모형 교체 횟수</a:t>
+              <a:t>모형 교체 횟수 (3년)</a:t>
             </a:r>
           </a:p>
           <a:p>
@@ -7361,7 +7379,7 @@
                 <a:ea typeface="Pretendard"/>
                 <a:cs typeface="Pretendard"/>
               </a:rPr>
-              <a:t>3개월마다 새로 학습하는 방식 대비</a:t>
+              <a:t>분기별 재학습 방식 13회 대비</a:t>
             </a:r>
           </a:p>
           <a:p>
@@ -7379,7 +7397,7 @@
                 <a:ea typeface="Pretendard"/>
                 <a:cs typeface="Pretendard"/>
               </a:rPr>
-              <a:t>평균 차이 19.4%에서 17.3%로</a:t>
+              <a:t>평균 오차 19.4% 대비 17.3%</a:t>
             </a:r>
           </a:p>
         </p:txBody>
@@ -7444,7 +7462,7 @@
                 <a:ea typeface="Pretendard"/>
                 <a:cs typeface="Pretendard"/>
               </a:rPr>
-              <a:t>결과 화면 (직접 조작 가능)</a:t>
+              <a:t>결과 화면</a:t>
             </a:r>
           </a:p>
           <a:p>
@@ -7503,7 +7521,7 @@
                 <a:ea typeface="Pretendard"/>
                 <a:cs typeface="Pretendard"/>
               </a:rPr>
-              <a:t>Lending Club 공개 대출 226만 건 사용. 각 시점의 판단에는 그 시점까지의 정보만 사용. 실제 금융회사 운영 아님</a:t>
+              <a:t>자료: Lending Club 공개 대출 226만 건. 시점별 판단에 해당 시점까지의 정보만 사용. 실제 금융회사 운영 사례 아님</a:t>
             </a:r>
           </a:p>
         </p:txBody>

--- a/ppt/역량PT_김연주.pptx
+++ b/ppt/역량PT_김연주.pptx
@@ -3200,7 +3200,7 @@
         </p:nvSpPr>
         <p:spPr>
           <a:xfrm>
-            <a:off x="548640" y="2423160"/>
+            <a:off x="548640" y="3154679"/>
             <a:ext cx="731520" cy="182880"/>
           </a:xfrm>
           <a:prstGeom prst="rect">
@@ -3241,7 +3241,7 @@
         </p:nvSpPr>
         <p:spPr>
           <a:xfrm>
-            <a:off x="1371600" y="2505075"/>
+            <a:off x="1371600" y="3236595"/>
             <a:ext cx="7178040" cy="19050"/>
           </a:xfrm>
           <a:prstGeom prst="rect">
@@ -3286,8 +3286,8 @@
         </p:nvCxnSpPr>
         <p:spPr>
           <a:xfrm>
-            <a:off x="8549640" y="2514600"/>
-            <a:ext cx="292608" cy="557784"/>
+            <a:off x="8549640" y="3246120"/>
+            <a:ext cx="292608" cy="466344"/>
           </a:xfrm>
           <a:prstGeom prst="line">
             <a:avLst/>
@@ -3307,7 +3307,7 @@
         </p:nvSpPr>
         <p:spPr>
           <a:xfrm>
-            <a:off x="548640" y="3794760"/>
+            <a:off x="548640" y="4343400"/>
             <a:ext cx="731520" cy="182880"/>
           </a:xfrm>
           <a:prstGeom prst="rect">
@@ -3348,7 +3348,7 @@
         </p:nvSpPr>
         <p:spPr>
           <a:xfrm>
-            <a:off x="1371600" y="3876675"/>
+            <a:off x="1371600" y="4425315"/>
             <a:ext cx="7178040" cy="19050"/>
           </a:xfrm>
           <a:prstGeom prst="rect">
@@ -3393,8 +3393,8 @@
         </p:nvCxnSpPr>
         <p:spPr>
           <a:xfrm flipV="1">
-            <a:off x="8549640" y="3328416"/>
-            <a:ext cx="292608" cy="557784"/>
+            <a:off x="8549640" y="3968496"/>
+            <a:ext cx="292608" cy="466344"/>
           </a:xfrm>
           <a:prstGeom prst="line">
             <a:avLst/>
@@ -3408,13 +3408,142 @@
       </p:cxnSp>
       <p:sp>
         <p:nvSpPr>
-          <p:cNvPr id="10" name="Oval 9"/>
+          <p:cNvPr id="10" name="TextBox 9"/>
+          <p:cNvSpPr txBox="1"/>
+          <p:nvPr/>
+        </p:nvSpPr>
+        <p:spPr>
+          <a:xfrm>
+            <a:off x="1600200" y="1371600"/>
+            <a:ext cx="5943600" cy="201168"/>
+          </a:xfrm>
+          <a:prstGeom prst="rect">
+            <a:avLst/>
+          </a:prstGeom>
+          <a:noFill/>
+        </p:spPr>
+        <p:txBody>
+          <a:bodyPr wrap="none" lIns="0" tIns="0" rIns="0" bIns="0" anchor="t">
+            <a:spAutoFit/>
+          </a:bodyPr>
+          <a:lstStyle/>
+          <a:p>
+            <a:pPr algn="l">
+              <a:lnSpc>
+                <a:spcPct val="115000"/>
+              </a:lnSpc>
+            </a:pPr>
+            <a:r>
+              <a:rPr sz="1050" b="1">
+                <a:solidFill>
+                  <a:srgbClr val="000000"/>
+                </a:solidFill>
+                <a:latin typeface="Pretendard"/>
+                <a:ea typeface="Pretendard"/>
+                <a:cs typeface="Pretendard"/>
+              </a:rPr>
+              <a:t>통계학 학사</a:t>
+            </a:r>
+            <a:r>
+              <a:rPr sz="850" b="0">
+                <a:solidFill>
+                  <a:srgbClr val="9A9A9A"/>
+                </a:solidFill>
+                <a:latin typeface="Pretendard"/>
+                <a:ea typeface="Pretendard"/>
+                <a:cs typeface="Pretendard"/>
+              </a:rPr>
+              <a:t>   2021.03 ~ 2025.08</a:t>
+            </a:r>
+            <a:r>
+              <a:rPr sz="850" b="0">
+                <a:solidFill>
+                  <a:srgbClr val="6B6B6B"/>
+                </a:solidFill>
+                <a:latin typeface="Pretendard"/>
+                <a:ea typeface="Pretendard"/>
+                <a:cs typeface="Pretendard"/>
+              </a:rPr>
+              <a:t>   통계적 추론과 모델링</a:t>
+            </a:r>
+          </a:p>
+        </p:txBody>
+      </p:sp>
+      <p:sp>
+        <p:nvSpPr>
+          <p:cNvPr id="11" name="Rectangle 10"/>
           <p:cNvSpPr/>
           <p:nvPr/>
         </p:nvSpPr>
         <p:spPr>
           <a:xfrm>
-            <a:off x="1618488" y="2304288"/>
+            <a:off x="1600200" y="1618488"/>
+            <a:ext cx="3424270" cy="82296"/>
+          </a:xfrm>
+          <a:prstGeom prst="rect">
+            <a:avLst/>
+          </a:prstGeom>
+          <a:solidFill>
+            <a:srgbClr val="D2D2D2"/>
+          </a:solidFill>
+          <a:ln>
+            <a:noFill/>
+          </a:ln>
+          <a:effectLst/>
+        </p:spPr>
+        <p:style>
+          <a:lnRef idx="1">
+            <a:schemeClr val="accent1"/>
+          </a:lnRef>
+          <a:fillRef idx="3">
+            <a:schemeClr val="accent1"/>
+          </a:fillRef>
+          <a:effectRef idx="2">
+            <a:schemeClr val="accent1"/>
+          </a:effectRef>
+          <a:fontRef idx="minor">
+            <a:schemeClr val="lt1"/>
+          </a:fontRef>
+        </p:style>
+        <p:txBody>
+          <a:bodyPr rtlCol="0" anchor="ctr"/>
+          <a:lstStyle/>
+          <a:p>
+            <a:pPr algn="ctr"/>
+            <a:endParaRPr/>
+          </a:p>
+        </p:txBody>
+      </p:sp>
+      <p:cxnSp>
+        <p:nvCxnSpPr>
+          <p:cNvPr id="12" name="Connector 11"/>
+          <p:cNvCxnSpPr/>
+          <p:nvPr/>
+        </p:nvCxnSpPr>
+        <p:spPr>
+          <a:xfrm>
+            <a:off x="1600200" y="1700784"/>
+            <a:ext cx="0" cy="1335024"/>
+          </a:xfrm>
+          <a:prstGeom prst="line">
+            <a:avLst/>
+          </a:prstGeom>
+          <a:ln w="9525">
+            <a:solidFill>
+              <a:srgbClr val="DDDDDD"/>
+            </a:solidFill>
+          </a:ln>
+        </p:spPr>
+      </p:cxnSp>
+      <p:sp>
+        <p:nvSpPr>
+          <p:cNvPr id="13" name="Oval 12"/>
+          <p:cNvSpPr/>
+          <p:nvPr/>
+        </p:nvSpPr>
+        <p:spPr>
+          <a:xfrm>
+            <a:off x="1389888" y="3035808"/>
             <a:ext cx="420624" cy="420624"/>
           </a:xfrm>
           <a:prstGeom prst="ellipse">
@@ -3455,14 +3584,14 @@
       </p:sp>
       <p:sp>
         <p:nvSpPr>
-          <p:cNvPr id="11" name="Freeform 10"/>
+          <p:cNvPr id="14" name="Freeform 13"/>
           <p:cNvSpPr/>
           <p:nvPr/>
         </p:nvSpPr>
         <p:spPr>
           <a:xfrm>
-            <a:off x="1709928" y="2432304"/>
-            <a:ext cx="237744" cy="109728"/>
+            <a:off x="1481328" y="3163824"/>
+            <a:ext cx="237744" cy="109727"/>
           </a:xfrm>
           <a:custGeom>
             <a:avLst/>
@@ -3471,7 +3600,7 @@
             <a:cxnLst/>
             <a:rect l="l" t="t" r="r" b="b"/>
             <a:pathLst>
-              <a:path w="237744" h="109728">
+              <a:path w="237744" h="109727">
                 <a:moveTo>
                   <a:pt x="0" y="54864"/>
                 </a:moveTo>
@@ -3482,7 +3611,7 @@
                   <a:pt x="237744" y="54864"/>
                 </a:lnTo>
                 <a:lnTo>
-                  <a:pt x="118872" y="109728"/>
+                  <a:pt x="118872" y="109727"/>
                 </a:lnTo>
                 <a:close/>
               </a:path>
@@ -3521,14 +3650,14 @@
       </p:sp>
       <p:sp>
         <p:nvSpPr>
-          <p:cNvPr id="12" name="Freeform 11"/>
+          <p:cNvPr id="15" name="Freeform 14"/>
           <p:cNvSpPr/>
           <p:nvPr/>
         </p:nvSpPr>
         <p:spPr>
           <a:xfrm>
-            <a:off x="1764792" y="2514600"/>
-            <a:ext cx="128015" cy="64008"/>
+            <a:off x="1536192" y="3246120"/>
+            <a:ext cx="128016" cy="64007"/>
           </a:xfrm>
           <a:custGeom>
             <a:avLst/>
@@ -3537,18 +3666,18 @@
             <a:cxnLst/>
             <a:rect l="l" t="t" r="r" b="b"/>
             <a:pathLst>
-              <a:path w="128015" h="64008">
+              <a:path w="128016" h="64007">
                 <a:moveTo>
                   <a:pt x="0" y="0"/>
                 </a:moveTo>
                 <a:lnTo>
-                  <a:pt x="0" y="64008"/>
+                  <a:pt x="0" y="64007"/>
                 </a:lnTo>
                 <a:lnTo>
-                  <a:pt x="128015" y="64008"/>
+                  <a:pt x="128016" y="64007"/>
                 </a:lnTo>
                 <a:lnTo>
-                  <a:pt x="128015" y="0"/>
+                  <a:pt x="128016" y="0"/>
                 </a:lnTo>
               </a:path>
             </a:pathLst>
@@ -3586,14 +3715,14 @@
       </p:sp>
       <p:cxnSp>
         <p:nvCxnSpPr>
-          <p:cNvPr id="13" name="Connector 12"/>
+          <p:cNvPr id="16" name="Connector 15"/>
           <p:cNvCxnSpPr/>
           <p:nvPr/>
         </p:nvCxnSpPr>
         <p:spPr>
           <a:xfrm>
-            <a:off x="1929384" y="2496312"/>
-            <a:ext cx="0" cy="82296"/>
+            <a:off x="1700784" y="3227832"/>
+            <a:ext cx="0" cy="82295"/>
           </a:xfrm>
           <a:prstGeom prst="line">
             <a:avLst/>
@@ -3607,14 +3736,14 @@
       </p:cxnSp>
       <p:sp>
         <p:nvSpPr>
-          <p:cNvPr id="14" name="TextBox 13"/>
+          <p:cNvPr id="17" name="TextBox 16"/>
           <p:cNvSpPr txBox="1"/>
           <p:nvPr/>
         </p:nvSpPr>
         <p:spPr>
           <a:xfrm>
-            <a:off x="1618488" y="1435608"/>
-            <a:ext cx="2011680" cy="658368"/>
+            <a:off x="2926080" y="1801368"/>
+            <a:ext cx="5943600" cy="201168"/>
           </a:xfrm>
           <a:prstGeom prst="rect">
             <a:avLst/>
@@ -3629,11 +3758,11 @@
           <a:p>
             <a:pPr algn="l">
               <a:lnSpc>
-                <a:spcPct val="130000"/>
+                <a:spcPct val="115000"/>
               </a:lnSpc>
             </a:pPr>
             <a:r>
-              <a:rPr sz="1100" b="1">
+              <a:rPr sz="1050" b="1">
                 <a:solidFill>
                   <a:srgbClr val="000000"/>
                 </a:solidFill>
@@ -3641,56 +3770,108 @@
                 <a:ea typeface="Pretendard"/>
                 <a:cs typeface="Pretendard"/>
               </a:rPr>
-              <a:t>통계학 학사</a:t>
-            </a:r>
-          </a:p>
-          <a:p>
-            <a:pPr algn="l">
-              <a:lnSpc>
-                <a:spcPct val="130000"/>
-              </a:lnSpc>
-            </a:pPr>
-            <a:r>
-              <a:rPr sz="900" b="0">
-                <a:solidFill>
-                  <a:srgbClr val="6B6B6B"/>
+              <a:t>외국인 학생 멘토링</a:t>
+            </a:r>
+            <a:r>
+              <a:rPr sz="850" b="0">
+                <a:solidFill>
+                  <a:srgbClr val="9A9A9A"/>
                 </a:solidFill>
                 <a:latin typeface="Pretendard"/>
                 <a:ea typeface="Pretendard"/>
                 <a:cs typeface="Pretendard"/>
               </a:rPr>
-              <a:t>통계적 추론과 모델링</a:t>
-            </a:r>
-          </a:p>
-          <a:p>
-            <a:pPr algn="l">
-              <a:lnSpc>
-                <a:spcPct val="130000"/>
-              </a:lnSpc>
-            </a:pPr>
+              <a:t>   2024.09 ~ 2024.12</a:t>
+            </a:r>
             <a:r>
               <a:rPr sz="850" b="0">
                 <a:solidFill>
-                  <a:srgbClr val="9A9A9A"/>
+                  <a:srgbClr val="6B6B6B"/>
                 </a:solidFill>
                 <a:latin typeface="Pretendard"/>
                 <a:ea typeface="Pretendard"/>
                 <a:cs typeface="Pretendard"/>
               </a:rPr>
-              <a:t>2021.03 ~ 2025.08</a:t>
-            </a:r>
-          </a:p>
-        </p:txBody>
-      </p:sp>
-      <p:sp>
-        <p:nvSpPr>
-          <p:cNvPr id="15" name="Oval 14"/>
+              <a:t>   통계학 전공 학업 지원</a:t>
+            </a:r>
+          </a:p>
+        </p:txBody>
+      </p:sp>
+      <p:sp>
+        <p:nvSpPr>
+          <p:cNvPr id="18" name="Rectangle 17"/>
           <p:cNvSpPr/>
           <p:nvPr/>
         </p:nvSpPr>
         <p:spPr>
           <a:xfrm>
-            <a:off x="3447288" y="2304288"/>
+            <a:off x="2926080" y="2048256"/>
+            <a:ext cx="572288" cy="82296"/>
+          </a:xfrm>
+          <a:prstGeom prst="rect">
+            <a:avLst/>
+          </a:prstGeom>
+          <a:solidFill>
+            <a:srgbClr val="D2D2D2"/>
+          </a:solidFill>
+          <a:ln>
+            <a:noFill/>
+          </a:ln>
+          <a:effectLst/>
+        </p:spPr>
+        <p:style>
+          <a:lnRef idx="1">
+            <a:schemeClr val="accent1"/>
+          </a:lnRef>
+          <a:fillRef idx="3">
+            <a:schemeClr val="accent1"/>
+          </a:fillRef>
+          <a:effectRef idx="2">
+            <a:schemeClr val="accent1"/>
+          </a:effectRef>
+          <a:fontRef idx="minor">
+            <a:schemeClr val="lt1"/>
+          </a:fontRef>
+        </p:style>
+        <p:txBody>
+          <a:bodyPr rtlCol="0" anchor="ctr"/>
+          <a:lstStyle/>
+          <a:p>
+            <a:pPr algn="ctr"/>
+            <a:endParaRPr/>
+          </a:p>
+        </p:txBody>
+      </p:sp>
+      <p:cxnSp>
+        <p:nvCxnSpPr>
+          <p:cNvPr id="19" name="Connector 18"/>
+          <p:cNvCxnSpPr/>
+          <p:nvPr/>
+        </p:nvCxnSpPr>
+        <p:spPr>
+          <a:xfrm>
+            <a:off x="2926080" y="2130552"/>
+            <a:ext cx="0" cy="905256"/>
+          </a:xfrm>
+          <a:prstGeom prst="line">
+            <a:avLst/>
+          </a:prstGeom>
+          <a:ln w="9525">
+            <a:solidFill>
+              <a:srgbClr val="DDDDDD"/>
+            </a:solidFill>
+          </a:ln>
+        </p:spPr>
+      </p:cxnSp>
+      <p:sp>
+        <p:nvSpPr>
+          <p:cNvPr id="20" name="Oval 19"/>
+          <p:cNvSpPr/>
+          <p:nvPr/>
+        </p:nvSpPr>
+        <p:spPr>
+          <a:xfrm>
+            <a:off x="2715768" y="3035808"/>
             <a:ext cx="420624" cy="420624"/>
           </a:xfrm>
           <a:prstGeom prst="ellipse">
@@ -3731,13 +3912,13 @@
       </p:sp>
       <p:sp>
         <p:nvSpPr>
-          <p:cNvPr id="16" name="Freeform 15"/>
+          <p:cNvPr id="21" name="Freeform 20"/>
           <p:cNvSpPr/>
           <p:nvPr/>
         </p:nvSpPr>
         <p:spPr>
           <a:xfrm>
-            <a:off x="3557016" y="2441448"/>
+            <a:off x="2825496" y="3172968"/>
             <a:ext cx="201168" cy="164592"/>
           </a:xfrm>
           <a:custGeom>
@@ -3806,13 +3987,13 @@
       </p:sp>
       <p:cxnSp>
         <p:nvCxnSpPr>
-          <p:cNvPr id="17" name="Connector 16"/>
+          <p:cNvPr id="22" name="Connector 21"/>
           <p:cNvCxnSpPr/>
           <p:nvPr/>
         </p:nvCxnSpPr>
         <p:spPr>
           <a:xfrm>
-            <a:off x="3598164" y="2482596"/>
+            <a:off x="2866644" y="3214115"/>
             <a:ext cx="118872" cy="0"/>
           </a:xfrm>
           <a:prstGeom prst="line">
@@ -3827,13 +4008,13 @@
       </p:cxnSp>
       <p:cxnSp>
         <p:nvCxnSpPr>
-          <p:cNvPr id="18" name="Connector 17"/>
+          <p:cNvPr id="23" name="Connector 22"/>
           <p:cNvCxnSpPr/>
           <p:nvPr/>
         </p:nvCxnSpPr>
         <p:spPr>
           <a:xfrm>
-            <a:off x="3598164" y="2514600"/>
+            <a:off x="2866644" y="3246120"/>
             <a:ext cx="118872" cy="0"/>
           </a:xfrm>
           <a:prstGeom prst="line">
@@ -3848,14 +4029,14 @@
       </p:cxnSp>
       <p:sp>
         <p:nvSpPr>
-          <p:cNvPr id="19" name="TextBox 18"/>
+          <p:cNvPr id="24" name="TextBox 23"/>
           <p:cNvSpPr txBox="1"/>
           <p:nvPr/>
         </p:nvSpPr>
         <p:spPr>
           <a:xfrm>
-            <a:off x="3447288" y="1435608"/>
-            <a:ext cx="2011680" cy="658368"/>
+            <a:off x="3689131" y="2231136"/>
+            <a:ext cx="5943600" cy="201168"/>
           </a:xfrm>
           <a:prstGeom prst="rect">
             <a:avLst/>
@@ -3870,11 +4051,11 @@
           <a:p>
             <a:pPr algn="l">
               <a:lnSpc>
-                <a:spcPct val="130000"/>
+                <a:spcPct val="115000"/>
               </a:lnSpc>
             </a:pPr>
             <a:r>
-              <a:rPr sz="1100" b="1">
+              <a:rPr sz="1050" b="1">
                 <a:solidFill>
                   <a:srgbClr val="000000"/>
                 </a:solidFill>
@@ -3882,56 +4063,108 @@
                 <a:ea typeface="Pretendard"/>
                 <a:cs typeface="Pretendard"/>
               </a:rPr>
-              <a:t>외국인 학생 멘토링</a:t>
-            </a:r>
-          </a:p>
-          <a:p>
-            <a:pPr algn="l">
-              <a:lnSpc>
-                <a:spcPct val="130000"/>
-              </a:lnSpc>
-            </a:pPr>
-            <a:r>
-              <a:rPr sz="900" b="0">
-                <a:solidFill>
-                  <a:srgbClr val="6B6B6B"/>
+              <a:t>인공지능 학회</a:t>
+            </a:r>
+            <a:r>
+              <a:rPr sz="850" b="0">
+                <a:solidFill>
+                  <a:srgbClr val="9A9A9A"/>
                 </a:solidFill>
                 <a:latin typeface="Pretendard"/>
                 <a:ea typeface="Pretendard"/>
                 <a:cs typeface="Pretendard"/>
               </a:rPr>
-              <a:t>통계학 전공 학업 지원</a:t>
-            </a:r>
-          </a:p>
-          <a:p>
-            <a:pPr algn="l">
-              <a:lnSpc>
-                <a:spcPct val="130000"/>
-              </a:lnSpc>
-            </a:pPr>
+              <a:t>   2025.01 ~ 2026.07</a:t>
+            </a:r>
             <a:r>
               <a:rPr sz="850" b="0">
                 <a:solidFill>
-                  <a:srgbClr val="9A9A9A"/>
+                  <a:srgbClr val="6B6B6B"/>
                 </a:solidFill>
                 <a:latin typeface="Pretendard"/>
                 <a:ea typeface="Pretendard"/>
                 <a:cs typeface="Pretendard"/>
               </a:rPr>
-              <a:t>2024.09 ~ 2024.12</a:t>
-            </a:r>
-          </a:p>
-        </p:txBody>
-      </p:sp>
-      <p:sp>
-        <p:nvSpPr>
-          <p:cNvPr id="20" name="Oval 19"/>
+              <a:t>   학회장, 운영팀장, 스터디 진행, 프로젝트 진행</a:t>
+            </a:r>
+          </a:p>
+        </p:txBody>
+      </p:sp>
+      <p:sp>
+        <p:nvSpPr>
+          <p:cNvPr id="25" name="Rectangle 24"/>
           <p:cNvSpPr/>
           <p:nvPr/>
         </p:nvSpPr>
         <p:spPr>
           <a:xfrm>
-            <a:off x="5276088" y="2304288"/>
+            <a:off x="3689131" y="2478024"/>
+            <a:ext cx="3433729" cy="82296"/>
+          </a:xfrm>
+          <a:prstGeom prst="rect">
+            <a:avLst/>
+          </a:prstGeom>
+          <a:solidFill>
+            <a:srgbClr val="D2D2D2"/>
+          </a:solidFill>
+          <a:ln>
+            <a:noFill/>
+          </a:ln>
+          <a:effectLst/>
+        </p:spPr>
+        <p:style>
+          <a:lnRef idx="1">
+            <a:schemeClr val="accent1"/>
+          </a:lnRef>
+          <a:fillRef idx="3">
+            <a:schemeClr val="accent1"/>
+          </a:fillRef>
+          <a:effectRef idx="2">
+            <a:schemeClr val="accent1"/>
+          </a:effectRef>
+          <a:fontRef idx="minor">
+            <a:schemeClr val="lt1"/>
+          </a:fontRef>
+        </p:style>
+        <p:txBody>
+          <a:bodyPr rtlCol="0" anchor="ctr"/>
+          <a:lstStyle/>
+          <a:p>
+            <a:pPr algn="ctr"/>
+            <a:endParaRPr/>
+          </a:p>
+        </p:txBody>
+      </p:sp>
+      <p:cxnSp>
+        <p:nvCxnSpPr>
+          <p:cNvPr id="26" name="Connector 25"/>
+          <p:cNvCxnSpPr/>
+          <p:nvPr/>
+        </p:nvCxnSpPr>
+        <p:spPr>
+          <a:xfrm>
+            <a:off x="3689131" y="2560320"/>
+            <a:ext cx="0" cy="475488"/>
+          </a:xfrm>
+          <a:prstGeom prst="line">
+            <a:avLst/>
+          </a:prstGeom>
+          <a:ln w="9525">
+            <a:solidFill>
+              <a:srgbClr val="DDDDDD"/>
+            </a:solidFill>
+          </a:ln>
+        </p:spPr>
+      </p:cxnSp>
+      <p:sp>
+        <p:nvSpPr>
+          <p:cNvPr id="27" name="Oval 26"/>
+          <p:cNvSpPr/>
+          <p:nvPr/>
+        </p:nvSpPr>
+        <p:spPr>
+          <a:xfrm>
+            <a:off x="3478819" y="3035808"/>
             <a:ext cx="420624" cy="420624"/>
           </a:xfrm>
           <a:prstGeom prst="ellipse">
@@ -3972,13 +4205,13 @@
       </p:sp>
       <p:sp>
         <p:nvSpPr>
-          <p:cNvPr id="21" name="Oval 20"/>
+          <p:cNvPr id="28" name="Oval 27"/>
           <p:cNvSpPr/>
           <p:nvPr/>
         </p:nvSpPr>
         <p:spPr>
           <a:xfrm>
-            <a:off x="5404104" y="2436876"/>
+            <a:off x="3606835" y="3168396"/>
             <a:ext cx="64008" cy="64008"/>
           </a:xfrm>
           <a:prstGeom prst="ellipse">
@@ -4019,13 +4252,13 @@
       </p:sp>
       <p:sp>
         <p:nvSpPr>
-          <p:cNvPr id="22" name="Freeform 21"/>
+          <p:cNvPr id="29" name="Freeform 28"/>
           <p:cNvSpPr/>
           <p:nvPr/>
         </p:nvSpPr>
         <p:spPr>
           <a:xfrm>
-            <a:off x="5385816" y="2542032"/>
+            <a:off x="3588547" y="3273551"/>
             <a:ext cx="100584" cy="54864"/>
           </a:xfrm>
           <a:custGeom>
@@ -4084,13 +4317,13 @@
       </p:sp>
       <p:sp>
         <p:nvSpPr>
-          <p:cNvPr id="23" name="Oval 22"/>
+          <p:cNvPr id="30" name="Oval 29"/>
           <p:cNvSpPr/>
           <p:nvPr/>
         </p:nvSpPr>
         <p:spPr>
           <a:xfrm>
-            <a:off x="5513831" y="2441448"/>
+            <a:off x="3716563" y="3172968"/>
             <a:ext cx="54864" cy="54864"/>
           </a:xfrm>
           <a:prstGeom prst="ellipse">
@@ -4131,14 +4364,14 @@
       </p:sp>
       <p:sp>
         <p:nvSpPr>
-          <p:cNvPr id="24" name="Freeform 23"/>
+          <p:cNvPr id="31" name="Freeform 30"/>
           <p:cNvSpPr/>
           <p:nvPr/>
         </p:nvSpPr>
         <p:spPr>
           <a:xfrm>
-            <a:off x="5490972" y="2542032"/>
-            <a:ext cx="100583" cy="54864"/>
+            <a:off x="3693703" y="3273551"/>
+            <a:ext cx="100584" cy="54864"/>
           </a:xfrm>
           <a:custGeom>
             <a:avLst/>
@@ -4147,7 +4380,7 @@
             <a:cxnLst/>
             <a:rect l="l" t="t" r="r" b="b"/>
             <a:pathLst>
-              <a:path w="100583" h="54864">
+              <a:path w="100584" h="54864">
                 <a:moveTo>
                   <a:pt x="0" y="54864"/>
                 </a:moveTo>
@@ -4158,7 +4391,7 @@
                   <a:pt x="91440" y="0"/>
                 </a:lnTo>
                 <a:lnTo>
-                  <a:pt x="100583" y="54864"/>
+                  <a:pt x="100584" y="54864"/>
                 </a:lnTo>
               </a:path>
             </a:pathLst>
@@ -4196,14 +4429,14 @@
       </p:sp>
       <p:sp>
         <p:nvSpPr>
-          <p:cNvPr id="25" name="TextBox 24"/>
+          <p:cNvPr id="32" name="TextBox 31"/>
           <p:cNvSpPr txBox="1"/>
           <p:nvPr/>
         </p:nvSpPr>
         <p:spPr>
           <a:xfrm>
-            <a:off x="5276088" y="1435608"/>
-            <a:ext cx="2011680" cy="877824"/>
+            <a:off x="5215233" y="2660904"/>
+            <a:ext cx="5943600" cy="201168"/>
           </a:xfrm>
           <a:prstGeom prst="rect">
             <a:avLst/>
@@ -4218,11 +4451,11 @@
           <a:p>
             <a:pPr algn="l">
               <a:lnSpc>
-                <a:spcPct val="130000"/>
+                <a:spcPct val="115000"/>
               </a:lnSpc>
             </a:pPr>
             <a:r>
-              <a:rPr sz="1100" b="1">
+              <a:rPr sz="1050" b="1">
                 <a:solidFill>
                   <a:srgbClr val="000000"/>
                 </a:solidFill>
@@ -4230,35 +4463,21 @@
                 <a:ea typeface="Pretendard"/>
                 <a:cs typeface="Pretendard"/>
               </a:rPr>
-              <a:t>인공지능 학회</a:t>
-            </a:r>
-          </a:p>
-          <a:p>
-            <a:pPr algn="l">
-              <a:lnSpc>
-                <a:spcPct val="130000"/>
-              </a:lnSpc>
-            </a:pPr>
-            <a:r>
-              <a:rPr sz="900" b="0">
-                <a:solidFill>
-                  <a:srgbClr val="6B6B6B"/>
+              <a:t>통계학 석사</a:t>
+            </a:r>
+            <a:r>
+              <a:rPr sz="850" b="0">
+                <a:solidFill>
+                  <a:srgbClr val="9A9A9A"/>
                 </a:solidFill>
                 <a:latin typeface="Pretendard"/>
                 <a:ea typeface="Pretendard"/>
                 <a:cs typeface="Pretendard"/>
               </a:rPr>
-              <a:t>학회장, 운영팀장</a:t>
-            </a:r>
-          </a:p>
-          <a:p>
-            <a:pPr algn="l">
-              <a:lnSpc>
-                <a:spcPct val="130000"/>
-              </a:lnSpc>
-            </a:pPr>
-            <a:r>
-              <a:rPr sz="900" b="0">
+              <a:t>   2025.09 ~ 2027.02</a:t>
+            </a:r>
+            <a:r>
+              <a:rPr sz="850" b="0">
                 <a:solidFill>
                   <a:srgbClr val="6B6B6B"/>
                 </a:solidFill>
@@ -4266,38 +4485,86 @@
                 <a:ea typeface="Pretendard"/>
                 <a:cs typeface="Pretendard"/>
               </a:rPr>
-              <a:t>스터디 진행, 프로젝트 진행</a:t>
-            </a:r>
-          </a:p>
-          <a:p>
-            <a:pPr algn="l">
-              <a:lnSpc>
-                <a:spcPct val="130000"/>
-              </a:lnSpc>
-            </a:pPr>
-            <a:r>
-              <a:rPr sz="850" b="0">
-                <a:solidFill>
-                  <a:srgbClr val="9A9A9A"/>
-                </a:solidFill>
-                <a:latin typeface="Pretendard"/>
-                <a:ea typeface="Pretendard"/>
-                <a:cs typeface="Pretendard"/>
-              </a:rPr>
-              <a:t>2025.01 ~ 2026.07</a:t>
-            </a:r>
-          </a:p>
-        </p:txBody>
-      </p:sp>
-      <p:sp>
-        <p:nvSpPr>
-          <p:cNvPr id="26" name="Oval 25"/>
+              <a:t>   딥러닝</a:t>
+            </a:r>
+          </a:p>
+        </p:txBody>
+      </p:sp>
+      <p:sp>
+        <p:nvSpPr>
+          <p:cNvPr id="33" name="Rectangle 32"/>
           <p:cNvSpPr/>
           <p:nvPr/>
         </p:nvSpPr>
         <p:spPr>
           <a:xfrm>
-            <a:off x="7196327" y="2304288"/>
+            <a:off x="5215233" y="2907792"/>
+            <a:ext cx="3242966" cy="82296"/>
+          </a:xfrm>
+          <a:prstGeom prst="rect">
+            <a:avLst/>
+          </a:prstGeom>
+          <a:solidFill>
+            <a:srgbClr val="D2D2D2"/>
+          </a:solidFill>
+          <a:ln>
+            <a:noFill/>
+          </a:ln>
+          <a:effectLst/>
+        </p:spPr>
+        <p:style>
+          <a:lnRef idx="1">
+            <a:schemeClr val="accent1"/>
+          </a:lnRef>
+          <a:fillRef idx="3">
+            <a:schemeClr val="accent1"/>
+          </a:fillRef>
+          <a:effectRef idx="2">
+            <a:schemeClr val="accent1"/>
+          </a:effectRef>
+          <a:fontRef idx="minor">
+            <a:schemeClr val="lt1"/>
+          </a:fontRef>
+        </p:style>
+        <p:txBody>
+          <a:bodyPr rtlCol="0" anchor="ctr"/>
+          <a:lstStyle/>
+          <a:p>
+            <a:pPr algn="ctr"/>
+            <a:endParaRPr/>
+          </a:p>
+        </p:txBody>
+      </p:sp>
+      <p:cxnSp>
+        <p:nvCxnSpPr>
+          <p:cNvPr id="34" name="Connector 33"/>
+          <p:cNvCxnSpPr/>
+          <p:nvPr/>
+        </p:nvCxnSpPr>
+        <p:spPr>
+          <a:xfrm>
+            <a:off x="5215233" y="2990088"/>
+            <a:ext cx="0" cy="45720"/>
+          </a:xfrm>
+          <a:prstGeom prst="line">
+            <a:avLst/>
+          </a:prstGeom>
+          <a:ln w="9525">
+            <a:solidFill>
+              <a:srgbClr val="DDDDDD"/>
+            </a:solidFill>
+          </a:ln>
+        </p:spPr>
+      </p:cxnSp>
+      <p:sp>
+        <p:nvSpPr>
+          <p:cNvPr id="35" name="Oval 34"/>
+          <p:cNvSpPr/>
+          <p:nvPr/>
+        </p:nvSpPr>
+        <p:spPr>
+          <a:xfrm>
+            <a:off x="5004921" y="3035808"/>
             <a:ext cx="420624" cy="420624"/>
           </a:xfrm>
           <a:prstGeom prst="ellipse">
@@ -4338,14 +4605,14 @@
       </p:sp>
       <p:sp>
         <p:nvSpPr>
-          <p:cNvPr id="27" name="Freeform 26"/>
+          <p:cNvPr id="36" name="Freeform 35"/>
           <p:cNvSpPr/>
           <p:nvPr/>
         </p:nvSpPr>
         <p:spPr>
           <a:xfrm>
-            <a:off x="7287768" y="2432304"/>
-            <a:ext cx="237744" cy="109728"/>
+            <a:off x="5096361" y="3163824"/>
+            <a:ext cx="237744" cy="109727"/>
           </a:xfrm>
           <a:custGeom>
             <a:avLst/>
@@ -4354,7 +4621,7 @@
             <a:cxnLst/>
             <a:rect l="l" t="t" r="r" b="b"/>
             <a:pathLst>
-              <a:path w="237744" h="109728">
+              <a:path w="237744" h="109727">
                 <a:moveTo>
                   <a:pt x="0" y="54864"/>
                 </a:moveTo>
@@ -4365,7 +4632,7 @@
                   <a:pt x="237744" y="54864"/>
                 </a:lnTo>
                 <a:lnTo>
-                  <a:pt x="118872" y="109728"/>
+                  <a:pt x="118872" y="109727"/>
                 </a:lnTo>
                 <a:close/>
               </a:path>
@@ -4404,14 +4671,14 @@
       </p:sp>
       <p:sp>
         <p:nvSpPr>
-          <p:cNvPr id="28" name="Freeform 27"/>
+          <p:cNvPr id="37" name="Freeform 36"/>
           <p:cNvSpPr/>
           <p:nvPr/>
         </p:nvSpPr>
         <p:spPr>
           <a:xfrm>
-            <a:off x="7342631" y="2514600"/>
-            <a:ext cx="128017" cy="64008"/>
+            <a:off x="5151225" y="3246120"/>
+            <a:ext cx="128016" cy="64007"/>
           </a:xfrm>
           <a:custGeom>
             <a:avLst/>
@@ -4420,18 +4687,18 @@
             <a:cxnLst/>
             <a:rect l="l" t="t" r="r" b="b"/>
             <a:pathLst>
-              <a:path w="128017" h="64008">
+              <a:path w="128016" h="64007">
                 <a:moveTo>
                   <a:pt x="0" y="0"/>
                 </a:moveTo>
                 <a:lnTo>
-                  <a:pt x="0" y="64008"/>
+                  <a:pt x="0" y="64007"/>
                 </a:lnTo>
                 <a:lnTo>
-                  <a:pt x="128017" y="64008"/>
+                  <a:pt x="128016" y="64007"/>
                 </a:lnTo>
                 <a:lnTo>
-                  <a:pt x="128017" y="0"/>
+                  <a:pt x="128016" y="0"/>
                 </a:lnTo>
               </a:path>
             </a:pathLst>
@@ -4469,14 +4736,14 @@
       </p:sp>
       <p:cxnSp>
         <p:nvCxnSpPr>
-          <p:cNvPr id="29" name="Connector 28"/>
+          <p:cNvPr id="38" name="Connector 37"/>
           <p:cNvCxnSpPr/>
           <p:nvPr/>
         </p:nvCxnSpPr>
         <p:spPr>
           <a:xfrm>
-            <a:off x="7507223" y="2496312"/>
-            <a:ext cx="0" cy="82296"/>
+            <a:off x="5315817" y="3227832"/>
+            <a:ext cx="0" cy="82295"/>
           </a:xfrm>
           <a:prstGeom prst="line">
             <a:avLst/>
@@ -4488,92 +4755,15 @@
           </a:ln>
         </p:spPr>
       </p:cxnSp>
-      <p:sp>
-        <p:nvSpPr>
-          <p:cNvPr id="30" name="TextBox 29"/>
-          <p:cNvSpPr txBox="1"/>
-          <p:nvPr/>
-        </p:nvSpPr>
-        <p:spPr>
-          <a:xfrm>
-            <a:off x="7196327" y="1435608"/>
-            <a:ext cx="2011680" cy="658368"/>
-          </a:xfrm>
-          <a:prstGeom prst="rect">
-            <a:avLst/>
-          </a:prstGeom>
-          <a:noFill/>
-        </p:spPr>
-        <p:txBody>
-          <a:bodyPr wrap="none" lIns="0" tIns="0" rIns="0" bIns="0" anchor="t">
-            <a:spAutoFit/>
-          </a:bodyPr>
-          <a:lstStyle/>
-          <a:p>
-            <a:pPr algn="l">
-              <a:lnSpc>
-                <a:spcPct val="130000"/>
-              </a:lnSpc>
-            </a:pPr>
-            <a:r>
-              <a:rPr sz="1100" b="1">
-                <a:solidFill>
-                  <a:srgbClr val="000000"/>
-                </a:solidFill>
-                <a:latin typeface="Pretendard"/>
-                <a:ea typeface="Pretendard"/>
-                <a:cs typeface="Pretendard"/>
-              </a:rPr>
-              <a:t>통계학 석사</a:t>
-            </a:r>
-          </a:p>
-          <a:p>
-            <a:pPr algn="l">
-              <a:lnSpc>
-                <a:spcPct val="130000"/>
-              </a:lnSpc>
-            </a:pPr>
-            <a:r>
-              <a:rPr sz="900" b="0">
-                <a:solidFill>
-                  <a:srgbClr val="6B6B6B"/>
-                </a:solidFill>
-                <a:latin typeface="Pretendard"/>
-                <a:ea typeface="Pretendard"/>
-                <a:cs typeface="Pretendard"/>
-              </a:rPr>
-              <a:t>딥러닝</a:t>
-            </a:r>
-          </a:p>
-          <a:p>
-            <a:pPr algn="l">
-              <a:lnSpc>
-                <a:spcPct val="130000"/>
-              </a:lnSpc>
-            </a:pPr>
-            <a:r>
-              <a:rPr sz="850" b="0">
-                <a:solidFill>
-                  <a:srgbClr val="9A9A9A"/>
-                </a:solidFill>
-                <a:latin typeface="Pretendard"/>
-                <a:ea typeface="Pretendard"/>
-                <a:cs typeface="Pretendard"/>
-              </a:rPr>
-              <a:t>2025.09 ~ 2027.02</a:t>
-            </a:r>
-          </a:p>
-        </p:txBody>
-      </p:sp>
       <p:cxnSp>
         <p:nvCxnSpPr>
-          <p:cNvPr id="31" name="Connector 30"/>
+          <p:cNvPr id="39" name="Connector 38"/>
           <p:cNvCxnSpPr/>
           <p:nvPr/>
         </p:nvCxnSpPr>
         <p:spPr>
           <a:xfrm>
-            <a:off x="1600200" y="3959352"/>
+            <a:off x="1600200" y="4507992"/>
             <a:ext cx="0" cy="237744"/>
           </a:xfrm>
           <a:prstGeom prst="line">
@@ -4588,13 +4778,13 @@
       </p:cxnSp>
       <p:cxnSp>
         <p:nvCxnSpPr>
-          <p:cNvPr id="32" name="Connector 31"/>
+          <p:cNvPr id="40" name="Connector 39"/>
           <p:cNvCxnSpPr/>
           <p:nvPr/>
         </p:nvCxnSpPr>
         <p:spPr>
           <a:xfrm>
-            <a:off x="2263140" y="3959352"/>
+            <a:off x="2263140" y="4507992"/>
             <a:ext cx="0" cy="804672"/>
           </a:xfrm>
           <a:prstGeom prst="line">
@@ -4609,13 +4799,13 @@
       </p:cxnSp>
       <p:cxnSp>
         <p:nvCxnSpPr>
-          <p:cNvPr id="33" name="Connector 32"/>
+          <p:cNvPr id="41" name="Connector 40"/>
           <p:cNvCxnSpPr/>
           <p:nvPr/>
         </p:nvCxnSpPr>
         <p:spPr>
           <a:xfrm>
-            <a:off x="2926080" y="3959352"/>
+            <a:off x="2926080" y="4507992"/>
             <a:ext cx="0" cy="1371600"/>
           </a:xfrm>
           <a:prstGeom prst="line">
@@ -4630,13 +4820,13 @@
       </p:cxnSp>
       <p:cxnSp>
         <p:nvCxnSpPr>
-          <p:cNvPr id="34" name="Connector 33"/>
+          <p:cNvPr id="42" name="Connector 41"/>
           <p:cNvCxnSpPr/>
           <p:nvPr/>
         </p:nvCxnSpPr>
         <p:spPr>
           <a:xfrm>
-            <a:off x="3589020" y="3959352"/>
+            <a:off x="3589020" y="4507992"/>
             <a:ext cx="0" cy="237744"/>
           </a:xfrm>
           <a:prstGeom prst="line">
@@ -4651,13 +4841,13 @@
       </p:cxnSp>
       <p:cxnSp>
         <p:nvCxnSpPr>
-          <p:cNvPr id="35" name="Connector 34"/>
+          <p:cNvPr id="43" name="Connector 42"/>
           <p:cNvCxnSpPr/>
           <p:nvPr/>
         </p:nvCxnSpPr>
         <p:spPr>
           <a:xfrm>
-            <a:off x="4251960" y="3959352"/>
+            <a:off x="4251960" y="4507992"/>
             <a:ext cx="0" cy="804672"/>
           </a:xfrm>
           <a:prstGeom prst="line">
@@ -4672,13 +4862,13 @@
       </p:cxnSp>
       <p:cxnSp>
         <p:nvCxnSpPr>
-          <p:cNvPr id="36" name="Connector 35"/>
+          <p:cNvPr id="44" name="Connector 43"/>
           <p:cNvCxnSpPr/>
           <p:nvPr/>
         </p:nvCxnSpPr>
         <p:spPr>
           <a:xfrm>
-            <a:off x="4914900" y="3959352"/>
+            <a:off x="4914900" y="4507992"/>
             <a:ext cx="0" cy="1371600"/>
           </a:xfrm>
           <a:prstGeom prst="line">
@@ -4693,13 +4883,13 @@
       </p:cxnSp>
       <p:cxnSp>
         <p:nvCxnSpPr>
-          <p:cNvPr id="37" name="Connector 36"/>
+          <p:cNvPr id="45" name="Connector 44"/>
           <p:cNvCxnSpPr/>
           <p:nvPr/>
         </p:nvCxnSpPr>
         <p:spPr>
           <a:xfrm>
-            <a:off x="5577840" y="3959352"/>
+            <a:off x="5577840" y="4507992"/>
             <a:ext cx="0" cy="237744"/>
           </a:xfrm>
           <a:prstGeom prst="line">
@@ -4714,13 +4904,13 @@
       </p:cxnSp>
       <p:cxnSp>
         <p:nvCxnSpPr>
-          <p:cNvPr id="38" name="Connector 37"/>
+          <p:cNvPr id="46" name="Connector 45"/>
           <p:cNvCxnSpPr/>
           <p:nvPr/>
         </p:nvCxnSpPr>
         <p:spPr>
           <a:xfrm>
-            <a:off x="6240780" y="3959352"/>
+            <a:off x="6240780" y="4507992"/>
             <a:ext cx="0" cy="804672"/>
           </a:xfrm>
           <a:prstGeom prst="line">
@@ -4735,13 +4925,13 @@
       </p:cxnSp>
       <p:cxnSp>
         <p:nvCxnSpPr>
-          <p:cNvPr id="39" name="Connector 38"/>
+          <p:cNvPr id="47" name="Connector 46"/>
           <p:cNvCxnSpPr/>
           <p:nvPr/>
         </p:nvCxnSpPr>
         <p:spPr>
           <a:xfrm>
-            <a:off x="6903720" y="3959352"/>
+            <a:off x="6903720" y="4507992"/>
             <a:ext cx="0" cy="1371600"/>
           </a:xfrm>
           <a:prstGeom prst="line">
@@ -4756,13 +4946,13 @@
       </p:cxnSp>
       <p:cxnSp>
         <p:nvCxnSpPr>
-          <p:cNvPr id="40" name="Connector 39"/>
+          <p:cNvPr id="48" name="Connector 47"/>
           <p:cNvCxnSpPr/>
           <p:nvPr/>
         </p:nvCxnSpPr>
         <p:spPr>
           <a:xfrm>
-            <a:off x="7566660" y="3959352"/>
+            <a:off x="7566660" y="4507992"/>
             <a:ext cx="0" cy="237744"/>
           </a:xfrm>
           <a:prstGeom prst="line">
@@ -4777,13 +4967,13 @@
       </p:cxnSp>
       <p:cxnSp>
         <p:nvCxnSpPr>
-          <p:cNvPr id="41" name="Connector 40"/>
+          <p:cNvPr id="49" name="Connector 48"/>
           <p:cNvCxnSpPr/>
           <p:nvPr/>
         </p:nvCxnSpPr>
         <p:spPr>
           <a:xfrm>
-            <a:off x="8229600" y="3959352"/>
+            <a:off x="8229600" y="4507992"/>
             <a:ext cx="0" cy="804672"/>
           </a:xfrm>
           <a:prstGeom prst="line">
@@ -4798,13 +4988,13 @@
       </p:cxnSp>
       <p:sp>
         <p:nvSpPr>
-          <p:cNvPr id="42" name="Oval 41"/>
+          <p:cNvPr id="50" name="Oval 49"/>
           <p:cNvSpPr/>
           <p:nvPr/>
         </p:nvSpPr>
         <p:spPr>
           <a:xfrm>
-            <a:off x="1545336" y="3831336"/>
+            <a:off x="1545336" y="4379976"/>
             <a:ext cx="109728" cy="109728"/>
           </a:xfrm>
           <a:prstGeom prst="ellipse">
@@ -4843,13 +5033,13 @@
       </p:sp>
       <p:sp>
         <p:nvSpPr>
-          <p:cNvPr id="43" name="TextBox 42"/>
+          <p:cNvPr id="51" name="TextBox 50"/>
           <p:cNvSpPr txBox="1"/>
           <p:nvPr/>
         </p:nvSpPr>
         <p:spPr>
           <a:xfrm>
-            <a:off x="1563624" y="4178808"/>
+            <a:off x="1563624" y="4727448"/>
             <a:ext cx="1393728" cy="411480"/>
           </a:xfrm>
           <a:prstGeom prst="rect">
@@ -4904,13 +5094,13 @@
       </p:sp>
       <p:sp>
         <p:nvSpPr>
-          <p:cNvPr id="44" name="Oval 43"/>
+          <p:cNvPr id="52" name="Oval 51"/>
           <p:cNvSpPr/>
           <p:nvPr/>
         </p:nvSpPr>
         <p:spPr>
           <a:xfrm>
-            <a:off x="2208276" y="3831336"/>
+            <a:off x="2208276" y="4379976"/>
             <a:ext cx="109728" cy="109728"/>
           </a:xfrm>
           <a:prstGeom prst="ellipse">
@@ -4949,13 +5139,13 @@
       </p:sp>
       <p:sp>
         <p:nvSpPr>
-          <p:cNvPr id="45" name="TextBox 44"/>
+          <p:cNvPr id="53" name="TextBox 52"/>
           <p:cNvSpPr txBox="1"/>
           <p:nvPr/>
         </p:nvSpPr>
         <p:spPr>
           <a:xfrm>
-            <a:off x="2226564" y="4745736"/>
+            <a:off x="2226564" y="5294376"/>
             <a:ext cx="1393728" cy="411480"/>
           </a:xfrm>
           <a:prstGeom prst="rect">
@@ -5010,13 +5200,13 @@
       </p:sp>
       <p:sp>
         <p:nvSpPr>
-          <p:cNvPr id="46" name="Oval 45"/>
+          <p:cNvPr id="54" name="Oval 53"/>
           <p:cNvSpPr/>
           <p:nvPr/>
         </p:nvSpPr>
         <p:spPr>
           <a:xfrm>
-            <a:off x="2871216" y="3831336"/>
+            <a:off x="2871216" y="4379976"/>
             <a:ext cx="109728" cy="109728"/>
           </a:xfrm>
           <a:prstGeom prst="ellipse">
@@ -5055,13 +5245,13 @@
       </p:sp>
       <p:sp>
         <p:nvSpPr>
-          <p:cNvPr id="47" name="TextBox 46"/>
+          <p:cNvPr id="55" name="TextBox 54"/>
           <p:cNvSpPr txBox="1"/>
           <p:nvPr/>
         </p:nvSpPr>
         <p:spPr>
           <a:xfrm>
-            <a:off x="2889504" y="5312664"/>
+            <a:off x="2889504" y="5861304"/>
             <a:ext cx="1302014" cy="411480"/>
           </a:xfrm>
           <a:prstGeom prst="rect">
@@ -5116,13 +5306,13 @@
       </p:sp>
       <p:sp>
         <p:nvSpPr>
-          <p:cNvPr id="48" name="Oval 47"/>
+          <p:cNvPr id="56" name="Oval 55"/>
           <p:cNvSpPr/>
           <p:nvPr/>
         </p:nvSpPr>
         <p:spPr>
           <a:xfrm>
-            <a:off x="3534156" y="3831336"/>
+            <a:off x="3534156" y="4379976"/>
             <a:ext cx="109728" cy="109728"/>
           </a:xfrm>
           <a:prstGeom prst="ellipse">
@@ -5161,13 +5351,13 @@
       </p:sp>
       <p:sp>
         <p:nvSpPr>
-          <p:cNvPr id="49" name="TextBox 48"/>
+          <p:cNvPr id="57" name="TextBox 56"/>
           <p:cNvSpPr txBox="1"/>
           <p:nvPr/>
         </p:nvSpPr>
         <p:spPr>
           <a:xfrm>
-            <a:off x="3552444" y="4178808"/>
+            <a:off x="3552444" y="4727448"/>
             <a:ext cx="1760585" cy="411480"/>
           </a:xfrm>
           <a:prstGeom prst="rect">
@@ -5222,13 +5412,13 @@
       </p:sp>
       <p:sp>
         <p:nvSpPr>
-          <p:cNvPr id="50" name="Oval 49"/>
+          <p:cNvPr id="58" name="Oval 57"/>
           <p:cNvSpPr/>
           <p:nvPr/>
         </p:nvSpPr>
         <p:spPr>
           <a:xfrm>
-            <a:off x="4197096" y="3831336"/>
+            <a:off x="4197096" y="4379976"/>
             <a:ext cx="109728" cy="109728"/>
           </a:xfrm>
           <a:prstGeom prst="ellipse">
@@ -5267,13 +5457,13 @@
       </p:sp>
       <p:sp>
         <p:nvSpPr>
-          <p:cNvPr id="51" name="TextBox 50"/>
+          <p:cNvPr id="59" name="TextBox 58"/>
           <p:cNvSpPr txBox="1"/>
           <p:nvPr/>
         </p:nvSpPr>
         <p:spPr>
           <a:xfrm>
-            <a:off x="4215384" y="4745736"/>
+            <a:off x="4215384" y="5294376"/>
             <a:ext cx="1393728" cy="411480"/>
           </a:xfrm>
           <a:prstGeom prst="rect">
@@ -5328,13 +5518,13 @@
       </p:sp>
       <p:sp>
         <p:nvSpPr>
-          <p:cNvPr id="52" name="Oval 51"/>
+          <p:cNvPr id="60" name="Oval 59"/>
           <p:cNvSpPr/>
           <p:nvPr/>
         </p:nvSpPr>
         <p:spPr>
           <a:xfrm>
-            <a:off x="4837176" y="3808476"/>
+            <a:off x="4837176" y="4357116"/>
             <a:ext cx="155448" cy="155448"/>
           </a:xfrm>
           <a:prstGeom prst="ellipse">
@@ -5373,13 +5563,13 @@
       </p:sp>
       <p:sp>
         <p:nvSpPr>
-          <p:cNvPr id="53" name="TextBox 52"/>
+          <p:cNvPr id="61" name="TextBox 60"/>
           <p:cNvSpPr txBox="1"/>
           <p:nvPr/>
         </p:nvSpPr>
         <p:spPr>
           <a:xfrm>
-            <a:off x="4878324" y="5312664"/>
+            <a:off x="4878324" y="5861304"/>
             <a:ext cx="1242669" cy="411480"/>
           </a:xfrm>
           <a:prstGeom prst="rect">
@@ -5434,13 +5624,13 @@
       </p:sp>
       <p:sp>
         <p:nvSpPr>
-          <p:cNvPr id="54" name="Oval 53"/>
+          <p:cNvPr id="62" name="Oval 61"/>
           <p:cNvSpPr/>
           <p:nvPr/>
         </p:nvSpPr>
         <p:spPr>
           <a:xfrm>
-            <a:off x="5522976" y="3831336"/>
+            <a:off x="5522976" y="4379976"/>
             <a:ext cx="109728" cy="109728"/>
           </a:xfrm>
           <a:prstGeom prst="ellipse">
@@ -5479,13 +5669,13 @@
       </p:sp>
       <p:sp>
         <p:nvSpPr>
-          <p:cNvPr id="55" name="TextBox 54"/>
+          <p:cNvPr id="63" name="TextBox 62"/>
           <p:cNvSpPr txBox="1"/>
           <p:nvPr/>
         </p:nvSpPr>
         <p:spPr>
           <a:xfrm>
-            <a:off x="5541264" y="4178808"/>
+            <a:off x="5541264" y="4727448"/>
             <a:ext cx="1210299" cy="411480"/>
           </a:xfrm>
           <a:prstGeom prst="rect">
@@ -5540,13 +5730,13 @@
       </p:sp>
       <p:sp>
         <p:nvSpPr>
-          <p:cNvPr id="56" name="Oval 55"/>
+          <p:cNvPr id="64" name="Oval 63"/>
           <p:cNvSpPr/>
           <p:nvPr/>
         </p:nvSpPr>
         <p:spPr>
           <a:xfrm>
-            <a:off x="6163056" y="3808476"/>
+            <a:off x="6163056" y="4357116"/>
             <a:ext cx="155448" cy="155448"/>
           </a:xfrm>
           <a:prstGeom prst="ellipse">
@@ -5585,13 +5775,13 @@
       </p:sp>
       <p:sp>
         <p:nvSpPr>
-          <p:cNvPr id="57" name="TextBox 56"/>
+          <p:cNvPr id="65" name="TextBox 64"/>
           <p:cNvSpPr txBox="1"/>
           <p:nvPr/>
         </p:nvSpPr>
         <p:spPr>
           <a:xfrm>
-            <a:off x="6204204" y="4745736"/>
+            <a:off x="6204204" y="5294376"/>
             <a:ext cx="1695846" cy="411480"/>
           </a:xfrm>
           <a:prstGeom prst="rect">
@@ -5646,13 +5836,13 @@
       </p:sp>
       <p:sp>
         <p:nvSpPr>
-          <p:cNvPr id="58" name="Oval 57"/>
+          <p:cNvPr id="66" name="Oval 65"/>
           <p:cNvSpPr/>
           <p:nvPr/>
         </p:nvSpPr>
         <p:spPr>
           <a:xfrm>
-            <a:off x="6848856" y="3831336"/>
+            <a:off x="6848856" y="4379976"/>
             <a:ext cx="109728" cy="109728"/>
           </a:xfrm>
           <a:prstGeom prst="ellipse">
@@ -5691,13 +5881,13 @@
       </p:sp>
       <p:sp>
         <p:nvSpPr>
-          <p:cNvPr id="59" name="TextBox 58"/>
+          <p:cNvPr id="67" name="TextBox 66"/>
           <p:cNvSpPr txBox="1"/>
           <p:nvPr/>
         </p:nvSpPr>
         <p:spPr>
           <a:xfrm>
-            <a:off x="6867144" y="5312664"/>
+            <a:off x="6867144" y="5861304"/>
             <a:ext cx="1577157" cy="411480"/>
           </a:xfrm>
           <a:prstGeom prst="rect">
@@ -5752,13 +5942,13 @@
       </p:sp>
       <p:sp>
         <p:nvSpPr>
-          <p:cNvPr id="60" name="Oval 59"/>
+          <p:cNvPr id="68" name="Oval 67"/>
           <p:cNvSpPr/>
           <p:nvPr/>
         </p:nvSpPr>
         <p:spPr>
           <a:xfrm>
-            <a:off x="7488936" y="3808476"/>
+            <a:off x="7488936" y="4357116"/>
             <a:ext cx="155448" cy="155448"/>
           </a:xfrm>
           <a:prstGeom prst="ellipse">
@@ -5797,13 +5987,13 @@
       </p:sp>
       <p:sp>
         <p:nvSpPr>
-          <p:cNvPr id="61" name="TextBox 60"/>
+          <p:cNvPr id="69" name="TextBox 68"/>
           <p:cNvSpPr txBox="1"/>
           <p:nvPr/>
         </p:nvSpPr>
         <p:spPr>
           <a:xfrm>
-            <a:off x="7530084" y="4178808"/>
+            <a:off x="7530084" y="4727448"/>
             <a:ext cx="1469257" cy="411480"/>
           </a:xfrm>
           <a:prstGeom prst="rect">
@@ -5858,13 +6048,13 @@
       </p:sp>
       <p:sp>
         <p:nvSpPr>
-          <p:cNvPr id="62" name="Oval 61"/>
+          <p:cNvPr id="70" name="Oval 69"/>
           <p:cNvSpPr/>
           <p:nvPr/>
         </p:nvSpPr>
         <p:spPr>
           <a:xfrm>
-            <a:off x="8151875" y="3808476"/>
+            <a:off x="8151875" y="4357116"/>
             <a:ext cx="155448" cy="155448"/>
           </a:xfrm>
           <a:prstGeom prst="ellipse">
@@ -5903,13 +6093,13 @@
       </p:sp>
       <p:sp>
         <p:nvSpPr>
-          <p:cNvPr id="63" name="TextBox 62"/>
+          <p:cNvPr id="71" name="TextBox 70"/>
           <p:cNvSpPr txBox="1"/>
           <p:nvPr/>
         </p:nvSpPr>
         <p:spPr>
           <a:xfrm>
-            <a:off x="8193024" y="4745736"/>
+            <a:off x="8193024" y="5294376"/>
             <a:ext cx="2149022" cy="411480"/>
           </a:xfrm>
           <a:prstGeom prst="rect">
@@ -5964,13 +6154,13 @@
       </p:sp>
       <p:sp>
         <p:nvSpPr>
-          <p:cNvPr id="64" name="Oval 63"/>
+          <p:cNvPr id="72" name="Oval 71"/>
           <p:cNvSpPr/>
           <p:nvPr/>
         </p:nvSpPr>
         <p:spPr>
           <a:xfrm>
-            <a:off x="8778240" y="2880360"/>
+            <a:off x="8778240" y="3520440"/>
             <a:ext cx="640080" cy="640080"/>
           </a:xfrm>
           <a:prstGeom prst="ellipse">
@@ -6009,13 +6199,13 @@
       </p:sp>
       <p:sp>
         <p:nvSpPr>
-          <p:cNvPr id="65" name="Freeform 64"/>
+          <p:cNvPr id="73" name="Freeform 72"/>
           <p:cNvSpPr/>
           <p:nvPr/>
         </p:nvSpPr>
         <p:spPr>
           <a:xfrm>
-            <a:off x="8979407" y="3154680"/>
+            <a:off x="8979407" y="3794760"/>
             <a:ext cx="237745" cy="137160"/>
           </a:xfrm>
           <a:custGeom>
@@ -6075,13 +6265,13 @@
       </p:sp>
       <p:sp>
         <p:nvSpPr>
-          <p:cNvPr id="66" name="Freeform 65"/>
+          <p:cNvPr id="74" name="Freeform 73"/>
           <p:cNvSpPr/>
           <p:nvPr/>
         </p:nvSpPr>
         <p:spPr>
           <a:xfrm>
-            <a:off x="9057132" y="3108960"/>
+            <a:off x="9057132" y="3749040"/>
             <a:ext cx="82296" cy="45720"/>
           </a:xfrm>
           <a:custGeom>
@@ -6140,13 +6330,13 @@
       </p:sp>
       <p:cxnSp>
         <p:nvCxnSpPr>
-          <p:cNvPr id="67" name="Connector 66"/>
+          <p:cNvPr id="75" name="Connector 74"/>
           <p:cNvCxnSpPr/>
           <p:nvPr/>
         </p:nvCxnSpPr>
         <p:spPr>
           <a:xfrm>
-            <a:off x="8979407" y="3209544"/>
+            <a:off x="8979407" y="3849624"/>
             <a:ext cx="237745" cy="0"/>
           </a:xfrm>
           <a:prstGeom prst="line">
@@ -6161,13 +6351,13 @@
       </p:cxnSp>
       <p:sp>
         <p:nvSpPr>
-          <p:cNvPr id="68" name="TextBox 67"/>
+          <p:cNvPr id="76" name="TextBox 75"/>
           <p:cNvSpPr txBox="1"/>
           <p:nvPr/>
         </p:nvSpPr>
         <p:spPr>
           <a:xfrm>
-            <a:off x="8823959" y="1527048"/>
+            <a:off x="8823959" y="2167128"/>
             <a:ext cx="2651760" cy="1289304"/>
           </a:xfrm>
           <a:prstGeom prst="rect">
@@ -6292,13 +6482,13 @@
       </p:sp>
       <p:cxnSp>
         <p:nvCxnSpPr>
-          <p:cNvPr id="69" name="Connector 68"/>
+          <p:cNvPr id="77" name="Connector 76"/>
           <p:cNvCxnSpPr/>
           <p:nvPr/>
         </p:nvCxnSpPr>
         <p:spPr>
           <a:xfrm>
-            <a:off x="9418319" y="3200400"/>
+            <a:off x="9418319" y="3840480"/>
             <a:ext cx="658369" cy="0"/>
           </a:xfrm>
           <a:prstGeom prst="line">
@@ -6313,13 +6503,13 @@
       </p:cxnSp>
       <p:sp>
         <p:nvSpPr>
-          <p:cNvPr id="70" name="Oval 69"/>
+          <p:cNvPr id="78" name="Oval 77"/>
           <p:cNvSpPr/>
           <p:nvPr/>
         </p:nvSpPr>
         <p:spPr>
           <a:xfrm>
-            <a:off x="10076688" y="2990088"/>
+            <a:off x="10076688" y="3630168"/>
             <a:ext cx="420624" cy="420624"/>
           </a:xfrm>
           <a:prstGeom prst="ellipse">
@@ -6360,13 +6550,13 @@
       </p:sp>
       <p:sp>
         <p:nvSpPr>
-          <p:cNvPr id="71" name="Freeform 70"/>
+          <p:cNvPr id="79" name="Freeform 78"/>
           <p:cNvSpPr/>
           <p:nvPr/>
         </p:nvSpPr>
         <p:spPr>
           <a:xfrm>
-            <a:off x="10177272" y="3127248"/>
+            <a:off x="10177272" y="3767328"/>
             <a:ext cx="219456" cy="146304"/>
           </a:xfrm>
           <a:custGeom>
@@ -6426,13 +6616,13 @@
       </p:sp>
       <p:cxnSp>
         <p:nvCxnSpPr>
-          <p:cNvPr id="72" name="Connector 71"/>
+          <p:cNvPr id="80" name="Connector 79"/>
           <p:cNvCxnSpPr/>
           <p:nvPr/>
         </p:nvCxnSpPr>
         <p:spPr>
           <a:xfrm>
-            <a:off x="10177272" y="3168396"/>
+            <a:off x="10177272" y="3808476"/>
             <a:ext cx="219456" cy="0"/>
           </a:xfrm>
           <a:prstGeom prst="line">
@@ -6447,13 +6637,13 @@
       </p:cxnSp>
       <p:cxnSp>
         <p:nvCxnSpPr>
-          <p:cNvPr id="73" name="Connector 72"/>
+          <p:cNvPr id="81" name="Connector 80"/>
           <p:cNvCxnSpPr/>
           <p:nvPr/>
         </p:nvCxnSpPr>
         <p:spPr>
           <a:xfrm>
-            <a:off x="10213848" y="3236976"/>
+            <a:off x="10213848" y="3877056"/>
             <a:ext cx="54864" cy="0"/>
           </a:xfrm>
           <a:prstGeom prst="line">
@@ -6468,13 +6658,13 @@
       </p:cxnSp>
       <p:sp>
         <p:nvSpPr>
-          <p:cNvPr id="74" name="TextBox 73"/>
+          <p:cNvPr id="82" name="TextBox 81"/>
           <p:cNvSpPr txBox="1"/>
           <p:nvPr/>
         </p:nvSpPr>
         <p:spPr>
           <a:xfrm>
-            <a:off x="10012680" y="3529584"/>
+            <a:off x="10012680" y="4169664"/>
             <a:ext cx="1630375" cy="274320"/>
           </a:xfrm>
           <a:prstGeom prst="rect">

--- a/ppt/역량PT_김연주.pptx
+++ b/ppt/역량PT_김연주.pptx
@@ -6799,7 +6799,7 @@
                 <a:ea typeface="Pretendard Medium"/>
                 <a:cs typeface="Pretendard Medium"/>
               </a:rPr>
-              <a:t>대출 부실 예측모형 자동 점검 시스템</a:t>
+              <a:t>신용평가모형 자동 점검 시스템</a:t>
             </a:r>
           </a:p>
         </p:txBody>
@@ -6926,7 +6926,7 @@
                 <a:ea typeface="Pretendard"/>
                 <a:cs typeface="Pretendard"/>
               </a:rPr>
-              <a:t>시간 경과에 따른 부실 예측모형 정확도 저하</a:t>
+              <a:t>시간 경과에 따른 신용평가모형 정확도 저하</a:t>
             </a:r>
           </a:p>
           <a:p>
@@ -6944,7 +6944,7 @@
                 <a:ea typeface="Pretendard"/>
                 <a:cs typeface="Pretendard"/>
               </a:rPr>
-              <a:t>실제 부실률 상승, 모형 예측치 하락 (부실률: 대출 실행 후 2년 내 미상환 비율)</a:t>
+              <a:t>실제 연체율 상승, 모형 예측치 하락 (연체율: 대출 실행 후 2년 내 상환 중단 후 손실 처리 비율)</a:t>
             </a:r>
           </a:p>
         </p:txBody>
@@ -7061,7 +7061,7 @@
                 <a:ea typeface="Pretendard"/>
                 <a:cs typeface="Pretendard"/>
               </a:rPr>
-              <a:t>분기별 예측 부실률·실제 부실률 비교</a:t>
+              <a:t>분기별 예측 연체율·실제 연체율 비교</a:t>
             </a:r>
           </a:p>
         </p:txBody>

--- a/ppt/역량PT_김연주.pptx
+++ b/ppt/역량PT_김연주.pptx
@@ -6926,7 +6926,7 @@
                 <a:ea typeface="Pretendard"/>
                 <a:cs typeface="Pretendard"/>
               </a:rPr>
-              <a:t>시간 경과에 따른 신용평가모형 정확도 저하</a:t>
+              <a:t>신용평가모형의 예측 연체율과 실제 연체율 차이 확대</a:t>
             </a:r>
           </a:p>
           <a:p>
@@ -6944,7 +6944,7 @@
                 <a:ea typeface="Pretendard"/>
                 <a:cs typeface="Pretendard"/>
               </a:rPr>
-              <a:t>실제 연체율 상승, 모형 예측치 하락 (연체율: 대출 실행 후 2년 내 상환 중단 후 손실 처리 비율)</a:t>
+              <a:t>실제 연체율 상승, 예측 연체율 하락 (연체율: 대출 실행 후 2년 내 상환 중단 후 손실 처리 비율)</a:t>
             </a:r>
           </a:p>
         </p:txBody>
@@ -7061,7 +7061,7 @@
                 <a:ea typeface="Pretendard"/>
                 <a:cs typeface="Pretendard"/>
               </a:rPr>
-              <a:t>분기별 예측 연체율·실제 연체율 비교</a:t>
+              <a:t>3개월마다 예측 연체율과 실제 연체율 비교</a:t>
             </a:r>
           </a:p>
         </p:txBody>
@@ -7113,7 +7113,7 @@
                 <a:ea typeface="Pretendard"/>
                 <a:cs typeface="Pretendard"/>
               </a:rPr>
-              <a:t>오차 확대 시 수정안 11종 검증 (1년 전 자료로 수립, 이후 실적으로 평가)</a:t>
+              <a:t>차이가 기준 초과 시 모형 수정안 11종 성능 비교</a:t>
             </a:r>
           </a:p>
         </p:txBody>
@@ -7165,7 +7165,7 @@
                 <a:ea typeface="Pretendard"/>
                 <a:cs typeface="Pretendard"/>
               </a:rPr>
-              <a:t>기준 충족안만 담당자 보고, 적용 여부는 담당자 결정</a:t>
+              <a:t>기준 통과안만 담당자 보고, 적용 여부는 담당자 결정</a:t>
             </a:r>
           </a:p>
         </p:txBody>
@@ -7251,7 +7251,7 @@
                 <a:ea typeface="Pretendard Medium"/>
                 <a:cs typeface="Pretendard Medium"/>
               </a:rPr>
-              <a:t>성과  2015~2018년 13개 분기 재현</a:t>
+              <a:t>성과  2015~2018년 자료로 3년간 운영 재현</a:t>
             </a:r>
           </a:p>
         </p:txBody>
@@ -7333,7 +7333,7 @@
                 <a:ea typeface="Pretendard SemiBold"/>
                 <a:cs typeface="Pretendard SemiBold"/>
               </a:rPr>
-              <a:t>이상 감지 시점</a:t>
+              <a:t>연체율 차이 발견 시점</a:t>
             </a:r>
           </a:p>
           <a:p>
@@ -7351,7 +7351,7 @@
                 <a:ea typeface="Pretendard"/>
                 <a:cs typeface="Pretendard"/>
               </a:rPr>
-              <a:t>대출 1년 실적 병행 확인</a:t>
+              <a:t>대출 후 1년 시점 연체 결과 활용 (기존 2년)</a:t>
             </a:r>
           </a:p>
         </p:txBody>
@@ -7433,7 +7433,7 @@
                 <a:ea typeface="Pretendard SemiBold"/>
                 <a:cs typeface="Pretendard SemiBold"/>
               </a:rPr>
-              <a:t>예측 오차 (권고안 적용 후)</a:t>
+              <a:t>수정안 적용 후 예측 연체율 오차</a:t>
             </a:r>
           </a:p>
           <a:p>
@@ -7551,7 +7551,7 @@
                 <a:ea typeface="Pretendard SemiBold"/>
                 <a:cs typeface="Pretendard SemiBold"/>
               </a:rPr>
-              <a:t>모형 교체 횟수 (3년)</a:t>
+              <a:t>3년간 모형 교체 횟수</a:t>
             </a:r>
           </a:p>
           <a:p>
@@ -7569,7 +7569,7 @@
                 <a:ea typeface="Pretendard"/>
                 <a:cs typeface="Pretendard"/>
               </a:rPr>
-              <a:t>분기별 재학습 방식 13회 대비</a:t>
+              <a:t>3개월마다 재학습하는 방식 13회 대비</a:t>
             </a:r>
           </a:p>
           <a:p>
@@ -7652,7 +7652,7 @@
                 <a:ea typeface="Pretendard"/>
                 <a:cs typeface="Pretendard"/>
               </a:rPr>
-              <a:t>결과 화면</a:t>
+              <a:t>결과 화면 (시점별 점검 결과 확인)</a:t>
             </a:r>
           </a:p>
           <a:p>

--- a/ppt/역량PT_김연주.pptx
+++ b/ppt/역량PT_김연주.pptx
@@ -6806,13 +6806,87 @@
       </p:sp>
       <p:sp>
         <p:nvSpPr>
-          <p:cNvPr id="4" name="Rectangle 3"/>
+          <p:cNvPr id="4" name="TextBox 3"/>
+          <p:cNvSpPr txBox="1"/>
+          <p:nvPr/>
+        </p:nvSpPr>
+        <p:spPr>
+          <a:xfrm>
+            <a:off x="548640" y="1325880"/>
+            <a:ext cx="11094415" cy="228600"/>
+          </a:xfrm>
+          <a:prstGeom prst="rect">
+            <a:avLst/>
+          </a:prstGeom>
+          <a:noFill/>
+        </p:spPr>
+        <p:txBody>
+          <a:bodyPr wrap="none" lIns="0" tIns="0" rIns="0" bIns="0" anchor="t">
+            <a:spAutoFit/>
+          </a:bodyPr>
+          <a:lstStyle/>
+          <a:p>
+            <a:pPr algn="l">
+              <a:lnSpc>
+                <a:spcPct val="115000"/>
+              </a:lnSpc>
+            </a:pPr>
+            <a:r>
+              <a:rPr sz="1000" b="0">
+                <a:solidFill>
+                  <a:srgbClr val="000000"/>
+                </a:solidFill>
+                <a:latin typeface="Pretendard SemiBold"/>
+                <a:ea typeface="Pretendard SemiBold"/>
+                <a:cs typeface="Pretendard SemiBold"/>
+              </a:rPr>
+              <a:t>데이터</a:t>
+            </a:r>
+            <a:r>
+              <a:rPr sz="1000" b="0">
+                <a:solidFill>
+                  <a:srgbClr val="6B6B6B"/>
+                </a:solidFill>
+                <a:latin typeface="Pretendard"/>
+                <a:ea typeface="Pretendard"/>
+                <a:cs typeface="Pretendard"/>
+              </a:rPr>
+              <a:t>  Lending Club 대출 226만 건 (2007~2018년)      </a:t>
+            </a:r>
+            <a:r>
+              <a:rPr sz="1000" b="0">
+                <a:solidFill>
+                  <a:srgbClr val="000000"/>
+                </a:solidFill>
+                <a:latin typeface="Pretendard SemiBold"/>
+                <a:ea typeface="Pretendard SemiBold"/>
+                <a:cs typeface="Pretendard SemiBold"/>
+              </a:rPr>
+              <a:t>모형</a:t>
+            </a:r>
+            <a:r>
+              <a:rPr sz="1000" b="0">
+                <a:solidFill>
+                  <a:srgbClr val="6B6B6B"/>
+                </a:solidFill>
+                <a:latin typeface="Pretendard"/>
+                <a:ea typeface="Pretendard"/>
+                <a:cs typeface="Pretendard"/>
+              </a:rPr>
+              <a:t>  2010~2012년 대출 8.7만 건의 대출 조건, 소득, 신용 이력으로 학습한 LightGBM 연체 예측모형</a:t>
+            </a:r>
+          </a:p>
+        </p:txBody>
+      </p:sp>
+      <p:sp>
+        <p:nvSpPr>
+          <p:cNvPr id="5" name="Rectangle 4"/>
           <p:cNvSpPr/>
           <p:nvPr/>
         </p:nvSpPr>
         <p:spPr>
           <a:xfrm>
-            <a:off x="548640" y="1476565"/>
+            <a:off x="548640" y="1622869"/>
             <a:ext cx="11094415" cy="9525"/>
           </a:xfrm>
           <a:prstGeom prst="rect">
@@ -6851,13 +6925,13 @@
       </p:sp>
       <p:sp>
         <p:nvSpPr>
-          <p:cNvPr id="5" name="TextBox 4"/>
+          <p:cNvPr id="6" name="TextBox 5"/>
           <p:cNvSpPr txBox="1"/>
           <p:nvPr/>
         </p:nvSpPr>
         <p:spPr>
           <a:xfrm>
-            <a:off x="548640" y="1691640"/>
+            <a:off x="548640" y="1755648"/>
             <a:ext cx="5486400" cy="228600"/>
           </a:xfrm>
           <a:prstGeom prst="rect">
@@ -6892,7 +6966,7 @@
       </p:sp>
       <p:sp>
         <p:nvSpPr>
-          <p:cNvPr id="6" name="TextBox 5"/>
+          <p:cNvPr id="7" name="TextBox 6"/>
           <p:cNvSpPr txBox="1"/>
           <p:nvPr/>
         </p:nvSpPr>
@@ -6951,7 +7025,7 @@
       </p:sp>
       <p:pic>
         <p:nvPicPr>
-          <p:cNvPr id="7" name="Picture 6" descr="chart_default.png"/>
+          <p:cNvPr id="8" name="Picture 7" descr="chart_default.png"/>
           <p:cNvPicPr>
             <a:picLocks noChangeAspect="1"/>
           </p:cNvPicPr>
@@ -6975,13 +7049,13 @@
       </p:pic>
       <p:sp>
         <p:nvSpPr>
-          <p:cNvPr id="8" name="TextBox 7"/>
+          <p:cNvPr id="9" name="TextBox 8"/>
           <p:cNvSpPr txBox="1"/>
           <p:nvPr/>
         </p:nvSpPr>
         <p:spPr>
           <a:xfrm>
-            <a:off x="6537959" y="1691640"/>
+            <a:off x="6537959" y="1755648"/>
             <a:ext cx="5105095" cy="228600"/>
           </a:xfrm>
           <a:prstGeom prst="rect">
@@ -7016,7 +7090,7 @@
       </p:sp>
       <p:sp>
         <p:nvSpPr>
-          <p:cNvPr id="9" name="TextBox 8"/>
+          <p:cNvPr id="10" name="TextBox 9"/>
           <p:cNvSpPr txBox="1"/>
           <p:nvPr/>
         </p:nvSpPr>
@@ -7068,7 +7142,7 @@
       </p:sp>
       <p:sp>
         <p:nvSpPr>
-          <p:cNvPr id="10" name="TextBox 9"/>
+          <p:cNvPr id="11" name="TextBox 10"/>
           <p:cNvSpPr txBox="1"/>
           <p:nvPr/>
         </p:nvSpPr>
@@ -7120,7 +7194,7 @@
       </p:sp>
       <p:sp>
         <p:nvSpPr>
-          <p:cNvPr id="11" name="TextBox 10"/>
+          <p:cNvPr id="12" name="TextBox 11"/>
           <p:cNvSpPr txBox="1"/>
           <p:nvPr/>
         </p:nvSpPr>
@@ -7172,7 +7246,7 @@
       </p:sp>
       <p:sp>
         <p:nvSpPr>
-          <p:cNvPr id="12" name="Rectangle 11"/>
+          <p:cNvPr id="13" name="Rectangle 12"/>
           <p:cNvSpPr/>
           <p:nvPr/>
         </p:nvSpPr>
@@ -7217,7 +7291,7 @@
       </p:sp>
       <p:sp>
         <p:nvSpPr>
-          <p:cNvPr id="13" name="TextBox 12"/>
+          <p:cNvPr id="14" name="TextBox 13"/>
           <p:cNvSpPr txBox="1"/>
           <p:nvPr/>
         </p:nvSpPr>
@@ -7258,7 +7332,7 @@
       </p:sp>
       <p:sp>
         <p:nvSpPr>
-          <p:cNvPr id="14" name="TextBox 13"/>
+          <p:cNvPr id="15" name="TextBox 14"/>
           <p:cNvSpPr txBox="1"/>
           <p:nvPr/>
         </p:nvSpPr>
@@ -7299,7 +7373,7 @@
       </p:sp>
       <p:sp>
         <p:nvSpPr>
-          <p:cNvPr id="15" name="TextBox 14"/>
+          <p:cNvPr id="16" name="TextBox 15"/>
           <p:cNvSpPr txBox="1"/>
           <p:nvPr/>
         </p:nvSpPr>
@@ -7358,7 +7432,7 @@
       </p:sp>
       <p:sp>
         <p:nvSpPr>
-          <p:cNvPr id="16" name="TextBox 15"/>
+          <p:cNvPr id="17" name="TextBox 16"/>
           <p:cNvSpPr txBox="1"/>
           <p:nvPr/>
         </p:nvSpPr>
@@ -7399,7 +7473,7 @@
       </p:sp>
       <p:sp>
         <p:nvSpPr>
-          <p:cNvPr id="17" name="TextBox 16"/>
+          <p:cNvPr id="18" name="TextBox 17"/>
           <p:cNvSpPr txBox="1"/>
           <p:nvPr/>
         </p:nvSpPr>
@@ -7476,7 +7550,7 @@
       </p:sp>
       <p:sp>
         <p:nvSpPr>
-          <p:cNvPr id="18" name="TextBox 17"/>
+          <p:cNvPr id="19" name="TextBox 18"/>
           <p:cNvSpPr txBox="1"/>
           <p:nvPr/>
         </p:nvSpPr>
@@ -7517,7 +7591,7 @@
       </p:sp>
       <p:sp>
         <p:nvSpPr>
-          <p:cNvPr id="19" name="TextBox 18"/>
+          <p:cNvPr id="20" name="TextBox 19"/>
           <p:cNvSpPr txBox="1"/>
           <p:nvPr/>
         </p:nvSpPr>
@@ -7594,7 +7668,7 @@
       </p:sp>
       <p:pic>
         <p:nvPicPr>
-          <p:cNvPr id="20" name="Picture 19" descr="qr.png"/>
+          <p:cNvPr id="21" name="Picture 20" descr="qr.png"/>
           <p:cNvPicPr>
             <a:picLocks noChangeAspect="1"/>
           </p:cNvPicPr>
@@ -7618,7 +7692,7 @@
       </p:pic>
       <p:sp>
         <p:nvSpPr>
-          <p:cNvPr id="21" name="TextBox 20"/>
+          <p:cNvPr id="22" name="TextBox 21"/>
           <p:cNvSpPr txBox="1"/>
           <p:nvPr/>
         </p:nvSpPr>
@@ -7677,7 +7751,7 @@
       </p:sp>
       <p:sp>
         <p:nvSpPr>
-          <p:cNvPr id="22" name="TextBox 21"/>
+          <p:cNvPr id="23" name="TextBox 22"/>
           <p:cNvSpPr txBox="1"/>
           <p:nvPr/>
         </p:nvSpPr>
@@ -7711,7 +7785,7 @@
                 <a:ea typeface="Pretendard"/>
                 <a:cs typeface="Pretendard"/>
               </a:rPr>
-              <a:t>자료: Lending Club 공개 대출 226만 건. 시점별 판단에 해당 시점까지의 정보만 사용. 실제 금융회사 운영 사례 아님</a:t>
+              <a:t>시점별 판단에 해당 시점까지의 정보만 사용. 실제 금융회사 운영 사례 아님</a:t>
             </a:r>
           </a:p>
         </p:txBody>

--- a/ppt/역량PT_김연주.pptx
+++ b/ppt/역량PT_김연주.pptx
@@ -7428,6 +7428,24 @@
               <a:t>대출 후 1년 시점 연체 결과 활용 (기존 2년)</a:t>
             </a:r>
           </a:p>
+          <a:p>
+            <a:pPr algn="l">
+              <a:lnSpc>
+                <a:spcPct val="125000"/>
+              </a:lnSpc>
+            </a:pPr>
+            <a:r>
+              <a:rPr sz="900" b="0">
+                <a:solidFill>
+                  <a:srgbClr val="6B6B6B"/>
+                </a:solidFill>
+                <a:latin typeface="Pretendard"/>
+                <a:ea typeface="Pretendard"/>
+                <a:cs typeface="Pretendard"/>
+              </a:rPr>
+              <a:t>2016~2017년 사례 기준</a:t>
+            </a:r>
+          </a:p>
         </p:txBody>
       </p:sp>
       <p:sp>
@@ -7525,7 +7543,7 @@
                 <a:ea typeface="Pretendard"/>
                 <a:cs typeface="Pretendard"/>
               </a:rPr>
-              <a:t>적용 전 33%</a:t>
+              <a:t>적용 전 33% (상대 오차: 실제÷예측-1)</a:t>
             </a:r>
           </a:p>
           <a:p>
@@ -7625,7 +7643,25 @@
                 <a:ea typeface="Pretendard SemiBold"/>
                 <a:cs typeface="Pretendard SemiBold"/>
               </a:rPr>
-              <a:t>3년간 모형 교체 횟수</a:t>
+              <a:t>3년간 모형 변경 횟수</a:t>
+            </a:r>
+          </a:p>
+          <a:p>
+            <a:pPr algn="l">
+              <a:lnSpc>
+                <a:spcPct val="125000"/>
+              </a:lnSpc>
+            </a:pPr>
+            <a:r>
+              <a:rPr sz="900" b="0">
+                <a:solidFill>
+                  <a:srgbClr val="6B6B6B"/>
+                </a:solidFill>
+                <a:latin typeface="Pretendard"/>
+                <a:ea typeface="Pretendard"/>
+                <a:cs typeface="Pretendard"/>
+              </a:rPr>
+              <a:t>재학습 1, 예측치 조정 3</a:t>
             </a:r>
           </a:p>
           <a:p>
@@ -7757,8 +7793,8 @@
         </p:nvSpPr>
         <p:spPr>
           <a:xfrm>
-            <a:off x="6537959" y="6400800"/>
-            <a:ext cx="5105095" cy="274320"/>
+            <a:off x="6537959" y="6291072"/>
+            <a:ext cx="5105095" cy="365760"/>
           </a:xfrm>
           <a:prstGeom prst="rect">
             <a:avLst/>
@@ -7773,7 +7809,25 @@
           <a:p>
             <a:pPr algn="l">
               <a:lnSpc>
-                <a:spcPct val="115000"/>
+                <a:spcPct val="120000"/>
+              </a:lnSpc>
+            </a:pPr>
+            <a:r>
+              <a:rPr sz="750" b="0">
+                <a:solidFill>
+                  <a:srgbClr val="9A9A9A"/>
+                </a:solidFill>
+                <a:latin typeface="Pretendard"/>
+                <a:ea typeface="Pretendard"/>
+                <a:cs typeface="Pretendard"/>
+              </a:rPr>
+              <a:t>오차 개선은 2018년 1분기 단일 판단, 변경 횟수는 변경 승인 가정 3년 누적 운영 기준</a:t>
+            </a:r>
+          </a:p>
+          <a:p>
+            <a:pPr algn="l">
+              <a:lnSpc>
+                <a:spcPct val="120000"/>
               </a:lnSpc>
             </a:pPr>
             <a:r>

--- a/ppt/역량PT_김연주.pptx
+++ b/ppt/역량PT_김연주.pptx
@@ -318,7 +318,7 @@
           <a:p>
             <a:fld id="{5BCAD085-E8A6-8845-BD4E-CB4CCA059FC4}" type="datetimeFigureOut">
               <a:rPr lang="en-US" smtClean="0"/>
-              <a:t>10/22/2026</a:t>
+              <a:t>10/23/2026</a:t>
             </a:fld>
             <a:endParaRPr lang="en-US"/>
           </a:p>
@@ -486,7 +486,7 @@
           <a:p>
             <a:fld id="{5BCAD085-E8A6-8845-BD4E-CB4CCA059FC4}" type="datetimeFigureOut">
               <a:rPr lang="en-US" smtClean="0"/>
-              <a:t>10/22/2026</a:t>
+              <a:t>10/23/2026</a:t>
             </a:fld>
             <a:endParaRPr lang="en-US"/>
           </a:p>
@@ -664,7 +664,7 @@
           <a:p>
             <a:fld id="{5BCAD085-E8A6-8845-BD4E-CB4CCA059FC4}" type="datetimeFigureOut">
               <a:rPr lang="en-US" smtClean="0"/>
-              <a:t>10/22/2026</a:t>
+              <a:t>10/23/2026</a:t>
             </a:fld>
             <a:endParaRPr lang="en-US"/>
           </a:p>
@@ -832,7 +832,7 @@
           <a:p>
             <a:fld id="{5BCAD085-E8A6-8845-BD4E-CB4CCA059FC4}" type="datetimeFigureOut">
               <a:rPr lang="en-US" smtClean="0"/>
-              <a:t>10/22/2026</a:t>
+              <a:t>10/23/2026</a:t>
             </a:fld>
             <a:endParaRPr lang="en-US"/>
           </a:p>
@@ -1077,7 +1077,7 @@
           <a:p>
             <a:fld id="{5BCAD085-E8A6-8845-BD4E-CB4CCA059FC4}" type="datetimeFigureOut">
               <a:rPr lang="en-US" smtClean="0"/>
-              <a:t>10/22/2026</a:t>
+              <a:t>10/23/2026</a:t>
             </a:fld>
             <a:endParaRPr lang="en-US"/>
           </a:p>
@@ -1362,7 +1362,7 @@
           <a:p>
             <a:fld id="{5BCAD085-E8A6-8845-BD4E-CB4CCA059FC4}" type="datetimeFigureOut">
               <a:rPr lang="en-US" smtClean="0"/>
-              <a:t>10/22/2026</a:t>
+              <a:t>10/23/2026</a:t>
             </a:fld>
             <a:endParaRPr lang="en-US"/>
           </a:p>
@@ -1781,7 +1781,7 @@
           <a:p>
             <a:fld id="{5BCAD085-E8A6-8845-BD4E-CB4CCA059FC4}" type="datetimeFigureOut">
               <a:rPr lang="en-US" smtClean="0"/>
-              <a:t>10/22/2026</a:t>
+              <a:t>10/23/2026</a:t>
             </a:fld>
             <a:endParaRPr lang="en-US"/>
           </a:p>
@@ -1898,7 +1898,7 @@
           <a:p>
             <a:fld id="{5BCAD085-E8A6-8845-BD4E-CB4CCA059FC4}" type="datetimeFigureOut">
               <a:rPr lang="en-US" smtClean="0"/>
-              <a:t>10/22/2026</a:t>
+              <a:t>10/23/2026</a:t>
             </a:fld>
             <a:endParaRPr lang="en-US"/>
           </a:p>
@@ -1993,7 +1993,7 @@
           <a:p>
             <a:fld id="{5BCAD085-E8A6-8845-BD4E-CB4CCA059FC4}" type="datetimeFigureOut">
               <a:rPr lang="en-US" smtClean="0"/>
-              <a:t>10/22/2026</a:t>
+              <a:t>10/23/2026</a:t>
             </a:fld>
             <a:endParaRPr lang="en-US"/>
           </a:p>
@@ -2268,7 +2268,7 @@
           <a:p>
             <a:fld id="{5BCAD085-E8A6-8845-BD4E-CB4CCA059FC4}" type="datetimeFigureOut">
               <a:rPr lang="en-US" smtClean="0"/>
-              <a:t>10/22/2026</a:t>
+              <a:t>10/23/2026</a:t>
             </a:fld>
             <a:endParaRPr lang="en-US"/>
           </a:p>
@@ -2520,7 +2520,7 @@
           <a:p>
             <a:fld id="{5BCAD085-E8A6-8845-BD4E-CB4CCA059FC4}" type="datetimeFigureOut">
               <a:rPr lang="en-US" smtClean="0"/>
-              <a:t>10/22/2026</a:t>
+              <a:t>10/23/2026</a:t>
             </a:fld>
             <a:endParaRPr lang="en-US"/>
           </a:p>
@@ -2731,7 +2731,7 @@
           <a:p>
             <a:fld id="{5BCAD085-E8A6-8845-BD4E-CB4CCA059FC4}" type="datetimeFigureOut">
               <a:rPr lang="en-US" smtClean="0"/>
-              <a:t>10/22/2026</a:t>
+              <a:t>10/23/2026</a:t>
             </a:fld>
             <a:endParaRPr lang="en-US"/>
           </a:p>
@@ -4755,9 +4755,95 @@
           </a:ln>
         </p:spPr>
       </p:cxnSp>
+      <p:sp>
+        <p:nvSpPr>
+          <p:cNvPr id="39" name="Rectangle 38"/>
+          <p:cNvSpPr/>
+          <p:nvPr/>
+        </p:nvSpPr>
+        <p:spPr>
+          <a:xfrm>
+            <a:off x="6932097" y="3017520"/>
+            <a:ext cx="572288" cy="82296"/>
+          </a:xfrm>
+          <a:prstGeom prst="rect">
+            <a:avLst/>
+          </a:prstGeom>
+          <a:solidFill>
+            <a:srgbClr val="D2D2D2"/>
+          </a:solidFill>
+          <a:ln>
+            <a:noFill/>
+          </a:ln>
+          <a:effectLst/>
+        </p:spPr>
+        <p:style>
+          <a:lnRef idx="1">
+            <a:schemeClr val="accent1"/>
+          </a:lnRef>
+          <a:fillRef idx="3">
+            <a:schemeClr val="accent1"/>
+          </a:fillRef>
+          <a:effectRef idx="2">
+            <a:schemeClr val="accent1"/>
+          </a:effectRef>
+          <a:fontRef idx="minor">
+            <a:schemeClr val="lt1"/>
+          </a:fontRef>
+        </p:style>
+        <p:txBody>
+          <a:bodyPr rtlCol="0" anchor="ctr"/>
+          <a:lstStyle/>
+          <a:p>
+            <a:pPr algn="ctr"/>
+            <a:endParaRPr/>
+          </a:p>
+        </p:txBody>
+      </p:sp>
+      <p:sp>
+        <p:nvSpPr>
+          <p:cNvPr id="40" name="TextBox 39"/>
+          <p:cNvSpPr txBox="1"/>
+          <p:nvPr/>
+        </p:nvSpPr>
+        <p:spPr>
+          <a:xfrm>
+            <a:off x="7577538" y="2944368"/>
+            <a:ext cx="1097280" cy="201168"/>
+          </a:xfrm>
+          <a:prstGeom prst="rect">
+            <a:avLst/>
+          </a:prstGeom>
+          <a:noFill/>
+        </p:spPr>
+        <p:txBody>
+          <a:bodyPr wrap="none" lIns="0" tIns="0" rIns="0" bIns="0" anchor="t">
+            <a:spAutoFit/>
+          </a:bodyPr>
+          <a:lstStyle/>
+          <a:p>
+            <a:pPr algn="l">
+              <a:lnSpc>
+                <a:spcPct val="115000"/>
+              </a:lnSpc>
+            </a:pPr>
+            <a:r>
+              <a:rPr sz="850" b="0">
+                <a:solidFill>
+                  <a:srgbClr val="6B6B6B"/>
+                </a:solidFill>
+                <a:latin typeface="Pretendard"/>
+                <a:ea typeface="Pretendard"/>
+                <a:cs typeface="Pretendard"/>
+              </a:rPr>
+              <a:t>BCG 인턴</a:t>
+            </a:r>
+          </a:p>
+        </p:txBody>
+      </p:sp>
       <p:cxnSp>
         <p:nvCxnSpPr>
-          <p:cNvPr id="39" name="Connector 38"/>
+          <p:cNvPr id="41" name="Connector 40"/>
           <p:cNvCxnSpPr/>
           <p:nvPr/>
         </p:nvCxnSpPr>
@@ -4778,7 +4864,7 @@
       </p:cxnSp>
       <p:cxnSp>
         <p:nvCxnSpPr>
-          <p:cNvPr id="40" name="Connector 39"/>
+          <p:cNvPr id="42" name="Connector 41"/>
           <p:cNvCxnSpPr/>
           <p:nvPr/>
         </p:nvCxnSpPr>
@@ -4799,7 +4885,7 @@
       </p:cxnSp>
       <p:cxnSp>
         <p:nvCxnSpPr>
-          <p:cNvPr id="41" name="Connector 40"/>
+          <p:cNvPr id="43" name="Connector 42"/>
           <p:cNvCxnSpPr/>
           <p:nvPr/>
         </p:nvCxnSpPr>
@@ -4820,7 +4906,7 @@
       </p:cxnSp>
       <p:cxnSp>
         <p:nvCxnSpPr>
-          <p:cNvPr id="42" name="Connector 41"/>
+          <p:cNvPr id="44" name="Connector 43"/>
           <p:cNvCxnSpPr/>
           <p:nvPr/>
         </p:nvCxnSpPr>
@@ -4841,7 +4927,7 @@
       </p:cxnSp>
       <p:cxnSp>
         <p:nvCxnSpPr>
-          <p:cNvPr id="43" name="Connector 42"/>
+          <p:cNvPr id="45" name="Connector 44"/>
           <p:cNvCxnSpPr/>
           <p:nvPr/>
         </p:nvCxnSpPr>
@@ -4862,7 +4948,7 @@
       </p:cxnSp>
       <p:cxnSp>
         <p:nvCxnSpPr>
-          <p:cNvPr id="44" name="Connector 43"/>
+          <p:cNvPr id="46" name="Connector 45"/>
           <p:cNvCxnSpPr/>
           <p:nvPr/>
         </p:nvCxnSpPr>
@@ -4883,7 +4969,7 @@
       </p:cxnSp>
       <p:cxnSp>
         <p:nvCxnSpPr>
-          <p:cNvPr id="45" name="Connector 44"/>
+          <p:cNvPr id="47" name="Connector 46"/>
           <p:cNvCxnSpPr/>
           <p:nvPr/>
         </p:nvCxnSpPr>
@@ -4904,7 +4990,7 @@
       </p:cxnSp>
       <p:cxnSp>
         <p:nvCxnSpPr>
-          <p:cNvPr id="46" name="Connector 45"/>
+          <p:cNvPr id="48" name="Connector 47"/>
           <p:cNvCxnSpPr/>
           <p:nvPr/>
         </p:nvCxnSpPr>
@@ -4925,7 +5011,7 @@
       </p:cxnSp>
       <p:cxnSp>
         <p:nvCxnSpPr>
-          <p:cNvPr id="47" name="Connector 46"/>
+          <p:cNvPr id="49" name="Connector 48"/>
           <p:cNvCxnSpPr/>
           <p:nvPr/>
         </p:nvCxnSpPr>
@@ -4946,7 +5032,7 @@
       </p:cxnSp>
       <p:cxnSp>
         <p:nvCxnSpPr>
-          <p:cNvPr id="48" name="Connector 47"/>
+          <p:cNvPr id="50" name="Connector 49"/>
           <p:cNvCxnSpPr/>
           <p:nvPr/>
         </p:nvCxnSpPr>
@@ -4967,7 +5053,7 @@
       </p:cxnSp>
       <p:cxnSp>
         <p:nvCxnSpPr>
-          <p:cNvPr id="49" name="Connector 48"/>
+          <p:cNvPr id="51" name="Connector 50"/>
           <p:cNvCxnSpPr/>
           <p:nvPr/>
         </p:nvCxnSpPr>
@@ -4988,7 +5074,7 @@
       </p:cxnSp>
       <p:sp>
         <p:nvSpPr>
-          <p:cNvPr id="50" name="Oval 49"/>
+          <p:cNvPr id="52" name="Oval 51"/>
           <p:cNvSpPr/>
           <p:nvPr/>
         </p:nvSpPr>
@@ -5033,7 +5119,7 @@
       </p:sp>
       <p:sp>
         <p:nvSpPr>
-          <p:cNvPr id="51" name="TextBox 50"/>
+          <p:cNvPr id="53" name="TextBox 52"/>
           <p:cNvSpPr txBox="1"/>
           <p:nvPr/>
         </p:nvSpPr>
@@ -5094,7 +5180,7 @@
       </p:sp>
       <p:sp>
         <p:nvSpPr>
-          <p:cNvPr id="52" name="Oval 51"/>
+          <p:cNvPr id="54" name="Oval 53"/>
           <p:cNvSpPr/>
           <p:nvPr/>
         </p:nvSpPr>
@@ -5139,7 +5225,7 @@
       </p:sp>
       <p:sp>
         <p:nvSpPr>
-          <p:cNvPr id="53" name="TextBox 52"/>
+          <p:cNvPr id="55" name="TextBox 54"/>
           <p:cNvSpPr txBox="1"/>
           <p:nvPr/>
         </p:nvSpPr>
@@ -5200,7 +5286,7 @@
       </p:sp>
       <p:sp>
         <p:nvSpPr>
-          <p:cNvPr id="54" name="Oval 53"/>
+          <p:cNvPr id="56" name="Oval 55"/>
           <p:cNvSpPr/>
           <p:nvPr/>
         </p:nvSpPr>
@@ -5245,7 +5331,7 @@
       </p:sp>
       <p:sp>
         <p:nvSpPr>
-          <p:cNvPr id="55" name="TextBox 54"/>
+          <p:cNvPr id="57" name="TextBox 56"/>
           <p:cNvSpPr txBox="1"/>
           <p:nvPr/>
         </p:nvSpPr>
@@ -5306,7 +5392,7 @@
       </p:sp>
       <p:sp>
         <p:nvSpPr>
-          <p:cNvPr id="56" name="Oval 55"/>
+          <p:cNvPr id="58" name="Oval 57"/>
           <p:cNvSpPr/>
           <p:nvPr/>
         </p:nvSpPr>
@@ -5351,7 +5437,7 @@
       </p:sp>
       <p:sp>
         <p:nvSpPr>
-          <p:cNvPr id="57" name="TextBox 56"/>
+          <p:cNvPr id="59" name="TextBox 58"/>
           <p:cNvSpPr txBox="1"/>
           <p:nvPr/>
         </p:nvSpPr>
@@ -5412,7 +5498,7 @@
       </p:sp>
       <p:sp>
         <p:nvSpPr>
-          <p:cNvPr id="58" name="Oval 57"/>
+          <p:cNvPr id="60" name="Oval 59"/>
           <p:cNvSpPr/>
           <p:nvPr/>
         </p:nvSpPr>
@@ -5457,7 +5543,7 @@
       </p:sp>
       <p:sp>
         <p:nvSpPr>
-          <p:cNvPr id="59" name="TextBox 58"/>
+          <p:cNvPr id="61" name="TextBox 60"/>
           <p:cNvSpPr txBox="1"/>
           <p:nvPr/>
         </p:nvSpPr>
@@ -5518,7 +5604,7 @@
       </p:sp>
       <p:sp>
         <p:nvSpPr>
-          <p:cNvPr id="60" name="Oval 59"/>
+          <p:cNvPr id="62" name="Oval 61"/>
           <p:cNvSpPr/>
           <p:nvPr/>
         </p:nvSpPr>
@@ -5563,7 +5649,7 @@
       </p:sp>
       <p:sp>
         <p:nvSpPr>
-          <p:cNvPr id="61" name="TextBox 60"/>
+          <p:cNvPr id="63" name="TextBox 62"/>
           <p:cNvSpPr txBox="1"/>
           <p:nvPr/>
         </p:nvSpPr>
@@ -5624,7 +5710,7 @@
       </p:sp>
       <p:sp>
         <p:nvSpPr>
-          <p:cNvPr id="62" name="Oval 61"/>
+          <p:cNvPr id="64" name="Oval 63"/>
           <p:cNvSpPr/>
           <p:nvPr/>
         </p:nvSpPr>
@@ -5669,7 +5755,7 @@
       </p:sp>
       <p:sp>
         <p:nvSpPr>
-          <p:cNvPr id="63" name="TextBox 62"/>
+          <p:cNvPr id="65" name="TextBox 64"/>
           <p:cNvSpPr txBox="1"/>
           <p:nvPr/>
         </p:nvSpPr>
@@ -5730,7 +5816,7 @@
       </p:sp>
       <p:sp>
         <p:nvSpPr>
-          <p:cNvPr id="64" name="Oval 63"/>
+          <p:cNvPr id="66" name="Oval 65"/>
           <p:cNvSpPr/>
           <p:nvPr/>
         </p:nvSpPr>
@@ -5775,7 +5861,7 @@
       </p:sp>
       <p:sp>
         <p:nvSpPr>
-          <p:cNvPr id="65" name="TextBox 64"/>
+          <p:cNvPr id="67" name="TextBox 66"/>
           <p:cNvSpPr txBox="1"/>
           <p:nvPr/>
         </p:nvSpPr>
@@ -5836,7 +5922,7 @@
       </p:sp>
       <p:sp>
         <p:nvSpPr>
-          <p:cNvPr id="66" name="Oval 65"/>
+          <p:cNvPr id="68" name="Oval 67"/>
           <p:cNvSpPr/>
           <p:nvPr/>
         </p:nvSpPr>
@@ -5881,7 +5967,7 @@
       </p:sp>
       <p:sp>
         <p:nvSpPr>
-          <p:cNvPr id="67" name="TextBox 66"/>
+          <p:cNvPr id="69" name="TextBox 68"/>
           <p:cNvSpPr txBox="1"/>
           <p:nvPr/>
         </p:nvSpPr>
@@ -5942,7 +6028,7 @@
       </p:sp>
       <p:sp>
         <p:nvSpPr>
-          <p:cNvPr id="68" name="Oval 67"/>
+          <p:cNvPr id="70" name="Oval 69"/>
           <p:cNvSpPr/>
           <p:nvPr/>
         </p:nvSpPr>
@@ -5987,7 +6073,7 @@
       </p:sp>
       <p:sp>
         <p:nvSpPr>
-          <p:cNvPr id="69" name="TextBox 68"/>
+          <p:cNvPr id="71" name="TextBox 70"/>
           <p:cNvSpPr txBox="1"/>
           <p:nvPr/>
         </p:nvSpPr>
@@ -6048,7 +6134,7 @@
       </p:sp>
       <p:sp>
         <p:nvSpPr>
-          <p:cNvPr id="70" name="Oval 69"/>
+          <p:cNvPr id="72" name="Oval 71"/>
           <p:cNvSpPr/>
           <p:nvPr/>
         </p:nvSpPr>
@@ -6093,7 +6179,7 @@
       </p:sp>
       <p:sp>
         <p:nvSpPr>
-          <p:cNvPr id="71" name="TextBox 70"/>
+          <p:cNvPr id="73" name="TextBox 72"/>
           <p:cNvSpPr txBox="1"/>
           <p:nvPr/>
         </p:nvSpPr>
@@ -6154,7 +6240,7 @@
       </p:sp>
       <p:sp>
         <p:nvSpPr>
-          <p:cNvPr id="72" name="Oval 71"/>
+          <p:cNvPr id="74" name="Oval 73"/>
           <p:cNvSpPr/>
           <p:nvPr/>
         </p:nvSpPr>
@@ -6199,7 +6285,7 @@
       </p:sp>
       <p:sp>
         <p:nvSpPr>
-          <p:cNvPr id="73" name="Freeform 72"/>
+          <p:cNvPr id="75" name="Freeform 74"/>
           <p:cNvSpPr/>
           <p:nvPr/>
         </p:nvSpPr>
@@ -6265,7 +6351,7 @@
       </p:sp>
       <p:sp>
         <p:nvSpPr>
-          <p:cNvPr id="74" name="Freeform 73"/>
+          <p:cNvPr id="76" name="Freeform 75"/>
           <p:cNvSpPr/>
           <p:nvPr/>
         </p:nvSpPr>
@@ -6330,7 +6416,7 @@
       </p:sp>
       <p:cxnSp>
         <p:nvCxnSpPr>
-          <p:cNvPr id="75" name="Connector 74"/>
+          <p:cNvPr id="77" name="Connector 76"/>
           <p:cNvCxnSpPr/>
           <p:nvPr/>
         </p:nvCxnSpPr>
@@ -6351,7 +6437,7 @@
       </p:cxnSp>
       <p:sp>
         <p:nvSpPr>
-          <p:cNvPr id="76" name="TextBox 75"/>
+          <p:cNvPr id="78" name="TextBox 77"/>
           <p:cNvSpPr txBox="1"/>
           <p:nvPr/>
         </p:nvSpPr>
@@ -6482,7 +6568,7 @@
       </p:sp>
       <p:cxnSp>
         <p:nvCxnSpPr>
-          <p:cNvPr id="77" name="Connector 76"/>
+          <p:cNvPr id="79" name="Connector 78"/>
           <p:cNvCxnSpPr/>
           <p:nvPr/>
         </p:nvCxnSpPr>
@@ -6503,7 +6589,7 @@
       </p:cxnSp>
       <p:sp>
         <p:nvSpPr>
-          <p:cNvPr id="78" name="Oval 77"/>
+          <p:cNvPr id="80" name="Oval 79"/>
           <p:cNvSpPr/>
           <p:nvPr/>
         </p:nvSpPr>
@@ -6550,7 +6636,7 @@
       </p:sp>
       <p:sp>
         <p:nvSpPr>
-          <p:cNvPr id="79" name="Freeform 78"/>
+          <p:cNvPr id="81" name="Freeform 80"/>
           <p:cNvSpPr/>
           <p:nvPr/>
         </p:nvSpPr>
@@ -6616,7 +6702,7 @@
       </p:sp>
       <p:cxnSp>
         <p:nvCxnSpPr>
-          <p:cNvPr id="80" name="Connector 79"/>
+          <p:cNvPr id="82" name="Connector 81"/>
           <p:cNvCxnSpPr/>
           <p:nvPr/>
         </p:nvCxnSpPr>
@@ -6637,7 +6723,7 @@
       </p:cxnSp>
       <p:cxnSp>
         <p:nvCxnSpPr>
-          <p:cNvPr id="81" name="Connector 80"/>
+          <p:cNvPr id="83" name="Connector 82"/>
           <p:cNvCxnSpPr/>
           <p:nvPr/>
         </p:nvCxnSpPr>
@@ -6658,7 +6744,7 @@
       </p:cxnSp>
       <p:sp>
         <p:nvSpPr>
-          <p:cNvPr id="82" name="TextBox 81"/>
+          <p:cNvPr id="84" name="TextBox 83"/>
           <p:cNvSpPr txBox="1"/>
           <p:nvPr/>
         </p:nvSpPr>
@@ -6873,7 +6959,7 @@
                 <a:ea typeface="Pretendard"/>
                 <a:cs typeface="Pretendard"/>
               </a:rPr>
-              <a:t>  2010~2012년 대출 8.7만 건의 대출 조건, 소득, 신용 이력으로 학습한 LightGBM 연체 예측모형</a:t>
+              <a:t>  2010~2012년 대출 8.7만 건의 대출 조건, 소득, 신용 이력으로 학습한 LightGBM 모형 (2년 내 상각 확률 예측)</a:t>
             </a:r>
           </a:p>
         </p:txBody>
@@ -7000,7 +7086,7 @@
                 <a:ea typeface="Pretendard"/>
                 <a:cs typeface="Pretendard"/>
               </a:rPr>
-              <a:t>신용평가모형의 예측 연체율과 실제 연체율 차이 확대</a:t>
+              <a:t>신용평가모형의 예측 상각률과 실제 상각률 차이 확대</a:t>
             </a:r>
           </a:p>
           <a:p>
@@ -7018,7 +7104,7 @@
                 <a:ea typeface="Pretendard"/>
                 <a:cs typeface="Pretendard"/>
               </a:rPr>
-              <a:t>실제 연체율 상승, 예측 연체율 하락 (연체율: 대출 실행 후 2년 내 상환 중단 후 손실 처리 비율)</a:t>
+              <a:t>실제 상각률 상승, 예측 상각률 하락 (상각률: 대출 실행 후 2년 내 상환 중단 후 손실 처리 비율)</a:t>
             </a:r>
           </a:p>
         </p:txBody>
@@ -7135,7 +7221,7 @@
                 <a:ea typeface="Pretendard"/>
                 <a:cs typeface="Pretendard"/>
               </a:rPr>
-              <a:t>3개월마다 예측 연체율과 실제 연체율 비교</a:t>
+              <a:t>3개월마다 예측 상각률과 실제 상각률 비교</a:t>
             </a:r>
           </a:p>
         </p:txBody>
@@ -7246,7 +7332,48 @@
       </p:sp>
       <p:sp>
         <p:nvSpPr>
-          <p:cNvPr id="13" name="Rectangle 12"/>
+          <p:cNvPr id="13" name="TextBox 12"/>
+          <p:cNvSpPr txBox="1"/>
+          <p:nvPr/>
+        </p:nvSpPr>
+        <p:spPr>
+          <a:xfrm>
+            <a:off x="6720840" y="2871216"/>
+            <a:ext cx="4922215" cy="201168"/>
+          </a:xfrm>
+          <a:prstGeom prst="rect">
+            <a:avLst/>
+          </a:prstGeom>
+          <a:noFill/>
+        </p:spPr>
+        <p:txBody>
+          <a:bodyPr wrap="none" lIns="0" tIns="0" rIns="0" bIns="0" anchor="t">
+            <a:spAutoFit/>
+          </a:bodyPr>
+          <a:lstStyle/>
+          <a:p>
+            <a:pPr algn="l">
+              <a:lnSpc>
+                <a:spcPct val="115000"/>
+              </a:lnSpc>
+            </a:pPr>
+            <a:r>
+              <a:rPr sz="850" b="0">
+                <a:solidFill>
+                  <a:srgbClr val="6B6B6B"/>
+                </a:solidFill>
+                <a:latin typeface="Pretendard"/>
+                <a:ea typeface="Pretendard"/>
+                <a:cs typeface="Pretendard"/>
+              </a:rPr>
+              <a:t>보고서 초안: Claude Opus 5.5, 보고서 수치는 계산 결과와 항목별 자동 대조</a:t>
+            </a:r>
+          </a:p>
+        </p:txBody>
+      </p:sp>
+      <p:sp>
+        <p:nvSpPr>
+          <p:cNvPr id="14" name="Rectangle 13"/>
           <p:cNvSpPr/>
           <p:nvPr/>
         </p:nvSpPr>
@@ -7291,7 +7418,7 @@
       </p:sp>
       <p:sp>
         <p:nvSpPr>
-          <p:cNvPr id="14" name="TextBox 13"/>
+          <p:cNvPr id="15" name="TextBox 14"/>
           <p:cNvSpPr txBox="1"/>
           <p:nvPr/>
         </p:nvSpPr>
@@ -7332,7 +7459,7 @@
       </p:sp>
       <p:sp>
         <p:nvSpPr>
-          <p:cNvPr id="15" name="TextBox 14"/>
+          <p:cNvPr id="16" name="TextBox 15"/>
           <p:cNvSpPr txBox="1"/>
           <p:nvPr/>
         </p:nvSpPr>
@@ -7366,14 +7493,14 @@
                 <a:ea typeface="Pretendard"/>
                 <a:cs typeface="Pretendard"/>
               </a:rPr>
-              <a:t>6개월 단축</a:t>
-            </a:r>
-          </a:p>
-        </p:txBody>
-      </p:sp>
-      <p:sp>
-        <p:nvSpPr>
-          <p:cNvPr id="16" name="TextBox 15"/>
+              <a:t>2분기 앞당김</a:t>
+            </a:r>
+          </a:p>
+        </p:txBody>
+      </p:sp>
+      <p:sp>
+        <p:nvSpPr>
+          <p:cNvPr id="17" name="TextBox 16"/>
           <p:cNvSpPr txBox="1"/>
           <p:nvPr/>
         </p:nvSpPr>
@@ -7407,7 +7534,7 @@
                 <a:ea typeface="Pretendard SemiBold"/>
                 <a:cs typeface="Pretendard SemiBold"/>
               </a:rPr>
-              <a:t>연체율 차이 발견 시점</a:t>
+              <a:t>상각률 이상 경고 시점</a:t>
             </a:r>
           </a:p>
           <a:p>
@@ -7425,7 +7552,7 @@
                 <a:ea typeface="Pretendard"/>
                 <a:cs typeface="Pretendard"/>
               </a:rPr>
-              <a:t>대출 후 1년 시점 연체 결과 활용 (기존 2년)</a:t>
+              <a:t>대출 후 1년 중간 실적 활용 (기존 2년 실적)</a:t>
             </a:r>
           </a:p>
           <a:p>
@@ -7443,14 +7570,14 @@
                 <a:ea typeface="Pretendard"/>
                 <a:cs typeface="Pretendard"/>
               </a:rPr>
-              <a:t>2016~2017년 사례 기준</a:t>
-            </a:r>
-          </a:p>
-        </p:txBody>
-      </p:sp>
-      <p:sp>
-        <p:nvSpPr>
-          <p:cNvPr id="17" name="TextBox 16"/>
+              <a:t>2016~2017년 단일 사례</a:t>
+            </a:r>
+          </a:p>
+        </p:txBody>
+      </p:sp>
+      <p:sp>
+        <p:nvSpPr>
+          <p:cNvPr id="18" name="TextBox 17"/>
           <p:cNvSpPr txBox="1"/>
           <p:nvPr/>
         </p:nvSpPr>
@@ -7491,7 +7618,7 @@
       </p:sp>
       <p:sp>
         <p:nvSpPr>
-          <p:cNvPr id="18" name="TextBox 17"/>
+          <p:cNvPr id="19" name="TextBox 18"/>
           <p:cNvSpPr txBox="1"/>
           <p:nvPr/>
         </p:nvSpPr>
@@ -7525,7 +7652,7 @@
                 <a:ea typeface="Pretendard SemiBold"/>
                 <a:cs typeface="Pretendard SemiBold"/>
               </a:rPr>
-              <a:t>수정안 적용 후 예측 연체율 오차</a:t>
+              <a:t>수정안 적용 후 상각률 예측 오차</a:t>
             </a:r>
           </a:p>
           <a:p>
@@ -7543,7 +7670,7 @@
                 <a:ea typeface="Pretendard"/>
                 <a:cs typeface="Pretendard"/>
               </a:rPr>
-              <a:t>적용 전 33% (상대 오차: 실제÷예측-1)</a:t>
+              <a:t>적용 전 33%, 상대 오차 (실제÷예측-1)</a:t>
             </a:r>
           </a:p>
           <a:p>
@@ -7561,14 +7688,32 @@
                 <a:ea typeface="Pretendard"/>
                 <a:cs typeface="Pretendard"/>
               </a:rPr>
-              <a:t>2018년 1분기 보유 대출 46만 건 기준</a:t>
-            </a:r>
-          </a:p>
-        </p:txBody>
-      </p:sp>
-      <p:sp>
-        <p:nvSpPr>
-          <p:cNvPr id="19" name="TextBox 18"/>
+              <a:t>절대 차이 3.4%p에서 1.6%p로</a:t>
+            </a:r>
+          </a:p>
+          <a:p>
+            <a:pPr algn="l">
+              <a:lnSpc>
+                <a:spcPct val="125000"/>
+              </a:lnSpc>
+            </a:pPr>
+            <a:r>
+              <a:rPr sz="900" b="0">
+                <a:solidFill>
+                  <a:srgbClr val="6B6B6B"/>
+                </a:solidFill>
+                <a:latin typeface="Pretendard"/>
+                <a:ea typeface="Pretendard"/>
+                <a:cs typeface="Pretendard"/>
+              </a:rPr>
+              <a:t>2018년 1분기 보유 대출 46만 건 사후 평가</a:t>
+            </a:r>
+          </a:p>
+        </p:txBody>
+      </p:sp>
+      <p:sp>
+        <p:nvSpPr>
+          <p:cNvPr id="20" name="TextBox 19"/>
           <p:cNvSpPr txBox="1"/>
           <p:nvPr/>
         </p:nvSpPr>
@@ -7609,7 +7754,7 @@
       </p:sp>
       <p:sp>
         <p:nvSpPr>
-          <p:cNvPr id="20" name="TextBox 19"/>
+          <p:cNvPr id="21" name="TextBox 20"/>
           <p:cNvSpPr txBox="1"/>
           <p:nvPr/>
         </p:nvSpPr>
@@ -7661,7 +7806,7 @@
                 <a:ea typeface="Pretendard"/>
                 <a:cs typeface="Pretendard"/>
               </a:rPr>
-              <a:t>재학습 1, 예측치 조정 3</a:t>
+              <a:t>재학습 1, 예측치 조정 3 (변경 승인 가정)</a:t>
             </a:r>
           </a:p>
           <a:p>
@@ -7679,7 +7824,7 @@
                 <a:ea typeface="Pretendard"/>
                 <a:cs typeface="Pretendard"/>
               </a:rPr>
-              <a:t>3개월마다 재학습하는 방식 13회 대비</a:t>
+              <a:t>정기 재학습 13회 대비 평균 오차 19.4%에서 17.3%로</a:t>
             </a:r>
           </a:p>
           <a:p>
@@ -7697,14 +7842,14 @@
                 <a:ea typeface="Pretendard"/>
                 <a:cs typeface="Pretendard"/>
               </a:rPr>
-              <a:t>평균 오차 19.4% 대비 17.3%</a:t>
+              <a:t>변별력(AUC)은 정기 재학습 우위 (0.701 대 0.693)</a:t>
             </a:r>
           </a:p>
         </p:txBody>
       </p:sp>
       <p:pic>
         <p:nvPicPr>
-          <p:cNvPr id="21" name="Picture 20" descr="qr.png"/>
+          <p:cNvPr id="22" name="Picture 21" descr="qr.png"/>
           <p:cNvPicPr>
             <a:picLocks noChangeAspect="1"/>
           </p:cNvPicPr>
@@ -7728,7 +7873,7 @@
       </p:pic>
       <p:sp>
         <p:nvSpPr>
-          <p:cNvPr id="22" name="TextBox 21"/>
+          <p:cNvPr id="23" name="TextBox 22"/>
           <p:cNvSpPr txBox="1"/>
           <p:nvPr/>
         </p:nvSpPr>
@@ -7787,7 +7932,7 @@
       </p:sp>
       <p:sp>
         <p:nvSpPr>
-          <p:cNvPr id="23" name="TextBox 22"/>
+          <p:cNvPr id="24" name="TextBox 23"/>
           <p:cNvSpPr txBox="1"/>
           <p:nvPr/>
         </p:nvSpPr>
@@ -7813,7 +7958,7 @@
               </a:lnSpc>
             </a:pPr>
             <a:r>
-              <a:rPr sz="750" b="0">
+              <a:rPr sz="800" b="0">
                 <a:solidFill>
                   <a:srgbClr val="9A9A9A"/>
                 </a:solidFill>
@@ -7821,7 +7966,7 @@
                 <a:ea typeface="Pretendard"/>
                 <a:cs typeface="Pretendard"/>
               </a:rPr>
-              <a:t>오차 개선은 2018년 1분기 단일 판단, 변경 횟수는 변경 승인 가정 3년 누적 운영 기준</a:t>
+              <a:t>판정 규칙은 같은 기간 결과를 보고 조정한 탐색 단계 결과. 상각 시점은 마지막 납부월 기준 근사</a:t>
             </a:r>
           </a:p>
           <a:p>
@@ -7831,7 +7976,7 @@
               </a:lnSpc>
             </a:pPr>
             <a:r>
-              <a:rPr sz="750" b="0">
+              <a:rPr sz="800" b="0">
                 <a:solidFill>
                   <a:srgbClr val="9A9A9A"/>
                 </a:solidFill>
@@ -7839,7 +7984,7 @@
                 <a:ea typeface="Pretendard"/>
                 <a:cs typeface="Pretendard"/>
               </a:rPr>
-              <a:t>시점별 판단에 해당 시점까지의 정보만 사용. 실제 금융회사 운영 사례 아님</a:t>
+              <a:t>시점별 판단에 해당 시점까지의 정보만 사용. 공개 자료 기반 과거 재현, 실제 금융회사 운영 사례 아님</a:t>
             </a:r>
           </a:p>
         </p:txBody>

--- a/ppt/역량PT_김연주.pptx
+++ b/ppt/역량PT_김연주.pptx
@@ -4763,7 +4763,7 @@
         </p:nvSpPr>
         <p:spPr>
           <a:xfrm>
-            <a:off x="6932097" y="3017520"/>
+            <a:off x="6932097" y="3081528"/>
             <a:ext cx="572288" cy="82296"/>
           </a:xfrm>
           <a:prstGeom prst="rect">
@@ -4808,7 +4808,7 @@
         </p:nvSpPr>
         <p:spPr>
           <a:xfrm>
-            <a:off x="7577538" y="2944368"/>
+            <a:off x="7577538" y="3026664"/>
             <a:ext cx="1097280" cy="201168"/>
           </a:xfrm>
           <a:prstGeom prst="rect">
@@ -7104,7 +7104,7 @@
                 <a:ea typeface="Pretendard"/>
                 <a:cs typeface="Pretendard"/>
               </a:rPr>
-              <a:t>실제 상각률 상승, 예측 상각률 하락 (상각률: 대출 실행 후 2년 내 상환 중단 후 손실 처리 비율)</a:t>
+              <a:t>실제 상각률 상승, 예측 상각률 하락 (상각률은 대출 실행 후 2년 내 상환 중단 후 손실 처리 비율)</a:t>
             </a:r>
           </a:p>
         </p:txBody>
@@ -7366,7 +7366,7 @@
                 <a:ea typeface="Pretendard"/>
                 <a:cs typeface="Pretendard"/>
               </a:rPr>
-              <a:t>보고서 초안: Claude Opus 5.5, 보고서 수치는 계산 결과와 항목별 자동 대조</a:t>
+              <a:t>보고서 초안은 Claude Opus 5.5 작성, 수치는 계산 결과와 항목별 자동 대조</a:t>
             </a:r>
           </a:p>
         </p:txBody>
@@ -7379,7 +7379,7 @@
         </p:nvSpPr>
         <p:spPr>
           <a:xfrm>
-            <a:off x="6537959" y="3031045"/>
+            <a:off x="6537959" y="3104197"/>
             <a:ext cx="5105095" cy="9525"/>
           </a:xfrm>
           <a:prstGeom prst="rect">
@@ -7424,7 +7424,7 @@
         </p:nvSpPr>
         <p:spPr>
           <a:xfrm>
-            <a:off x="6537959" y="3154680"/>
+            <a:off x="6537959" y="3200400"/>
             <a:ext cx="5105095" cy="228600"/>
           </a:xfrm>
           <a:prstGeom prst="rect">

--- a/ppt/역량PT_김연주.pptx
+++ b/ppt/역량PT_김연주.pptx
@@ -3455,17 +3455,6 @@
               </a:rPr>
               <a:t>   2021.03 ~ 2025.08</a:t>
             </a:r>
-            <a:r>
-              <a:rPr sz="850" b="0">
-                <a:solidFill>
-                  <a:srgbClr val="6B6B6B"/>
-                </a:solidFill>
-                <a:latin typeface="Pretendard"/>
-                <a:ea typeface="Pretendard"/>
-                <a:cs typeface="Pretendard"/>
-              </a:rPr>
-              <a:t>   통계적 추론과 모델링</a:t>
-            </a:r>
           </a:p>
         </p:txBody>
       </p:sp>
@@ -3782,17 +3771,6 @@
                 <a:cs typeface="Pretendard"/>
               </a:rPr>
               <a:t>   2024.09 ~ 2024.12</a:t>
-            </a:r>
-            <a:r>
-              <a:rPr sz="850" b="0">
-                <a:solidFill>
-                  <a:srgbClr val="6B6B6B"/>
-                </a:solidFill>
-                <a:latin typeface="Pretendard"/>
-                <a:ea typeface="Pretendard"/>
-                <a:cs typeface="Pretendard"/>
-              </a:rPr>
-              <a:t>   통계학 전공 학업 지원</a:t>
             </a:r>
           </a:p>
         </p:txBody>
@@ -4076,17 +4054,6 @@
               </a:rPr>
               <a:t>   2025.01 ~ 2026.07</a:t>
             </a:r>
-            <a:r>
-              <a:rPr sz="850" b="0">
-                <a:solidFill>
-                  <a:srgbClr val="6B6B6B"/>
-                </a:solidFill>
-                <a:latin typeface="Pretendard"/>
-                <a:ea typeface="Pretendard"/>
-                <a:cs typeface="Pretendard"/>
-              </a:rPr>
-              <a:t>   학회장, 운영팀장, 스터디 진행, 프로젝트 진행</a:t>
-            </a:r>
           </a:p>
         </p:txBody>
       </p:sp>
@@ -4475,17 +4442,6 @@
                 <a:cs typeface="Pretendard"/>
               </a:rPr>
               <a:t>   2025.09 ~ 2027.02</a:t>
-            </a:r>
-            <a:r>
-              <a:rPr sz="850" b="0">
-                <a:solidFill>
-                  <a:srgbClr val="6B6B6B"/>
-                </a:solidFill>
-                <a:latin typeface="Pretendard"/>
-                <a:ea typeface="Pretendard"/>
-                <a:cs typeface="Pretendard"/>
-              </a:rPr>
-              <a:t>   딥러닝</a:t>
             </a:r>
           </a:p>
         </p:txBody>

--- a/ppt/역량PT_김연주.pptx
+++ b/ppt/역량PT_김연주.pptx
@@ -7281,7 +7281,7 @@
                 <a:ea typeface="Pretendard"/>
                 <a:cs typeface="Pretendard"/>
               </a:rPr>
-              <a:t>기준 통과안만 담당자 보고, 적용 여부는 담당자 결정</a:t>
+              <a:t>기준 통과안 담당자 보고, 적용 여부는 담당자 결정</a:t>
             </a:r>
           </a:p>
         </p:txBody>
@@ -7449,7 +7449,7 @@
                 <a:ea typeface="Pretendard"/>
                 <a:cs typeface="Pretendard"/>
               </a:rPr>
-              <a:t>2분기 앞당김</a:t>
+              <a:t>6개월 미리 예측</a:t>
             </a:r>
           </a:p>
         </p:txBody>
@@ -7940,7 +7940,7 @@
                 <a:ea typeface="Pretendard"/>
                 <a:cs typeface="Pretendard"/>
               </a:rPr>
-              <a:t>시점별 판단에 해당 시점까지의 정보만 사용. 공개 자료 기반 과거 재현, 실제 금융회사 운영 사례 아님</a:t>
+              <a:t>시점별 판단은 해당 시점까지 확정된 정보로 수행. 공개 자료 기반 과거 재현, 실제 금융회사 운영 사례 아님</a:t>
             </a:r>
           </a:p>
         </p:txBody>

--- a/ppt/역량PT_김연주.pptx
+++ b/ppt/역량PT_김연주.pptx
@@ -7060,14 +7060,55 @@
                 <a:ea typeface="Pretendard"/>
                 <a:cs typeface="Pretendard"/>
               </a:rPr>
-              <a:t>실제 상각률 상승, 예측 상각률 하락 (상각률은 대출 실행 후 2년 내 상환 중단 후 손실 처리 비율)</a:t>
+              <a:t>상각률은 대출 실행 후 2년 내 상환 중단 후 손실 처리 비율. 예측 오차는 |실제÷예측-1|</a:t>
+            </a:r>
+          </a:p>
+        </p:txBody>
+      </p:sp>
+      <p:sp>
+        <p:nvSpPr>
+          <p:cNvPr id="8" name="TextBox 7"/>
+          <p:cNvSpPr txBox="1"/>
+          <p:nvPr/>
+        </p:nvSpPr>
+        <p:spPr>
+          <a:xfrm>
+            <a:off x="548640" y="2487168"/>
+            <a:ext cx="5486400" cy="228600"/>
+          </a:xfrm>
+          <a:prstGeom prst="rect">
+            <a:avLst/>
+          </a:prstGeom>
+          <a:noFill/>
+        </p:spPr>
+        <p:txBody>
+          <a:bodyPr wrap="none" lIns="0" tIns="0" rIns="0" bIns="0" anchor="t">
+            <a:spAutoFit/>
+          </a:bodyPr>
+          <a:lstStyle/>
+          <a:p>
+            <a:pPr algn="l">
+              <a:lnSpc>
+                <a:spcPct val="115000"/>
+              </a:lnSpc>
+            </a:pPr>
+            <a:r>
+              <a:rPr sz="900" b="0">
+                <a:solidFill>
+                  <a:srgbClr val="6B6B6B"/>
+                </a:solidFill>
+                <a:latin typeface="Pretendard Medium"/>
+                <a:ea typeface="Pretendard Medium"/>
+                <a:cs typeface="Pretendard Medium"/>
+              </a:rPr>
+              <a:t>판단 시점별 보유 대출의 상각률 예측 오차, 모형 유지 대비 본 시스템 적용 (변경 승인 가정)</a:t>
             </a:r>
           </a:p>
         </p:txBody>
       </p:sp>
       <p:pic>
         <p:nvPicPr>
-          <p:cNvPr id="8" name="Picture 7" descr="chart_default.png"/>
+          <p:cNvPr id="9" name="Picture 8" descr="chart_effect.png"/>
           <p:cNvPicPr>
             <a:picLocks noChangeAspect="1"/>
           </p:cNvPicPr>
@@ -7091,7 +7132,7 @@
       </p:pic>
       <p:sp>
         <p:nvSpPr>
-          <p:cNvPr id="9" name="TextBox 8"/>
+          <p:cNvPr id="10" name="TextBox 9"/>
           <p:cNvSpPr txBox="1"/>
           <p:nvPr/>
         </p:nvSpPr>
@@ -7132,7 +7173,7 @@
       </p:sp>
       <p:sp>
         <p:nvSpPr>
-          <p:cNvPr id="10" name="TextBox 9"/>
+          <p:cNvPr id="11" name="TextBox 10"/>
           <p:cNvSpPr txBox="1"/>
           <p:nvPr/>
         </p:nvSpPr>
@@ -7184,7 +7225,7 @@
       </p:sp>
       <p:sp>
         <p:nvSpPr>
-          <p:cNvPr id="11" name="TextBox 10"/>
+          <p:cNvPr id="12" name="TextBox 11"/>
           <p:cNvSpPr txBox="1"/>
           <p:nvPr/>
         </p:nvSpPr>
@@ -7236,7 +7277,7 @@
       </p:sp>
       <p:sp>
         <p:nvSpPr>
-          <p:cNvPr id="12" name="TextBox 11"/>
+          <p:cNvPr id="13" name="TextBox 12"/>
           <p:cNvSpPr txBox="1"/>
           <p:nvPr/>
         </p:nvSpPr>
@@ -7288,7 +7329,7 @@
       </p:sp>
       <p:sp>
         <p:nvSpPr>
-          <p:cNvPr id="13" name="TextBox 12"/>
+          <p:cNvPr id="14" name="TextBox 13"/>
           <p:cNvSpPr txBox="1"/>
           <p:nvPr/>
         </p:nvSpPr>
@@ -7329,7 +7370,7 @@
       </p:sp>
       <p:sp>
         <p:nvSpPr>
-          <p:cNvPr id="14" name="Rectangle 13"/>
+          <p:cNvPr id="15" name="Rectangle 14"/>
           <p:cNvSpPr/>
           <p:nvPr/>
         </p:nvSpPr>
@@ -7374,7 +7415,7 @@
       </p:sp>
       <p:sp>
         <p:nvSpPr>
-          <p:cNvPr id="15" name="TextBox 14"/>
+          <p:cNvPr id="16" name="TextBox 15"/>
           <p:cNvSpPr txBox="1"/>
           <p:nvPr/>
         </p:nvSpPr>
@@ -7415,7 +7456,7 @@
       </p:sp>
       <p:sp>
         <p:nvSpPr>
-          <p:cNvPr id="16" name="TextBox 15"/>
+          <p:cNvPr id="17" name="TextBox 16"/>
           <p:cNvSpPr txBox="1"/>
           <p:nvPr/>
         </p:nvSpPr>
@@ -7449,14 +7490,14 @@
                 <a:ea typeface="Pretendard"/>
                 <a:cs typeface="Pretendard"/>
               </a:rPr>
-              <a:t>6개월 미리 예측</a:t>
-            </a:r>
-          </a:p>
-        </p:txBody>
-      </p:sp>
-      <p:sp>
-        <p:nvSpPr>
-          <p:cNvPr id="17" name="TextBox 16"/>
+              <a:t>6개월 전 사전 예측</a:t>
+            </a:r>
+          </a:p>
+        </p:txBody>
+      </p:sp>
+      <p:sp>
+        <p:nvSpPr>
+          <p:cNvPr id="18" name="TextBox 17"/>
           <p:cNvSpPr txBox="1"/>
           <p:nvPr/>
         </p:nvSpPr>
@@ -7533,7 +7574,7 @@
       </p:sp>
       <p:sp>
         <p:nvSpPr>
-          <p:cNvPr id="18" name="TextBox 17"/>
+          <p:cNvPr id="19" name="TextBox 18"/>
           <p:cNvSpPr txBox="1"/>
           <p:nvPr/>
         </p:nvSpPr>
@@ -7574,7 +7615,7 @@
       </p:sp>
       <p:sp>
         <p:nvSpPr>
-          <p:cNvPr id="19" name="TextBox 18"/>
+          <p:cNvPr id="20" name="TextBox 19"/>
           <p:cNvSpPr txBox="1"/>
           <p:nvPr/>
         </p:nvSpPr>
@@ -7669,7 +7710,7 @@
       </p:sp>
       <p:sp>
         <p:nvSpPr>
-          <p:cNvPr id="20" name="TextBox 19"/>
+          <p:cNvPr id="21" name="TextBox 20"/>
           <p:cNvSpPr txBox="1"/>
           <p:nvPr/>
         </p:nvSpPr>
@@ -7710,7 +7751,7 @@
       </p:sp>
       <p:sp>
         <p:nvSpPr>
-          <p:cNvPr id="21" name="TextBox 20"/>
+          <p:cNvPr id="22" name="TextBox 21"/>
           <p:cNvSpPr txBox="1"/>
           <p:nvPr/>
         </p:nvSpPr>
@@ -7805,7 +7846,7 @@
       </p:sp>
       <p:pic>
         <p:nvPicPr>
-          <p:cNvPr id="22" name="Picture 21" descr="qr.png"/>
+          <p:cNvPr id="23" name="Picture 22" descr="qr.png"/>
           <p:cNvPicPr>
             <a:picLocks noChangeAspect="1"/>
           </p:cNvPicPr>
@@ -7829,7 +7870,7 @@
       </p:pic>
       <p:sp>
         <p:nvSpPr>
-          <p:cNvPr id="23" name="TextBox 22"/>
+          <p:cNvPr id="24" name="TextBox 23"/>
           <p:cNvSpPr txBox="1"/>
           <p:nvPr/>
         </p:nvSpPr>
@@ -7888,7 +7929,7 @@
       </p:sp>
       <p:sp>
         <p:nvSpPr>
-          <p:cNvPr id="24" name="TextBox 23"/>
+          <p:cNvPr id="25" name="TextBox 24"/>
           <p:cNvSpPr txBox="1"/>
           <p:nvPr/>
         </p:nvSpPr>

--- a/ppt/역량PT_김연주.pptx
+++ b/ppt/역량PT_김연주.pptx
@@ -7101,7 +7101,7 @@
                 <a:ea typeface="Pretendard Medium"/>
                 <a:cs typeface="Pretendard Medium"/>
               </a:rPr>
-              <a:t>판단 시점별 보유 대출의 상각률 예측 오차, 모형 유지 대비 본 시스템 적용 (변경 승인 가정)</a:t>
+              <a:t>판단 시점별 보유 대출의 실제 상각률과 예측 상각률. 숫자는 모형 갱신 시점 (갱신 승인 가정)</a:t>
             </a:r>
           </a:p>
         </p:txBody>

--- a/ppt/역량PT_김연주.pptx
+++ b/ppt/역량PT_김연주.pptx
@@ -7785,7 +7785,7 @@
                 <a:ea typeface="Pretendard SemiBold"/>
                 <a:cs typeface="Pretendard SemiBold"/>
               </a:rPr>
-              <a:t>3년간 모형 변경 횟수</a:t>
+              <a:t>3년간 모형 갱신 횟수</a:t>
             </a:r>
           </a:p>
           <a:p>
@@ -7803,7 +7803,7 @@
                 <a:ea typeface="Pretendard"/>
                 <a:cs typeface="Pretendard"/>
               </a:rPr>
-              <a:t>재학습 1, 예측치 조정 3 (변경 승인 가정)</a:t>
+              <a:t>재학습 1, 예측치 조정 3 (갱신 승인 가정)</a:t>
             </a:r>
           </a:p>
           <a:p>

--- a/ppt/역량PT_김연주.pptx
+++ b/ppt/역량PT_김연주.pptx
@@ -6915,7 +6915,7 @@
                 <a:ea typeface="Pretendard"/>
                 <a:cs typeface="Pretendard"/>
               </a:rPr>
-              <a:t>  2010~2012년 대출 8.7만 건의 대출 조건, 소득, 신용 이력으로 학습한 LightGBM 모형 (2년 내 상각 확률 예측)</a:t>
+              <a:t>  2010~2013년 상반기 대출 14만 건의 대출 조건, 소득, 신용 이력으로 학습한 LightGBM 모형 (2년 내 상각 확률 예측)</a:t>
             </a:r>
           </a:p>
         </p:txBody>
@@ -7270,7 +7270,7 @@
                 <a:ea typeface="Pretendard"/>
                 <a:cs typeface="Pretendard"/>
               </a:rPr>
-              <a:t>차이가 기준 초과 시 모형 수정안 11종 성능 비교</a:t>
+              <a:t>차이가 기준 초과 시 모형 수정안 12종 성능 비교</a:t>
             </a:r>
           </a:p>
         </p:txBody>
@@ -7608,7 +7608,7 @@
                 <a:ea typeface="Pretendard"/>
                 <a:cs typeface="Pretendard"/>
               </a:rPr>
-              <a:t>13%</a:t>
+              <a:t>6%</a:t>
             </a:r>
           </a:p>
         </p:txBody>
@@ -7667,7 +7667,7 @@
                 <a:ea typeface="Pretendard"/>
                 <a:cs typeface="Pretendard"/>
               </a:rPr>
-              <a:t>적용 전 33%, 상대 오차 (실제÷예측-1)</a:t>
+              <a:t>적용 전 31%, 상대 오차 (실제÷예측-1)</a:t>
             </a:r>
           </a:p>
           <a:p>
@@ -7685,7 +7685,7 @@
                 <a:ea typeface="Pretendard"/>
                 <a:cs typeface="Pretendard"/>
               </a:rPr>
-              <a:t>절대 차이 3.4%p에서 1.6%p로</a:t>
+              <a:t>권고 10개 시점 평균, 당시 보유 대출 사후 평가</a:t>
             </a:r>
           </a:p>
           <a:p>
@@ -7703,7 +7703,7 @@
                 <a:ea typeface="Pretendard"/>
                 <a:cs typeface="Pretendard"/>
               </a:rPr>
-              <a:t>2018년 1분기 보유 대출 46만 건 사후 평가</a:t>
+              <a:t>상각률 측정 대상 대출 실행 2014~2016년</a:t>
             </a:r>
           </a:p>
         </p:txBody>
@@ -7744,7 +7744,7 @@
                 <a:ea typeface="Pretendard"/>
                 <a:cs typeface="Pretendard"/>
               </a:rPr>
-              <a:t>4회</a:t>
+              <a:t>2회</a:t>
             </a:r>
           </a:p>
         </p:txBody>
@@ -7803,7 +7803,7 @@
                 <a:ea typeface="Pretendard"/>
                 <a:cs typeface="Pretendard"/>
               </a:rPr>
-              <a:t>재학습 1, 예측치 조정 3 (갱신 승인 가정)</a:t>
+              <a:t>예측치 조정 2회 (갱신 승인 가정)</a:t>
             </a:r>
           </a:p>
           <a:p>
@@ -7821,7 +7821,7 @@
                 <a:ea typeface="Pretendard"/>
                 <a:cs typeface="Pretendard"/>
               </a:rPr>
-              <a:t>정기 재학습 13회 대비 평균 오차 19.4%에서 17.3%로</a:t>
+              <a:t>정기 재학습 13회 대비 평균 오차 18.8%에서 9.5%로</a:t>
             </a:r>
           </a:p>
           <a:p>
@@ -7839,7 +7839,7 @@
                 <a:ea typeface="Pretendard"/>
                 <a:cs typeface="Pretendard"/>
               </a:rPr>
-              <a:t>변별력(AUC)은 정기 재학습 우위 (0.701 대 0.693)</a:t>
+              <a:t>변별력(AUC) 우위 (0.703 대 0.701)</a:t>
             </a:r>
           </a:p>
         </p:txBody>

--- a/ppt/역량PT_김연주.pptx
+++ b/ppt/역량PT_김연주.pptx
@@ -7073,7 +7073,7 @@
         </p:nvSpPr>
         <p:spPr>
           <a:xfrm>
-            <a:off x="548640" y="2487168"/>
+            <a:off x="548640" y="2450592"/>
             <a:ext cx="5486400" cy="228600"/>
           </a:xfrm>
           <a:prstGeom prst="rect">
@@ -7122,8 +7122,8 @@
         </p:blipFill>
         <p:spPr>
           <a:xfrm>
-            <a:off x="502919" y="2697480"/>
-            <a:ext cx="5486400" cy="2654709"/>
+            <a:off x="502919" y="2633472"/>
+            <a:ext cx="5486400" cy="3141406"/>
           </a:xfrm>
           <a:prstGeom prst="rect">
             <a:avLst/>
@@ -7462,8 +7462,8 @@
         </p:nvSpPr>
         <p:spPr>
           <a:xfrm>
-            <a:off x="6537959" y="3456432"/>
-            <a:ext cx="2377440" cy="411480"/>
+            <a:off x="6537959" y="3566160"/>
+            <a:ext cx="1531010" cy="384048"/>
           </a:xfrm>
           <a:prstGeom prst="rect">
             <a:avLst/>
@@ -7482,48 +7482,7 @@
               </a:lnSpc>
             </a:pPr>
             <a:r>
-              <a:rPr sz="2000" b="1">
-                <a:solidFill>
-                  <a:srgbClr val="000000"/>
-                </a:solidFill>
-                <a:latin typeface="Pretendard"/>
-                <a:ea typeface="Pretendard"/>
-                <a:cs typeface="Pretendard"/>
-              </a:rPr>
-              <a:t>6개월 전 사전 예측</a:t>
-            </a:r>
-          </a:p>
-        </p:txBody>
-      </p:sp>
-      <p:sp>
-        <p:nvSpPr>
-          <p:cNvPr id="18" name="TextBox 17"/>
-          <p:cNvSpPr txBox="1"/>
-          <p:nvPr/>
-        </p:nvSpPr>
-        <p:spPr>
-          <a:xfrm>
-            <a:off x="8961119" y="3474720"/>
-            <a:ext cx="2681935" cy="640080"/>
-          </a:xfrm>
-          <a:prstGeom prst="rect">
-            <a:avLst/>
-          </a:prstGeom>
-          <a:noFill/>
-        </p:spPr>
-        <p:txBody>
-          <a:bodyPr wrap="none" lIns="0" tIns="0" rIns="0" bIns="0" anchor="t">
-            <a:spAutoFit/>
-          </a:bodyPr>
-          <a:lstStyle/>
-          <a:p>
-            <a:pPr algn="l">
-              <a:lnSpc>
-                <a:spcPct val="125000"/>
-              </a:lnSpc>
-            </a:pPr>
-            <a:r>
-              <a:rPr sz="1050" b="0">
+              <a:rPr sz="1000" b="0">
                 <a:solidFill>
                   <a:srgbClr val="000000"/>
                 </a:solidFill>
@@ -7534,32 +7493,132 @@
               <a:t>상각률 이상 경고 시점</a:t>
             </a:r>
           </a:p>
+        </p:txBody>
+      </p:sp>
+      <p:sp>
+        <p:nvSpPr>
+          <p:cNvPr id="18" name="TextBox 17"/>
+          <p:cNvSpPr txBox="1"/>
+          <p:nvPr/>
+        </p:nvSpPr>
+        <p:spPr>
+          <a:xfrm>
+            <a:off x="6537959" y="3950208"/>
+            <a:ext cx="1531010" cy="731520"/>
+          </a:xfrm>
+          <a:prstGeom prst="rect">
+            <a:avLst/>
+          </a:prstGeom>
+          <a:noFill/>
+        </p:spPr>
+        <p:txBody>
+          <a:bodyPr wrap="none" lIns="0" tIns="0" rIns="0" bIns="0" anchor="b">
+            <a:spAutoFit/>
+          </a:bodyPr>
+          <a:lstStyle/>
           <a:p>
             <a:pPr algn="l">
               <a:lnSpc>
-                <a:spcPct val="125000"/>
+                <a:spcPct val="100000"/>
               </a:lnSpc>
             </a:pPr>
             <a:r>
-              <a:rPr sz="900" b="0">
-                <a:solidFill>
-                  <a:srgbClr val="6B6B6B"/>
+              <a:rPr sz="2200" b="1">
+                <a:solidFill>
+                  <a:srgbClr val="000000"/>
                 </a:solidFill>
                 <a:latin typeface="Pretendard"/>
                 <a:ea typeface="Pretendard"/>
                 <a:cs typeface="Pretendard"/>
               </a:rPr>
-              <a:t>대출 후 1년 중간 실적 활용 (기존 2년 실적)</a:t>
+              <a:t>6개월 전</a:t>
             </a:r>
           </a:p>
           <a:p>
             <a:pPr algn="l">
               <a:lnSpc>
-                <a:spcPct val="125000"/>
+                <a:spcPct val="100000"/>
               </a:lnSpc>
             </a:pPr>
             <a:r>
-              <a:rPr sz="900" b="0">
+              <a:rPr sz="2200" b="1">
+                <a:solidFill>
+                  <a:srgbClr val="000000"/>
+                </a:solidFill>
+                <a:latin typeface="Pretendard"/>
+                <a:ea typeface="Pretendard"/>
+                <a:cs typeface="Pretendard"/>
+              </a:rPr>
+              <a:t>사전 예측</a:t>
+            </a:r>
+          </a:p>
+        </p:txBody>
+      </p:sp>
+      <p:sp>
+        <p:nvSpPr>
+          <p:cNvPr id="19" name="TextBox 18"/>
+          <p:cNvSpPr txBox="1"/>
+          <p:nvPr/>
+        </p:nvSpPr>
+        <p:spPr>
+          <a:xfrm>
+            <a:off x="6537959" y="4800600"/>
+            <a:ext cx="1531010" cy="1280160"/>
+          </a:xfrm>
+          <a:prstGeom prst="rect">
+            <a:avLst/>
+          </a:prstGeom>
+          <a:noFill/>
+        </p:spPr>
+        <p:txBody>
+          <a:bodyPr wrap="none" lIns="0" tIns="0" rIns="0" bIns="0" anchor="t">
+            <a:spAutoFit/>
+          </a:bodyPr>
+          <a:lstStyle/>
+          <a:p>
+            <a:pPr algn="l">
+              <a:lnSpc>
+                <a:spcPct val="120000"/>
+              </a:lnSpc>
+            </a:pPr>
+            <a:r>
+              <a:rPr sz="850" b="0">
+                <a:solidFill>
+                  <a:srgbClr val="6B6B6B"/>
+                </a:solidFill>
+                <a:latin typeface="Pretendard"/>
+                <a:ea typeface="Pretendard"/>
+                <a:cs typeface="Pretendard"/>
+              </a:rPr>
+              <a:t>대출 후 1년 중간 실적 활용</a:t>
+            </a:r>
+          </a:p>
+          <a:p>
+            <a:pPr algn="l">
+              <a:lnSpc>
+                <a:spcPct val="120000"/>
+              </a:lnSpc>
+            </a:pPr>
+            <a:r>
+              <a:rPr sz="850" b="0">
+                <a:solidFill>
+                  <a:srgbClr val="6B6B6B"/>
+                </a:solidFill>
+                <a:latin typeface="Pretendard"/>
+                <a:ea typeface="Pretendard"/>
+                <a:cs typeface="Pretendard"/>
+              </a:rPr>
+              <a:t>(기존 2년 실적)</a:t>
+            </a:r>
+          </a:p>
+          <a:p>
+            <a:pPr algn="l">
+              <a:lnSpc>
+                <a:spcPct val="120000"/>
+              </a:lnSpc>
+            </a:pPr>
+            <a:r>
+              <a:rPr sz="850" b="0">
                 <a:solidFill>
                   <a:srgbClr val="6B6B6B"/>
                 </a:solidFill>
@@ -7574,14 +7633,59 @@
       </p:sp>
       <p:sp>
         <p:nvSpPr>
-          <p:cNvPr id="19" name="TextBox 18"/>
+          <p:cNvPr id="20" name="Rectangle 19"/>
+          <p:cNvSpPr/>
+          <p:nvPr/>
+        </p:nvSpPr>
+        <p:spPr>
+          <a:xfrm>
+            <a:off x="8192223" y="3566160"/>
+            <a:ext cx="9525" cy="2240280"/>
+          </a:xfrm>
+          <a:prstGeom prst="rect">
+            <a:avLst/>
+          </a:prstGeom>
+          <a:solidFill>
+            <a:srgbClr val="DDDDDD"/>
+          </a:solidFill>
+          <a:ln>
+            <a:noFill/>
+          </a:ln>
+          <a:effectLst/>
+        </p:spPr>
+        <p:style>
+          <a:lnRef idx="1">
+            <a:schemeClr val="accent1"/>
+          </a:lnRef>
+          <a:fillRef idx="3">
+            <a:schemeClr val="accent1"/>
+          </a:fillRef>
+          <a:effectRef idx="2">
+            <a:schemeClr val="accent1"/>
+          </a:effectRef>
+          <a:fontRef idx="minor">
+            <a:schemeClr val="lt1"/>
+          </a:fontRef>
+        </p:style>
+        <p:txBody>
+          <a:bodyPr rtlCol="0" anchor="ctr"/>
+          <a:lstStyle/>
+          <a:p>
+            <a:pPr algn="ctr"/>
+            <a:endParaRPr/>
+          </a:p>
+        </p:txBody>
+      </p:sp>
+      <p:sp>
+        <p:nvSpPr>
+          <p:cNvPr id="21" name="TextBox 20"/>
           <p:cNvSpPr txBox="1"/>
           <p:nvPr/>
         </p:nvSpPr>
         <p:spPr>
           <a:xfrm>
-            <a:off x="6537959" y="4206240"/>
-            <a:ext cx="2377440" cy="411480"/>
+            <a:off x="8325002" y="3566160"/>
+            <a:ext cx="1531010" cy="384048"/>
           </a:xfrm>
           <a:prstGeom prst="rect">
             <a:avLst/>
@@ -7600,7 +7704,66 @@
               </a:lnSpc>
             </a:pPr>
             <a:r>
-              <a:rPr sz="2000" b="1">
+              <a:rPr sz="1000" b="0">
+                <a:solidFill>
+                  <a:srgbClr val="000000"/>
+                </a:solidFill>
+                <a:latin typeface="Pretendard SemiBold"/>
+                <a:ea typeface="Pretendard SemiBold"/>
+                <a:cs typeface="Pretendard SemiBold"/>
+              </a:rPr>
+              <a:t>모형 갱신 후 상각률</a:t>
+            </a:r>
+          </a:p>
+          <a:p>
+            <a:pPr algn="l">
+              <a:lnSpc>
+                <a:spcPct val="115000"/>
+              </a:lnSpc>
+            </a:pPr>
+            <a:r>
+              <a:rPr sz="1000" b="0">
+                <a:solidFill>
+                  <a:srgbClr val="000000"/>
+                </a:solidFill>
+                <a:latin typeface="Pretendard SemiBold"/>
+                <a:ea typeface="Pretendard SemiBold"/>
+                <a:cs typeface="Pretendard SemiBold"/>
+              </a:rPr>
+              <a:t>예측 오차</a:t>
+            </a:r>
+          </a:p>
+        </p:txBody>
+      </p:sp>
+      <p:sp>
+        <p:nvSpPr>
+          <p:cNvPr id="22" name="TextBox 21"/>
+          <p:cNvSpPr txBox="1"/>
+          <p:nvPr/>
+        </p:nvSpPr>
+        <p:spPr>
+          <a:xfrm>
+            <a:off x="8325002" y="3950208"/>
+            <a:ext cx="1531010" cy="731520"/>
+          </a:xfrm>
+          <a:prstGeom prst="rect">
+            <a:avLst/>
+          </a:prstGeom>
+          <a:noFill/>
+        </p:spPr>
+        <p:txBody>
+          <a:bodyPr wrap="none" lIns="0" tIns="0" rIns="0" bIns="0" anchor="b">
+            <a:spAutoFit/>
+          </a:bodyPr>
+          <a:lstStyle/>
+          <a:p>
+            <a:pPr algn="l">
+              <a:lnSpc>
+                <a:spcPct val="100000"/>
+              </a:lnSpc>
+            </a:pPr>
+            <a:r>
+              <a:rPr sz="2200" b="1">
                 <a:solidFill>
                   <a:srgbClr val="000000"/>
                 </a:solidFill>
@@ -7615,14 +7778,14 @@
       </p:sp>
       <p:sp>
         <p:nvSpPr>
-          <p:cNvPr id="20" name="TextBox 19"/>
+          <p:cNvPr id="23" name="TextBox 22"/>
           <p:cNvSpPr txBox="1"/>
           <p:nvPr/>
         </p:nvSpPr>
         <p:spPr>
           <a:xfrm>
-            <a:off x="8961119" y="4224527"/>
-            <a:ext cx="2681935" cy="640080"/>
+            <a:off x="8325002" y="4800600"/>
+            <a:ext cx="1531010" cy="1280160"/>
           </a:xfrm>
           <a:prstGeom prst="rect">
             <a:avLst/>
@@ -7637,29 +7800,11 @@
           <a:p>
             <a:pPr algn="l">
               <a:lnSpc>
-                <a:spcPct val="125000"/>
+                <a:spcPct val="120000"/>
               </a:lnSpc>
             </a:pPr>
             <a:r>
-              <a:rPr sz="1050" b="0">
-                <a:solidFill>
-                  <a:srgbClr val="000000"/>
-                </a:solidFill>
-                <a:latin typeface="Pretendard SemiBold"/>
-                <a:ea typeface="Pretendard SemiBold"/>
-                <a:cs typeface="Pretendard SemiBold"/>
-              </a:rPr>
-              <a:t>모형 갱신 후 상각률 예측 오차</a:t>
-            </a:r>
-          </a:p>
-          <a:p>
-            <a:pPr algn="l">
-              <a:lnSpc>
-                <a:spcPct val="125000"/>
-              </a:lnSpc>
-            </a:pPr>
-            <a:r>
-              <a:rPr sz="900" b="0">
+              <a:rPr sz="850" b="0">
                 <a:solidFill>
                   <a:srgbClr val="6B6B6B"/>
                 </a:solidFill>
@@ -7667,17 +7812,35 @@
                 <a:ea typeface="Pretendard"/>
                 <a:cs typeface="Pretendard"/>
               </a:rPr>
-              <a:t>갱신 없음 33%, 상대 오차 (실제÷예측-1)</a:t>
+              <a:t>갱신 없음 33%, 상대 오차</a:t>
             </a:r>
           </a:p>
           <a:p>
             <a:pPr algn="l">
               <a:lnSpc>
-                <a:spcPct val="125000"/>
+                <a:spcPct val="120000"/>
               </a:lnSpc>
             </a:pPr>
             <a:r>
-              <a:rPr sz="900" b="0">
+              <a:rPr sz="850" b="0">
+                <a:solidFill>
+                  <a:srgbClr val="6B6B6B"/>
+                </a:solidFill>
+                <a:latin typeface="Pretendard"/>
+                <a:ea typeface="Pretendard"/>
+                <a:cs typeface="Pretendard"/>
+              </a:rPr>
+              <a:t>(실제÷예측-1)</a:t>
+            </a:r>
+          </a:p>
+          <a:p>
+            <a:pPr algn="l">
+              <a:lnSpc>
+                <a:spcPct val="120000"/>
+              </a:lnSpc>
+            </a:pPr>
+            <a:r>
+              <a:rPr sz="850" b="0">
                 <a:solidFill>
                   <a:srgbClr val="6B6B6B"/>
                 </a:solidFill>
@@ -7691,11 +7854,11 @@
           <a:p>
             <a:pPr algn="l">
               <a:lnSpc>
-                <a:spcPct val="125000"/>
+                <a:spcPct val="120000"/>
               </a:lnSpc>
             </a:pPr>
             <a:r>
-              <a:rPr sz="900" b="0">
+              <a:rPr sz="850" b="0">
                 <a:solidFill>
                   <a:srgbClr val="6B6B6B"/>
                 </a:solidFill>
@@ -7703,21 +7866,84 @@
                 <a:ea typeface="Pretendard"/>
                 <a:cs typeface="Pretendard"/>
               </a:rPr>
-              <a:t>2018년 4분기 보유 대출 (그림의 마지막 시점)</a:t>
-            </a:r>
-          </a:p>
-        </p:txBody>
-      </p:sp>
-      <p:sp>
-        <p:nvSpPr>
-          <p:cNvPr id="21" name="TextBox 20"/>
+              <a:t>2018년 4분기 보유 대출</a:t>
+            </a:r>
+          </a:p>
+          <a:p>
+            <a:pPr algn="l">
+              <a:lnSpc>
+                <a:spcPct val="120000"/>
+              </a:lnSpc>
+            </a:pPr>
+            <a:r>
+              <a:rPr sz="850" b="0">
+                <a:solidFill>
+                  <a:srgbClr val="6B6B6B"/>
+                </a:solidFill>
+                <a:latin typeface="Pretendard"/>
+                <a:ea typeface="Pretendard"/>
+                <a:cs typeface="Pretendard"/>
+              </a:rPr>
+              <a:t>(그림의 마지막 시점)</a:t>
+            </a:r>
+          </a:p>
+        </p:txBody>
+      </p:sp>
+      <p:sp>
+        <p:nvSpPr>
+          <p:cNvPr id="24" name="Rectangle 23"/>
+          <p:cNvSpPr/>
+          <p:nvPr/>
+        </p:nvSpPr>
+        <p:spPr>
+          <a:xfrm>
+            <a:off x="9979265" y="3566160"/>
+            <a:ext cx="9525" cy="2240280"/>
+          </a:xfrm>
+          <a:prstGeom prst="rect">
+            <a:avLst/>
+          </a:prstGeom>
+          <a:solidFill>
+            <a:srgbClr val="DDDDDD"/>
+          </a:solidFill>
+          <a:ln>
+            <a:noFill/>
+          </a:ln>
+          <a:effectLst/>
+        </p:spPr>
+        <p:style>
+          <a:lnRef idx="1">
+            <a:schemeClr val="accent1"/>
+          </a:lnRef>
+          <a:fillRef idx="3">
+            <a:schemeClr val="accent1"/>
+          </a:fillRef>
+          <a:effectRef idx="2">
+            <a:schemeClr val="accent1"/>
+          </a:effectRef>
+          <a:fontRef idx="minor">
+            <a:schemeClr val="lt1"/>
+          </a:fontRef>
+        </p:style>
+        <p:txBody>
+          <a:bodyPr rtlCol="0" anchor="ctr"/>
+          <a:lstStyle/>
+          <a:p>
+            <a:pPr algn="ctr"/>
+            <a:endParaRPr/>
+          </a:p>
+        </p:txBody>
+      </p:sp>
+      <p:sp>
+        <p:nvSpPr>
+          <p:cNvPr id="25" name="TextBox 24"/>
           <p:cNvSpPr txBox="1"/>
           <p:nvPr/>
         </p:nvSpPr>
         <p:spPr>
           <a:xfrm>
-            <a:off x="6537959" y="4956048"/>
-            <a:ext cx="2377440" cy="411480"/>
+            <a:off x="10112044" y="3566160"/>
+            <a:ext cx="1531010" cy="384048"/>
           </a:xfrm>
           <a:prstGeom prst="rect">
             <a:avLst/>
@@ -7736,7 +7962,48 @@
               </a:lnSpc>
             </a:pPr>
             <a:r>
-              <a:rPr sz="2000" b="1">
+              <a:rPr sz="1000" b="0">
+                <a:solidFill>
+                  <a:srgbClr val="000000"/>
+                </a:solidFill>
+                <a:latin typeface="Pretendard SemiBold"/>
+                <a:ea typeface="Pretendard SemiBold"/>
+                <a:cs typeface="Pretendard SemiBold"/>
+              </a:rPr>
+              <a:t>3년간 모형 갱신 횟수</a:t>
+            </a:r>
+          </a:p>
+        </p:txBody>
+      </p:sp>
+      <p:sp>
+        <p:nvSpPr>
+          <p:cNvPr id="26" name="TextBox 25"/>
+          <p:cNvSpPr txBox="1"/>
+          <p:nvPr/>
+        </p:nvSpPr>
+        <p:spPr>
+          <a:xfrm>
+            <a:off x="10112044" y="3950208"/>
+            <a:ext cx="1531010" cy="731520"/>
+          </a:xfrm>
+          <a:prstGeom prst="rect">
+            <a:avLst/>
+          </a:prstGeom>
+          <a:noFill/>
+        </p:spPr>
+        <p:txBody>
+          <a:bodyPr wrap="none" lIns="0" tIns="0" rIns="0" bIns="0" anchor="b">
+            <a:spAutoFit/>
+          </a:bodyPr>
+          <a:lstStyle/>
+          <a:p>
+            <a:pPr algn="l">
+              <a:lnSpc>
+                <a:spcPct val="100000"/>
+              </a:lnSpc>
+            </a:pPr>
+            <a:r>
+              <a:rPr sz="2200" b="1">
                 <a:solidFill>
                   <a:srgbClr val="000000"/>
                 </a:solidFill>
@@ -7751,14 +8018,14 @@
       </p:sp>
       <p:sp>
         <p:nvSpPr>
-          <p:cNvPr id="22" name="TextBox 21"/>
+          <p:cNvPr id="27" name="TextBox 26"/>
           <p:cNvSpPr txBox="1"/>
           <p:nvPr/>
         </p:nvSpPr>
         <p:spPr>
           <a:xfrm>
-            <a:off x="8961119" y="4974336"/>
-            <a:ext cx="2681935" cy="640080"/>
+            <a:off x="10112044" y="4800600"/>
+            <a:ext cx="1531010" cy="1280160"/>
           </a:xfrm>
           <a:prstGeom prst="rect">
             <a:avLst/>
@@ -7773,29 +8040,11 @@
           <a:p>
             <a:pPr algn="l">
               <a:lnSpc>
-                <a:spcPct val="125000"/>
+                <a:spcPct val="120000"/>
               </a:lnSpc>
             </a:pPr>
             <a:r>
-              <a:rPr sz="1050" b="0">
-                <a:solidFill>
-                  <a:srgbClr val="000000"/>
-                </a:solidFill>
-                <a:latin typeface="Pretendard SemiBold"/>
-                <a:ea typeface="Pretendard SemiBold"/>
-                <a:cs typeface="Pretendard SemiBold"/>
-              </a:rPr>
-              <a:t>3년간 모형 갱신 횟수</a:t>
-            </a:r>
-          </a:p>
-          <a:p>
-            <a:pPr algn="l">
-              <a:lnSpc>
-                <a:spcPct val="125000"/>
-              </a:lnSpc>
-            </a:pPr>
-            <a:r>
-              <a:rPr sz="900" b="0">
+              <a:rPr sz="850" b="0">
                 <a:solidFill>
                   <a:srgbClr val="6B6B6B"/>
                 </a:solidFill>
@@ -7803,17 +8052,17 @@
                 <a:ea typeface="Pretendard"/>
                 <a:cs typeface="Pretendard"/>
               </a:rPr>
-              <a:t>예측치 조정 2회 (갱신 승인 가정)</a:t>
+              <a:t>예측치 조정 2회</a:t>
             </a:r>
           </a:p>
           <a:p>
             <a:pPr algn="l">
               <a:lnSpc>
-                <a:spcPct val="125000"/>
+                <a:spcPct val="120000"/>
               </a:lnSpc>
             </a:pPr>
             <a:r>
-              <a:rPr sz="900" b="0">
+              <a:rPr sz="850" b="0">
                 <a:solidFill>
                   <a:srgbClr val="6B6B6B"/>
                 </a:solidFill>
@@ -7821,17 +8070,17 @@
                 <a:ea typeface="Pretendard"/>
                 <a:cs typeface="Pretendard"/>
               </a:rPr>
-              <a:t>정기 재학습 13회 대비 평균 오차 18.8%에서 9.5%로</a:t>
+              <a:t>(갱신 승인 가정)</a:t>
             </a:r>
           </a:p>
           <a:p>
             <a:pPr algn="l">
               <a:lnSpc>
-                <a:spcPct val="125000"/>
+                <a:spcPct val="120000"/>
               </a:lnSpc>
             </a:pPr>
             <a:r>
-              <a:rPr sz="900" b="0">
+              <a:rPr sz="850" b="0">
                 <a:solidFill>
                   <a:srgbClr val="6B6B6B"/>
                 </a:solidFill>
@@ -7839,14 +8088,68 @@
                 <a:ea typeface="Pretendard"/>
                 <a:cs typeface="Pretendard"/>
               </a:rPr>
-              <a:t>변별력(AUC) 우위 (0.703 대 0.701)</a:t>
+              <a:t>정기 재학습 13회 대비 평균 오차</a:t>
+            </a:r>
+          </a:p>
+          <a:p>
+            <a:pPr algn="l">
+              <a:lnSpc>
+                <a:spcPct val="120000"/>
+              </a:lnSpc>
+            </a:pPr>
+            <a:r>
+              <a:rPr sz="850" b="0">
+                <a:solidFill>
+                  <a:srgbClr val="6B6B6B"/>
+                </a:solidFill>
+                <a:latin typeface="Pretendard"/>
+                <a:ea typeface="Pretendard"/>
+                <a:cs typeface="Pretendard"/>
+              </a:rPr>
+              <a:t>18.8%에서 9.5%로</a:t>
+            </a:r>
+          </a:p>
+          <a:p>
+            <a:pPr algn="l">
+              <a:lnSpc>
+                <a:spcPct val="120000"/>
+              </a:lnSpc>
+            </a:pPr>
+            <a:r>
+              <a:rPr sz="850" b="0">
+                <a:solidFill>
+                  <a:srgbClr val="6B6B6B"/>
+                </a:solidFill>
+                <a:latin typeface="Pretendard"/>
+                <a:ea typeface="Pretendard"/>
+                <a:cs typeface="Pretendard"/>
+              </a:rPr>
+              <a:t>변별력(AUC) 우위</a:t>
+            </a:r>
+          </a:p>
+          <a:p>
+            <a:pPr algn="l">
+              <a:lnSpc>
+                <a:spcPct val="120000"/>
+              </a:lnSpc>
+            </a:pPr>
+            <a:r>
+              <a:rPr sz="850" b="0">
+                <a:solidFill>
+                  <a:srgbClr val="6B6B6B"/>
+                </a:solidFill>
+                <a:latin typeface="Pretendard"/>
+                <a:ea typeface="Pretendard"/>
+                <a:cs typeface="Pretendard"/>
+              </a:rPr>
+              <a:t>(0.703 대 0.701)</a:t>
             </a:r>
           </a:p>
         </p:txBody>
       </p:sp>
       <p:pic>
         <p:nvPicPr>
-          <p:cNvPr id="23" name="Picture 22" descr="qr.png"/>
+          <p:cNvPr id="28" name="Picture 27" descr="qr.png"/>
           <p:cNvPicPr>
             <a:picLocks noChangeAspect="1"/>
           </p:cNvPicPr>
@@ -7860,8 +8163,8 @@
         </p:blipFill>
         <p:spPr>
           <a:xfrm>
-            <a:off x="548640" y="5486400"/>
-            <a:ext cx="868680" cy="868680"/>
+            <a:off x="548640" y="5788152"/>
+            <a:ext cx="777240" cy="777240"/>
           </a:xfrm>
           <a:prstGeom prst="rect">
             <a:avLst/>
@@ -7870,13 +8173,13 @@
       </p:pic>
       <p:sp>
         <p:nvSpPr>
-          <p:cNvPr id="24" name="TextBox 23"/>
+          <p:cNvPr id="29" name="TextBox 28"/>
           <p:cNvSpPr txBox="1"/>
           <p:nvPr/>
         </p:nvSpPr>
         <p:spPr>
           <a:xfrm>
-            <a:off x="1554479" y="5650992"/>
+            <a:off x="1463039" y="5925312"/>
             <a:ext cx="4114800" cy="548640"/>
           </a:xfrm>
           <a:prstGeom prst="rect">
@@ -7929,7 +8232,7 @@
       </p:sp>
       <p:sp>
         <p:nvSpPr>
-          <p:cNvPr id="25" name="TextBox 24"/>
+          <p:cNvPr id="30" name="TextBox 29"/>
           <p:cNvSpPr txBox="1"/>
           <p:nvPr/>
         </p:nvSpPr>
@@ -7963,7 +8266,7 @@
                 <a:ea typeface="Pretendard"/>
                 <a:cs typeface="Pretendard"/>
               </a:rPr>
-              <a:t>판정 규칙은 같은 기간 결과를 보고 조정한 탐색 단계 결과. 상각 시점은 마지막 납부월 기준 근사</a:t>
+              <a:t>판정 규칙과 모형 설정은 같은 기간 결과를 보고 정한 탐색 단계 결과. 상각 시점은 마지막 납부월 기준 근사</a:t>
             </a:r>
           </a:p>
           <a:p>

--- a/ppt/역량PT_김연주.pptx
+++ b/ppt/역량PT_김연주.pptx
@@ -7123,7 +7123,7 @@
         <p:spPr>
           <a:xfrm>
             <a:off x="502919" y="2633472"/>
-            <a:ext cx="5486400" cy="3141406"/>
+            <a:ext cx="5486400" cy="3760838"/>
           </a:xfrm>
           <a:prstGeom prst="rect">
             <a:avLst/>
@@ -7463,7 +7463,7 @@
         <p:spPr>
           <a:xfrm>
             <a:off x="6537959" y="3566160"/>
-            <a:ext cx="1531010" cy="384048"/>
+            <a:ext cx="1531010" cy="201168"/>
           </a:xfrm>
           <a:prstGeom prst="rect">
             <a:avLst/>
@@ -7503,8 +7503,8 @@
         </p:nvSpPr>
         <p:spPr>
           <a:xfrm>
-            <a:off x="6537959" y="3950208"/>
-            <a:ext cx="1531010" cy="731520"/>
+            <a:off x="6537959" y="3840480"/>
+            <a:ext cx="1531010" cy="768096"/>
           </a:xfrm>
           <a:prstGeom prst="rect">
             <a:avLst/>
@@ -7512,7 +7512,7 @@
           <a:noFill/>
         </p:spPr>
         <p:txBody>
-          <a:bodyPr wrap="none" lIns="0" tIns="0" rIns="0" bIns="0" anchor="b">
+          <a:bodyPr wrap="none" lIns="0" tIns="0" rIns="0" bIns="0" anchor="t">
             <a:spAutoFit/>
           </a:bodyPr>
           <a:lstStyle/>
@@ -7562,8 +7562,8 @@
         </p:nvSpPr>
         <p:spPr>
           <a:xfrm>
-            <a:off x="6537959" y="4800600"/>
-            <a:ext cx="1531010" cy="1280160"/>
+            <a:off x="6537959" y="4718304"/>
+            <a:ext cx="1531010" cy="914400"/>
           </a:xfrm>
           <a:prstGeom prst="rect">
             <a:avLst/>
@@ -7578,11 +7578,11 @@
           <a:p>
             <a:pPr algn="l">
               <a:lnSpc>
-                <a:spcPct val="120000"/>
+                <a:spcPct val="125000"/>
               </a:lnSpc>
             </a:pPr>
             <a:r>
-              <a:rPr sz="850" b="0">
+              <a:rPr sz="900" b="0">
                 <a:solidFill>
                   <a:srgbClr val="6B6B6B"/>
                 </a:solidFill>
@@ -7596,11 +7596,11 @@
           <a:p>
             <a:pPr algn="l">
               <a:lnSpc>
-                <a:spcPct val="120000"/>
+                <a:spcPct val="125000"/>
               </a:lnSpc>
             </a:pPr>
             <a:r>
-              <a:rPr sz="850" b="0">
+              <a:rPr sz="900" b="0">
                 <a:solidFill>
                   <a:srgbClr val="6B6B6B"/>
                 </a:solidFill>
@@ -7608,25 +7608,7 @@
                 <a:ea typeface="Pretendard"/>
                 <a:cs typeface="Pretendard"/>
               </a:rPr>
-              <a:t>(기존 2년 실적)</a:t>
-            </a:r>
-          </a:p>
-          <a:p>
-            <a:pPr algn="l">
-              <a:lnSpc>
-                <a:spcPct val="120000"/>
-              </a:lnSpc>
-            </a:pPr>
-            <a:r>
-              <a:rPr sz="850" b="0">
-                <a:solidFill>
-                  <a:srgbClr val="6B6B6B"/>
-                </a:solidFill>
-                <a:latin typeface="Pretendard"/>
-                <a:ea typeface="Pretendard"/>
-                <a:cs typeface="Pretendard"/>
-              </a:rPr>
-              <a:t>2016~2017년 단일 사례</a:t>
+              <a:t>(기존 방식은 2년 실적 확인 후 경고)</a:t>
             </a:r>
           </a:p>
         </p:txBody>
@@ -7640,7 +7622,7 @@
         <p:spPr>
           <a:xfrm>
             <a:off x="8192223" y="3566160"/>
-            <a:ext cx="9525" cy="2240280"/>
+            <a:ext cx="9525" cy="1920240"/>
           </a:xfrm>
           <a:prstGeom prst="rect">
             <a:avLst/>
@@ -7685,7 +7667,7 @@
         <p:spPr>
           <a:xfrm>
             <a:off x="8325002" y="3566160"/>
-            <a:ext cx="1531010" cy="384048"/>
+            <a:ext cx="1531010" cy="402336"/>
           </a:xfrm>
           <a:prstGeom prst="rect">
             <a:avLst/>
@@ -7743,8 +7725,8 @@
         </p:nvSpPr>
         <p:spPr>
           <a:xfrm>
-            <a:off x="8325002" y="3950208"/>
-            <a:ext cx="1531010" cy="731520"/>
+            <a:off x="8325002" y="4041648"/>
+            <a:ext cx="1531010" cy="384048"/>
           </a:xfrm>
           <a:prstGeom prst="rect">
             <a:avLst/>
@@ -7752,7 +7734,7 @@
           <a:noFill/>
         </p:spPr>
         <p:txBody>
-          <a:bodyPr wrap="none" lIns="0" tIns="0" rIns="0" bIns="0" anchor="b">
+          <a:bodyPr wrap="none" lIns="0" tIns="0" rIns="0" bIns="0" anchor="t">
             <a:spAutoFit/>
           </a:bodyPr>
           <a:lstStyle/>
@@ -7784,8 +7766,8 @@
         </p:nvSpPr>
         <p:spPr>
           <a:xfrm>
-            <a:off x="8325002" y="4800600"/>
-            <a:ext cx="1531010" cy="1280160"/>
+            <a:off x="8325002" y="4535424"/>
+            <a:ext cx="1531010" cy="914400"/>
           </a:xfrm>
           <a:prstGeom prst="rect">
             <a:avLst/>
@@ -7800,11 +7782,11 @@
           <a:p>
             <a:pPr algn="l">
               <a:lnSpc>
-                <a:spcPct val="120000"/>
+                <a:spcPct val="125000"/>
               </a:lnSpc>
             </a:pPr>
             <a:r>
-              <a:rPr sz="850" b="0">
+              <a:rPr sz="900" b="0">
                 <a:solidFill>
                   <a:srgbClr val="6B6B6B"/>
                 </a:solidFill>
@@ -7812,17 +7794,17 @@
                 <a:ea typeface="Pretendard"/>
                 <a:cs typeface="Pretendard"/>
               </a:rPr>
-              <a:t>갱신 없음 33%, 상대 오차</a:t>
+              <a:t>모형을 그대로 두면 33%</a:t>
             </a:r>
           </a:p>
           <a:p>
             <a:pPr algn="l">
               <a:lnSpc>
-                <a:spcPct val="120000"/>
+                <a:spcPct val="125000"/>
               </a:lnSpc>
             </a:pPr>
             <a:r>
-              <a:rPr sz="850" b="0">
+              <a:rPr sz="900" b="0">
                 <a:solidFill>
                   <a:srgbClr val="6B6B6B"/>
                 </a:solidFill>
@@ -7830,61 +7812,7 @@
                 <a:ea typeface="Pretendard"/>
                 <a:cs typeface="Pretendard"/>
               </a:rPr>
-              <a:t>(실제÷예측-1)</a:t>
-            </a:r>
-          </a:p>
-          <a:p>
-            <a:pPr algn="l">
-              <a:lnSpc>
-                <a:spcPct val="120000"/>
-              </a:lnSpc>
-            </a:pPr>
-            <a:r>
-              <a:rPr sz="850" b="0">
-                <a:solidFill>
-                  <a:srgbClr val="6B6B6B"/>
-                </a:solidFill>
-                <a:latin typeface="Pretendard"/>
-                <a:ea typeface="Pretendard"/>
-                <a:cs typeface="Pretendard"/>
-              </a:rPr>
-              <a:t>절대 차이 3.5%p에서 0.3%p로</a:t>
-            </a:r>
-          </a:p>
-          <a:p>
-            <a:pPr algn="l">
-              <a:lnSpc>
-                <a:spcPct val="120000"/>
-              </a:lnSpc>
-            </a:pPr>
-            <a:r>
-              <a:rPr sz="850" b="0">
-                <a:solidFill>
-                  <a:srgbClr val="6B6B6B"/>
-                </a:solidFill>
-                <a:latin typeface="Pretendard"/>
-                <a:ea typeface="Pretendard"/>
-                <a:cs typeface="Pretendard"/>
-              </a:rPr>
-              <a:t>2018년 4분기 보유 대출</a:t>
-            </a:r>
-          </a:p>
-          <a:p>
-            <a:pPr algn="l">
-              <a:lnSpc>
-                <a:spcPct val="120000"/>
-              </a:lnSpc>
-            </a:pPr>
-            <a:r>
-              <a:rPr sz="850" b="0">
-                <a:solidFill>
-                  <a:srgbClr val="6B6B6B"/>
-                </a:solidFill>
-                <a:latin typeface="Pretendard"/>
-                <a:ea typeface="Pretendard"/>
-                <a:cs typeface="Pretendard"/>
-              </a:rPr>
-              <a:t>(그림의 마지막 시점)</a:t>
+              <a:t>2018년 4분기 기준</a:t>
             </a:r>
           </a:p>
         </p:txBody>
@@ -7898,7 +7826,7 @@
         <p:spPr>
           <a:xfrm>
             <a:off x="9979265" y="3566160"/>
-            <a:ext cx="9525" cy="2240280"/>
+            <a:ext cx="9525" cy="1920240"/>
           </a:xfrm>
           <a:prstGeom prst="rect">
             <a:avLst/>
@@ -7943,7 +7871,7 @@
         <p:spPr>
           <a:xfrm>
             <a:off x="10112044" y="3566160"/>
-            <a:ext cx="1531010" cy="384048"/>
+            <a:ext cx="1531010" cy="201168"/>
           </a:xfrm>
           <a:prstGeom prst="rect">
             <a:avLst/>
@@ -7983,8 +7911,8 @@
         </p:nvSpPr>
         <p:spPr>
           <a:xfrm>
-            <a:off x="10112044" y="3950208"/>
-            <a:ext cx="1531010" cy="731520"/>
+            <a:off x="10112044" y="3840480"/>
+            <a:ext cx="1531010" cy="384048"/>
           </a:xfrm>
           <a:prstGeom prst="rect">
             <a:avLst/>
@@ -7992,7 +7920,7 @@
           <a:noFill/>
         </p:spPr>
         <p:txBody>
-          <a:bodyPr wrap="none" lIns="0" tIns="0" rIns="0" bIns="0" anchor="b">
+          <a:bodyPr wrap="none" lIns="0" tIns="0" rIns="0" bIns="0" anchor="t">
             <a:spAutoFit/>
           </a:bodyPr>
           <a:lstStyle/>
@@ -8024,8 +7952,8 @@
         </p:nvSpPr>
         <p:spPr>
           <a:xfrm>
-            <a:off x="10112044" y="4800600"/>
-            <a:ext cx="1531010" cy="1280160"/>
+            <a:off x="10112044" y="4334256"/>
+            <a:ext cx="1531010" cy="914400"/>
           </a:xfrm>
           <a:prstGeom prst="rect">
             <a:avLst/>
@@ -8040,11 +7968,11 @@
           <a:p>
             <a:pPr algn="l">
               <a:lnSpc>
-                <a:spcPct val="120000"/>
+                <a:spcPct val="125000"/>
               </a:lnSpc>
             </a:pPr>
             <a:r>
-              <a:rPr sz="850" b="0">
+              <a:rPr sz="900" b="0">
                 <a:solidFill>
                   <a:srgbClr val="6B6B6B"/>
                 </a:solidFill>
@@ -8052,17 +7980,17 @@
                 <a:ea typeface="Pretendard"/>
                 <a:cs typeface="Pretendard"/>
               </a:rPr>
-              <a:t>예측치 조정 2회</a:t>
+              <a:t>평균 오차 9.5%</a:t>
             </a:r>
           </a:p>
           <a:p>
             <a:pPr algn="l">
               <a:lnSpc>
-                <a:spcPct val="120000"/>
+                <a:spcPct val="125000"/>
               </a:lnSpc>
             </a:pPr>
             <a:r>
-              <a:rPr sz="850" b="0">
+              <a:rPr sz="900" b="0">
                 <a:solidFill>
                   <a:srgbClr val="6B6B6B"/>
                 </a:solidFill>
@@ -8070,79 +7998,7 @@
                 <a:ea typeface="Pretendard"/>
                 <a:cs typeface="Pretendard"/>
               </a:rPr>
-              <a:t>(갱신 승인 가정)</a:t>
-            </a:r>
-          </a:p>
-          <a:p>
-            <a:pPr algn="l">
-              <a:lnSpc>
-                <a:spcPct val="120000"/>
-              </a:lnSpc>
-            </a:pPr>
-            <a:r>
-              <a:rPr sz="850" b="0">
-                <a:solidFill>
-                  <a:srgbClr val="6B6B6B"/>
-                </a:solidFill>
-                <a:latin typeface="Pretendard"/>
-                <a:ea typeface="Pretendard"/>
-                <a:cs typeface="Pretendard"/>
-              </a:rPr>
-              <a:t>정기 재학습 13회 대비 평균 오차</a:t>
-            </a:r>
-          </a:p>
-          <a:p>
-            <a:pPr algn="l">
-              <a:lnSpc>
-                <a:spcPct val="120000"/>
-              </a:lnSpc>
-            </a:pPr>
-            <a:r>
-              <a:rPr sz="850" b="0">
-                <a:solidFill>
-                  <a:srgbClr val="6B6B6B"/>
-                </a:solidFill>
-                <a:latin typeface="Pretendard"/>
-                <a:ea typeface="Pretendard"/>
-                <a:cs typeface="Pretendard"/>
-              </a:rPr>
-              <a:t>18.8%에서 9.5%로</a:t>
-            </a:r>
-          </a:p>
-          <a:p>
-            <a:pPr algn="l">
-              <a:lnSpc>
-                <a:spcPct val="120000"/>
-              </a:lnSpc>
-            </a:pPr>
-            <a:r>
-              <a:rPr sz="850" b="0">
-                <a:solidFill>
-                  <a:srgbClr val="6B6B6B"/>
-                </a:solidFill>
-                <a:latin typeface="Pretendard"/>
-                <a:ea typeface="Pretendard"/>
-                <a:cs typeface="Pretendard"/>
-              </a:rPr>
-              <a:t>변별력(AUC) 우위</a:t>
-            </a:r>
-          </a:p>
-          <a:p>
-            <a:pPr algn="l">
-              <a:lnSpc>
-                <a:spcPct val="120000"/>
-              </a:lnSpc>
-            </a:pPr>
-            <a:r>
-              <a:rPr sz="850" b="0">
-                <a:solidFill>
-                  <a:srgbClr val="6B6B6B"/>
-                </a:solidFill>
-                <a:latin typeface="Pretendard"/>
-                <a:ea typeface="Pretendard"/>
-                <a:cs typeface="Pretendard"/>
-              </a:rPr>
-              <a:t>(0.703 대 0.701)</a:t>
+              <a:t>3개월마다 재학습(13회)은 18.8%</a:t>
             </a:r>
           </a:p>
         </p:txBody>
@@ -8163,8 +8019,8 @@
         </p:blipFill>
         <p:spPr>
           <a:xfrm>
-            <a:off x="548640" y="5788152"/>
-            <a:ext cx="777240" cy="777240"/>
+            <a:off x="10911535" y="384048"/>
+            <a:ext cx="731520" cy="731520"/>
           </a:xfrm>
           <a:prstGeom prst="rect">
             <a:avLst/>
@@ -8179,8 +8035,8 @@
         </p:nvSpPr>
         <p:spPr>
           <a:xfrm>
-            <a:off x="1463039" y="5925312"/>
-            <a:ext cx="4114800" cy="548640"/>
+            <a:off x="7985455" y="566928"/>
+            <a:ext cx="2788920" cy="457200"/>
           </a:xfrm>
           <a:prstGeom prst="rect">
             <a:avLst/>
@@ -8193,13 +8049,13 @@
           </a:bodyPr>
           <a:lstStyle/>
           <a:p>
-            <a:pPr algn="l">
+            <a:pPr algn="r">
               <a:lnSpc>
                 <a:spcPct val="130000"/>
               </a:lnSpc>
             </a:pPr>
             <a:r>
-              <a:rPr sz="1100" b="1">
+              <a:rPr sz="1000" b="1">
                 <a:solidFill>
                   <a:srgbClr val="000000"/>
                 </a:solidFill>
@@ -8211,13 +8067,13 @@
             </a:r>
           </a:p>
           <a:p>
-            <a:pPr algn="l">
+            <a:pPr algn="r">
               <a:lnSpc>
                 <a:spcPct val="130000"/>
               </a:lnSpc>
             </a:pPr>
             <a:r>
-              <a:rPr sz="950" b="0">
+              <a:rPr sz="900" b="0">
                 <a:solidFill>
                   <a:srgbClr val="6B6B6B"/>
                 </a:solidFill>

--- a/ppt/역량PT_김연주.pptx
+++ b/ppt/역량PT_김연주.pptx
@@ -7060,55 +7060,14 @@
                 <a:ea typeface="Pretendard"/>
                 <a:cs typeface="Pretendard"/>
               </a:rPr>
-              <a:t>상각률은 대출 실행 후 2년 내 상환 중단 후 손실 처리 비율. 예측 오차는 |실제÷예측-1|</a:t>
-            </a:r>
-          </a:p>
-        </p:txBody>
-      </p:sp>
-      <p:sp>
-        <p:nvSpPr>
-          <p:cNvPr id="8" name="TextBox 7"/>
-          <p:cNvSpPr txBox="1"/>
-          <p:nvPr/>
-        </p:nvSpPr>
-        <p:spPr>
-          <a:xfrm>
-            <a:off x="548640" y="2450592"/>
-            <a:ext cx="5486400" cy="228600"/>
-          </a:xfrm>
-          <a:prstGeom prst="rect">
-            <a:avLst/>
-          </a:prstGeom>
-          <a:noFill/>
-        </p:spPr>
-        <p:txBody>
-          <a:bodyPr wrap="none" lIns="0" tIns="0" rIns="0" bIns="0" anchor="t">
-            <a:spAutoFit/>
-          </a:bodyPr>
-          <a:lstStyle/>
-          <a:p>
-            <a:pPr algn="l">
-              <a:lnSpc>
-                <a:spcPct val="115000"/>
-              </a:lnSpc>
-            </a:pPr>
-            <a:r>
-              <a:rPr sz="900" b="0">
-                <a:solidFill>
-                  <a:srgbClr val="6B6B6B"/>
-                </a:solidFill>
-                <a:latin typeface="Pretendard Medium"/>
-                <a:ea typeface="Pretendard Medium"/>
-                <a:cs typeface="Pretendard Medium"/>
-              </a:rPr>
-              <a:t>판단 시점별 보유 대출의 실제 상각률과 예측 상각률. 숫자는 모형 갱신 시점 (갱신 승인 가정)</a:t>
+              <a:t>상각률: 대출 실행 후 2년 내 상환 중단 후 손실 처리 비율</a:t>
             </a:r>
           </a:p>
         </p:txBody>
       </p:sp>
       <p:pic>
         <p:nvPicPr>
-          <p:cNvPr id="9" name="Picture 8" descr="chart_effect.png"/>
+          <p:cNvPr id="8" name="Picture 7" descr="chart_effect.png"/>
           <p:cNvPicPr>
             <a:picLocks noChangeAspect="1"/>
           </p:cNvPicPr>
@@ -7122,7 +7081,7 @@
         </p:blipFill>
         <p:spPr>
           <a:xfrm>
-            <a:off x="502919" y="2633472"/>
+            <a:off x="502919" y="2395728"/>
             <a:ext cx="5486400" cy="3760838"/>
           </a:xfrm>
           <a:prstGeom prst="rect">
@@ -7130,6 +7089,47 @@
           </a:prstGeom>
         </p:spPr>
       </p:pic>
+      <p:sp>
+        <p:nvSpPr>
+          <p:cNvPr id="9" name="TextBox 8"/>
+          <p:cNvSpPr txBox="1"/>
+          <p:nvPr/>
+        </p:nvSpPr>
+        <p:spPr>
+          <a:xfrm>
+            <a:off x="548640" y="6174854"/>
+            <a:ext cx="5486400" cy="228600"/>
+          </a:xfrm>
+          <a:prstGeom prst="rect">
+            <a:avLst/>
+          </a:prstGeom>
+          <a:noFill/>
+        </p:spPr>
+        <p:txBody>
+          <a:bodyPr wrap="none" lIns="0" tIns="0" rIns="0" bIns="0" anchor="t">
+            <a:spAutoFit/>
+          </a:bodyPr>
+          <a:lstStyle/>
+          <a:p>
+            <a:pPr algn="ctr">
+              <a:lnSpc>
+                <a:spcPct val="115000"/>
+              </a:lnSpc>
+            </a:pPr>
+            <a:r>
+              <a:rPr sz="900" b="0">
+                <a:solidFill>
+                  <a:srgbClr val="6B6B6B"/>
+                </a:solidFill>
+                <a:latin typeface="Pretendard Medium"/>
+                <a:ea typeface="Pretendard Medium"/>
+                <a:cs typeface="Pretendard Medium"/>
+              </a:rPr>
+              <a:t>판단 시점별 보유 대출의 실제 상각률과 예측 상각률 (갱신 승인 가정)</a:t>
+            </a:r>
+          </a:p>
+        </p:txBody>
+      </p:sp>
       <p:sp>
         <p:nvSpPr>
           <p:cNvPr id="10" name="TextBox 9"/>
@@ -7322,55 +7322,14 @@
                 <a:ea typeface="Pretendard"/>
                 <a:cs typeface="Pretendard"/>
               </a:rPr>
-              <a:t>기준 통과안 담당자 보고, 적용 여부는 담당자 결정</a:t>
-            </a:r>
-          </a:p>
-        </p:txBody>
-      </p:sp>
-      <p:sp>
-        <p:nvSpPr>
-          <p:cNvPr id="14" name="TextBox 13"/>
-          <p:cNvSpPr txBox="1"/>
-          <p:nvPr/>
-        </p:nvSpPr>
-        <p:spPr>
-          <a:xfrm>
-            <a:off x="6720840" y="2871216"/>
-            <a:ext cx="4922215" cy="201168"/>
-          </a:xfrm>
-          <a:prstGeom prst="rect">
-            <a:avLst/>
-          </a:prstGeom>
-          <a:noFill/>
-        </p:spPr>
-        <p:txBody>
-          <a:bodyPr wrap="none" lIns="0" tIns="0" rIns="0" bIns="0" anchor="t">
-            <a:spAutoFit/>
-          </a:bodyPr>
-          <a:lstStyle/>
-          <a:p>
-            <a:pPr algn="l">
-              <a:lnSpc>
-                <a:spcPct val="115000"/>
-              </a:lnSpc>
-            </a:pPr>
-            <a:r>
-              <a:rPr sz="850" b="0">
-                <a:solidFill>
-                  <a:srgbClr val="6B6B6B"/>
-                </a:solidFill>
-                <a:latin typeface="Pretendard"/>
-                <a:ea typeface="Pretendard"/>
-                <a:cs typeface="Pretendard"/>
-              </a:rPr>
-              <a:t>보고서 초안은 Claude Opus 5.5 작성, 수치는 계산 결과와 항목별 자동 대조</a:t>
-            </a:r>
-          </a:p>
-        </p:txBody>
-      </p:sp>
-      <p:sp>
-        <p:nvSpPr>
-          <p:cNvPr id="15" name="Rectangle 14"/>
+              <a:t>기준 통과안 담당자 보고, 담당자가 적용 여부 결정</a:t>
+            </a:r>
+          </a:p>
+        </p:txBody>
+      </p:sp>
+      <p:sp>
+        <p:nvSpPr>
+          <p:cNvPr id="14" name="Rectangle 13"/>
           <p:cNvSpPr/>
           <p:nvPr/>
         </p:nvSpPr>
@@ -7415,7 +7374,7 @@
       </p:sp>
       <p:sp>
         <p:nvSpPr>
-          <p:cNvPr id="16" name="TextBox 15"/>
+          <p:cNvPr id="15" name="TextBox 14"/>
           <p:cNvSpPr txBox="1"/>
           <p:nvPr/>
         </p:nvSpPr>
@@ -7456,7 +7415,7 @@
       </p:sp>
       <p:sp>
         <p:nvSpPr>
-          <p:cNvPr id="17" name="TextBox 16"/>
+          <p:cNvPr id="16" name="TextBox 15"/>
           <p:cNvSpPr txBox="1"/>
           <p:nvPr/>
         </p:nvSpPr>
@@ -7497,7 +7456,7 @@
       </p:sp>
       <p:sp>
         <p:nvSpPr>
-          <p:cNvPr id="18" name="TextBox 17"/>
+          <p:cNvPr id="17" name="TextBox 16"/>
           <p:cNvSpPr txBox="1"/>
           <p:nvPr/>
         </p:nvSpPr>
@@ -7556,7 +7515,7 @@
       </p:sp>
       <p:sp>
         <p:nvSpPr>
-          <p:cNvPr id="19" name="TextBox 18"/>
+          <p:cNvPr id="18" name="TextBox 17"/>
           <p:cNvSpPr txBox="1"/>
           <p:nvPr/>
         </p:nvSpPr>
@@ -7590,7 +7549,7 @@
                 <a:ea typeface="Pretendard"/>
                 <a:cs typeface="Pretendard"/>
               </a:rPr>
-              <a:t>대출 후 1년 중간 실적 활용</a:t>
+              <a:t>대출 1년 차 실적으로 경고</a:t>
             </a:r>
           </a:p>
           <a:p>
@@ -7608,14 +7567,32 @@
                 <a:ea typeface="Pretendard"/>
                 <a:cs typeface="Pretendard"/>
               </a:rPr>
-              <a:t>(기존 방식은 2년 실적 확인 후 경고)</a:t>
-            </a:r>
-          </a:p>
-        </p:txBody>
-      </p:sp>
-      <p:sp>
-        <p:nvSpPr>
-          <p:cNvPr id="20" name="Rectangle 19"/>
+              <a:t>기존 방식은 2년 차</a:t>
+            </a:r>
+          </a:p>
+          <a:p>
+            <a:pPr algn="l">
+              <a:lnSpc>
+                <a:spcPct val="125000"/>
+              </a:lnSpc>
+            </a:pPr>
+            <a:r>
+              <a:rPr sz="900" b="0">
+                <a:solidFill>
+                  <a:srgbClr val="6B6B6B"/>
+                </a:solidFill>
+                <a:latin typeface="Pretendard"/>
+                <a:ea typeface="Pretendard"/>
+                <a:cs typeface="Pretendard"/>
+              </a:rPr>
+              <a:t>실적 확인 후 경고</a:t>
+            </a:r>
+          </a:p>
+        </p:txBody>
+      </p:sp>
+      <p:sp>
+        <p:nvSpPr>
+          <p:cNvPr id="19" name="Rectangle 18"/>
           <p:cNvSpPr/>
           <p:nvPr/>
         </p:nvSpPr>
@@ -7660,7 +7637,7 @@
       </p:sp>
       <p:sp>
         <p:nvSpPr>
-          <p:cNvPr id="21" name="TextBox 20"/>
+          <p:cNvPr id="20" name="TextBox 19"/>
           <p:cNvSpPr txBox="1"/>
           <p:nvPr/>
         </p:nvSpPr>
@@ -7719,7 +7696,7 @@
       </p:sp>
       <p:sp>
         <p:nvSpPr>
-          <p:cNvPr id="22" name="TextBox 21"/>
+          <p:cNvPr id="21" name="TextBox 20"/>
           <p:cNvSpPr txBox="1"/>
           <p:nvPr/>
         </p:nvSpPr>
@@ -7760,7 +7737,7 @@
       </p:sp>
       <p:sp>
         <p:nvSpPr>
-          <p:cNvPr id="23" name="TextBox 22"/>
+          <p:cNvPr id="22" name="TextBox 21"/>
           <p:cNvSpPr txBox="1"/>
           <p:nvPr/>
         </p:nvSpPr>
@@ -7794,7 +7771,7 @@
                 <a:ea typeface="Pretendard"/>
                 <a:cs typeface="Pretendard"/>
               </a:rPr>
-              <a:t>모형을 그대로 두면 33%</a:t>
+              <a:t>갱신 안 할 시 예측 오차 33%</a:t>
             </a:r>
           </a:p>
           <a:p>
@@ -7812,14 +7789,14 @@
                 <a:ea typeface="Pretendard"/>
                 <a:cs typeface="Pretendard"/>
               </a:rPr>
-              <a:t>2018년 4분기 기준</a:t>
-            </a:r>
-          </a:p>
-        </p:txBody>
-      </p:sp>
-      <p:sp>
-        <p:nvSpPr>
-          <p:cNvPr id="24" name="Rectangle 23"/>
+              <a:t>(2018년 4분기 기준)</a:t>
+            </a:r>
+          </a:p>
+        </p:txBody>
+      </p:sp>
+      <p:sp>
+        <p:nvSpPr>
+          <p:cNvPr id="23" name="Rectangle 22"/>
           <p:cNvSpPr/>
           <p:nvPr/>
         </p:nvSpPr>
@@ -7864,7 +7841,7 @@
       </p:sp>
       <p:sp>
         <p:nvSpPr>
-          <p:cNvPr id="25" name="TextBox 24"/>
+          <p:cNvPr id="24" name="TextBox 23"/>
           <p:cNvSpPr txBox="1"/>
           <p:nvPr/>
         </p:nvSpPr>
@@ -7905,7 +7882,7 @@
       </p:sp>
       <p:sp>
         <p:nvSpPr>
-          <p:cNvPr id="26" name="TextBox 25"/>
+          <p:cNvPr id="25" name="TextBox 24"/>
           <p:cNvSpPr txBox="1"/>
           <p:nvPr/>
         </p:nvSpPr>
@@ -7946,7 +7923,7 @@
       </p:sp>
       <p:sp>
         <p:nvSpPr>
-          <p:cNvPr id="27" name="TextBox 26"/>
+          <p:cNvPr id="26" name="TextBox 25"/>
           <p:cNvSpPr txBox="1"/>
           <p:nvPr/>
         </p:nvSpPr>
@@ -7980,7 +7957,7 @@
                 <a:ea typeface="Pretendard"/>
                 <a:cs typeface="Pretendard"/>
               </a:rPr>
-              <a:t>평균 오차 9.5%</a:t>
+              <a:t>3년 평균 예측 오차 9.5%</a:t>
             </a:r>
           </a:p>
           <a:p>
@@ -7998,14 +7975,32 @@
                 <a:ea typeface="Pretendard"/>
                 <a:cs typeface="Pretendard"/>
               </a:rPr>
-              <a:t>3개월마다 재학습(13회)은 18.8%</a:t>
+              <a:t>3개월마다 재학습 시</a:t>
+            </a:r>
+          </a:p>
+          <a:p>
+            <a:pPr algn="l">
+              <a:lnSpc>
+                <a:spcPct val="125000"/>
+              </a:lnSpc>
+            </a:pPr>
+            <a:r>
+              <a:rPr sz="900" b="0">
+                <a:solidFill>
+                  <a:srgbClr val="6B6B6B"/>
+                </a:solidFill>
+                <a:latin typeface="Pretendard"/>
+                <a:ea typeface="Pretendard"/>
+                <a:cs typeface="Pretendard"/>
+              </a:rPr>
+              <a:t>13회 갱신, 예측 오차 18.8%</a:t>
             </a:r>
           </a:p>
         </p:txBody>
       </p:sp>
       <p:pic>
         <p:nvPicPr>
-          <p:cNvPr id="28" name="Picture 27" descr="qr.png"/>
+          <p:cNvPr id="27" name="Picture 26" descr="qr.png"/>
           <p:cNvPicPr>
             <a:picLocks noChangeAspect="1"/>
           </p:cNvPicPr>
@@ -8029,7 +8024,7 @@
       </p:pic>
       <p:sp>
         <p:nvSpPr>
-          <p:cNvPr id="29" name="TextBox 28"/>
+          <p:cNvPr id="28" name="TextBox 27"/>
           <p:cNvSpPr txBox="1"/>
           <p:nvPr/>
         </p:nvSpPr>
@@ -8063,7 +8058,7 @@
                 <a:ea typeface="Pretendard"/>
                 <a:cs typeface="Pretendard"/>
               </a:rPr>
-              <a:t>결과 화면 (시점별 점검 결과 확인)</a:t>
+              <a:t>시뮬레이션 링크</a:t>
             </a:r>
           </a:p>
           <a:p>
@@ -8088,14 +8083,14 @@
       </p:sp>
       <p:sp>
         <p:nvSpPr>
-          <p:cNvPr id="30" name="TextBox 29"/>
+          <p:cNvPr id="29" name="TextBox 28"/>
           <p:cNvSpPr txBox="1"/>
           <p:nvPr/>
         </p:nvSpPr>
         <p:spPr>
           <a:xfrm>
-            <a:off x="6537959" y="6291072"/>
-            <a:ext cx="5105095" cy="365760"/>
+            <a:off x="6537959" y="5989320"/>
+            <a:ext cx="5105095" cy="685800"/>
           </a:xfrm>
           <a:prstGeom prst="rect">
             <a:avLst/>
@@ -8122,7 +8117,7 @@
                 <a:ea typeface="Pretendard"/>
                 <a:cs typeface="Pretendard"/>
               </a:rPr>
-              <a:t>판정 규칙과 모형 설정은 같은 기간 결과를 보고 정한 탐색 단계 결과. 상각 시점은 마지막 납부월 기준 근사</a:t>
+              <a:t>판정 규칙과 모형 설정은 같은 기간 결과를 보고 정한 탐색 단계 결과입니다.</a:t>
             </a:r>
           </a:p>
           <a:p>
@@ -8140,7 +8135,43 @@
                 <a:ea typeface="Pretendard"/>
                 <a:cs typeface="Pretendard"/>
               </a:rPr>
-              <a:t>시점별 판단은 해당 시점까지 확정된 정보로 수행. 공개 자료 기반 과거 재현, 실제 금융회사 운영 사례 아님</a:t>
+              <a:t>상각 시점은 마지막 납부월 기준 근사치입니다.</a:t>
+            </a:r>
+          </a:p>
+          <a:p>
+            <a:pPr algn="l">
+              <a:lnSpc>
+                <a:spcPct val="120000"/>
+              </a:lnSpc>
+            </a:pPr>
+            <a:r>
+              <a:rPr sz="800" b="0">
+                <a:solidFill>
+                  <a:srgbClr val="9A9A9A"/>
+                </a:solidFill>
+                <a:latin typeface="Pretendard"/>
+                <a:ea typeface="Pretendard"/>
+                <a:cs typeface="Pretendard"/>
+              </a:rPr>
+              <a:t>시점별 판단은 해당 시점까지 확정된 정보로 수행했습니다.</a:t>
+            </a:r>
+          </a:p>
+          <a:p>
+            <a:pPr algn="l">
+              <a:lnSpc>
+                <a:spcPct val="120000"/>
+              </a:lnSpc>
+            </a:pPr>
+            <a:r>
+              <a:rPr sz="800" b="0">
+                <a:solidFill>
+                  <a:srgbClr val="9A9A9A"/>
+                </a:solidFill>
+                <a:latin typeface="Pretendard"/>
+                <a:ea typeface="Pretendard"/>
+                <a:cs typeface="Pretendard"/>
+              </a:rPr>
+              <a:t>공개 자료 기반 과거 재현이며 실제 금융회사 운영 사례가 아닙니다.</a:t>
             </a:r>
           </a:p>
         </p:txBody>

--- a/ppt/역량PT_김연주.pptx
+++ b/ppt/역량PT_김연주.pptx
@@ -6974,7 +6974,7 @@
         <p:spPr>
           <a:xfrm>
             <a:off x="548640" y="1755648"/>
-            <a:ext cx="5486400" cy="228600"/>
+            <a:ext cx="6309360" cy="228600"/>
           </a:xfrm>
           <a:prstGeom prst="rect">
             <a:avLst/>
@@ -7015,7 +7015,7 @@
         <p:spPr>
           <a:xfrm>
             <a:off x="548640" y="1938528"/>
-            <a:ext cx="5486400" cy="548640"/>
+            <a:ext cx="6309360" cy="548640"/>
           </a:xfrm>
           <a:prstGeom prst="rect">
             <a:avLst/>
@@ -7082,7 +7082,7 @@
         <p:spPr>
           <a:xfrm>
             <a:off x="502919" y="2395728"/>
-            <a:ext cx="5486400" cy="3760838"/>
+            <a:ext cx="6309360" cy="3875749"/>
           </a:xfrm>
           <a:prstGeom prst="rect">
             <a:avLst/>
@@ -7097,8 +7097,8 @@
         </p:nvSpPr>
         <p:spPr>
           <a:xfrm>
-            <a:off x="548640" y="6174854"/>
-            <a:ext cx="5486400" cy="228600"/>
+            <a:off x="548640" y="6289765"/>
+            <a:ext cx="6309360" cy="228600"/>
           </a:xfrm>
           <a:prstGeom prst="rect">
             <a:avLst/>
@@ -7138,8 +7138,8 @@
         </p:nvSpPr>
         <p:spPr>
           <a:xfrm>
-            <a:off x="6537959" y="1755648"/>
-            <a:ext cx="5105095" cy="228600"/>
+            <a:off x="7269480" y="1755648"/>
+            <a:ext cx="4373575" cy="228600"/>
           </a:xfrm>
           <a:prstGeom prst="rect">
             <a:avLst/>
@@ -7179,8 +7179,8 @@
         </p:nvSpPr>
         <p:spPr>
           <a:xfrm>
-            <a:off x="6537959" y="1965960"/>
-            <a:ext cx="5105095" cy="274320"/>
+            <a:off x="7269480" y="1965960"/>
+            <a:ext cx="4373575" cy="274320"/>
           </a:xfrm>
           <a:prstGeom prst="rect">
             <a:avLst/>
@@ -7231,8 +7231,8 @@
         </p:nvSpPr>
         <p:spPr>
           <a:xfrm>
-            <a:off x="6537959" y="2295144"/>
-            <a:ext cx="5105095" cy="274320"/>
+            <a:off x="7269480" y="2295144"/>
+            <a:ext cx="4373575" cy="274320"/>
           </a:xfrm>
           <a:prstGeom prst="rect">
             <a:avLst/>
@@ -7283,8 +7283,8 @@
         </p:nvSpPr>
         <p:spPr>
           <a:xfrm>
-            <a:off x="6537959" y="2624328"/>
-            <a:ext cx="5105095" cy="274320"/>
+            <a:off x="7269480" y="2624328"/>
+            <a:ext cx="4373575" cy="274320"/>
           </a:xfrm>
           <a:prstGeom prst="rect">
             <a:avLst/>
@@ -7335,8 +7335,8 @@
         </p:nvSpPr>
         <p:spPr>
           <a:xfrm>
-            <a:off x="6537959" y="3104197"/>
-            <a:ext cx="5105095" cy="9525"/>
+            <a:off x="7269480" y="3104197"/>
+            <a:ext cx="4373575" cy="9525"/>
           </a:xfrm>
           <a:prstGeom prst="rect">
             <a:avLst/>
@@ -7380,8 +7380,8 @@
         </p:nvSpPr>
         <p:spPr>
           <a:xfrm>
-            <a:off x="6537959" y="3200400"/>
-            <a:ext cx="5105095" cy="228600"/>
+            <a:off x="7269480" y="3200400"/>
+            <a:ext cx="4373575" cy="228600"/>
           </a:xfrm>
           <a:prstGeom prst="rect">
             <a:avLst/>
@@ -7421,8 +7421,8 @@
         </p:nvSpPr>
         <p:spPr>
           <a:xfrm>
-            <a:off x="6537959" y="3566160"/>
-            <a:ext cx="1531010" cy="201168"/>
+            <a:off x="7269480" y="3566160"/>
+            <a:ext cx="1323746" cy="201168"/>
           </a:xfrm>
           <a:prstGeom prst="rect">
             <a:avLst/>
@@ -7441,7 +7441,7 @@
               </a:lnSpc>
             </a:pPr>
             <a:r>
-              <a:rPr sz="1000" b="0">
+              <a:rPr sz="950" b="0">
                 <a:solidFill>
                   <a:srgbClr val="000000"/>
                 </a:solidFill>
@@ -7462,8 +7462,8 @@
         </p:nvSpPr>
         <p:spPr>
           <a:xfrm>
-            <a:off x="6537959" y="3840480"/>
-            <a:ext cx="1531010" cy="768096"/>
+            <a:off x="7269480" y="3840480"/>
+            <a:ext cx="1323746" cy="768096"/>
           </a:xfrm>
           <a:prstGeom prst="rect">
             <a:avLst/>
@@ -7521,8 +7521,8 @@
         </p:nvSpPr>
         <p:spPr>
           <a:xfrm>
-            <a:off x="6537959" y="4718304"/>
-            <a:ext cx="1531010" cy="914400"/>
+            <a:off x="7269480" y="4718304"/>
+            <a:ext cx="1323746" cy="914400"/>
           </a:xfrm>
           <a:prstGeom prst="rect">
             <a:avLst/>
@@ -7598,7 +7598,7 @@
         </p:nvSpPr>
         <p:spPr>
           <a:xfrm>
-            <a:off x="8192223" y="3566160"/>
+            <a:off x="8689047" y="3566160"/>
             <a:ext cx="9525" cy="1920240"/>
           </a:xfrm>
           <a:prstGeom prst="rect">
@@ -7643,8 +7643,8 @@
         </p:nvSpPr>
         <p:spPr>
           <a:xfrm>
-            <a:off x="8325002" y="3566160"/>
-            <a:ext cx="1531010" cy="402336"/>
+            <a:off x="8794394" y="3566160"/>
+            <a:ext cx="1323746" cy="402336"/>
           </a:xfrm>
           <a:prstGeom prst="rect">
             <a:avLst/>
@@ -7663,7 +7663,7 @@
               </a:lnSpc>
             </a:pPr>
             <a:r>
-              <a:rPr sz="1000" b="0">
+              <a:rPr sz="950" b="0">
                 <a:solidFill>
                   <a:srgbClr val="000000"/>
                 </a:solidFill>
@@ -7681,7 +7681,7 @@
               </a:lnSpc>
             </a:pPr>
             <a:r>
-              <a:rPr sz="1000" b="0">
+              <a:rPr sz="950" b="0">
                 <a:solidFill>
                   <a:srgbClr val="000000"/>
                 </a:solidFill>
@@ -7702,8 +7702,8 @@
         </p:nvSpPr>
         <p:spPr>
           <a:xfrm>
-            <a:off x="8325002" y="4041648"/>
-            <a:ext cx="1531010" cy="384048"/>
+            <a:off x="8794394" y="4041648"/>
+            <a:ext cx="1323746" cy="384048"/>
           </a:xfrm>
           <a:prstGeom prst="rect">
             <a:avLst/>
@@ -7743,8 +7743,8 @@
         </p:nvSpPr>
         <p:spPr>
           <a:xfrm>
-            <a:off x="8325002" y="4535424"/>
-            <a:ext cx="1531010" cy="914400"/>
+            <a:off x="8794394" y="4535424"/>
+            <a:ext cx="1323746" cy="914400"/>
           </a:xfrm>
           <a:prstGeom prst="rect">
             <a:avLst/>
@@ -7771,7 +7771,7 @@
                 <a:ea typeface="Pretendard"/>
                 <a:cs typeface="Pretendard"/>
               </a:rPr>
-              <a:t>갱신 안 할 시 예측 오차 33%</a:t>
+              <a:t>갱신 안 할 시</a:t>
             </a:r>
           </a:p>
           <a:p>
@@ -7789,6 +7789,24 @@
                 <a:ea typeface="Pretendard"/>
                 <a:cs typeface="Pretendard"/>
               </a:rPr>
+              <a:t>예측 오차 33%</a:t>
+            </a:r>
+          </a:p>
+          <a:p>
+            <a:pPr algn="l">
+              <a:lnSpc>
+                <a:spcPct val="125000"/>
+              </a:lnSpc>
+            </a:pPr>
+            <a:r>
+              <a:rPr sz="900" b="0">
+                <a:solidFill>
+                  <a:srgbClr val="6B6B6B"/>
+                </a:solidFill>
+                <a:latin typeface="Pretendard"/>
+                <a:ea typeface="Pretendard"/>
+                <a:cs typeface="Pretendard"/>
+              </a:rPr>
               <a:t>(2018년 4분기 기준)</a:t>
             </a:r>
           </a:p>
@@ -7802,7 +7820,7 @@
         </p:nvSpPr>
         <p:spPr>
           <a:xfrm>
-            <a:off x="9979265" y="3566160"/>
+            <a:off x="10213961" y="3566160"/>
             <a:ext cx="9525" cy="1920240"/>
           </a:xfrm>
           <a:prstGeom prst="rect">
@@ -7847,8 +7865,8 @@
         </p:nvSpPr>
         <p:spPr>
           <a:xfrm>
-            <a:off x="10112044" y="3566160"/>
-            <a:ext cx="1531010" cy="201168"/>
+            <a:off x="10319308" y="3566160"/>
+            <a:ext cx="1323746" cy="201168"/>
           </a:xfrm>
           <a:prstGeom prst="rect">
             <a:avLst/>
@@ -7867,7 +7885,7 @@
               </a:lnSpc>
             </a:pPr>
             <a:r>
-              <a:rPr sz="1000" b="0">
+              <a:rPr sz="950" b="0">
                 <a:solidFill>
                   <a:srgbClr val="000000"/>
                 </a:solidFill>
@@ -7888,8 +7906,8 @@
         </p:nvSpPr>
         <p:spPr>
           <a:xfrm>
-            <a:off x="10112044" y="3840480"/>
-            <a:ext cx="1531010" cy="384048"/>
+            <a:off x="10319308" y="3840480"/>
+            <a:ext cx="1323746" cy="384048"/>
           </a:xfrm>
           <a:prstGeom prst="rect">
             <a:avLst/>
@@ -7929,8 +7947,8 @@
         </p:nvSpPr>
         <p:spPr>
           <a:xfrm>
-            <a:off x="10112044" y="4334256"/>
-            <a:ext cx="1531010" cy="914400"/>
+            <a:off x="10319308" y="4334256"/>
+            <a:ext cx="1323746" cy="914400"/>
           </a:xfrm>
           <a:prstGeom prst="rect">
             <a:avLst/>
@@ -7993,7 +8011,25 @@
                 <a:ea typeface="Pretendard"/>
                 <a:cs typeface="Pretendard"/>
               </a:rPr>
-              <a:t>13회 갱신, 예측 오차 18.8%</a:t>
+              <a:t>13회 갱신,</a:t>
+            </a:r>
+          </a:p>
+          <a:p>
+            <a:pPr algn="l">
+              <a:lnSpc>
+                <a:spcPct val="125000"/>
+              </a:lnSpc>
+            </a:pPr>
+            <a:r>
+              <a:rPr sz="900" b="0">
+                <a:solidFill>
+                  <a:srgbClr val="6B6B6B"/>
+                </a:solidFill>
+                <a:latin typeface="Pretendard"/>
+                <a:ea typeface="Pretendard"/>
+                <a:cs typeface="Pretendard"/>
+              </a:rPr>
+              <a:t>예측 오차 18.8%</a:t>
             </a:r>
           </a:p>
         </p:txBody>
@@ -8089,8 +8125,8 @@
         </p:nvSpPr>
         <p:spPr>
           <a:xfrm>
-            <a:off x="6537959" y="5989320"/>
-            <a:ext cx="5105095" cy="685800"/>
+            <a:off x="7269480" y="5989320"/>
+            <a:ext cx="4373575" cy="685800"/>
           </a:xfrm>
           <a:prstGeom prst="rect">
             <a:avLst/>

--- a/ppt/역량PT_김연주.pptx
+++ b/ppt/역량PT_김연주.pptx
@@ -7218,7 +7218,7 @@
                 <a:ea typeface="Pretendard"/>
                 <a:cs typeface="Pretendard"/>
               </a:rPr>
-              <a:t>3개월마다 예측 상각률과 실제 상각률 비교</a:t>
+              <a:t>3개월마다 결과가 확정된 대출의 예측 상각률과 실제 상각률 비교</a:t>
             </a:r>
           </a:p>
         </p:txBody>

--- a/ppt/역량PT_김연주.pptx
+++ b/ppt/역량PT_김연주.pptx
@@ -3142,7 +3142,7 @@
                 <a:ea typeface="Pretendard"/>
                 <a:cs typeface="Pretendard"/>
               </a:rPr>
-              <a:t>Experience Timeline</a:t>
+              <a:t>01 Experience Timeline</a:t>
             </a:r>
           </a:p>
         </p:txBody>

--- a/ppt/역량PT_김연주.pptx
+++ b/ppt/역량PT_김연주.pptx
@@ -7125,7 +7125,7 @@
                 <a:ea typeface="Pretendard Medium"/>
                 <a:cs typeface="Pretendard Medium"/>
               </a:rPr>
-              <a:t>판단 시점별 보유 대출의 실제 상각률과 예측 상각률 (갱신 승인 가정)</a:t>
+              <a:t>판단 시점별 보유 대출의 예측 상각률과 사후 확인된 실제 상각률 (갱신 승인 가정)</a:t>
             </a:r>
           </a:p>
         </p:txBody>

--- a/ppt/역량PT_김연주.pptx
+++ b/ppt/역량PT_김연주.pptx
@@ -7,22 +7,23 @@
   <p:sldIdLst>
     <p:sldId id="256" r:id="rId2"/>
     <p:sldId id="257" r:id="rId3"/>
+    <p:sldId id="258" r:id="rId4"/>
   </p:sldIdLst>
   <p:sldSz cx="12192000" cy="6858000"/>
   <p:notesSz cx="6858000" cy="9144000"/>
   <p:embeddedFontLst>
     <p:embeddedFont>
       <p:font typeface="Pretendard" panose="02000003000000020004" pitchFamily="2" charset="-127"/>
-      <p:regular r:id="rId4"/>
-      <p:bold r:id="rId5"/>
+      <p:regular r:id="rId5"/>
+      <p:bold r:id="rId6"/>
     </p:embeddedFont>
     <p:embeddedFont>
       <p:font typeface="Pretendard Medium" panose="02000003000000020004" pitchFamily="2" charset="-127"/>
-      <p:regular r:id="rId6"/>
+      <p:regular r:id="rId7"/>
     </p:embeddedFont>
     <p:embeddedFont>
       <p:font typeface="Pretendard SemiBold" panose="02000003000000020004" pitchFamily="2" charset="-127"/>
-      <p:bold r:id="rId7"/>
+      <p:bold r:id="rId8"/>
     </p:embeddedFont>
   </p:embeddedFontLst>
   <p:defaultTextStyle>
@@ -3108,6 +3109,385 @@
       </p:grpSpPr>
       <p:sp>
         <p:nvSpPr>
+          <p:cNvPr id="2" name="Rectangle 1"/>
+          <p:cNvSpPr/>
+          <p:nvPr/>
+        </p:nvSpPr>
+        <p:spPr>
+          <a:xfrm>
+            <a:off x="0" y="0"/>
+            <a:ext cx="12191695" cy="6858000"/>
+          </a:xfrm>
+          <a:prstGeom prst="rect">
+            <a:avLst/>
+          </a:prstGeom>
+          <a:solidFill>
+            <a:srgbClr val="000000"/>
+          </a:solidFill>
+          <a:ln>
+            <a:noFill/>
+          </a:ln>
+          <a:effectLst/>
+        </p:spPr>
+        <p:style>
+          <a:lnRef idx="1">
+            <a:schemeClr val="accent1"/>
+          </a:lnRef>
+          <a:fillRef idx="3">
+            <a:schemeClr val="accent1"/>
+          </a:fillRef>
+          <a:effectRef idx="2">
+            <a:schemeClr val="accent1"/>
+          </a:effectRef>
+          <a:fontRef idx="minor">
+            <a:schemeClr val="lt1"/>
+          </a:fontRef>
+        </p:style>
+        <p:txBody>
+          <a:bodyPr rtlCol="0" anchor="ctr"/>
+          <a:lstStyle/>
+          <a:p>
+            <a:pPr algn="ctr"/>
+            <a:endParaRPr/>
+          </a:p>
+        </p:txBody>
+      </p:sp>
+      <p:sp>
+        <p:nvSpPr>
+          <p:cNvPr id="3" name="TextBox 2"/>
+          <p:cNvSpPr txBox="1"/>
+          <p:nvPr/>
+        </p:nvSpPr>
+        <p:spPr>
+          <a:xfrm>
+            <a:off x="822959" y="2148840"/>
+            <a:ext cx="5486400" cy="822960"/>
+          </a:xfrm>
+          <a:prstGeom prst="rect">
+            <a:avLst/>
+          </a:prstGeom>
+          <a:noFill/>
+        </p:spPr>
+        <p:txBody>
+          <a:bodyPr wrap="none" lIns="0" tIns="0" rIns="0" bIns="0" anchor="t">
+            <a:spAutoFit/>
+          </a:bodyPr>
+          <a:lstStyle/>
+          <a:p>
+            <a:pPr algn="l">
+              <a:lnSpc>
+                <a:spcPct val="115000"/>
+              </a:lnSpc>
+            </a:pPr>
+            <a:r>
+              <a:rPr sz="4000" b="1">
+                <a:solidFill>
+                  <a:srgbClr val="FFFFFF"/>
+                </a:solidFill>
+                <a:latin typeface="Pretendard"/>
+                <a:ea typeface="Pretendard"/>
+                <a:cs typeface="Pretendard"/>
+              </a:rPr>
+              <a:t>김연주</a:t>
+            </a:r>
+          </a:p>
+        </p:txBody>
+      </p:sp>
+      <p:sp>
+        <p:nvSpPr>
+          <p:cNvPr id="4" name="TextBox 3"/>
+          <p:cNvSpPr txBox="1"/>
+          <p:nvPr/>
+        </p:nvSpPr>
+        <p:spPr>
+          <a:xfrm>
+            <a:off x="822959" y="3154680"/>
+            <a:ext cx="5486400" cy="548640"/>
+          </a:xfrm>
+          <a:prstGeom prst="rect">
+            <a:avLst/>
+          </a:prstGeom>
+          <a:noFill/>
+        </p:spPr>
+        <p:txBody>
+          <a:bodyPr wrap="none" lIns="0" tIns="0" rIns="0" bIns="0" anchor="t">
+            <a:spAutoFit/>
+          </a:bodyPr>
+          <a:lstStyle/>
+          <a:p>
+            <a:pPr algn="l">
+              <a:lnSpc>
+                <a:spcPct val="130000"/>
+              </a:lnSpc>
+            </a:pPr>
+            <a:r>
+              <a:rPr sz="1100" b="0">
+                <a:solidFill>
+                  <a:srgbClr val="9A9A9A"/>
+                </a:solidFill>
+                <a:latin typeface="Pretendard"/>
+                <a:ea typeface="Pretendard"/>
+                <a:cs typeface="Pretendard"/>
+              </a:rPr>
+              <a:t>관심분야</a:t>
+            </a:r>
+          </a:p>
+          <a:p>
+            <a:pPr algn="l">
+              <a:lnSpc>
+                <a:spcPct val="130000"/>
+              </a:lnSpc>
+            </a:pPr>
+            <a:r>
+              <a:rPr sz="1600" b="0">
+                <a:solidFill>
+                  <a:srgbClr val="FFFFFF"/>
+                </a:solidFill>
+                <a:latin typeface="Pretendard Medium"/>
+                <a:ea typeface="Pretendard Medium"/>
+                <a:cs typeface="Pretendard Medium"/>
+              </a:rPr>
+              <a:t>리스크 / Collection</a:t>
+            </a:r>
+          </a:p>
+        </p:txBody>
+      </p:sp>
+      <p:sp>
+        <p:nvSpPr>
+          <p:cNvPr id="5" name="Rectangle 4"/>
+          <p:cNvSpPr/>
+          <p:nvPr/>
+        </p:nvSpPr>
+        <p:spPr>
+          <a:xfrm>
+            <a:off x="822959" y="4155757"/>
+            <a:ext cx="3840480" cy="9525"/>
+          </a:xfrm>
+          <a:prstGeom prst="rect">
+            <a:avLst/>
+          </a:prstGeom>
+          <a:solidFill>
+            <a:srgbClr val="6B6B6B"/>
+          </a:solidFill>
+          <a:ln>
+            <a:noFill/>
+          </a:ln>
+          <a:effectLst/>
+        </p:spPr>
+        <p:style>
+          <a:lnRef idx="1">
+            <a:schemeClr val="accent1"/>
+          </a:lnRef>
+          <a:fillRef idx="3">
+            <a:schemeClr val="accent1"/>
+          </a:fillRef>
+          <a:effectRef idx="2">
+            <a:schemeClr val="accent1"/>
+          </a:effectRef>
+          <a:fontRef idx="minor">
+            <a:schemeClr val="lt1"/>
+          </a:fontRef>
+        </p:style>
+        <p:txBody>
+          <a:bodyPr rtlCol="0" anchor="ctr"/>
+          <a:lstStyle/>
+          <a:p>
+            <a:pPr algn="ctr"/>
+            <a:endParaRPr/>
+          </a:p>
+        </p:txBody>
+      </p:sp>
+      <p:sp>
+        <p:nvSpPr>
+          <p:cNvPr id="6" name="TextBox 5"/>
+          <p:cNvSpPr txBox="1"/>
+          <p:nvPr/>
+        </p:nvSpPr>
+        <p:spPr>
+          <a:xfrm>
+            <a:off x="822959" y="4389120"/>
+            <a:ext cx="457200" cy="274320"/>
+          </a:xfrm>
+          <a:prstGeom prst="rect">
+            <a:avLst/>
+          </a:prstGeom>
+          <a:noFill/>
+        </p:spPr>
+        <p:txBody>
+          <a:bodyPr wrap="none" lIns="0" tIns="0" rIns="0" bIns="0" anchor="t">
+            <a:spAutoFit/>
+          </a:bodyPr>
+          <a:lstStyle/>
+          <a:p>
+            <a:pPr algn="l">
+              <a:lnSpc>
+                <a:spcPct val="115000"/>
+              </a:lnSpc>
+            </a:pPr>
+            <a:r>
+              <a:rPr sz="1400" b="1">
+                <a:solidFill>
+                  <a:srgbClr val="FFFFFF"/>
+                </a:solidFill>
+                <a:latin typeface="Pretendard"/>
+                <a:ea typeface="Pretendard"/>
+                <a:cs typeface="Pretendard"/>
+              </a:rPr>
+              <a:t>01</a:t>
+            </a:r>
+          </a:p>
+        </p:txBody>
+      </p:sp>
+      <p:sp>
+        <p:nvSpPr>
+          <p:cNvPr id="7" name="TextBox 6"/>
+          <p:cNvSpPr txBox="1"/>
+          <p:nvPr/>
+        </p:nvSpPr>
+        <p:spPr>
+          <a:xfrm>
+            <a:off x="1325880" y="4389120"/>
+            <a:ext cx="4572000" cy="274320"/>
+          </a:xfrm>
+          <a:prstGeom prst="rect">
+            <a:avLst/>
+          </a:prstGeom>
+          <a:noFill/>
+        </p:spPr>
+        <p:txBody>
+          <a:bodyPr wrap="none" lIns="0" tIns="0" rIns="0" bIns="0" anchor="t">
+            <a:spAutoFit/>
+          </a:bodyPr>
+          <a:lstStyle/>
+          <a:p>
+            <a:pPr algn="l">
+              <a:lnSpc>
+                <a:spcPct val="115000"/>
+              </a:lnSpc>
+            </a:pPr>
+            <a:r>
+              <a:rPr sz="1400" b="0">
+                <a:solidFill>
+                  <a:srgbClr val="FFFFFF"/>
+                </a:solidFill>
+                <a:latin typeface="Pretendard"/>
+                <a:ea typeface="Pretendard"/>
+                <a:cs typeface="Pretendard"/>
+              </a:rPr>
+              <a:t>Experience Timeline</a:t>
+            </a:r>
+          </a:p>
+        </p:txBody>
+      </p:sp>
+      <p:sp>
+        <p:nvSpPr>
+          <p:cNvPr id="8" name="TextBox 7"/>
+          <p:cNvSpPr txBox="1"/>
+          <p:nvPr/>
+        </p:nvSpPr>
+        <p:spPr>
+          <a:xfrm>
+            <a:off x="822959" y="4736592"/>
+            <a:ext cx="457200" cy="274320"/>
+          </a:xfrm>
+          <a:prstGeom prst="rect">
+            <a:avLst/>
+          </a:prstGeom>
+          <a:noFill/>
+        </p:spPr>
+        <p:txBody>
+          <a:bodyPr wrap="none" lIns="0" tIns="0" rIns="0" bIns="0" anchor="t">
+            <a:spAutoFit/>
+          </a:bodyPr>
+          <a:lstStyle/>
+          <a:p>
+            <a:pPr algn="l">
+              <a:lnSpc>
+                <a:spcPct val="115000"/>
+              </a:lnSpc>
+            </a:pPr>
+            <a:r>
+              <a:rPr sz="1400" b="1">
+                <a:solidFill>
+                  <a:srgbClr val="FFFFFF"/>
+                </a:solidFill>
+                <a:latin typeface="Pretendard"/>
+                <a:ea typeface="Pretendard"/>
+                <a:cs typeface="Pretendard"/>
+              </a:rPr>
+              <a:t>02</a:t>
+            </a:r>
+          </a:p>
+        </p:txBody>
+      </p:sp>
+      <p:sp>
+        <p:nvSpPr>
+          <p:cNvPr id="9" name="TextBox 8"/>
+          <p:cNvSpPr txBox="1"/>
+          <p:nvPr/>
+        </p:nvSpPr>
+        <p:spPr>
+          <a:xfrm>
+            <a:off x="1325880" y="4736592"/>
+            <a:ext cx="4572000" cy="274320"/>
+          </a:xfrm>
+          <a:prstGeom prst="rect">
+            <a:avLst/>
+          </a:prstGeom>
+          <a:noFill/>
+        </p:spPr>
+        <p:txBody>
+          <a:bodyPr wrap="none" lIns="0" tIns="0" rIns="0" bIns="0" anchor="t">
+            <a:spAutoFit/>
+          </a:bodyPr>
+          <a:lstStyle/>
+          <a:p>
+            <a:pPr algn="l">
+              <a:lnSpc>
+                <a:spcPct val="115000"/>
+              </a:lnSpc>
+            </a:pPr>
+            <a:r>
+              <a:rPr sz="1400" b="0">
+                <a:solidFill>
+                  <a:srgbClr val="FFFFFF"/>
+                </a:solidFill>
+                <a:latin typeface="Pretendard"/>
+                <a:ea typeface="Pretendard"/>
+                <a:cs typeface="Pretendard"/>
+              </a:rPr>
+              <a:t>New Project</a:t>
+            </a:r>
+          </a:p>
+        </p:txBody>
+      </p:sp>
+    </p:spTree>
+  </p:cSld>
+  <p:clrMapOvr>
+    <a:masterClrMapping/>
+  </p:clrMapOvr>
+</p:sld>
+</file>
+
+<file path=ppt/slides/slide2.xml><?xml version="1.0" encoding="utf-8"?>
+<p:sld xmlns:a="http://schemas.openxmlformats.org/drawingml/2006/main" xmlns:r="http://schemas.openxmlformats.org/officeDocument/2006/relationships" xmlns:p="http://schemas.openxmlformats.org/presentationml/2006/main">
+  <p:cSld>
+    <p:spTree>
+      <p:nvGrpSpPr>
+        <p:cNvPr id="1" name=""/>
+        <p:cNvGrpSpPr/>
+        <p:nvPr/>
+      </p:nvGrpSpPr>
+      <p:grpSpPr>
+        <a:xfrm>
+          <a:off x="0" y="0"/>
+          <a:ext cx="0" cy="0"/>
+          <a:chOff x="0" y="0"/>
+          <a:chExt cx="0" cy="0"/>
+        </a:xfrm>
+      </p:grpSpPr>
+      <p:sp>
+        <p:nvSpPr>
           <p:cNvPr id="2" name="TextBox 1"/>
           <p:cNvSpPr txBox="1"/>
           <p:nvPr/>
@@ -6747,7 +7127,7 @@
 </p:sld>
 </file>
 
-<file path=ppt/slides/slide2.xml><?xml version="1.0" encoding="utf-8"?>
+<file path=ppt/slides/slide3.xml><?xml version="1.0" encoding="utf-8"?>
 <p:sld xmlns:a="http://schemas.openxmlformats.org/drawingml/2006/main" xmlns:r="http://schemas.openxmlformats.org/officeDocument/2006/relationships" xmlns:p="http://schemas.openxmlformats.org/presentationml/2006/main">
   <p:cSld>
     <p:spTree>

--- a/ppt/역량PT_김연주.pptx
+++ b/ppt/역량PT_김연주.pptx
@@ -7,23 +7,22 @@
   <p:sldIdLst>
     <p:sldId id="256" r:id="rId2"/>
     <p:sldId id="257" r:id="rId3"/>
-    <p:sldId id="258" r:id="rId4"/>
   </p:sldIdLst>
   <p:sldSz cx="12192000" cy="6858000"/>
   <p:notesSz cx="6858000" cy="9144000"/>
   <p:embeddedFontLst>
     <p:embeddedFont>
       <p:font typeface="Pretendard" panose="02000003000000020004" pitchFamily="2" charset="-127"/>
-      <p:regular r:id="rId5"/>
-      <p:bold r:id="rId6"/>
+      <p:regular r:id="rId4"/>
+      <p:bold r:id="rId5"/>
     </p:embeddedFont>
     <p:embeddedFont>
       <p:font typeface="Pretendard Medium" panose="02000003000000020004" pitchFamily="2" charset="-127"/>
-      <p:regular r:id="rId7"/>
+      <p:regular r:id="rId6"/>
     </p:embeddedFont>
     <p:embeddedFont>
       <p:font typeface="Pretendard SemiBold" panose="02000003000000020004" pitchFamily="2" charset="-127"/>
-      <p:bold r:id="rId8"/>
+      <p:bold r:id="rId7"/>
     </p:embeddedFont>
   </p:embeddedFontLst>
   <p:defaultTextStyle>
@@ -3109,385 +3108,6 @@
       </p:grpSpPr>
       <p:sp>
         <p:nvSpPr>
-          <p:cNvPr id="2" name="Rectangle 1"/>
-          <p:cNvSpPr/>
-          <p:nvPr/>
-        </p:nvSpPr>
-        <p:spPr>
-          <a:xfrm>
-            <a:off x="0" y="0"/>
-            <a:ext cx="12191695" cy="6858000"/>
-          </a:xfrm>
-          <a:prstGeom prst="rect">
-            <a:avLst/>
-          </a:prstGeom>
-          <a:solidFill>
-            <a:srgbClr val="000000"/>
-          </a:solidFill>
-          <a:ln>
-            <a:noFill/>
-          </a:ln>
-          <a:effectLst/>
-        </p:spPr>
-        <p:style>
-          <a:lnRef idx="1">
-            <a:schemeClr val="accent1"/>
-          </a:lnRef>
-          <a:fillRef idx="3">
-            <a:schemeClr val="accent1"/>
-          </a:fillRef>
-          <a:effectRef idx="2">
-            <a:schemeClr val="accent1"/>
-          </a:effectRef>
-          <a:fontRef idx="minor">
-            <a:schemeClr val="lt1"/>
-          </a:fontRef>
-        </p:style>
-        <p:txBody>
-          <a:bodyPr rtlCol="0" anchor="ctr"/>
-          <a:lstStyle/>
-          <a:p>
-            <a:pPr algn="ctr"/>
-            <a:endParaRPr/>
-          </a:p>
-        </p:txBody>
-      </p:sp>
-      <p:sp>
-        <p:nvSpPr>
-          <p:cNvPr id="3" name="TextBox 2"/>
-          <p:cNvSpPr txBox="1"/>
-          <p:nvPr/>
-        </p:nvSpPr>
-        <p:spPr>
-          <a:xfrm>
-            <a:off x="822959" y="2148840"/>
-            <a:ext cx="5486400" cy="822960"/>
-          </a:xfrm>
-          <a:prstGeom prst="rect">
-            <a:avLst/>
-          </a:prstGeom>
-          <a:noFill/>
-        </p:spPr>
-        <p:txBody>
-          <a:bodyPr wrap="none" lIns="0" tIns="0" rIns="0" bIns="0" anchor="t">
-            <a:spAutoFit/>
-          </a:bodyPr>
-          <a:lstStyle/>
-          <a:p>
-            <a:pPr algn="l">
-              <a:lnSpc>
-                <a:spcPct val="115000"/>
-              </a:lnSpc>
-            </a:pPr>
-            <a:r>
-              <a:rPr sz="4000" b="1">
-                <a:solidFill>
-                  <a:srgbClr val="FFFFFF"/>
-                </a:solidFill>
-                <a:latin typeface="Pretendard"/>
-                <a:ea typeface="Pretendard"/>
-                <a:cs typeface="Pretendard"/>
-              </a:rPr>
-              <a:t>김연주</a:t>
-            </a:r>
-          </a:p>
-        </p:txBody>
-      </p:sp>
-      <p:sp>
-        <p:nvSpPr>
-          <p:cNvPr id="4" name="TextBox 3"/>
-          <p:cNvSpPr txBox="1"/>
-          <p:nvPr/>
-        </p:nvSpPr>
-        <p:spPr>
-          <a:xfrm>
-            <a:off x="822959" y="3154680"/>
-            <a:ext cx="5486400" cy="548640"/>
-          </a:xfrm>
-          <a:prstGeom prst="rect">
-            <a:avLst/>
-          </a:prstGeom>
-          <a:noFill/>
-        </p:spPr>
-        <p:txBody>
-          <a:bodyPr wrap="none" lIns="0" tIns="0" rIns="0" bIns="0" anchor="t">
-            <a:spAutoFit/>
-          </a:bodyPr>
-          <a:lstStyle/>
-          <a:p>
-            <a:pPr algn="l">
-              <a:lnSpc>
-                <a:spcPct val="130000"/>
-              </a:lnSpc>
-            </a:pPr>
-            <a:r>
-              <a:rPr sz="1100" b="0">
-                <a:solidFill>
-                  <a:srgbClr val="9A9A9A"/>
-                </a:solidFill>
-                <a:latin typeface="Pretendard"/>
-                <a:ea typeface="Pretendard"/>
-                <a:cs typeface="Pretendard"/>
-              </a:rPr>
-              <a:t>관심분야</a:t>
-            </a:r>
-          </a:p>
-          <a:p>
-            <a:pPr algn="l">
-              <a:lnSpc>
-                <a:spcPct val="130000"/>
-              </a:lnSpc>
-            </a:pPr>
-            <a:r>
-              <a:rPr sz="1600" b="0">
-                <a:solidFill>
-                  <a:srgbClr val="FFFFFF"/>
-                </a:solidFill>
-                <a:latin typeface="Pretendard Medium"/>
-                <a:ea typeface="Pretendard Medium"/>
-                <a:cs typeface="Pretendard Medium"/>
-              </a:rPr>
-              <a:t>리스크 / Collection</a:t>
-            </a:r>
-          </a:p>
-        </p:txBody>
-      </p:sp>
-      <p:sp>
-        <p:nvSpPr>
-          <p:cNvPr id="5" name="Rectangle 4"/>
-          <p:cNvSpPr/>
-          <p:nvPr/>
-        </p:nvSpPr>
-        <p:spPr>
-          <a:xfrm>
-            <a:off x="822959" y="4155757"/>
-            <a:ext cx="3840480" cy="9525"/>
-          </a:xfrm>
-          <a:prstGeom prst="rect">
-            <a:avLst/>
-          </a:prstGeom>
-          <a:solidFill>
-            <a:srgbClr val="6B6B6B"/>
-          </a:solidFill>
-          <a:ln>
-            <a:noFill/>
-          </a:ln>
-          <a:effectLst/>
-        </p:spPr>
-        <p:style>
-          <a:lnRef idx="1">
-            <a:schemeClr val="accent1"/>
-          </a:lnRef>
-          <a:fillRef idx="3">
-            <a:schemeClr val="accent1"/>
-          </a:fillRef>
-          <a:effectRef idx="2">
-            <a:schemeClr val="accent1"/>
-          </a:effectRef>
-          <a:fontRef idx="minor">
-            <a:schemeClr val="lt1"/>
-          </a:fontRef>
-        </p:style>
-        <p:txBody>
-          <a:bodyPr rtlCol="0" anchor="ctr"/>
-          <a:lstStyle/>
-          <a:p>
-            <a:pPr algn="ctr"/>
-            <a:endParaRPr/>
-          </a:p>
-        </p:txBody>
-      </p:sp>
-      <p:sp>
-        <p:nvSpPr>
-          <p:cNvPr id="6" name="TextBox 5"/>
-          <p:cNvSpPr txBox="1"/>
-          <p:nvPr/>
-        </p:nvSpPr>
-        <p:spPr>
-          <a:xfrm>
-            <a:off x="822959" y="4389120"/>
-            <a:ext cx="457200" cy="274320"/>
-          </a:xfrm>
-          <a:prstGeom prst="rect">
-            <a:avLst/>
-          </a:prstGeom>
-          <a:noFill/>
-        </p:spPr>
-        <p:txBody>
-          <a:bodyPr wrap="none" lIns="0" tIns="0" rIns="0" bIns="0" anchor="t">
-            <a:spAutoFit/>
-          </a:bodyPr>
-          <a:lstStyle/>
-          <a:p>
-            <a:pPr algn="l">
-              <a:lnSpc>
-                <a:spcPct val="115000"/>
-              </a:lnSpc>
-            </a:pPr>
-            <a:r>
-              <a:rPr sz="1400" b="1">
-                <a:solidFill>
-                  <a:srgbClr val="FFFFFF"/>
-                </a:solidFill>
-                <a:latin typeface="Pretendard"/>
-                <a:ea typeface="Pretendard"/>
-                <a:cs typeface="Pretendard"/>
-              </a:rPr>
-              <a:t>01</a:t>
-            </a:r>
-          </a:p>
-        </p:txBody>
-      </p:sp>
-      <p:sp>
-        <p:nvSpPr>
-          <p:cNvPr id="7" name="TextBox 6"/>
-          <p:cNvSpPr txBox="1"/>
-          <p:nvPr/>
-        </p:nvSpPr>
-        <p:spPr>
-          <a:xfrm>
-            <a:off x="1325880" y="4389120"/>
-            <a:ext cx="4572000" cy="274320"/>
-          </a:xfrm>
-          <a:prstGeom prst="rect">
-            <a:avLst/>
-          </a:prstGeom>
-          <a:noFill/>
-        </p:spPr>
-        <p:txBody>
-          <a:bodyPr wrap="none" lIns="0" tIns="0" rIns="0" bIns="0" anchor="t">
-            <a:spAutoFit/>
-          </a:bodyPr>
-          <a:lstStyle/>
-          <a:p>
-            <a:pPr algn="l">
-              <a:lnSpc>
-                <a:spcPct val="115000"/>
-              </a:lnSpc>
-            </a:pPr>
-            <a:r>
-              <a:rPr sz="1400" b="0">
-                <a:solidFill>
-                  <a:srgbClr val="FFFFFF"/>
-                </a:solidFill>
-                <a:latin typeface="Pretendard"/>
-                <a:ea typeface="Pretendard"/>
-                <a:cs typeface="Pretendard"/>
-              </a:rPr>
-              <a:t>Experience Timeline</a:t>
-            </a:r>
-          </a:p>
-        </p:txBody>
-      </p:sp>
-      <p:sp>
-        <p:nvSpPr>
-          <p:cNvPr id="8" name="TextBox 7"/>
-          <p:cNvSpPr txBox="1"/>
-          <p:nvPr/>
-        </p:nvSpPr>
-        <p:spPr>
-          <a:xfrm>
-            <a:off x="822959" y="4736592"/>
-            <a:ext cx="457200" cy="274320"/>
-          </a:xfrm>
-          <a:prstGeom prst="rect">
-            <a:avLst/>
-          </a:prstGeom>
-          <a:noFill/>
-        </p:spPr>
-        <p:txBody>
-          <a:bodyPr wrap="none" lIns="0" tIns="0" rIns="0" bIns="0" anchor="t">
-            <a:spAutoFit/>
-          </a:bodyPr>
-          <a:lstStyle/>
-          <a:p>
-            <a:pPr algn="l">
-              <a:lnSpc>
-                <a:spcPct val="115000"/>
-              </a:lnSpc>
-            </a:pPr>
-            <a:r>
-              <a:rPr sz="1400" b="1">
-                <a:solidFill>
-                  <a:srgbClr val="FFFFFF"/>
-                </a:solidFill>
-                <a:latin typeface="Pretendard"/>
-                <a:ea typeface="Pretendard"/>
-                <a:cs typeface="Pretendard"/>
-              </a:rPr>
-              <a:t>02</a:t>
-            </a:r>
-          </a:p>
-        </p:txBody>
-      </p:sp>
-      <p:sp>
-        <p:nvSpPr>
-          <p:cNvPr id="9" name="TextBox 8"/>
-          <p:cNvSpPr txBox="1"/>
-          <p:nvPr/>
-        </p:nvSpPr>
-        <p:spPr>
-          <a:xfrm>
-            <a:off x="1325880" y="4736592"/>
-            <a:ext cx="4572000" cy="274320"/>
-          </a:xfrm>
-          <a:prstGeom prst="rect">
-            <a:avLst/>
-          </a:prstGeom>
-          <a:noFill/>
-        </p:spPr>
-        <p:txBody>
-          <a:bodyPr wrap="none" lIns="0" tIns="0" rIns="0" bIns="0" anchor="t">
-            <a:spAutoFit/>
-          </a:bodyPr>
-          <a:lstStyle/>
-          <a:p>
-            <a:pPr algn="l">
-              <a:lnSpc>
-                <a:spcPct val="115000"/>
-              </a:lnSpc>
-            </a:pPr>
-            <a:r>
-              <a:rPr sz="1400" b="0">
-                <a:solidFill>
-                  <a:srgbClr val="FFFFFF"/>
-                </a:solidFill>
-                <a:latin typeface="Pretendard"/>
-                <a:ea typeface="Pretendard"/>
-                <a:cs typeface="Pretendard"/>
-              </a:rPr>
-              <a:t>New Project</a:t>
-            </a:r>
-          </a:p>
-        </p:txBody>
-      </p:sp>
-    </p:spTree>
-  </p:cSld>
-  <p:clrMapOvr>
-    <a:masterClrMapping/>
-  </p:clrMapOvr>
-</p:sld>
-</file>
-
-<file path=ppt/slides/slide2.xml><?xml version="1.0" encoding="utf-8"?>
-<p:sld xmlns:a="http://schemas.openxmlformats.org/drawingml/2006/main" xmlns:r="http://schemas.openxmlformats.org/officeDocument/2006/relationships" xmlns:p="http://schemas.openxmlformats.org/presentationml/2006/main">
-  <p:cSld>
-    <p:spTree>
-      <p:nvGrpSpPr>
-        <p:cNvPr id="1" name=""/>
-        <p:cNvGrpSpPr/>
-        <p:nvPr/>
-      </p:nvGrpSpPr>
-      <p:grpSpPr>
-        <a:xfrm>
-          <a:off x="0" y="0"/>
-          <a:ext cx="0" cy="0"/>
-          <a:chOff x="0" y="0"/>
-          <a:chExt cx="0" cy="0"/>
-        </a:xfrm>
-      </p:grpSpPr>
-      <p:sp>
-        <p:nvSpPr>
           <p:cNvPr id="2" name="TextBox 1"/>
           <p:cNvSpPr txBox="1"/>
           <p:nvPr/>
@@ -7127,7 +6747,7 @@
 </p:sld>
 </file>
 
-<file path=ppt/slides/slide3.xml><?xml version="1.0" encoding="utf-8"?>
+<file path=ppt/slides/slide2.xml><?xml version="1.0" encoding="utf-8"?>
 <p:sld xmlns:a="http://schemas.openxmlformats.org/drawingml/2006/main" xmlns:r="http://schemas.openxmlformats.org/officeDocument/2006/relationships" xmlns:p="http://schemas.openxmlformats.org/presentationml/2006/main">
   <p:cSld>
     <p:spTree>
